--- a/Intro_PPT/RISCV-MCU.pptx
+++ b/Intro_PPT/RISCV-MCU.pptx
@@ -6,7 +6,7 @@
     <p:sldMasterId id="2147483654" r:id="rId2"/>
   </p:sldMasterIdLst>
   <p:notesMasterIdLst>
-    <p:notesMasterId r:id="rId34"/>
+    <p:notesMasterId r:id="rId36"/>
   </p:notesMasterIdLst>
   <p:sldIdLst>
     <p:sldId id="256" r:id="rId3"/>
@@ -17,29 +17,31 @@
     <p:sldId id="279" r:id="rId8"/>
     <p:sldId id="295" r:id="rId9"/>
     <p:sldId id="257" r:id="rId10"/>
-    <p:sldId id="293" r:id="rId11"/>
-    <p:sldId id="262" r:id="rId12"/>
-    <p:sldId id="291" r:id="rId13"/>
-    <p:sldId id="296" r:id="rId14"/>
-    <p:sldId id="271" r:id="rId15"/>
-    <p:sldId id="282" r:id="rId16"/>
-    <p:sldId id="284" r:id="rId17"/>
-    <p:sldId id="283" r:id="rId18"/>
-    <p:sldId id="273" r:id="rId19"/>
-    <p:sldId id="297" r:id="rId20"/>
-    <p:sldId id="302" r:id="rId21"/>
-    <p:sldId id="298" r:id="rId22"/>
-    <p:sldId id="263" r:id="rId23"/>
-    <p:sldId id="299" r:id="rId24"/>
-    <p:sldId id="272" r:id="rId25"/>
-    <p:sldId id="289" r:id="rId26"/>
-    <p:sldId id="280" r:id="rId27"/>
-    <p:sldId id="281" r:id="rId28"/>
-    <p:sldId id="300" r:id="rId29"/>
-    <p:sldId id="304" r:id="rId30"/>
-    <p:sldId id="303" r:id="rId31"/>
-    <p:sldId id="264" r:id="rId32"/>
-    <p:sldId id="287" r:id="rId33"/>
+    <p:sldId id="305" r:id="rId11"/>
+    <p:sldId id="306" r:id="rId12"/>
+    <p:sldId id="293" r:id="rId13"/>
+    <p:sldId id="262" r:id="rId14"/>
+    <p:sldId id="291" r:id="rId15"/>
+    <p:sldId id="296" r:id="rId16"/>
+    <p:sldId id="271" r:id="rId17"/>
+    <p:sldId id="282" r:id="rId18"/>
+    <p:sldId id="284" r:id="rId19"/>
+    <p:sldId id="283" r:id="rId20"/>
+    <p:sldId id="273" r:id="rId21"/>
+    <p:sldId id="297" r:id="rId22"/>
+    <p:sldId id="302" r:id="rId23"/>
+    <p:sldId id="298" r:id="rId24"/>
+    <p:sldId id="263" r:id="rId25"/>
+    <p:sldId id="299" r:id="rId26"/>
+    <p:sldId id="272" r:id="rId27"/>
+    <p:sldId id="289" r:id="rId28"/>
+    <p:sldId id="280" r:id="rId29"/>
+    <p:sldId id="281" r:id="rId30"/>
+    <p:sldId id="300" r:id="rId31"/>
+    <p:sldId id="304" r:id="rId32"/>
+    <p:sldId id="303" r:id="rId33"/>
+    <p:sldId id="264" r:id="rId34"/>
+    <p:sldId id="287" r:id="rId35"/>
   </p:sldIdLst>
   <p:sldSz cx="12192000" cy="6858000"/>
   <p:notesSz cx="6858000" cy="9144000"/>
@@ -5517,6 +5519,375 @@
         <p:cNvPr id="1" name="">
           <a:extLst>
             <a:ext uri="{FF2B5EF4-FFF2-40B4-BE49-F238E27FC236}">
+              <a16:creationId xmlns:a16="http://schemas.microsoft.com/office/drawing/2014/main" id="{A5A25FA8-6701-FE87-7508-884C773C8FB6}"/>
+            </a:ext>
+          </a:extLst>
+        </p:cNvPr>
+        <p:cNvGrpSpPr/>
+        <p:nvPr/>
+      </p:nvGrpSpPr>
+      <p:grpSpPr>
+        <a:xfrm>
+          <a:off x="0" y="0"/>
+          <a:ext cx="0" cy="0"/>
+          <a:chOff x="0" y="0"/>
+          <a:chExt cx="0" cy="0"/>
+        </a:xfrm>
+      </p:grpSpPr>
+      <p:sp>
+        <p:nvSpPr>
+          <p:cNvPr id="69" name="PlaceHolder 1">
+            <a:extLst>
+              <a:ext uri="{FF2B5EF4-FFF2-40B4-BE49-F238E27FC236}">
+                <a16:creationId xmlns:a16="http://schemas.microsoft.com/office/drawing/2014/main" id="{A37A3AAA-108C-313C-A6F1-D6EB5172A3B5}"/>
+              </a:ext>
+            </a:extLst>
+          </p:cNvPr>
+          <p:cNvSpPr>
+            <a:spLocks noGrp="1"/>
+          </p:cNvSpPr>
+          <p:nvPr>
+            <p:ph type="title"/>
+          </p:nvPr>
+        </p:nvSpPr>
+        <p:spPr>
+          <a:xfrm>
+            <a:off x="1015920" y="0"/>
+            <a:ext cx="10972080" cy="1142280"/>
+          </a:xfrm>
+          <a:prstGeom prst="rect">
+            <a:avLst/>
+          </a:prstGeom>
+          <a:noFill/>
+          <a:ln w="0">
+            <a:noFill/>
+          </a:ln>
+        </p:spPr>
+        <p:txBody>
+          <a:bodyPr lIns="91440" tIns="45720" rIns="91440" bIns="45720" anchor="ctr">
+            <a:noAutofit/>
+          </a:bodyPr>
+          <a:lstStyle/>
+          <a:p>
+            <a:pPr indent="0">
+              <a:lnSpc>
+                <a:spcPct val="100000"/>
+              </a:lnSpc>
+              <a:buNone/>
+              <a:tabLst>
+                <a:tab pos="0" algn="l"/>
+              </a:tabLst>
+            </a:pPr>
+            <a:r>
+              <a:rPr lang="en-US" sz="4000" b="1" strike="noStrike" spc="-1" dirty="0">
+                <a:solidFill>
+                  <a:srgbClr val="DDDDDD"/>
+                </a:solidFill>
+                <a:latin typeface="Calibri"/>
+                <a:ea typeface="Calibri"/>
+              </a:rPr>
+              <a:t>Instruction </a:t>
+            </a:r>
+            <a:r>
+              <a:rPr lang="en-US" altLang="zh-TW" sz="4000" b="1" spc="-1" dirty="0">
+                <a:solidFill>
+                  <a:srgbClr val="DDDDDD"/>
+                </a:solidFill>
+                <a:latin typeface="Calibri"/>
+                <a:ea typeface="Calibri"/>
+              </a:rPr>
+              <a:t>Network</a:t>
+            </a:r>
+            <a:r>
+              <a:rPr lang="en-US" sz="4000" b="1" strike="noStrike" spc="-1" dirty="0">
+                <a:solidFill>
+                  <a:srgbClr val="DDDDDD"/>
+                </a:solidFill>
+                <a:latin typeface="Calibri"/>
+                <a:ea typeface="Calibri"/>
+              </a:rPr>
+              <a:t> / Data Network</a:t>
+            </a:r>
+            <a:endParaRPr lang="en-US" sz="4000" b="0" strike="noStrike" spc="-1" dirty="0">
+              <a:solidFill>
+                <a:srgbClr val="000000"/>
+              </a:solidFill>
+              <a:latin typeface="Arial"/>
+            </a:endParaRPr>
+          </a:p>
+        </p:txBody>
+      </p:sp>
+      <p:sp>
+        <p:nvSpPr>
+          <p:cNvPr id="6" name="Slide Number Placeholder 5">
+            <a:extLst>
+              <a:ext uri="{FF2B5EF4-FFF2-40B4-BE49-F238E27FC236}">
+                <a16:creationId xmlns:a16="http://schemas.microsoft.com/office/drawing/2014/main" id="{FB94BD7F-4885-2101-FDE4-CC5D8F72E6DB}"/>
+              </a:ext>
+            </a:extLst>
+          </p:cNvPr>
+          <p:cNvSpPr>
+            <a:spLocks noGrp="1"/>
+          </p:cNvSpPr>
+          <p:nvPr>
+            <p:ph type="sldNum" idx="10"/>
+          </p:nvPr>
+        </p:nvSpPr>
+        <p:spPr/>
+        <p:txBody>
+          <a:bodyPr/>
+          <a:lstStyle/>
+          <a:p>
+            <a:fld id="{5E7A655E-BA10-45EB-B439-1EA08694B58E}" type="slidenum">
+              <a:rPr lang="en-TW" smtClean="0"/>
+              <a:t>10</a:t>
+            </a:fld>
+            <a:endParaRPr lang="en-TW"/>
+          </a:p>
+        </p:txBody>
+      </p:sp>
+      <p:pic>
+        <p:nvPicPr>
+          <p:cNvPr id="21" name="圖片 20">
+            <a:extLst>
+              <a:ext uri="{FF2B5EF4-FFF2-40B4-BE49-F238E27FC236}">
+                <a16:creationId xmlns:a16="http://schemas.microsoft.com/office/drawing/2014/main" id="{6927BB97-30AD-DC17-8AE6-02BADFC1DE58}"/>
+              </a:ext>
+            </a:extLst>
+          </p:cNvPr>
+          <p:cNvPicPr>
+            <a:picLocks noChangeAspect="1"/>
+          </p:cNvPicPr>
+          <p:nvPr/>
+        </p:nvPicPr>
+        <p:blipFill>
+          <a:blip r:embed="rId2"/>
+          <a:stretch>
+            <a:fillRect/>
+          </a:stretch>
+        </p:blipFill>
+        <p:spPr>
+          <a:xfrm>
+            <a:off x="2446483" y="1656477"/>
+            <a:ext cx="7299033" cy="4941243"/>
+          </a:xfrm>
+          <a:prstGeom prst="rect">
+            <a:avLst/>
+          </a:prstGeom>
+        </p:spPr>
+      </p:pic>
+    </p:spTree>
+    <p:extLst>
+      <p:ext uri="{BB962C8B-B14F-4D97-AF65-F5344CB8AC3E}">
+        <p14:creationId xmlns:p14="http://schemas.microsoft.com/office/powerpoint/2010/main" val="2466545452"/>
+      </p:ext>
+    </p:extLst>
+  </p:cSld>
+  <p:clrMapOvr>
+    <a:masterClrMapping/>
+  </p:clrMapOvr>
+</p:sld>
+</file>
+
+<file path=ppt/slides/slide11.xml><?xml version="1.0" encoding="utf-8"?>
+<p:sld xmlns:a="http://schemas.openxmlformats.org/drawingml/2006/main" xmlns:r="http://schemas.openxmlformats.org/officeDocument/2006/relationships" xmlns:p="http://schemas.openxmlformats.org/presentationml/2006/main">
+  <p:cSld>
+    <p:spTree>
+      <p:nvGrpSpPr>
+        <p:cNvPr id="1" name="">
+          <a:extLst>
+            <a:ext uri="{FF2B5EF4-FFF2-40B4-BE49-F238E27FC236}">
+              <a16:creationId xmlns:a16="http://schemas.microsoft.com/office/drawing/2014/main" id="{4421CBEE-344E-4473-44B9-BC4555CCD284}"/>
+            </a:ext>
+          </a:extLst>
+        </p:cNvPr>
+        <p:cNvGrpSpPr/>
+        <p:nvPr/>
+      </p:nvGrpSpPr>
+      <p:grpSpPr>
+        <a:xfrm>
+          <a:off x="0" y="0"/>
+          <a:ext cx="0" cy="0"/>
+          <a:chOff x="0" y="0"/>
+          <a:chExt cx="0" cy="0"/>
+        </a:xfrm>
+      </p:grpSpPr>
+      <p:sp>
+        <p:nvSpPr>
+          <p:cNvPr id="2" name="標題 1">
+            <a:extLst>
+              <a:ext uri="{FF2B5EF4-FFF2-40B4-BE49-F238E27FC236}">
+                <a16:creationId xmlns:a16="http://schemas.microsoft.com/office/drawing/2014/main" id="{FBC8B1B4-C4CF-32E2-281A-8D71EAB23F40}"/>
+              </a:ext>
+            </a:extLst>
+          </p:cNvPr>
+          <p:cNvSpPr>
+            <a:spLocks noGrp="1"/>
+          </p:cNvSpPr>
+          <p:nvPr>
+            <p:ph type="title"/>
+          </p:nvPr>
+        </p:nvSpPr>
+        <p:spPr/>
+        <p:txBody>
+          <a:bodyPr/>
+          <a:lstStyle/>
+          <a:p>
+            <a:r>
+              <a:rPr lang="en-US" sz="4000" b="1" dirty="0">
+                <a:solidFill>
+                  <a:schemeClr val="bg1">
+                    <a:lumMod val="85000"/>
+                  </a:schemeClr>
+                </a:solidFill>
+                <a:latin typeface="Calibri" panose="020F0502020204030204" pitchFamily="34" charset="0"/>
+                <a:cs typeface="Calibri" panose="020F0502020204030204" pitchFamily="34" charset="0"/>
+              </a:rPr>
+              <a:t>Memory-Mapped I/O vs SFR</a:t>
+            </a:r>
+          </a:p>
+        </p:txBody>
+      </p:sp>
+      <p:sp>
+        <p:nvSpPr>
+          <p:cNvPr id="3" name="文字版面配置區 2">
+            <a:extLst>
+              <a:ext uri="{FF2B5EF4-FFF2-40B4-BE49-F238E27FC236}">
+                <a16:creationId xmlns:a16="http://schemas.microsoft.com/office/drawing/2014/main" id="{9AF33343-238B-E602-E1A4-D78BF8167BD8}"/>
+              </a:ext>
+            </a:extLst>
+          </p:cNvPr>
+          <p:cNvSpPr>
+            <a:spLocks noGrp="1"/>
+          </p:cNvSpPr>
+          <p:nvPr>
+            <p:ph type="body" idx="1"/>
+          </p:nvPr>
+        </p:nvSpPr>
+        <p:spPr/>
+        <p:txBody>
+          <a:bodyPr/>
+          <a:lstStyle/>
+          <a:p>
+            <a:r>
+              <a:rPr lang="en-US" sz="2400" dirty="0">
+                <a:latin typeface="Times New Roman" panose="02020603050405020304" pitchFamily="18" charset="0"/>
+                <a:cs typeface="Times New Roman" panose="02020603050405020304" pitchFamily="18" charset="0"/>
+              </a:rPr>
+              <a:t>Memory-Mapped I/O (MMIO): </a:t>
+            </a:r>
+          </a:p>
+          <a:p>
+            <a:pPr lvl="1"/>
+            <a:r>
+              <a:rPr lang="en-US" dirty="0">
+                <a:solidFill>
+                  <a:srgbClr val="FF0000"/>
+                </a:solidFill>
+                <a:latin typeface="Times New Roman" panose="02020603050405020304" pitchFamily="18" charset="0"/>
+                <a:cs typeface="Times New Roman" panose="02020603050405020304" pitchFamily="18" charset="0"/>
+              </a:rPr>
+              <a:t>Peripherals are mapped into the memory address space </a:t>
+            </a:r>
+          </a:p>
+          <a:p>
+            <a:pPr lvl="1"/>
+            <a:r>
+              <a:rPr lang="en-US" dirty="0">
+                <a:latin typeface="Times New Roman" panose="02020603050405020304" pitchFamily="18" charset="0"/>
+                <a:cs typeface="Times New Roman" panose="02020603050405020304" pitchFamily="18" charset="0"/>
+              </a:rPr>
+              <a:t>Accessed using normal load/store instructions </a:t>
+            </a:r>
+          </a:p>
+          <a:p>
+            <a:pPr lvl="1"/>
+            <a:r>
+              <a:rPr lang="en-US" dirty="0">
+                <a:latin typeface="Times New Roman" panose="02020603050405020304" pitchFamily="18" charset="0"/>
+                <a:cs typeface="Times New Roman" panose="02020603050405020304" pitchFamily="18" charset="0"/>
+              </a:rPr>
+              <a:t>Easy to integrate and extend (add new devices by assigning new addresses) </a:t>
+            </a:r>
+          </a:p>
+          <a:p>
+            <a:endParaRPr lang="en-US" sz="2400" dirty="0">
+              <a:latin typeface="Times New Roman" panose="02020603050405020304" pitchFamily="18" charset="0"/>
+              <a:cs typeface="Times New Roman" panose="02020603050405020304" pitchFamily="18" charset="0"/>
+            </a:endParaRPr>
+          </a:p>
+          <a:p>
+            <a:r>
+              <a:rPr lang="en-US" sz="2400" dirty="0">
+                <a:latin typeface="Times New Roman" panose="02020603050405020304" pitchFamily="18" charset="0"/>
+                <a:cs typeface="Times New Roman" panose="02020603050405020304" pitchFamily="18" charset="0"/>
+              </a:rPr>
+              <a:t>SFR (Special Function Registers) in traditional MCUs (e.g., PIC): </a:t>
+            </a:r>
+          </a:p>
+          <a:p>
+            <a:pPr lvl="1"/>
+            <a:r>
+              <a:rPr lang="en-US" dirty="0">
+                <a:solidFill>
+                  <a:srgbClr val="FF0000"/>
+                </a:solidFill>
+                <a:latin typeface="Times New Roman" panose="02020603050405020304" pitchFamily="18" charset="0"/>
+                <a:cs typeface="Times New Roman" panose="02020603050405020304" pitchFamily="18" charset="0"/>
+              </a:rPr>
+              <a:t>Peripheral control uses dedicated special registers</a:t>
+            </a:r>
+            <a:r>
+              <a:rPr lang="en-US" dirty="0">
+                <a:latin typeface="Times New Roman" panose="02020603050405020304" pitchFamily="18" charset="0"/>
+                <a:cs typeface="Times New Roman" panose="02020603050405020304" pitchFamily="18" charset="0"/>
+              </a:rPr>
+              <a:t> </a:t>
+            </a:r>
+          </a:p>
+          <a:p>
+            <a:pPr lvl="1"/>
+            <a:r>
+              <a:rPr lang="en-US" dirty="0">
+                <a:latin typeface="Times New Roman" panose="02020603050405020304" pitchFamily="18" charset="0"/>
+                <a:cs typeface="Times New Roman" panose="02020603050405020304" pitchFamily="18" charset="0"/>
+              </a:rPr>
+              <a:t>Often requires bank selection / bit-level control </a:t>
+            </a:r>
+          </a:p>
+          <a:p>
+            <a:pPr lvl="1"/>
+            <a:r>
+              <a:rPr lang="en-US" dirty="0">
+                <a:latin typeface="Times New Roman" panose="02020603050405020304" pitchFamily="18" charset="0"/>
+                <a:cs typeface="Times New Roman" panose="02020603050405020304" pitchFamily="18" charset="0"/>
+              </a:rPr>
+              <a:t>Less flexible when scaling to more peripherals</a:t>
+            </a:r>
+          </a:p>
+        </p:txBody>
+      </p:sp>
+    </p:spTree>
+    <p:extLst>
+      <p:ext uri="{BB962C8B-B14F-4D97-AF65-F5344CB8AC3E}">
+        <p14:creationId xmlns:p14="http://schemas.microsoft.com/office/powerpoint/2010/main" val="2803053597"/>
+      </p:ext>
+    </p:extLst>
+  </p:cSld>
+  <p:clrMapOvr>
+    <a:masterClrMapping/>
+  </p:clrMapOvr>
+</p:sld>
+</file>
+
+<file path=ppt/slides/slide12.xml><?xml version="1.0" encoding="utf-8"?>
+<p:sld xmlns:a="http://schemas.openxmlformats.org/drawingml/2006/main" xmlns:r="http://schemas.openxmlformats.org/officeDocument/2006/relationships" xmlns:p="http://schemas.openxmlformats.org/presentationml/2006/main">
+  <p:cSld>
+    <p:spTree>
+      <p:nvGrpSpPr>
+        <p:cNvPr id="1" name="">
+          <a:extLst>
+            <a:ext uri="{FF2B5EF4-FFF2-40B4-BE49-F238E27FC236}">
               <a16:creationId xmlns:a16="http://schemas.microsoft.com/office/drawing/2014/main" id="{D37A883E-C9AB-0CAE-0BBB-12C928044276}"/>
             </a:ext>
           </a:extLst>
@@ -5705,7 +6076,7 @@
 </p:sld>
 </file>
 
-<file path=ppt/slides/slide11.xml><?xml version="1.0" encoding="utf-8"?>
+<file path=ppt/slides/slide13.xml><?xml version="1.0" encoding="utf-8"?>
 <p:sld xmlns:a="http://schemas.openxmlformats.org/drawingml/2006/main" xmlns:r="http://schemas.openxmlformats.org/officeDocument/2006/relationships" xmlns:p="http://schemas.openxmlformats.org/presentationml/2006/main">
   <p:cSld>
     <p:spTree>
@@ -6134,7 +6505,7 @@
           <a:p>
             <a:fld id="{5E7A655E-BA10-45EB-B439-1EA08694B58E}" type="slidenum">
               <a:rPr lang="en-TW" smtClean="0"/>
-              <a:t>11</a:t>
+              <a:t>13</a:t>
             </a:fld>
             <a:endParaRPr lang="en-TW"/>
           </a:p>
@@ -6153,7 +6524,7 @@
 </p:sld>
 </file>
 
-<file path=ppt/slides/slide12.xml><?xml version="1.0" encoding="utf-8"?>
+<file path=ppt/slides/slide14.xml><?xml version="1.0" encoding="utf-8"?>
 <p:sld xmlns:a="http://schemas.openxmlformats.org/drawingml/2006/main" xmlns:r="http://schemas.openxmlformats.org/officeDocument/2006/relationships" xmlns:p="http://schemas.openxmlformats.org/presentationml/2006/main">
   <p:cSld>
     <p:spTree>
@@ -6414,7 +6785,7 @@
           <a:p>
             <a:fld id="{5E7A655E-BA10-45EB-B439-1EA08694B58E}" type="slidenum">
               <a:rPr lang="en-TW" smtClean="0"/>
-              <a:t>12</a:t>
+              <a:t>14</a:t>
             </a:fld>
             <a:endParaRPr lang="en-TW"/>
           </a:p>
@@ -6433,7 +6804,7 @@
 </p:sld>
 </file>
 
-<file path=ppt/slides/slide13.xml><?xml version="1.0" encoding="utf-8"?>
+<file path=ppt/slides/slide15.xml><?xml version="1.0" encoding="utf-8"?>
 <p:sld xmlns:a="http://schemas.openxmlformats.org/drawingml/2006/main" xmlns:r="http://schemas.openxmlformats.org/officeDocument/2006/relationships" xmlns:p="http://schemas.openxmlformats.org/presentationml/2006/main">
   <p:cSld>
     <p:spTree>
@@ -7446,7 +7817,7 @@
           <a:p>
             <a:fld id="{5E7A655E-BA10-45EB-B439-1EA08694B58E}" type="slidenum">
               <a:rPr lang="en-TW" smtClean="0"/>
-              <a:t>13</a:t>
+              <a:t>15</a:t>
             </a:fld>
             <a:endParaRPr lang="en-TW"/>
           </a:p>
@@ -7465,7 +7836,7 @@
 </p:sld>
 </file>
 
-<file path=ppt/slides/slide14.xml><?xml version="1.0" encoding="utf-8"?>
+<file path=ppt/slides/slide16.xml><?xml version="1.0" encoding="utf-8"?>
 <p:sld xmlns:a="http://schemas.openxmlformats.org/drawingml/2006/main" xmlns:r="http://schemas.openxmlformats.org/officeDocument/2006/relationships" xmlns:p="http://schemas.openxmlformats.org/presentationml/2006/main">
   <p:cSld>
     <p:spTree>
@@ -9111,7 +9482,7 @@
           <a:p>
             <a:fld id="{5E7A655E-BA10-45EB-B439-1EA08694B58E}" type="slidenum">
               <a:rPr lang="en-TW" smtClean="0"/>
-              <a:t>14</a:t>
+              <a:t>16</a:t>
             </a:fld>
             <a:endParaRPr lang="en-TW"/>
           </a:p>
@@ -9130,7 +9501,7 @@
 </p:sld>
 </file>
 
-<file path=ppt/slides/slide15.xml><?xml version="1.0" encoding="utf-8"?>
+<file path=ppt/slides/slide17.xml><?xml version="1.0" encoding="utf-8"?>
 <p:sld xmlns:a="http://schemas.openxmlformats.org/drawingml/2006/main" xmlns:r="http://schemas.openxmlformats.org/officeDocument/2006/relationships" xmlns:p="http://schemas.openxmlformats.org/presentationml/2006/main">
   <p:cSld>
     <p:spTree>
@@ -9952,7 +10323,7 @@
           <a:p>
             <a:fld id="{5E7A655E-BA10-45EB-B439-1EA08694B58E}" type="slidenum">
               <a:rPr lang="en-TW" smtClean="0"/>
-              <a:t>15</a:t>
+              <a:t>17</a:t>
             </a:fld>
             <a:endParaRPr lang="en-TW"/>
           </a:p>
@@ -9971,7 +10342,7 @@
 </p:sld>
 </file>
 
-<file path=ppt/slides/slide16.xml><?xml version="1.0" encoding="utf-8"?>
+<file path=ppt/slides/slide18.xml><?xml version="1.0" encoding="utf-8"?>
 <p:sld xmlns:a="http://schemas.openxmlformats.org/drawingml/2006/main" xmlns:r="http://schemas.openxmlformats.org/officeDocument/2006/relationships" xmlns:p="http://schemas.openxmlformats.org/presentationml/2006/main">
   <p:cSld>
     <p:spTree>
@@ -10689,7 +11060,7 @@
           <a:p>
             <a:fld id="{5E7A655E-BA10-45EB-B439-1EA08694B58E}" type="slidenum">
               <a:rPr lang="en-TW" smtClean="0"/>
-              <a:t>16</a:t>
+              <a:t>18</a:t>
             </a:fld>
             <a:endParaRPr lang="en-TW"/>
           </a:p>
@@ -10708,7 +11079,7 @@
 </p:sld>
 </file>
 
-<file path=ppt/slides/slide17.xml><?xml version="1.0" encoding="utf-8"?>
+<file path=ppt/slides/slide19.xml><?xml version="1.0" encoding="utf-8"?>
 <p:sld xmlns:a="http://schemas.openxmlformats.org/drawingml/2006/main" xmlns:r="http://schemas.openxmlformats.org/officeDocument/2006/relationships" xmlns:p="http://schemas.openxmlformats.org/presentationml/2006/main">
   <p:cSld>
     <p:spTree>
@@ -12700,7 +13071,7 @@
           <a:p>
             <a:fld id="{5E7A655E-BA10-45EB-B439-1EA08694B58E}" type="slidenum">
               <a:rPr lang="en-TW" smtClean="0"/>
-              <a:t>17</a:t>
+              <a:t>19</a:t>
             </a:fld>
             <a:endParaRPr lang="en-TW"/>
           </a:p>
@@ -12710,390 +13081,6 @@
     <p:extLst>
       <p:ext uri="{BB962C8B-B14F-4D97-AF65-F5344CB8AC3E}">
         <p14:creationId xmlns:p14="http://schemas.microsoft.com/office/powerpoint/2010/main" val="1375800246"/>
-      </p:ext>
-    </p:extLst>
-  </p:cSld>
-  <p:clrMapOvr>
-    <a:masterClrMapping/>
-  </p:clrMapOvr>
-</p:sld>
-</file>
-
-<file path=ppt/slides/slide18.xml><?xml version="1.0" encoding="utf-8"?>
-<p:sld xmlns:a="http://schemas.openxmlformats.org/drawingml/2006/main" xmlns:r="http://schemas.openxmlformats.org/officeDocument/2006/relationships" xmlns:p="http://schemas.openxmlformats.org/presentationml/2006/main">
-  <p:cSld>
-    <p:spTree>
-      <p:nvGrpSpPr>
-        <p:cNvPr id="1" name="">
-          <a:extLst>
-            <a:ext uri="{FF2B5EF4-FFF2-40B4-BE49-F238E27FC236}">
-              <a16:creationId xmlns:a16="http://schemas.microsoft.com/office/drawing/2014/main" id="{72315587-52FC-4A6B-E62D-0319F98C1EB6}"/>
-            </a:ext>
-          </a:extLst>
-        </p:cNvPr>
-        <p:cNvGrpSpPr/>
-        <p:nvPr/>
-      </p:nvGrpSpPr>
-      <p:grpSpPr>
-        <a:xfrm>
-          <a:off x="0" y="0"/>
-          <a:ext cx="0" cy="0"/>
-          <a:chOff x="0" y="0"/>
-          <a:chExt cx="0" cy="0"/>
-        </a:xfrm>
-      </p:grpSpPr>
-      <p:sp>
-        <p:nvSpPr>
-          <p:cNvPr id="4" name="文字方塊 3">
-            <a:extLst>
-              <a:ext uri="{FF2B5EF4-FFF2-40B4-BE49-F238E27FC236}">
-                <a16:creationId xmlns:a16="http://schemas.microsoft.com/office/drawing/2014/main" id="{F865D2DC-50BC-C4B3-3FE4-EFD4BFFB1F2B}"/>
-              </a:ext>
-            </a:extLst>
-          </p:cNvPr>
-          <p:cNvSpPr txBox="1"/>
-          <p:nvPr/>
-        </p:nvSpPr>
-        <p:spPr>
-          <a:xfrm>
-            <a:off x="572575" y="1468582"/>
-            <a:ext cx="11213772" cy="4457952"/>
-          </a:xfrm>
-          <a:prstGeom prst="rect">
-            <a:avLst/>
-          </a:prstGeom>
-          <a:noFill/>
-        </p:spPr>
-        <p:txBody>
-          <a:bodyPr wrap="square" rtlCol="0">
-            <a:spAutoFit/>
-          </a:bodyPr>
-          <a:lstStyle/>
-          <a:p>
-            <a:pPr marL="285750" indent="-285750">
-              <a:lnSpc>
-                <a:spcPct val="150000"/>
-              </a:lnSpc>
-              <a:buFont typeface="Arial" panose="020B0604020202020204" pitchFamily="34" charset="0"/>
-              <a:buChar char="•"/>
-            </a:pPr>
-            <a:r>
-              <a:rPr lang="en-US" sz="2400" dirty="0">
-                <a:solidFill>
-                  <a:schemeClr val="bg1">
-                    <a:lumMod val="65000"/>
-                  </a:schemeClr>
-                </a:solidFill>
-                <a:latin typeface="Times New Roman" panose="02020603050405020304" pitchFamily="18" charset="0"/>
-                <a:cs typeface="Times New Roman" panose="02020603050405020304" pitchFamily="18" charset="0"/>
-              </a:rPr>
-              <a:t>FPGA Selection and Spec</a:t>
-            </a:r>
-          </a:p>
-          <a:p>
-            <a:pPr marL="285750" indent="-285750">
-              <a:lnSpc>
-                <a:spcPct val="150000"/>
-              </a:lnSpc>
-              <a:buFont typeface="Arial" panose="020B0604020202020204" pitchFamily="34" charset="0"/>
-              <a:buChar char="•"/>
-            </a:pPr>
-            <a:r>
-              <a:rPr lang="en-US" sz="2400" dirty="0">
-                <a:solidFill>
-                  <a:schemeClr val="bg1">
-                    <a:lumMod val="65000"/>
-                  </a:schemeClr>
-                </a:solidFill>
-                <a:latin typeface="Times New Roman" panose="02020603050405020304" pitchFamily="18" charset="0"/>
-                <a:cs typeface="Times New Roman" panose="02020603050405020304" pitchFamily="18" charset="0"/>
-              </a:rPr>
-              <a:t>Overview Microcontroller / AXI Mapping</a:t>
-            </a:r>
-          </a:p>
-          <a:p>
-            <a:pPr marL="285750" indent="-285750">
-              <a:lnSpc>
-                <a:spcPct val="150000"/>
-              </a:lnSpc>
-              <a:buFont typeface="Arial" panose="020B0604020202020204" pitchFamily="34" charset="0"/>
-              <a:buChar char="•"/>
-            </a:pPr>
-            <a:r>
-              <a:rPr lang="en-US" sz="2400" dirty="0">
-                <a:solidFill>
-                  <a:schemeClr val="bg1">
-                    <a:lumMod val="65000"/>
-                  </a:schemeClr>
-                </a:solidFill>
-                <a:latin typeface="Times New Roman" panose="02020603050405020304" pitchFamily="18" charset="0"/>
-                <a:cs typeface="Times New Roman" panose="02020603050405020304" pitchFamily="18" charset="0"/>
-              </a:rPr>
-              <a:t>GPIO / Interrupt System / </a:t>
-            </a:r>
-            <a:r>
-              <a:rPr lang="zh-TW" altLang="en-US" sz="2400" dirty="0">
-                <a:solidFill>
-                  <a:schemeClr val="bg1">
-                    <a:lumMod val="65000"/>
-                  </a:schemeClr>
-                </a:solidFill>
-                <a:latin typeface="Times New Roman" panose="02020603050405020304" pitchFamily="18" charset="0"/>
-                <a:cs typeface="Times New Roman" panose="02020603050405020304" pitchFamily="18" charset="0"/>
-              </a:rPr>
-              <a:t> </a:t>
-            </a:r>
-            <a:r>
-              <a:rPr lang="en-US" altLang="zh-TW" sz="2400" dirty="0">
-                <a:solidFill>
-                  <a:schemeClr val="bg1">
-                    <a:lumMod val="65000"/>
-                  </a:schemeClr>
-                </a:solidFill>
-                <a:latin typeface="Times New Roman" panose="02020603050405020304" pitchFamily="18" charset="0"/>
-                <a:cs typeface="Times New Roman" panose="02020603050405020304" pitchFamily="18" charset="0"/>
-              </a:rPr>
-              <a:t>Timer &amp; PWM / XADC / UART</a:t>
-            </a:r>
-          </a:p>
-          <a:p>
-            <a:pPr marL="285750" indent="-285750">
-              <a:lnSpc>
-                <a:spcPct val="150000"/>
-              </a:lnSpc>
-              <a:buFont typeface="Arial" panose="020B0604020202020204" pitchFamily="34" charset="0"/>
-              <a:buChar char="•"/>
-            </a:pPr>
-            <a:r>
-              <a:rPr lang="en-US" altLang="zh-TW" sz="2400" dirty="0">
-                <a:latin typeface="Times New Roman" panose="02020603050405020304" pitchFamily="18" charset="0"/>
-                <a:cs typeface="Times New Roman" panose="02020603050405020304" pitchFamily="18" charset="0"/>
-              </a:rPr>
-              <a:t>Memory Hierarchy</a:t>
-            </a:r>
-          </a:p>
-          <a:p>
-            <a:pPr marL="285750" indent="-285750">
-              <a:lnSpc>
-                <a:spcPct val="150000"/>
-              </a:lnSpc>
-              <a:buFont typeface="Arial" panose="020B0604020202020204" pitchFamily="34" charset="0"/>
-              <a:buChar char="•"/>
-            </a:pPr>
-            <a:r>
-              <a:rPr lang="en-US" altLang="zh-TW" sz="2400" dirty="0">
-                <a:solidFill>
-                  <a:schemeClr val="bg1">
-                    <a:lumMod val="65000"/>
-                  </a:schemeClr>
-                </a:solidFill>
-                <a:latin typeface="Times New Roman" panose="02020603050405020304" pitchFamily="18" charset="0"/>
-                <a:cs typeface="Times New Roman" panose="02020603050405020304" pitchFamily="18" charset="0"/>
-              </a:rPr>
-              <a:t>Hardware Report</a:t>
-            </a:r>
-            <a:endParaRPr lang="en-US" sz="2400" dirty="0">
-              <a:solidFill>
-                <a:schemeClr val="bg1">
-                  <a:lumMod val="65000"/>
-                </a:schemeClr>
-              </a:solidFill>
-              <a:latin typeface="Times New Roman" panose="02020603050405020304" pitchFamily="18" charset="0"/>
-              <a:cs typeface="Times New Roman" panose="02020603050405020304" pitchFamily="18" charset="0"/>
-            </a:endParaRPr>
-          </a:p>
-          <a:p>
-            <a:pPr marL="285750" indent="-285750">
-              <a:lnSpc>
-                <a:spcPct val="150000"/>
-              </a:lnSpc>
-              <a:buFont typeface="Arial" panose="020B0604020202020204" pitchFamily="34" charset="0"/>
-              <a:buChar char="•"/>
-            </a:pPr>
-            <a:r>
-              <a:rPr lang="en-US" sz="2400" dirty="0">
-                <a:solidFill>
-                  <a:schemeClr val="bg1">
-                    <a:lumMod val="65000"/>
-                  </a:schemeClr>
-                </a:solidFill>
-                <a:latin typeface="Times New Roman" panose="02020603050405020304" pitchFamily="18" charset="0"/>
-                <a:cs typeface="Times New Roman" panose="02020603050405020304" pitchFamily="18" charset="0"/>
-              </a:rPr>
-              <a:t>Software Design Flow</a:t>
-            </a:r>
-          </a:p>
-          <a:p>
-            <a:pPr marL="285750" indent="-285750">
-              <a:lnSpc>
-                <a:spcPct val="150000"/>
-              </a:lnSpc>
-              <a:buFont typeface="Arial" panose="020B0604020202020204" pitchFamily="34" charset="0"/>
-              <a:buChar char="•"/>
-            </a:pPr>
-            <a:r>
-              <a:rPr lang="en-US" sz="2400" dirty="0">
-                <a:solidFill>
-                  <a:schemeClr val="bg1">
-                    <a:lumMod val="65000"/>
-                  </a:schemeClr>
-                </a:solidFill>
-                <a:latin typeface="Times New Roman" panose="02020603050405020304" pitchFamily="18" charset="0"/>
-                <a:cs typeface="Times New Roman" panose="02020603050405020304" pitchFamily="18" charset="0"/>
-              </a:rPr>
-              <a:t>JTAG Debug Flow</a:t>
-            </a:r>
-          </a:p>
-          <a:p>
-            <a:pPr marL="285750" indent="-285750">
-              <a:lnSpc>
-                <a:spcPct val="150000"/>
-              </a:lnSpc>
-              <a:buFont typeface="Arial" panose="020B0604020202020204" pitchFamily="34" charset="0"/>
-              <a:buChar char="•"/>
-            </a:pPr>
-            <a:r>
-              <a:rPr lang="en-US" sz="2400" dirty="0">
-                <a:solidFill>
-                  <a:schemeClr val="bg1">
-                    <a:lumMod val="65000"/>
-                  </a:schemeClr>
-                </a:solidFill>
-                <a:latin typeface="Times New Roman" panose="02020603050405020304" pitchFamily="18" charset="0"/>
-                <a:cs typeface="Times New Roman" panose="02020603050405020304" pitchFamily="18" charset="0"/>
-              </a:rPr>
-              <a:t>Standalone Boot Sequence</a:t>
-            </a:r>
-          </a:p>
-        </p:txBody>
-      </p:sp>
-      <p:sp>
-        <p:nvSpPr>
-          <p:cNvPr id="2" name="Slide Number Placeholder 1">
-            <a:extLst>
-              <a:ext uri="{FF2B5EF4-FFF2-40B4-BE49-F238E27FC236}">
-                <a16:creationId xmlns:a16="http://schemas.microsoft.com/office/drawing/2014/main" id="{BD646DE9-60F7-4C50-56D4-C7EB42185999}"/>
-              </a:ext>
-            </a:extLst>
-          </p:cNvPr>
-          <p:cNvSpPr>
-            <a:spLocks noGrp="1"/>
-          </p:cNvSpPr>
-          <p:nvPr>
-            <p:ph type="sldNum" idx="10"/>
-          </p:nvPr>
-        </p:nvSpPr>
-        <p:spPr/>
-        <p:txBody>
-          <a:bodyPr/>
-          <a:lstStyle/>
-          <a:p>
-            <a:fld id="{5E7A655E-BA10-45EB-B439-1EA08694B58E}" type="slidenum">
-              <a:rPr lang="en-TW" smtClean="0"/>
-              <a:t>18</a:t>
-            </a:fld>
-            <a:endParaRPr lang="en-TW"/>
-          </a:p>
-        </p:txBody>
-      </p:sp>
-    </p:spTree>
-    <p:extLst>
-      <p:ext uri="{BB962C8B-B14F-4D97-AF65-F5344CB8AC3E}">
-        <p14:creationId xmlns:p14="http://schemas.microsoft.com/office/powerpoint/2010/main" val="2151672787"/>
-      </p:ext>
-    </p:extLst>
-  </p:cSld>
-  <p:clrMapOvr>
-    <a:masterClrMapping/>
-  </p:clrMapOvr>
-</p:sld>
-</file>
-
-<file path=ppt/slides/slide19.xml><?xml version="1.0" encoding="utf-8"?>
-<p:sld xmlns:a="http://schemas.openxmlformats.org/drawingml/2006/main" xmlns:r="http://schemas.openxmlformats.org/officeDocument/2006/relationships" xmlns:p="http://schemas.openxmlformats.org/presentationml/2006/main">
-  <p:cSld>
-    <p:spTree>
-      <p:nvGrpSpPr>
-        <p:cNvPr id="1" name=""/>
-        <p:cNvGrpSpPr/>
-        <p:nvPr/>
-      </p:nvGrpSpPr>
-      <p:grpSpPr>
-        <a:xfrm>
-          <a:off x="0" y="0"/>
-          <a:ext cx="0" cy="0"/>
-          <a:chOff x="0" y="0"/>
-          <a:chExt cx="0" cy="0"/>
-        </a:xfrm>
-      </p:grpSpPr>
-      <p:sp>
-        <p:nvSpPr>
-          <p:cNvPr id="4" name="Title 3">
-            <a:extLst>
-              <a:ext uri="{FF2B5EF4-FFF2-40B4-BE49-F238E27FC236}">
-                <a16:creationId xmlns:a16="http://schemas.microsoft.com/office/drawing/2014/main" id="{F5AFFE6F-8DBA-7061-5BC7-4F987527D05A}"/>
-              </a:ext>
-            </a:extLst>
-          </p:cNvPr>
-          <p:cNvSpPr>
-            <a:spLocks noGrp="1"/>
-          </p:cNvSpPr>
-          <p:nvPr>
-            <p:ph type="title"/>
-          </p:nvPr>
-        </p:nvSpPr>
-        <p:spPr/>
-        <p:txBody>
-          <a:bodyPr/>
-          <a:lstStyle/>
-          <a:p>
-            <a:r>
-              <a:rPr lang="en-US" sz="4000" b="1" spc="-1" dirty="0">
-                <a:solidFill>
-                  <a:srgbClr val="DDDDDD"/>
-                </a:solidFill>
-                <a:latin typeface="Calibri"/>
-                <a:ea typeface="Calibri"/>
-              </a:rPr>
-              <a:t>Memory Hierarchy</a:t>
-            </a:r>
-            <a:endParaRPr lang="en-TW" sz="4000" dirty="0"/>
-          </a:p>
-        </p:txBody>
-      </p:sp>
-      <p:sp>
-        <p:nvSpPr>
-          <p:cNvPr id="2" name="Slide Number Placeholder 1">
-            <a:extLst>
-              <a:ext uri="{FF2B5EF4-FFF2-40B4-BE49-F238E27FC236}">
-                <a16:creationId xmlns:a16="http://schemas.microsoft.com/office/drawing/2014/main" id="{85C9A37E-5DF7-F2E5-4038-A385A8195227}"/>
-              </a:ext>
-            </a:extLst>
-          </p:cNvPr>
-          <p:cNvSpPr>
-            <a:spLocks noGrp="1"/>
-          </p:cNvSpPr>
-          <p:nvPr>
-            <p:ph type="sldNum" idx="10"/>
-          </p:nvPr>
-        </p:nvSpPr>
-        <p:spPr/>
-        <p:txBody>
-          <a:bodyPr/>
-          <a:lstStyle/>
-          <a:p>
-            <a:fld id="{9856DA5A-CF52-47BD-AC49-21DC5CAD2230}" type="slidenum">
-              <a:rPr lang="en-TW" smtClean="0"/>
-              <a:t>19</a:t>
-            </a:fld>
-            <a:endParaRPr lang="en-TW"/>
-          </a:p>
-        </p:txBody>
-      </p:sp>
-    </p:spTree>
-    <p:extLst>
-      <p:ext uri="{BB962C8B-B14F-4D97-AF65-F5344CB8AC3E}">
-        <p14:creationId xmlns:p14="http://schemas.microsoft.com/office/powerpoint/2010/main" val="225680696"/>
       </p:ext>
     </p:extLst>
   </p:cSld>
@@ -13435,6 +13422,437 @@
         <p:cNvPr id="1" name="">
           <a:extLst>
             <a:ext uri="{FF2B5EF4-FFF2-40B4-BE49-F238E27FC236}">
+              <a16:creationId xmlns:a16="http://schemas.microsoft.com/office/drawing/2014/main" id="{72315587-52FC-4A6B-E62D-0319F98C1EB6}"/>
+            </a:ext>
+          </a:extLst>
+        </p:cNvPr>
+        <p:cNvGrpSpPr/>
+        <p:nvPr/>
+      </p:nvGrpSpPr>
+      <p:grpSpPr>
+        <a:xfrm>
+          <a:off x="0" y="0"/>
+          <a:ext cx="0" cy="0"/>
+          <a:chOff x="0" y="0"/>
+          <a:chExt cx="0" cy="0"/>
+        </a:xfrm>
+      </p:grpSpPr>
+      <p:sp>
+        <p:nvSpPr>
+          <p:cNvPr id="4" name="文字方塊 3">
+            <a:extLst>
+              <a:ext uri="{FF2B5EF4-FFF2-40B4-BE49-F238E27FC236}">
+                <a16:creationId xmlns:a16="http://schemas.microsoft.com/office/drawing/2014/main" id="{F865D2DC-50BC-C4B3-3FE4-EFD4BFFB1F2B}"/>
+              </a:ext>
+            </a:extLst>
+          </p:cNvPr>
+          <p:cNvSpPr txBox="1"/>
+          <p:nvPr/>
+        </p:nvSpPr>
+        <p:spPr>
+          <a:xfrm>
+            <a:off x="572575" y="1468582"/>
+            <a:ext cx="11213772" cy="4457952"/>
+          </a:xfrm>
+          <a:prstGeom prst="rect">
+            <a:avLst/>
+          </a:prstGeom>
+          <a:noFill/>
+        </p:spPr>
+        <p:txBody>
+          <a:bodyPr wrap="square" rtlCol="0">
+            <a:spAutoFit/>
+          </a:bodyPr>
+          <a:lstStyle/>
+          <a:p>
+            <a:pPr marL="285750" indent="-285750">
+              <a:lnSpc>
+                <a:spcPct val="150000"/>
+              </a:lnSpc>
+              <a:buFont typeface="Arial" panose="020B0604020202020204" pitchFamily="34" charset="0"/>
+              <a:buChar char="•"/>
+            </a:pPr>
+            <a:r>
+              <a:rPr lang="en-US" sz="2400" dirty="0">
+                <a:solidFill>
+                  <a:schemeClr val="bg1">
+                    <a:lumMod val="65000"/>
+                  </a:schemeClr>
+                </a:solidFill>
+                <a:latin typeface="Times New Roman" panose="02020603050405020304" pitchFamily="18" charset="0"/>
+                <a:cs typeface="Times New Roman" panose="02020603050405020304" pitchFamily="18" charset="0"/>
+              </a:rPr>
+              <a:t>FPGA Selection and Spec</a:t>
+            </a:r>
+          </a:p>
+          <a:p>
+            <a:pPr marL="285750" indent="-285750">
+              <a:lnSpc>
+                <a:spcPct val="150000"/>
+              </a:lnSpc>
+              <a:buFont typeface="Arial" panose="020B0604020202020204" pitchFamily="34" charset="0"/>
+              <a:buChar char="•"/>
+            </a:pPr>
+            <a:r>
+              <a:rPr lang="en-US" sz="2400" dirty="0">
+                <a:solidFill>
+                  <a:schemeClr val="bg1">
+                    <a:lumMod val="65000"/>
+                  </a:schemeClr>
+                </a:solidFill>
+                <a:latin typeface="Times New Roman" panose="02020603050405020304" pitchFamily="18" charset="0"/>
+                <a:cs typeface="Times New Roman" panose="02020603050405020304" pitchFamily="18" charset="0"/>
+              </a:rPr>
+              <a:t>Overview Microcontroller / AXI Mapping</a:t>
+            </a:r>
+          </a:p>
+          <a:p>
+            <a:pPr marL="285750" indent="-285750">
+              <a:lnSpc>
+                <a:spcPct val="150000"/>
+              </a:lnSpc>
+              <a:buFont typeface="Arial" panose="020B0604020202020204" pitchFamily="34" charset="0"/>
+              <a:buChar char="•"/>
+            </a:pPr>
+            <a:r>
+              <a:rPr lang="en-US" sz="2400" dirty="0">
+                <a:solidFill>
+                  <a:schemeClr val="bg1">
+                    <a:lumMod val="65000"/>
+                  </a:schemeClr>
+                </a:solidFill>
+                <a:latin typeface="Times New Roman" panose="02020603050405020304" pitchFamily="18" charset="0"/>
+                <a:cs typeface="Times New Roman" panose="02020603050405020304" pitchFamily="18" charset="0"/>
+              </a:rPr>
+              <a:t>GPIO / Interrupt System / </a:t>
+            </a:r>
+            <a:r>
+              <a:rPr lang="zh-TW" altLang="en-US" sz="2400" dirty="0">
+                <a:solidFill>
+                  <a:schemeClr val="bg1">
+                    <a:lumMod val="65000"/>
+                  </a:schemeClr>
+                </a:solidFill>
+                <a:latin typeface="Times New Roman" panose="02020603050405020304" pitchFamily="18" charset="0"/>
+                <a:cs typeface="Times New Roman" panose="02020603050405020304" pitchFamily="18" charset="0"/>
+              </a:rPr>
+              <a:t> </a:t>
+            </a:r>
+            <a:r>
+              <a:rPr lang="en-US" altLang="zh-TW" sz="2400" dirty="0">
+                <a:solidFill>
+                  <a:schemeClr val="bg1">
+                    <a:lumMod val="65000"/>
+                  </a:schemeClr>
+                </a:solidFill>
+                <a:latin typeface="Times New Roman" panose="02020603050405020304" pitchFamily="18" charset="0"/>
+                <a:cs typeface="Times New Roman" panose="02020603050405020304" pitchFamily="18" charset="0"/>
+              </a:rPr>
+              <a:t>Timer &amp; PWM / XADC / UART</a:t>
+            </a:r>
+          </a:p>
+          <a:p>
+            <a:pPr marL="285750" indent="-285750">
+              <a:lnSpc>
+                <a:spcPct val="150000"/>
+              </a:lnSpc>
+              <a:buFont typeface="Arial" panose="020B0604020202020204" pitchFamily="34" charset="0"/>
+              <a:buChar char="•"/>
+            </a:pPr>
+            <a:r>
+              <a:rPr lang="en-US" altLang="zh-TW" sz="2400" dirty="0">
+                <a:latin typeface="Times New Roman" panose="02020603050405020304" pitchFamily="18" charset="0"/>
+                <a:cs typeface="Times New Roman" panose="02020603050405020304" pitchFamily="18" charset="0"/>
+              </a:rPr>
+              <a:t>Memory Hierarchy</a:t>
+            </a:r>
+          </a:p>
+          <a:p>
+            <a:pPr marL="285750" indent="-285750">
+              <a:lnSpc>
+                <a:spcPct val="150000"/>
+              </a:lnSpc>
+              <a:buFont typeface="Arial" panose="020B0604020202020204" pitchFamily="34" charset="0"/>
+              <a:buChar char="•"/>
+            </a:pPr>
+            <a:r>
+              <a:rPr lang="en-US" altLang="zh-TW" sz="2400" dirty="0">
+                <a:solidFill>
+                  <a:schemeClr val="bg1">
+                    <a:lumMod val="65000"/>
+                  </a:schemeClr>
+                </a:solidFill>
+                <a:latin typeface="Times New Roman" panose="02020603050405020304" pitchFamily="18" charset="0"/>
+                <a:cs typeface="Times New Roman" panose="02020603050405020304" pitchFamily="18" charset="0"/>
+              </a:rPr>
+              <a:t>Hardware Report</a:t>
+            </a:r>
+            <a:endParaRPr lang="en-US" sz="2400" dirty="0">
+              <a:solidFill>
+                <a:schemeClr val="bg1">
+                  <a:lumMod val="65000"/>
+                </a:schemeClr>
+              </a:solidFill>
+              <a:latin typeface="Times New Roman" panose="02020603050405020304" pitchFamily="18" charset="0"/>
+              <a:cs typeface="Times New Roman" panose="02020603050405020304" pitchFamily="18" charset="0"/>
+            </a:endParaRPr>
+          </a:p>
+          <a:p>
+            <a:pPr marL="285750" indent="-285750">
+              <a:lnSpc>
+                <a:spcPct val="150000"/>
+              </a:lnSpc>
+              <a:buFont typeface="Arial" panose="020B0604020202020204" pitchFamily="34" charset="0"/>
+              <a:buChar char="•"/>
+            </a:pPr>
+            <a:r>
+              <a:rPr lang="en-US" sz="2400" dirty="0">
+                <a:solidFill>
+                  <a:schemeClr val="bg1">
+                    <a:lumMod val="65000"/>
+                  </a:schemeClr>
+                </a:solidFill>
+                <a:latin typeface="Times New Roman" panose="02020603050405020304" pitchFamily="18" charset="0"/>
+                <a:cs typeface="Times New Roman" panose="02020603050405020304" pitchFamily="18" charset="0"/>
+              </a:rPr>
+              <a:t>Software Design Flow</a:t>
+            </a:r>
+          </a:p>
+          <a:p>
+            <a:pPr marL="285750" indent="-285750">
+              <a:lnSpc>
+                <a:spcPct val="150000"/>
+              </a:lnSpc>
+              <a:buFont typeface="Arial" panose="020B0604020202020204" pitchFamily="34" charset="0"/>
+              <a:buChar char="•"/>
+            </a:pPr>
+            <a:r>
+              <a:rPr lang="en-US" sz="2400" dirty="0">
+                <a:solidFill>
+                  <a:schemeClr val="bg1">
+                    <a:lumMod val="65000"/>
+                  </a:schemeClr>
+                </a:solidFill>
+                <a:latin typeface="Times New Roman" panose="02020603050405020304" pitchFamily="18" charset="0"/>
+                <a:cs typeface="Times New Roman" panose="02020603050405020304" pitchFamily="18" charset="0"/>
+              </a:rPr>
+              <a:t>JTAG Debug Flow</a:t>
+            </a:r>
+          </a:p>
+          <a:p>
+            <a:pPr marL="285750" indent="-285750">
+              <a:lnSpc>
+                <a:spcPct val="150000"/>
+              </a:lnSpc>
+              <a:buFont typeface="Arial" panose="020B0604020202020204" pitchFamily="34" charset="0"/>
+              <a:buChar char="•"/>
+            </a:pPr>
+            <a:r>
+              <a:rPr lang="en-US" sz="2400" dirty="0">
+                <a:solidFill>
+                  <a:schemeClr val="bg1">
+                    <a:lumMod val="65000"/>
+                  </a:schemeClr>
+                </a:solidFill>
+                <a:latin typeface="Times New Roman" panose="02020603050405020304" pitchFamily="18" charset="0"/>
+                <a:cs typeface="Times New Roman" panose="02020603050405020304" pitchFamily="18" charset="0"/>
+              </a:rPr>
+              <a:t>Standalone Boot Sequence</a:t>
+            </a:r>
+          </a:p>
+        </p:txBody>
+      </p:sp>
+      <p:sp>
+        <p:nvSpPr>
+          <p:cNvPr id="2" name="Slide Number Placeholder 1">
+            <a:extLst>
+              <a:ext uri="{FF2B5EF4-FFF2-40B4-BE49-F238E27FC236}">
+                <a16:creationId xmlns:a16="http://schemas.microsoft.com/office/drawing/2014/main" id="{BD646DE9-60F7-4C50-56D4-C7EB42185999}"/>
+              </a:ext>
+            </a:extLst>
+          </p:cNvPr>
+          <p:cNvSpPr>
+            <a:spLocks noGrp="1"/>
+          </p:cNvSpPr>
+          <p:nvPr>
+            <p:ph type="sldNum" idx="10"/>
+          </p:nvPr>
+        </p:nvSpPr>
+        <p:spPr/>
+        <p:txBody>
+          <a:bodyPr/>
+          <a:lstStyle/>
+          <a:p>
+            <a:fld id="{5E7A655E-BA10-45EB-B439-1EA08694B58E}" type="slidenum">
+              <a:rPr lang="en-TW" smtClean="0"/>
+              <a:t>20</a:t>
+            </a:fld>
+            <a:endParaRPr lang="en-TW"/>
+          </a:p>
+        </p:txBody>
+      </p:sp>
+    </p:spTree>
+    <p:extLst>
+      <p:ext uri="{BB962C8B-B14F-4D97-AF65-F5344CB8AC3E}">
+        <p14:creationId xmlns:p14="http://schemas.microsoft.com/office/powerpoint/2010/main" val="2151672787"/>
+      </p:ext>
+    </p:extLst>
+  </p:cSld>
+  <p:clrMapOvr>
+    <a:masterClrMapping/>
+  </p:clrMapOvr>
+</p:sld>
+</file>
+
+<file path=ppt/slides/slide21.xml><?xml version="1.0" encoding="utf-8"?>
+<p:sld xmlns:a="http://schemas.openxmlformats.org/drawingml/2006/main" xmlns:r="http://schemas.openxmlformats.org/officeDocument/2006/relationships" xmlns:p="http://schemas.openxmlformats.org/presentationml/2006/main">
+  <p:cSld>
+    <p:spTree>
+      <p:nvGrpSpPr>
+        <p:cNvPr id="1" name=""/>
+        <p:cNvGrpSpPr/>
+        <p:nvPr/>
+      </p:nvGrpSpPr>
+      <p:grpSpPr>
+        <a:xfrm>
+          <a:off x="0" y="0"/>
+          <a:ext cx="0" cy="0"/>
+          <a:chOff x="0" y="0"/>
+          <a:chExt cx="0" cy="0"/>
+        </a:xfrm>
+      </p:grpSpPr>
+      <p:sp>
+        <p:nvSpPr>
+          <p:cNvPr id="4" name="Title 3">
+            <a:extLst>
+              <a:ext uri="{FF2B5EF4-FFF2-40B4-BE49-F238E27FC236}">
+                <a16:creationId xmlns:a16="http://schemas.microsoft.com/office/drawing/2014/main" id="{F5AFFE6F-8DBA-7061-5BC7-4F987527D05A}"/>
+              </a:ext>
+            </a:extLst>
+          </p:cNvPr>
+          <p:cNvSpPr>
+            <a:spLocks noGrp="1"/>
+          </p:cNvSpPr>
+          <p:nvPr>
+            <p:ph type="title"/>
+          </p:nvPr>
+        </p:nvSpPr>
+        <p:spPr/>
+        <p:txBody>
+          <a:bodyPr/>
+          <a:lstStyle/>
+          <a:p>
+            <a:r>
+              <a:rPr lang="en-US" sz="4000" b="1" spc="-1" dirty="0">
+                <a:solidFill>
+                  <a:srgbClr val="DDDDDD"/>
+                </a:solidFill>
+                <a:latin typeface="Calibri"/>
+                <a:ea typeface="Calibri"/>
+              </a:rPr>
+              <a:t>Memory Hierarchy</a:t>
+            </a:r>
+            <a:endParaRPr lang="en-TW" sz="4000" dirty="0"/>
+          </a:p>
+        </p:txBody>
+      </p:sp>
+      <p:sp>
+        <p:nvSpPr>
+          <p:cNvPr id="2" name="Slide Number Placeholder 1">
+            <a:extLst>
+              <a:ext uri="{FF2B5EF4-FFF2-40B4-BE49-F238E27FC236}">
+                <a16:creationId xmlns:a16="http://schemas.microsoft.com/office/drawing/2014/main" id="{85C9A37E-5DF7-F2E5-4038-A385A8195227}"/>
+              </a:ext>
+            </a:extLst>
+          </p:cNvPr>
+          <p:cNvSpPr>
+            <a:spLocks noGrp="1"/>
+          </p:cNvSpPr>
+          <p:nvPr>
+            <p:ph type="sldNum" idx="10"/>
+          </p:nvPr>
+        </p:nvSpPr>
+        <p:spPr/>
+        <p:txBody>
+          <a:bodyPr/>
+          <a:lstStyle/>
+          <a:p>
+            <a:fld id="{9856DA5A-CF52-47BD-AC49-21DC5CAD2230}" type="slidenum">
+              <a:rPr lang="en-TW" smtClean="0"/>
+              <a:t>21</a:t>
+            </a:fld>
+            <a:endParaRPr lang="en-TW"/>
+          </a:p>
+        </p:txBody>
+      </p:sp>
+      <p:sp>
+        <p:nvSpPr>
+          <p:cNvPr id="3" name="動作按鈕: 說明 2">
+            <a:hlinkClick r:id="" action="ppaction://noaction" highlightClick="1"/>
+            <a:extLst>
+              <a:ext uri="{FF2B5EF4-FFF2-40B4-BE49-F238E27FC236}">
+                <a16:creationId xmlns:a16="http://schemas.microsoft.com/office/drawing/2014/main" id="{1B32337C-19B9-3E2D-F004-FE7014D04844}"/>
+              </a:ext>
+            </a:extLst>
+          </p:cNvPr>
+          <p:cNvSpPr/>
+          <p:nvPr/>
+        </p:nvSpPr>
+        <p:spPr>
+          <a:xfrm>
+            <a:off x="2554664" y="2309567"/>
+            <a:ext cx="6985262" cy="3167406"/>
+          </a:xfrm>
+          <a:prstGeom prst="actionButtonHelp">
+            <a:avLst/>
+          </a:prstGeom>
+        </p:spPr>
+        <p:style>
+          <a:lnRef idx="2">
+            <a:schemeClr val="accent1">
+              <a:shade val="15000"/>
+            </a:schemeClr>
+          </a:lnRef>
+          <a:fillRef idx="1">
+            <a:schemeClr val="accent1"/>
+          </a:fillRef>
+          <a:effectRef idx="0">
+            <a:schemeClr val="accent1"/>
+          </a:effectRef>
+          <a:fontRef idx="minor">
+            <a:schemeClr val="lt1"/>
+          </a:fontRef>
+        </p:style>
+        <p:txBody>
+          <a:bodyPr rtlCol="0" anchor="ctr"/>
+          <a:lstStyle/>
+          <a:p>
+            <a:pPr algn="ctr"/>
+            <a:endParaRPr lang="en-US"/>
+          </a:p>
+        </p:txBody>
+      </p:sp>
+    </p:spTree>
+    <p:extLst>
+      <p:ext uri="{BB962C8B-B14F-4D97-AF65-F5344CB8AC3E}">
+        <p14:creationId xmlns:p14="http://schemas.microsoft.com/office/powerpoint/2010/main" val="225680696"/>
+      </p:ext>
+    </p:extLst>
+  </p:cSld>
+  <p:clrMapOvr>
+    <a:masterClrMapping/>
+  </p:clrMapOvr>
+</p:sld>
+</file>
+
+<file path=ppt/slides/slide22.xml><?xml version="1.0" encoding="utf-8"?>
+<p:sld xmlns:a="http://schemas.openxmlformats.org/drawingml/2006/main" xmlns:r="http://schemas.openxmlformats.org/officeDocument/2006/relationships" xmlns:p="http://schemas.openxmlformats.org/presentationml/2006/main">
+  <p:cSld>
+    <p:spTree>
+      <p:nvGrpSpPr>
+        <p:cNvPr id="1" name="">
+          <a:extLst>
+            <a:ext uri="{FF2B5EF4-FFF2-40B4-BE49-F238E27FC236}">
               <a16:creationId xmlns:a16="http://schemas.microsoft.com/office/drawing/2014/main" id="{6481B114-3126-551B-D14F-7694FD058C49}"/>
             </a:ext>
           </a:extLst>
@@ -13693,7 +14111,7 @@
           <a:p>
             <a:fld id="{5E7A655E-BA10-45EB-B439-1EA08694B58E}" type="slidenum">
               <a:rPr lang="en-TW" smtClean="0"/>
-              <a:t>20</a:t>
+              <a:t>22</a:t>
             </a:fld>
             <a:endParaRPr lang="en-TW"/>
           </a:p>
@@ -13712,7 +14130,7 @@
 </p:sld>
 </file>
 
-<file path=ppt/slides/slide21.xml><?xml version="1.0" encoding="utf-8"?>
+<file path=ppt/slides/slide23.xml><?xml version="1.0" encoding="utf-8"?>
 <p:sld xmlns:a="http://schemas.openxmlformats.org/drawingml/2006/main" xmlns:r="http://schemas.openxmlformats.org/officeDocument/2006/relationships" xmlns:p="http://schemas.openxmlformats.org/presentationml/2006/main">
   <p:cSld>
     <p:spTree>
@@ -13954,7 +14372,7 @@
           <a:p>
             <a:fld id="{5E7A655E-BA10-45EB-B439-1EA08694B58E}" type="slidenum">
               <a:rPr lang="en-TW" smtClean="0"/>
-              <a:t>21</a:t>
+              <a:t>23</a:t>
             </a:fld>
             <a:endParaRPr lang="en-TW"/>
           </a:p>
@@ -13968,7 +14386,7 @@
 </p:sld>
 </file>
 
-<file path=ppt/slides/slide22.xml><?xml version="1.0" encoding="utf-8"?>
+<file path=ppt/slides/slide24.xml><?xml version="1.0" encoding="utf-8"?>
 <p:sld xmlns:a="http://schemas.openxmlformats.org/drawingml/2006/main" xmlns:r="http://schemas.openxmlformats.org/officeDocument/2006/relationships" xmlns:p="http://schemas.openxmlformats.org/presentationml/2006/main">
   <p:cSld>
     <p:spTree>
@@ -14239,7 +14657,7 @@
           <a:p>
             <a:fld id="{5E7A655E-BA10-45EB-B439-1EA08694B58E}" type="slidenum">
               <a:rPr lang="en-TW" smtClean="0"/>
-              <a:t>22</a:t>
+              <a:t>24</a:t>
             </a:fld>
             <a:endParaRPr lang="en-TW"/>
           </a:p>
@@ -14258,7 +14676,7 @@
 </p:sld>
 </file>
 
-<file path=ppt/slides/slide23.xml><?xml version="1.0" encoding="utf-8"?>
+<file path=ppt/slides/slide25.xml><?xml version="1.0" encoding="utf-8"?>
 <p:sld xmlns:a="http://schemas.openxmlformats.org/drawingml/2006/main" xmlns:r="http://schemas.openxmlformats.org/officeDocument/2006/relationships" xmlns:p="http://schemas.openxmlformats.org/presentationml/2006/main">
   <p:cSld>
     <p:spTree>
@@ -14383,7 +14801,7 @@
             </a:pPr>
             <a:fld id="{00000000-1234-1234-1234-123412341234}" type="slidenum">
               <a:rPr lang="en-US" smtClean="0"/>
-              <a:t>23</a:t>
+              <a:t>25</a:t>
             </a:fld>
             <a:endParaRPr lang="en-US"/>
           </a:p>
@@ -14402,7 +14820,7 @@
 </p:sld>
 </file>
 
-<file path=ppt/slides/slide24.xml><?xml version="1.0" encoding="utf-8"?>
+<file path=ppt/slides/slide26.xml><?xml version="1.0" encoding="utf-8"?>
 <p:sld xmlns:a="http://schemas.openxmlformats.org/drawingml/2006/main" xmlns:r="http://schemas.openxmlformats.org/officeDocument/2006/relationships" xmlns:p="http://schemas.openxmlformats.org/presentationml/2006/main">
   <p:cSld>
     <p:spTree>
@@ -14638,7 +15056,7 @@
             </a:pPr>
             <a:fld id="{00000000-1234-1234-1234-123412341234}" type="slidenum">
               <a:rPr lang="en-US" smtClean="0"/>
-              <a:t>24</a:t>
+              <a:t>26</a:t>
             </a:fld>
             <a:endParaRPr lang="en-US"/>
           </a:p>
@@ -14657,7 +15075,7 @@
 </p:sld>
 </file>
 
-<file path=ppt/slides/slide25.xml><?xml version="1.0" encoding="utf-8"?>
+<file path=ppt/slides/slide27.xml><?xml version="1.0" encoding="utf-8"?>
 <p:sld xmlns:a="http://schemas.openxmlformats.org/drawingml/2006/main" xmlns:r="http://schemas.openxmlformats.org/officeDocument/2006/relationships" xmlns:p="http://schemas.openxmlformats.org/presentationml/2006/main">
   <p:cSld>
     <p:spTree>
@@ -15077,7 +15495,7 @@
           <a:p>
             <a:fld id="{5E7A655E-BA10-45EB-B439-1EA08694B58E}" type="slidenum">
               <a:rPr lang="en-TW" smtClean="0"/>
-              <a:t>25</a:t>
+              <a:t>27</a:t>
             </a:fld>
             <a:endParaRPr lang="en-TW"/>
           </a:p>
@@ -15096,7 +15514,7 @@
 </p:sld>
 </file>
 
-<file path=ppt/slides/slide26.xml><?xml version="1.0" encoding="utf-8"?>
+<file path=ppt/slides/slide28.xml><?xml version="1.0" encoding="utf-8"?>
 <p:sld xmlns:a="http://schemas.openxmlformats.org/drawingml/2006/main" xmlns:r="http://schemas.openxmlformats.org/officeDocument/2006/relationships" xmlns:p="http://schemas.openxmlformats.org/presentationml/2006/main">
   <p:cSld>
     <p:spTree>
@@ -15408,7 +15826,7 @@
           <a:p>
             <a:fld id="{5E7A655E-BA10-45EB-B439-1EA08694B58E}" type="slidenum">
               <a:rPr lang="en-TW" smtClean="0"/>
-              <a:t>26</a:t>
+              <a:t>28</a:t>
             </a:fld>
             <a:endParaRPr lang="en-TW"/>
           </a:p>
@@ -15427,7 +15845,7 @@
 </p:sld>
 </file>
 
-<file path=ppt/slides/slide27.xml><?xml version="1.0" encoding="utf-8"?>
+<file path=ppt/slides/slide29.xml><?xml version="1.0" encoding="utf-8"?>
 <p:sld xmlns:a="http://schemas.openxmlformats.org/drawingml/2006/main" xmlns:r="http://schemas.openxmlformats.org/officeDocument/2006/relationships" xmlns:p="http://schemas.openxmlformats.org/presentationml/2006/main">
   <p:cSld>
     <p:spTree>
@@ -15698,7 +16116,7 @@
           <a:p>
             <a:fld id="{5E7A655E-BA10-45EB-B439-1EA08694B58E}" type="slidenum">
               <a:rPr lang="en-TW" smtClean="0"/>
-              <a:t>27</a:t>
+              <a:t>29</a:t>
             </a:fld>
             <a:endParaRPr lang="en-TW"/>
           </a:p>
@@ -15708,528 +16126,6 @@
     <p:extLst>
       <p:ext uri="{BB962C8B-B14F-4D97-AF65-F5344CB8AC3E}">
         <p14:creationId xmlns:p14="http://schemas.microsoft.com/office/powerpoint/2010/main" val="4012919507"/>
-      </p:ext>
-    </p:extLst>
-  </p:cSld>
-  <p:clrMapOvr>
-    <a:masterClrMapping/>
-  </p:clrMapOvr>
-</p:sld>
-</file>
-
-<file path=ppt/slides/slide28.xml><?xml version="1.0" encoding="utf-8"?>
-<p:sld xmlns:a="http://schemas.openxmlformats.org/drawingml/2006/main" xmlns:r="http://schemas.openxmlformats.org/officeDocument/2006/relationships" xmlns:p="http://schemas.openxmlformats.org/presentationml/2006/main">
-  <p:cSld>
-    <p:spTree>
-      <p:nvGrpSpPr>
-        <p:cNvPr id="1" name="">
-          <a:extLst>
-            <a:ext uri="{FF2B5EF4-FFF2-40B4-BE49-F238E27FC236}">
-              <a16:creationId xmlns:a16="http://schemas.microsoft.com/office/drawing/2014/main" id="{536355E2-8D8C-BE82-5BF8-D64A289BC6AA}"/>
-            </a:ext>
-          </a:extLst>
-        </p:cNvPr>
-        <p:cNvGrpSpPr/>
-        <p:nvPr/>
-      </p:nvGrpSpPr>
-      <p:grpSpPr>
-        <a:xfrm>
-          <a:off x="0" y="0"/>
-          <a:ext cx="0" cy="0"/>
-          <a:chOff x="0" y="0"/>
-          <a:chExt cx="0" cy="0"/>
-        </a:xfrm>
-      </p:grpSpPr>
-      <p:sp>
-        <p:nvSpPr>
-          <p:cNvPr id="129" name="PlaceHolder 1">
-            <a:extLst>
-              <a:ext uri="{FF2B5EF4-FFF2-40B4-BE49-F238E27FC236}">
-                <a16:creationId xmlns:a16="http://schemas.microsoft.com/office/drawing/2014/main" id="{6630D19B-1BA9-EF8E-9C47-E096B8258AC3}"/>
-              </a:ext>
-            </a:extLst>
-          </p:cNvPr>
-          <p:cNvSpPr>
-            <a:spLocks noGrp="1"/>
-          </p:cNvSpPr>
-          <p:nvPr>
-            <p:ph type="title"/>
-          </p:nvPr>
-        </p:nvSpPr>
-        <p:spPr>
-          <a:xfrm>
-            <a:off x="1015920" y="0"/>
-            <a:ext cx="10972080" cy="1142280"/>
-          </a:xfrm>
-          <a:prstGeom prst="rect">
-            <a:avLst/>
-          </a:prstGeom>
-          <a:noFill/>
-          <a:ln w="0">
-            <a:noFill/>
-          </a:ln>
-        </p:spPr>
-        <p:txBody>
-          <a:bodyPr lIns="91440" tIns="45720" rIns="91440" bIns="45720" anchor="ctr">
-            <a:noAutofit/>
-          </a:bodyPr>
-          <a:lstStyle/>
-          <a:p>
-            <a:pPr indent="0">
-              <a:lnSpc>
-                <a:spcPct val="100000"/>
-              </a:lnSpc>
-              <a:buNone/>
-              <a:tabLst>
-                <a:tab pos="0" algn="l"/>
-              </a:tabLst>
-            </a:pPr>
-            <a:r>
-              <a:rPr lang="en-US" sz="4000" b="1" spc="-1" dirty="0">
-                <a:solidFill>
-                  <a:srgbClr val="DDDDDD"/>
-                </a:solidFill>
-                <a:latin typeface="Calibri"/>
-              </a:rPr>
-              <a:t>JTAG Debug Flow</a:t>
-            </a:r>
-            <a:endParaRPr lang="en-US" sz="4000" b="0" strike="noStrike" spc="-1" dirty="0">
-              <a:solidFill>
-                <a:srgbClr val="000000"/>
-              </a:solidFill>
-              <a:latin typeface="Arial"/>
-            </a:endParaRPr>
-          </a:p>
-        </p:txBody>
-      </p:sp>
-      <p:sp>
-        <p:nvSpPr>
-          <p:cNvPr id="131" name="AutoShape 3">
-            <a:extLst>
-              <a:ext uri="{FF2B5EF4-FFF2-40B4-BE49-F238E27FC236}">
-                <a16:creationId xmlns:a16="http://schemas.microsoft.com/office/drawing/2014/main" id="{5DC04991-490B-FA31-CF4D-3A390138A17A}"/>
-              </a:ext>
-            </a:extLst>
-          </p:cNvPr>
-          <p:cNvSpPr/>
-          <p:nvPr/>
-        </p:nvSpPr>
-        <p:spPr>
-          <a:xfrm>
-            <a:off x="5943600" y="3276720"/>
-            <a:ext cx="304200" cy="304200"/>
-          </a:xfrm>
-          <a:prstGeom prst="rect">
-            <a:avLst/>
-          </a:prstGeom>
-          <a:noFill/>
-          <a:ln w="0">
-            <a:noFill/>
-          </a:ln>
-        </p:spPr>
-        <p:style>
-          <a:lnRef idx="0">
-            <a:scrgbClr r="0" g="0" b="0"/>
-          </a:lnRef>
-          <a:fillRef idx="0">
-            <a:scrgbClr r="0" g="0" b="0"/>
-          </a:fillRef>
-          <a:effectRef idx="0">
-            <a:scrgbClr r="0" g="0" b="0"/>
-          </a:effectRef>
-          <a:fontRef idx="minor"/>
-        </p:style>
-        <p:txBody>
-          <a:bodyPr lIns="90000" tIns="45000" rIns="90000" bIns="45000" numCol="1" spcCol="0" anchor="t">
-            <a:noAutofit/>
-          </a:bodyPr>
-          <a:lstStyle/>
-          <a:p>
-            <a:pPr>
-              <a:lnSpc>
-                <a:spcPct val="100000"/>
-              </a:lnSpc>
-            </a:pPr>
-            <a:endParaRPr lang="en-US" sz="1400" b="0" strike="noStrike" spc="-1">
-              <a:solidFill>
-                <a:srgbClr val="000000"/>
-              </a:solidFill>
-              <a:latin typeface="Arial"/>
-              <a:ea typeface="Arial"/>
-            </a:endParaRPr>
-          </a:p>
-        </p:txBody>
-      </p:sp>
-      <p:sp>
-        <p:nvSpPr>
-          <p:cNvPr id="2" name="動作按鈕: 說明 1">
-            <a:hlinkClick r:id="" action="ppaction://noaction" highlightClick="1"/>
-            <a:extLst>
-              <a:ext uri="{FF2B5EF4-FFF2-40B4-BE49-F238E27FC236}">
-                <a16:creationId xmlns:a16="http://schemas.microsoft.com/office/drawing/2014/main" id="{43FCC448-A9B1-5427-37F1-D59C23D22D20}"/>
-              </a:ext>
-            </a:extLst>
-          </p:cNvPr>
-          <p:cNvSpPr/>
-          <p:nvPr/>
-        </p:nvSpPr>
-        <p:spPr>
-          <a:xfrm>
-            <a:off x="2554664" y="2309567"/>
-            <a:ext cx="6985262" cy="3167406"/>
-          </a:xfrm>
-          <a:prstGeom prst="actionButtonHelp">
-            <a:avLst/>
-          </a:prstGeom>
-        </p:spPr>
-        <p:style>
-          <a:lnRef idx="2">
-            <a:schemeClr val="accent1">
-              <a:shade val="15000"/>
-            </a:schemeClr>
-          </a:lnRef>
-          <a:fillRef idx="1">
-            <a:schemeClr val="accent1"/>
-          </a:fillRef>
-          <a:effectRef idx="0">
-            <a:schemeClr val="accent1"/>
-          </a:effectRef>
-          <a:fontRef idx="minor">
-            <a:schemeClr val="lt1"/>
-          </a:fontRef>
-        </p:style>
-        <p:txBody>
-          <a:bodyPr rtlCol="0" anchor="ctr"/>
-          <a:lstStyle/>
-          <a:p>
-            <a:pPr algn="ctr"/>
-            <a:endParaRPr lang="en-US"/>
-          </a:p>
-        </p:txBody>
-      </p:sp>
-      <p:sp>
-        <p:nvSpPr>
-          <p:cNvPr id="3" name="Slide Number Placeholder 2">
-            <a:extLst>
-              <a:ext uri="{FF2B5EF4-FFF2-40B4-BE49-F238E27FC236}">
-                <a16:creationId xmlns:a16="http://schemas.microsoft.com/office/drawing/2014/main" id="{A46BADAD-3AC3-ED5E-3EAD-EF0F2DCFF1B0}"/>
-              </a:ext>
-            </a:extLst>
-          </p:cNvPr>
-          <p:cNvSpPr>
-            <a:spLocks noGrp="1"/>
-          </p:cNvSpPr>
-          <p:nvPr>
-            <p:ph type="sldNum" idx="10"/>
-          </p:nvPr>
-        </p:nvSpPr>
-        <p:spPr/>
-        <p:txBody>
-          <a:bodyPr/>
-          <a:lstStyle/>
-          <a:p>
-            <a:fld id="{5E7A655E-BA10-45EB-B439-1EA08694B58E}" type="slidenum">
-              <a:rPr lang="en-TW" smtClean="0"/>
-              <a:t>28</a:t>
-            </a:fld>
-            <a:endParaRPr lang="en-TW"/>
-          </a:p>
-        </p:txBody>
-      </p:sp>
-    </p:spTree>
-    <p:extLst>
-      <p:ext uri="{BB962C8B-B14F-4D97-AF65-F5344CB8AC3E}">
-        <p14:creationId xmlns:p14="http://schemas.microsoft.com/office/powerpoint/2010/main" val="2042655001"/>
-      </p:ext>
-    </p:extLst>
-  </p:cSld>
-  <p:clrMapOvr>
-    <a:masterClrMapping/>
-  </p:clrMapOvr>
-</p:sld>
-</file>
-
-<file path=ppt/slides/slide29.xml><?xml version="1.0" encoding="utf-8"?>
-<p:sld xmlns:a="http://schemas.openxmlformats.org/drawingml/2006/main" xmlns:r="http://schemas.openxmlformats.org/officeDocument/2006/relationships" xmlns:p="http://schemas.openxmlformats.org/presentationml/2006/main">
-  <p:cSld>
-    <p:spTree>
-      <p:nvGrpSpPr>
-        <p:cNvPr id="1" name="">
-          <a:extLst>
-            <a:ext uri="{FF2B5EF4-FFF2-40B4-BE49-F238E27FC236}">
-              <a16:creationId xmlns:a16="http://schemas.microsoft.com/office/drawing/2014/main" id="{DBD334A9-887E-0379-E9A8-0B87329B9692}"/>
-            </a:ext>
-          </a:extLst>
-        </p:cNvPr>
-        <p:cNvGrpSpPr/>
-        <p:nvPr/>
-      </p:nvGrpSpPr>
-      <p:grpSpPr>
-        <a:xfrm>
-          <a:off x="0" y="0"/>
-          <a:ext cx="0" cy="0"/>
-          <a:chOff x="0" y="0"/>
-          <a:chExt cx="0" cy="0"/>
-        </a:xfrm>
-      </p:grpSpPr>
-      <p:sp>
-        <p:nvSpPr>
-          <p:cNvPr id="4" name="文字方塊 3">
-            <a:extLst>
-              <a:ext uri="{FF2B5EF4-FFF2-40B4-BE49-F238E27FC236}">
-                <a16:creationId xmlns:a16="http://schemas.microsoft.com/office/drawing/2014/main" id="{B6FE46E2-6884-8E38-0EE2-E3D2FDFAB16C}"/>
-              </a:ext>
-            </a:extLst>
-          </p:cNvPr>
-          <p:cNvSpPr txBox="1"/>
-          <p:nvPr/>
-        </p:nvSpPr>
-        <p:spPr>
-          <a:xfrm>
-            <a:off x="572575" y="1468582"/>
-            <a:ext cx="11213772" cy="4457952"/>
-          </a:xfrm>
-          <a:prstGeom prst="rect">
-            <a:avLst/>
-          </a:prstGeom>
-          <a:noFill/>
-        </p:spPr>
-        <p:txBody>
-          <a:bodyPr wrap="square" rtlCol="0">
-            <a:spAutoFit/>
-          </a:bodyPr>
-          <a:lstStyle/>
-          <a:p>
-            <a:pPr marL="285750" indent="-285750">
-              <a:lnSpc>
-                <a:spcPct val="150000"/>
-              </a:lnSpc>
-              <a:buFont typeface="Arial" panose="020B0604020202020204" pitchFamily="34" charset="0"/>
-              <a:buChar char="•"/>
-            </a:pPr>
-            <a:r>
-              <a:rPr lang="en-US" sz="2400" dirty="0">
-                <a:solidFill>
-                  <a:schemeClr val="bg1">
-                    <a:lumMod val="65000"/>
-                  </a:schemeClr>
-                </a:solidFill>
-                <a:latin typeface="Times New Roman" panose="02020603050405020304" pitchFamily="18" charset="0"/>
-                <a:cs typeface="Times New Roman" panose="02020603050405020304" pitchFamily="18" charset="0"/>
-              </a:rPr>
-              <a:t>FPGA Selection and Spec</a:t>
-            </a:r>
-          </a:p>
-          <a:p>
-            <a:pPr marL="285750" indent="-285750">
-              <a:lnSpc>
-                <a:spcPct val="150000"/>
-              </a:lnSpc>
-              <a:buFont typeface="Arial" panose="020B0604020202020204" pitchFamily="34" charset="0"/>
-              <a:buChar char="•"/>
-            </a:pPr>
-            <a:r>
-              <a:rPr lang="en-US" sz="2400" dirty="0">
-                <a:solidFill>
-                  <a:schemeClr val="bg1">
-                    <a:lumMod val="65000"/>
-                  </a:schemeClr>
-                </a:solidFill>
-                <a:latin typeface="Times New Roman" panose="02020603050405020304" pitchFamily="18" charset="0"/>
-                <a:cs typeface="Times New Roman" panose="02020603050405020304" pitchFamily="18" charset="0"/>
-              </a:rPr>
-              <a:t>Overview Microcontroller / AXI Mapping</a:t>
-            </a:r>
-          </a:p>
-          <a:p>
-            <a:pPr marL="285750" indent="-285750">
-              <a:lnSpc>
-                <a:spcPct val="150000"/>
-              </a:lnSpc>
-              <a:buFont typeface="Arial" panose="020B0604020202020204" pitchFamily="34" charset="0"/>
-              <a:buChar char="•"/>
-            </a:pPr>
-            <a:r>
-              <a:rPr lang="en-US" sz="2400" dirty="0">
-                <a:solidFill>
-                  <a:schemeClr val="bg1">
-                    <a:lumMod val="65000"/>
-                  </a:schemeClr>
-                </a:solidFill>
-                <a:latin typeface="Times New Roman" panose="02020603050405020304" pitchFamily="18" charset="0"/>
-                <a:cs typeface="Times New Roman" panose="02020603050405020304" pitchFamily="18" charset="0"/>
-              </a:rPr>
-              <a:t>GPIO / Interrupt System / </a:t>
-            </a:r>
-            <a:r>
-              <a:rPr lang="zh-TW" altLang="en-US" sz="2400" dirty="0">
-                <a:solidFill>
-                  <a:schemeClr val="bg1">
-                    <a:lumMod val="65000"/>
-                  </a:schemeClr>
-                </a:solidFill>
-                <a:latin typeface="Times New Roman" panose="02020603050405020304" pitchFamily="18" charset="0"/>
-                <a:cs typeface="Times New Roman" panose="02020603050405020304" pitchFamily="18" charset="0"/>
-              </a:rPr>
-              <a:t> </a:t>
-            </a:r>
-            <a:r>
-              <a:rPr lang="en-US" altLang="zh-TW" sz="2400" dirty="0">
-                <a:solidFill>
-                  <a:schemeClr val="bg1">
-                    <a:lumMod val="65000"/>
-                  </a:schemeClr>
-                </a:solidFill>
-                <a:latin typeface="Times New Roman" panose="02020603050405020304" pitchFamily="18" charset="0"/>
-                <a:cs typeface="Times New Roman" panose="02020603050405020304" pitchFamily="18" charset="0"/>
-              </a:rPr>
-              <a:t>Timer &amp; PWM / XADC / UART</a:t>
-            </a:r>
-          </a:p>
-          <a:p>
-            <a:pPr marL="285750" indent="-285750">
-              <a:lnSpc>
-                <a:spcPct val="150000"/>
-              </a:lnSpc>
-              <a:buFont typeface="Arial" panose="020B0604020202020204" pitchFamily="34" charset="0"/>
-              <a:buChar char="•"/>
-            </a:pPr>
-            <a:r>
-              <a:rPr lang="en-US" altLang="zh-TW" sz="2400" dirty="0">
-                <a:solidFill>
-                  <a:schemeClr val="bg1">
-                    <a:lumMod val="65000"/>
-                  </a:schemeClr>
-                </a:solidFill>
-                <a:latin typeface="Times New Roman" panose="02020603050405020304" pitchFamily="18" charset="0"/>
-                <a:cs typeface="Times New Roman" panose="02020603050405020304" pitchFamily="18" charset="0"/>
-              </a:rPr>
-              <a:t>Memory Hierarchy</a:t>
-            </a:r>
-          </a:p>
-          <a:p>
-            <a:pPr marL="285750" indent="-285750">
-              <a:lnSpc>
-                <a:spcPct val="150000"/>
-              </a:lnSpc>
-              <a:buFont typeface="Arial" panose="020B0604020202020204" pitchFamily="34" charset="0"/>
-              <a:buChar char="•"/>
-            </a:pPr>
-            <a:r>
-              <a:rPr lang="en-US" altLang="zh-TW" sz="2400" dirty="0">
-                <a:solidFill>
-                  <a:schemeClr val="bg1">
-                    <a:lumMod val="65000"/>
-                  </a:schemeClr>
-                </a:solidFill>
-                <a:latin typeface="Times New Roman" panose="02020603050405020304" pitchFamily="18" charset="0"/>
-                <a:cs typeface="Times New Roman" panose="02020603050405020304" pitchFamily="18" charset="0"/>
-              </a:rPr>
-              <a:t>Hardware Report</a:t>
-            </a:r>
-            <a:endParaRPr lang="en-US" sz="2400" dirty="0">
-              <a:solidFill>
-                <a:schemeClr val="bg1">
-                  <a:lumMod val="65000"/>
-                </a:schemeClr>
-              </a:solidFill>
-              <a:latin typeface="Times New Roman" panose="02020603050405020304" pitchFamily="18" charset="0"/>
-              <a:cs typeface="Times New Roman" panose="02020603050405020304" pitchFamily="18" charset="0"/>
-            </a:endParaRPr>
-          </a:p>
-          <a:p>
-            <a:pPr marL="285750" indent="-285750">
-              <a:lnSpc>
-                <a:spcPct val="150000"/>
-              </a:lnSpc>
-              <a:buFont typeface="Arial" panose="020B0604020202020204" pitchFamily="34" charset="0"/>
-              <a:buChar char="•"/>
-            </a:pPr>
-            <a:r>
-              <a:rPr lang="en-US" sz="2400" dirty="0">
-                <a:solidFill>
-                  <a:schemeClr val="bg1">
-                    <a:lumMod val="65000"/>
-                  </a:schemeClr>
-                </a:solidFill>
-                <a:latin typeface="Times New Roman" panose="02020603050405020304" pitchFamily="18" charset="0"/>
-                <a:cs typeface="Times New Roman" panose="02020603050405020304" pitchFamily="18" charset="0"/>
-              </a:rPr>
-              <a:t>Software Design Flow</a:t>
-            </a:r>
-          </a:p>
-          <a:p>
-            <a:pPr marL="285750" indent="-285750">
-              <a:lnSpc>
-                <a:spcPct val="150000"/>
-              </a:lnSpc>
-              <a:buFont typeface="Arial" panose="020B0604020202020204" pitchFamily="34" charset="0"/>
-              <a:buChar char="•"/>
-            </a:pPr>
-            <a:r>
-              <a:rPr lang="en-US" sz="2400" dirty="0">
-                <a:solidFill>
-                  <a:schemeClr val="bg1">
-                    <a:lumMod val="65000"/>
-                  </a:schemeClr>
-                </a:solidFill>
-                <a:latin typeface="Times New Roman" panose="02020603050405020304" pitchFamily="18" charset="0"/>
-                <a:cs typeface="Times New Roman" panose="02020603050405020304" pitchFamily="18" charset="0"/>
-              </a:rPr>
-              <a:t>JTAG Debug Flow</a:t>
-            </a:r>
-          </a:p>
-          <a:p>
-            <a:pPr marL="285750" indent="-285750">
-              <a:lnSpc>
-                <a:spcPct val="150000"/>
-              </a:lnSpc>
-              <a:buFont typeface="Arial" panose="020B0604020202020204" pitchFamily="34" charset="0"/>
-              <a:buChar char="•"/>
-            </a:pPr>
-            <a:r>
-              <a:rPr lang="en-US" sz="2400" dirty="0">
-                <a:latin typeface="Times New Roman" panose="02020603050405020304" pitchFamily="18" charset="0"/>
-                <a:cs typeface="Times New Roman" panose="02020603050405020304" pitchFamily="18" charset="0"/>
-              </a:rPr>
-              <a:t>Standalone Boot Sequence</a:t>
-            </a:r>
-          </a:p>
-        </p:txBody>
-      </p:sp>
-      <p:sp>
-        <p:nvSpPr>
-          <p:cNvPr id="2" name="Slide Number Placeholder 1">
-            <a:extLst>
-              <a:ext uri="{FF2B5EF4-FFF2-40B4-BE49-F238E27FC236}">
-                <a16:creationId xmlns:a16="http://schemas.microsoft.com/office/drawing/2014/main" id="{775A9C5E-439C-66E9-1069-2FD157FC2825}"/>
-              </a:ext>
-            </a:extLst>
-          </p:cNvPr>
-          <p:cNvSpPr>
-            <a:spLocks noGrp="1"/>
-          </p:cNvSpPr>
-          <p:nvPr>
-            <p:ph type="sldNum" idx="10"/>
-          </p:nvPr>
-        </p:nvSpPr>
-        <p:spPr/>
-        <p:txBody>
-          <a:bodyPr/>
-          <a:lstStyle/>
-          <a:p>
-            <a:fld id="{5E7A655E-BA10-45EB-B439-1EA08694B58E}" type="slidenum">
-              <a:rPr lang="en-TW" smtClean="0"/>
-              <a:t>29</a:t>
-            </a:fld>
-            <a:endParaRPr lang="en-TW"/>
-          </a:p>
-        </p:txBody>
-      </p:sp>
-    </p:spTree>
-    <p:extLst>
-      <p:ext uri="{BB962C8B-B14F-4D97-AF65-F5344CB8AC3E}">
-        <p14:creationId xmlns:p14="http://schemas.microsoft.com/office/powerpoint/2010/main" val="4023069193"/>
       </p:ext>
     </p:extLst>
   </p:cSld>
@@ -16597,6 +16493,519 @@
   <p:cSld>
     <p:spTree>
       <p:nvGrpSpPr>
+        <p:cNvPr id="1" name="">
+          <a:extLst>
+            <a:ext uri="{FF2B5EF4-FFF2-40B4-BE49-F238E27FC236}">
+              <a16:creationId xmlns:a16="http://schemas.microsoft.com/office/drawing/2014/main" id="{536355E2-8D8C-BE82-5BF8-D64A289BC6AA}"/>
+            </a:ext>
+          </a:extLst>
+        </p:cNvPr>
+        <p:cNvGrpSpPr/>
+        <p:nvPr/>
+      </p:nvGrpSpPr>
+      <p:grpSpPr>
+        <a:xfrm>
+          <a:off x="0" y="0"/>
+          <a:ext cx="0" cy="0"/>
+          <a:chOff x="0" y="0"/>
+          <a:chExt cx="0" cy="0"/>
+        </a:xfrm>
+      </p:grpSpPr>
+      <p:sp>
+        <p:nvSpPr>
+          <p:cNvPr id="129" name="PlaceHolder 1">
+            <a:extLst>
+              <a:ext uri="{FF2B5EF4-FFF2-40B4-BE49-F238E27FC236}">
+                <a16:creationId xmlns:a16="http://schemas.microsoft.com/office/drawing/2014/main" id="{6630D19B-1BA9-EF8E-9C47-E096B8258AC3}"/>
+              </a:ext>
+            </a:extLst>
+          </p:cNvPr>
+          <p:cNvSpPr>
+            <a:spLocks noGrp="1"/>
+          </p:cNvSpPr>
+          <p:nvPr>
+            <p:ph type="title"/>
+          </p:nvPr>
+        </p:nvSpPr>
+        <p:spPr>
+          <a:xfrm>
+            <a:off x="1015920" y="0"/>
+            <a:ext cx="10972080" cy="1142280"/>
+          </a:xfrm>
+          <a:prstGeom prst="rect">
+            <a:avLst/>
+          </a:prstGeom>
+          <a:noFill/>
+          <a:ln w="0">
+            <a:noFill/>
+          </a:ln>
+        </p:spPr>
+        <p:txBody>
+          <a:bodyPr lIns="91440" tIns="45720" rIns="91440" bIns="45720" anchor="ctr">
+            <a:noAutofit/>
+          </a:bodyPr>
+          <a:lstStyle/>
+          <a:p>
+            <a:pPr indent="0">
+              <a:lnSpc>
+                <a:spcPct val="100000"/>
+              </a:lnSpc>
+              <a:buNone/>
+              <a:tabLst>
+                <a:tab pos="0" algn="l"/>
+              </a:tabLst>
+            </a:pPr>
+            <a:r>
+              <a:rPr lang="en-US" sz="4000" b="1" spc="-1" dirty="0">
+                <a:solidFill>
+                  <a:srgbClr val="DDDDDD"/>
+                </a:solidFill>
+                <a:latin typeface="Calibri"/>
+              </a:rPr>
+              <a:t>JTAG Debug Flow</a:t>
+            </a:r>
+            <a:endParaRPr lang="en-US" sz="4000" b="0" strike="noStrike" spc="-1" dirty="0">
+              <a:solidFill>
+                <a:srgbClr val="000000"/>
+              </a:solidFill>
+              <a:latin typeface="Arial"/>
+            </a:endParaRPr>
+          </a:p>
+        </p:txBody>
+      </p:sp>
+      <p:sp>
+        <p:nvSpPr>
+          <p:cNvPr id="131" name="AutoShape 3">
+            <a:extLst>
+              <a:ext uri="{FF2B5EF4-FFF2-40B4-BE49-F238E27FC236}">
+                <a16:creationId xmlns:a16="http://schemas.microsoft.com/office/drawing/2014/main" id="{5DC04991-490B-FA31-CF4D-3A390138A17A}"/>
+              </a:ext>
+            </a:extLst>
+          </p:cNvPr>
+          <p:cNvSpPr/>
+          <p:nvPr/>
+        </p:nvSpPr>
+        <p:spPr>
+          <a:xfrm>
+            <a:off x="5943600" y="3276720"/>
+            <a:ext cx="304200" cy="304200"/>
+          </a:xfrm>
+          <a:prstGeom prst="rect">
+            <a:avLst/>
+          </a:prstGeom>
+          <a:noFill/>
+          <a:ln w="0">
+            <a:noFill/>
+          </a:ln>
+        </p:spPr>
+        <p:style>
+          <a:lnRef idx="0">
+            <a:scrgbClr r="0" g="0" b="0"/>
+          </a:lnRef>
+          <a:fillRef idx="0">
+            <a:scrgbClr r="0" g="0" b="0"/>
+          </a:fillRef>
+          <a:effectRef idx="0">
+            <a:scrgbClr r="0" g="0" b="0"/>
+          </a:effectRef>
+          <a:fontRef idx="minor"/>
+        </p:style>
+        <p:txBody>
+          <a:bodyPr lIns="90000" tIns="45000" rIns="90000" bIns="45000" numCol="1" spcCol="0" anchor="t">
+            <a:noAutofit/>
+          </a:bodyPr>
+          <a:lstStyle/>
+          <a:p>
+            <a:pPr>
+              <a:lnSpc>
+                <a:spcPct val="100000"/>
+              </a:lnSpc>
+            </a:pPr>
+            <a:endParaRPr lang="en-US" sz="1400" b="0" strike="noStrike" spc="-1">
+              <a:solidFill>
+                <a:srgbClr val="000000"/>
+              </a:solidFill>
+              <a:latin typeface="Arial"/>
+              <a:ea typeface="Arial"/>
+            </a:endParaRPr>
+          </a:p>
+        </p:txBody>
+      </p:sp>
+      <p:sp>
+        <p:nvSpPr>
+          <p:cNvPr id="3" name="Slide Number Placeholder 2">
+            <a:extLst>
+              <a:ext uri="{FF2B5EF4-FFF2-40B4-BE49-F238E27FC236}">
+                <a16:creationId xmlns:a16="http://schemas.microsoft.com/office/drawing/2014/main" id="{A46BADAD-3AC3-ED5E-3EAD-EF0F2DCFF1B0}"/>
+              </a:ext>
+            </a:extLst>
+          </p:cNvPr>
+          <p:cNvSpPr>
+            <a:spLocks noGrp="1"/>
+          </p:cNvSpPr>
+          <p:nvPr>
+            <p:ph type="sldNum" idx="10"/>
+          </p:nvPr>
+        </p:nvSpPr>
+        <p:spPr/>
+        <p:txBody>
+          <a:bodyPr/>
+          <a:lstStyle/>
+          <a:p>
+            <a:fld id="{5E7A655E-BA10-45EB-B439-1EA08694B58E}" type="slidenum">
+              <a:rPr lang="en-TW" smtClean="0"/>
+              <a:t>30</a:t>
+            </a:fld>
+            <a:endParaRPr lang="en-TW"/>
+          </a:p>
+        </p:txBody>
+      </p:sp>
+      <p:sp>
+        <p:nvSpPr>
+          <p:cNvPr id="5" name="文字方塊 4">
+            <a:extLst>
+              <a:ext uri="{FF2B5EF4-FFF2-40B4-BE49-F238E27FC236}">
+                <a16:creationId xmlns:a16="http://schemas.microsoft.com/office/drawing/2014/main" id="{77A5CBF7-2141-EA13-EDE6-5414AC38BD75}"/>
+              </a:ext>
+            </a:extLst>
+          </p:cNvPr>
+          <p:cNvSpPr txBox="1"/>
+          <p:nvPr/>
+        </p:nvSpPr>
+        <p:spPr>
+          <a:xfrm>
+            <a:off x="1193761" y="2024265"/>
+            <a:ext cx="9803877" cy="646331"/>
+          </a:xfrm>
+          <a:prstGeom prst="rect">
+            <a:avLst/>
+          </a:prstGeom>
+          <a:noFill/>
+        </p:spPr>
+        <p:txBody>
+          <a:bodyPr wrap="square" rtlCol="0">
+            <a:spAutoFit/>
+          </a:bodyPr>
+          <a:lstStyle/>
+          <a:p>
+            <a:r>
+              <a:rPr lang="en-US" dirty="0">
+                <a:hlinkClick r:id="rId2"/>
+              </a:rPr>
+              <a:t>RISC-V-MCU-on-Cmod-A7/Vitis-Software-Dev-Guide/JTAG-Debug-Mode/JTAG-Debug-Mode.md at main · ukp66482/RISC-V-MCU-on-Cmod-A7</a:t>
+            </a:r>
+            <a:endParaRPr lang="en-US" dirty="0"/>
+          </a:p>
+        </p:txBody>
+      </p:sp>
+    </p:spTree>
+    <p:extLst>
+      <p:ext uri="{BB962C8B-B14F-4D97-AF65-F5344CB8AC3E}">
+        <p14:creationId xmlns:p14="http://schemas.microsoft.com/office/powerpoint/2010/main" val="2042655001"/>
+      </p:ext>
+    </p:extLst>
+  </p:cSld>
+  <p:clrMapOvr>
+    <a:masterClrMapping/>
+  </p:clrMapOvr>
+</p:sld>
+</file>
+
+<file path=ppt/slides/slide31.xml><?xml version="1.0" encoding="utf-8"?>
+<p:sld xmlns:a="http://schemas.openxmlformats.org/drawingml/2006/main" xmlns:r="http://schemas.openxmlformats.org/officeDocument/2006/relationships" xmlns:p="http://schemas.openxmlformats.org/presentationml/2006/main">
+  <p:cSld>
+    <p:spTree>
+      <p:nvGrpSpPr>
+        <p:cNvPr id="1" name="">
+          <a:extLst>
+            <a:ext uri="{FF2B5EF4-FFF2-40B4-BE49-F238E27FC236}">
+              <a16:creationId xmlns:a16="http://schemas.microsoft.com/office/drawing/2014/main" id="{DBD334A9-887E-0379-E9A8-0B87329B9692}"/>
+            </a:ext>
+          </a:extLst>
+        </p:cNvPr>
+        <p:cNvGrpSpPr/>
+        <p:nvPr/>
+      </p:nvGrpSpPr>
+      <p:grpSpPr>
+        <a:xfrm>
+          <a:off x="0" y="0"/>
+          <a:ext cx="0" cy="0"/>
+          <a:chOff x="0" y="0"/>
+          <a:chExt cx="0" cy="0"/>
+        </a:xfrm>
+      </p:grpSpPr>
+      <p:sp>
+        <p:nvSpPr>
+          <p:cNvPr id="4" name="文字方塊 3">
+            <a:extLst>
+              <a:ext uri="{FF2B5EF4-FFF2-40B4-BE49-F238E27FC236}">
+                <a16:creationId xmlns:a16="http://schemas.microsoft.com/office/drawing/2014/main" id="{B6FE46E2-6884-8E38-0EE2-E3D2FDFAB16C}"/>
+              </a:ext>
+            </a:extLst>
+          </p:cNvPr>
+          <p:cNvSpPr txBox="1"/>
+          <p:nvPr/>
+        </p:nvSpPr>
+        <p:spPr>
+          <a:xfrm>
+            <a:off x="572575" y="1468582"/>
+            <a:ext cx="11213772" cy="4457952"/>
+          </a:xfrm>
+          <a:prstGeom prst="rect">
+            <a:avLst/>
+          </a:prstGeom>
+          <a:noFill/>
+        </p:spPr>
+        <p:txBody>
+          <a:bodyPr wrap="square" rtlCol="0">
+            <a:spAutoFit/>
+          </a:bodyPr>
+          <a:lstStyle/>
+          <a:p>
+            <a:pPr marL="285750" indent="-285750">
+              <a:lnSpc>
+                <a:spcPct val="150000"/>
+              </a:lnSpc>
+              <a:buFont typeface="Arial" panose="020B0604020202020204" pitchFamily="34" charset="0"/>
+              <a:buChar char="•"/>
+            </a:pPr>
+            <a:r>
+              <a:rPr lang="en-US" sz="2400" dirty="0">
+                <a:solidFill>
+                  <a:schemeClr val="bg1">
+                    <a:lumMod val="65000"/>
+                  </a:schemeClr>
+                </a:solidFill>
+                <a:latin typeface="Times New Roman" panose="02020603050405020304" pitchFamily="18" charset="0"/>
+                <a:cs typeface="Times New Roman" panose="02020603050405020304" pitchFamily="18" charset="0"/>
+              </a:rPr>
+              <a:t>FPGA Selection and Spec</a:t>
+            </a:r>
+          </a:p>
+          <a:p>
+            <a:pPr marL="285750" indent="-285750">
+              <a:lnSpc>
+                <a:spcPct val="150000"/>
+              </a:lnSpc>
+              <a:buFont typeface="Arial" panose="020B0604020202020204" pitchFamily="34" charset="0"/>
+              <a:buChar char="•"/>
+            </a:pPr>
+            <a:r>
+              <a:rPr lang="en-US" sz="2400" dirty="0">
+                <a:solidFill>
+                  <a:schemeClr val="bg1">
+                    <a:lumMod val="65000"/>
+                  </a:schemeClr>
+                </a:solidFill>
+                <a:latin typeface="Times New Roman" panose="02020603050405020304" pitchFamily="18" charset="0"/>
+                <a:cs typeface="Times New Roman" panose="02020603050405020304" pitchFamily="18" charset="0"/>
+              </a:rPr>
+              <a:t>Overview Microcontroller / AXI Mapping</a:t>
+            </a:r>
+          </a:p>
+          <a:p>
+            <a:pPr marL="285750" indent="-285750">
+              <a:lnSpc>
+                <a:spcPct val="150000"/>
+              </a:lnSpc>
+              <a:buFont typeface="Arial" panose="020B0604020202020204" pitchFamily="34" charset="0"/>
+              <a:buChar char="•"/>
+            </a:pPr>
+            <a:r>
+              <a:rPr lang="en-US" sz="2400" dirty="0">
+                <a:solidFill>
+                  <a:schemeClr val="bg1">
+                    <a:lumMod val="65000"/>
+                  </a:schemeClr>
+                </a:solidFill>
+                <a:latin typeface="Times New Roman" panose="02020603050405020304" pitchFamily="18" charset="0"/>
+                <a:cs typeface="Times New Roman" panose="02020603050405020304" pitchFamily="18" charset="0"/>
+              </a:rPr>
+              <a:t>GPIO / Interrupt System / </a:t>
+            </a:r>
+            <a:r>
+              <a:rPr lang="zh-TW" altLang="en-US" sz="2400" dirty="0">
+                <a:solidFill>
+                  <a:schemeClr val="bg1">
+                    <a:lumMod val="65000"/>
+                  </a:schemeClr>
+                </a:solidFill>
+                <a:latin typeface="Times New Roman" panose="02020603050405020304" pitchFamily="18" charset="0"/>
+                <a:cs typeface="Times New Roman" panose="02020603050405020304" pitchFamily="18" charset="0"/>
+              </a:rPr>
+              <a:t> </a:t>
+            </a:r>
+            <a:r>
+              <a:rPr lang="en-US" altLang="zh-TW" sz="2400" dirty="0">
+                <a:solidFill>
+                  <a:schemeClr val="bg1">
+                    <a:lumMod val="65000"/>
+                  </a:schemeClr>
+                </a:solidFill>
+                <a:latin typeface="Times New Roman" panose="02020603050405020304" pitchFamily="18" charset="0"/>
+                <a:cs typeface="Times New Roman" panose="02020603050405020304" pitchFamily="18" charset="0"/>
+              </a:rPr>
+              <a:t>Timer &amp; PWM / XADC / UART</a:t>
+            </a:r>
+          </a:p>
+          <a:p>
+            <a:pPr marL="285750" indent="-285750">
+              <a:lnSpc>
+                <a:spcPct val="150000"/>
+              </a:lnSpc>
+              <a:buFont typeface="Arial" panose="020B0604020202020204" pitchFamily="34" charset="0"/>
+              <a:buChar char="•"/>
+            </a:pPr>
+            <a:r>
+              <a:rPr lang="en-US" altLang="zh-TW" sz="2400" dirty="0">
+                <a:solidFill>
+                  <a:schemeClr val="bg1">
+                    <a:lumMod val="65000"/>
+                  </a:schemeClr>
+                </a:solidFill>
+                <a:latin typeface="Times New Roman" panose="02020603050405020304" pitchFamily="18" charset="0"/>
+                <a:cs typeface="Times New Roman" panose="02020603050405020304" pitchFamily="18" charset="0"/>
+              </a:rPr>
+              <a:t>Memory Hierarchy</a:t>
+            </a:r>
+          </a:p>
+          <a:p>
+            <a:pPr marL="285750" indent="-285750">
+              <a:lnSpc>
+                <a:spcPct val="150000"/>
+              </a:lnSpc>
+              <a:buFont typeface="Arial" panose="020B0604020202020204" pitchFamily="34" charset="0"/>
+              <a:buChar char="•"/>
+            </a:pPr>
+            <a:r>
+              <a:rPr lang="en-US" altLang="zh-TW" sz="2400" dirty="0">
+                <a:solidFill>
+                  <a:schemeClr val="bg1">
+                    <a:lumMod val="65000"/>
+                  </a:schemeClr>
+                </a:solidFill>
+                <a:latin typeface="Times New Roman" panose="02020603050405020304" pitchFamily="18" charset="0"/>
+                <a:cs typeface="Times New Roman" panose="02020603050405020304" pitchFamily="18" charset="0"/>
+              </a:rPr>
+              <a:t>Hardware Report</a:t>
+            </a:r>
+            <a:endParaRPr lang="en-US" sz="2400" dirty="0">
+              <a:solidFill>
+                <a:schemeClr val="bg1">
+                  <a:lumMod val="65000"/>
+                </a:schemeClr>
+              </a:solidFill>
+              <a:latin typeface="Times New Roman" panose="02020603050405020304" pitchFamily="18" charset="0"/>
+              <a:cs typeface="Times New Roman" panose="02020603050405020304" pitchFamily="18" charset="0"/>
+            </a:endParaRPr>
+          </a:p>
+          <a:p>
+            <a:pPr marL="285750" indent="-285750">
+              <a:lnSpc>
+                <a:spcPct val="150000"/>
+              </a:lnSpc>
+              <a:buFont typeface="Arial" panose="020B0604020202020204" pitchFamily="34" charset="0"/>
+              <a:buChar char="•"/>
+            </a:pPr>
+            <a:r>
+              <a:rPr lang="en-US" sz="2400" dirty="0">
+                <a:solidFill>
+                  <a:schemeClr val="bg1">
+                    <a:lumMod val="65000"/>
+                  </a:schemeClr>
+                </a:solidFill>
+                <a:latin typeface="Times New Roman" panose="02020603050405020304" pitchFamily="18" charset="0"/>
+                <a:cs typeface="Times New Roman" panose="02020603050405020304" pitchFamily="18" charset="0"/>
+              </a:rPr>
+              <a:t>Software Design Flow</a:t>
+            </a:r>
+          </a:p>
+          <a:p>
+            <a:pPr marL="285750" indent="-285750">
+              <a:lnSpc>
+                <a:spcPct val="150000"/>
+              </a:lnSpc>
+              <a:buFont typeface="Arial" panose="020B0604020202020204" pitchFamily="34" charset="0"/>
+              <a:buChar char="•"/>
+            </a:pPr>
+            <a:r>
+              <a:rPr lang="en-US" sz="2400" dirty="0">
+                <a:solidFill>
+                  <a:schemeClr val="bg1">
+                    <a:lumMod val="65000"/>
+                  </a:schemeClr>
+                </a:solidFill>
+                <a:latin typeface="Times New Roman" panose="02020603050405020304" pitchFamily="18" charset="0"/>
+                <a:cs typeface="Times New Roman" panose="02020603050405020304" pitchFamily="18" charset="0"/>
+              </a:rPr>
+              <a:t>JTAG Debug Flow</a:t>
+            </a:r>
+          </a:p>
+          <a:p>
+            <a:pPr marL="285750" indent="-285750">
+              <a:lnSpc>
+                <a:spcPct val="150000"/>
+              </a:lnSpc>
+              <a:buFont typeface="Arial" panose="020B0604020202020204" pitchFamily="34" charset="0"/>
+              <a:buChar char="•"/>
+            </a:pPr>
+            <a:r>
+              <a:rPr lang="en-US" sz="2400" dirty="0">
+                <a:latin typeface="Times New Roman" panose="02020603050405020304" pitchFamily="18" charset="0"/>
+                <a:cs typeface="Times New Roman" panose="02020603050405020304" pitchFamily="18" charset="0"/>
+              </a:rPr>
+              <a:t>Standalone Boot Sequence</a:t>
+            </a:r>
+          </a:p>
+        </p:txBody>
+      </p:sp>
+      <p:sp>
+        <p:nvSpPr>
+          <p:cNvPr id="2" name="Slide Number Placeholder 1">
+            <a:extLst>
+              <a:ext uri="{FF2B5EF4-FFF2-40B4-BE49-F238E27FC236}">
+                <a16:creationId xmlns:a16="http://schemas.microsoft.com/office/drawing/2014/main" id="{775A9C5E-439C-66E9-1069-2FD157FC2825}"/>
+              </a:ext>
+            </a:extLst>
+          </p:cNvPr>
+          <p:cNvSpPr>
+            <a:spLocks noGrp="1"/>
+          </p:cNvSpPr>
+          <p:nvPr>
+            <p:ph type="sldNum" idx="10"/>
+          </p:nvPr>
+        </p:nvSpPr>
+        <p:spPr/>
+        <p:txBody>
+          <a:bodyPr/>
+          <a:lstStyle/>
+          <a:p>
+            <a:fld id="{5E7A655E-BA10-45EB-B439-1EA08694B58E}" type="slidenum">
+              <a:rPr lang="en-TW" smtClean="0"/>
+              <a:t>31</a:t>
+            </a:fld>
+            <a:endParaRPr lang="en-TW"/>
+          </a:p>
+        </p:txBody>
+      </p:sp>
+    </p:spTree>
+    <p:extLst>
+      <p:ext uri="{BB962C8B-B14F-4D97-AF65-F5344CB8AC3E}">
+        <p14:creationId xmlns:p14="http://schemas.microsoft.com/office/powerpoint/2010/main" val="4023069193"/>
+      </p:ext>
+    </p:extLst>
+  </p:cSld>
+  <p:clrMapOvr>
+    <a:masterClrMapping/>
+  </p:clrMapOvr>
+</p:sld>
+</file>
+
+<file path=ppt/slides/slide32.xml><?xml version="1.0" encoding="utf-8"?>
+<p:sld xmlns:a="http://schemas.openxmlformats.org/drawingml/2006/main" xmlns:r="http://schemas.openxmlformats.org/officeDocument/2006/relationships" xmlns:p="http://schemas.openxmlformats.org/presentationml/2006/main">
+  <p:cSld>
+    <p:spTree>
+      <p:nvGrpSpPr>
         <p:cNvPr id="1" name=""/>
         <p:cNvGrpSpPr/>
         <p:nvPr/>
@@ -16788,7 +17197,7 @@
           <a:p>
             <a:fld id="{5E7A655E-BA10-45EB-B439-1EA08694B58E}" type="slidenum">
               <a:rPr lang="en-TW" smtClean="0"/>
-              <a:t>30</a:t>
+              <a:t>32</a:t>
             </a:fld>
             <a:endParaRPr lang="en-TW"/>
           </a:p>
@@ -16802,7 +17211,7 @@
 </p:sld>
 </file>
 
-<file path=ppt/slides/slide31.xml><?xml version="1.0" encoding="utf-8"?>
+<file path=ppt/slides/slide33.xml><?xml version="1.0" encoding="utf-8"?>
 <p:sld xmlns:a="http://schemas.openxmlformats.org/drawingml/2006/main" xmlns:r="http://schemas.openxmlformats.org/officeDocument/2006/relationships" xmlns:p="http://schemas.openxmlformats.org/presentationml/2006/main">
   <p:cSld>
     <p:spTree>
@@ -16993,6 +17402,9 @@
             </a:pPr>
             <a:r>
               <a:rPr lang="en-US" sz="2400" dirty="0">
+                <a:solidFill>
+                  <a:srgbClr val="FF0000"/>
+                </a:solidFill>
                 <a:latin typeface="Times New Roman" panose="02020603050405020304" pitchFamily="18" charset="0"/>
                 <a:cs typeface="Times New Roman" panose="02020603050405020304" pitchFamily="18" charset="0"/>
               </a:rPr>
@@ -17102,6 +17514,9 @@
             </a:pPr>
             <a:r>
               <a:rPr lang="en-US" sz="2400" dirty="0">
+                <a:solidFill>
+                  <a:srgbClr val="FF0000"/>
+                </a:solidFill>
                 <a:latin typeface="Times New Roman" panose="02020603050405020304" pitchFamily="18" charset="0"/>
                 <a:cs typeface="Times New Roman" panose="02020603050405020304" pitchFamily="18" charset="0"/>
               </a:rPr>
@@ -17109,12 +17524,18 @@
             </a:r>
             <a:r>
               <a:rPr lang="zh-TW" altLang="en-US" sz="2400" dirty="0">
+                <a:solidFill>
+                  <a:srgbClr val="FF0000"/>
+                </a:solidFill>
                 <a:latin typeface="Times New Roman" panose="02020603050405020304" pitchFamily="18" charset="0"/>
                 <a:cs typeface="Times New Roman" panose="02020603050405020304" pitchFamily="18" charset="0"/>
               </a:rPr>
               <a:t>使用</a:t>
             </a:r>
             <a:endParaRPr lang="en-US" altLang="zh-TW" sz="2400" dirty="0">
+              <a:solidFill>
+                <a:srgbClr val="FF0000"/>
+              </a:solidFill>
               <a:latin typeface="Times New Roman" panose="02020603050405020304" pitchFamily="18" charset="0"/>
               <a:cs typeface="Times New Roman" panose="02020603050405020304" pitchFamily="18" charset="0"/>
             </a:endParaRPr>
@@ -17192,7 +17613,7 @@
           <a:p>
             <a:fld id="{5E7A655E-BA10-45EB-B439-1EA08694B58E}" type="slidenum">
               <a:rPr lang="en-TW" smtClean="0"/>
-              <a:t>31</a:t>
+              <a:t>33</a:t>
             </a:fld>
             <a:endParaRPr lang="en-TW"/>
           </a:p>
@@ -20548,7 +20969,7 @@
         </p:nvSpPr>
         <p:spPr>
           <a:xfrm>
-            <a:off x="6096000" y="2725266"/>
+            <a:off x="8026645" y="2687395"/>
             <a:ext cx="3492360" cy="811800"/>
           </a:xfrm>
           <a:prstGeom prst="roundRect">
@@ -20621,7 +21042,7 @@
         </p:nvSpPr>
         <p:spPr>
           <a:xfrm>
-            <a:off x="5626749" y="5046598"/>
+            <a:off x="4298842" y="5066309"/>
             <a:ext cx="1209600" cy="1045080"/>
           </a:xfrm>
           <a:prstGeom prst="roundRect">
@@ -20683,31 +21104,6 @@
           </a:p>
         </p:txBody>
       </p:sp>
-      <p:cxnSp>
-        <p:nvCxnSpPr>
-          <p:cNvPr id="75" name="直線單箭頭接點 11"/>
-          <p:cNvCxnSpPr>
-            <a:stCxn id="71" idx="3"/>
-            <a:endCxn id="70" idx="1"/>
-          </p:cNvCxnSpPr>
-          <p:nvPr/>
-        </p:nvCxnSpPr>
-        <p:spPr>
-          <a:xfrm>
-            <a:off x="2597404" y="3175281"/>
-            <a:ext cx="562680" cy="360"/>
-          </a:xfrm>
-          <a:prstGeom prst="straightConnector1">
-            <a:avLst/>
-          </a:prstGeom>
-          <a:ln w="0">
-            <a:solidFill>
-              <a:srgbClr val="000000"/>
-            </a:solidFill>
-            <a:tailEnd type="triangle" w="med" len="med"/>
-          </a:ln>
-        </p:spPr>
-      </p:cxnSp>
       <p:sp>
         <p:nvSpPr>
           <p:cNvPr id="76" name="矩形 12"/>
@@ -20786,7 +21182,7 @@
         </p:nvCxnSpPr>
         <p:spPr>
           <a:xfrm flipV="1">
-            <a:off x="6351640" y="2443008"/>
+            <a:off x="8282285" y="2405137"/>
             <a:ext cx="0" cy="285835"/>
           </a:xfrm>
           <a:prstGeom prst="straightConnector1">
@@ -20810,7 +21206,7 @@
         </p:nvCxnSpPr>
         <p:spPr>
           <a:xfrm flipV="1">
-            <a:off x="7832871" y="2443008"/>
+            <a:off x="9763516" y="2405137"/>
             <a:ext cx="0" cy="282258"/>
           </a:xfrm>
           <a:prstGeom prst="straightConnector1">
@@ -20826,199 +21222,13 @@
       </p:cxnSp>
       <p:sp>
         <p:nvSpPr>
-          <p:cNvPr id="79" name="箭號: 向下 18"/>
-          <p:cNvSpPr/>
-          <p:nvPr/>
-        </p:nvSpPr>
-        <p:spPr>
-          <a:xfrm>
-            <a:off x="3720964" y="3660561"/>
-            <a:ext cx="249120" cy="479520"/>
-          </a:xfrm>
-          <a:prstGeom prst="downArrow">
-            <a:avLst>
-              <a:gd name="adj1" fmla="val 50000"/>
-              <a:gd name="adj2" fmla="val 50000"/>
-            </a:avLst>
-          </a:prstGeom>
-          <a:solidFill>
-            <a:schemeClr val="tx1"/>
-          </a:solidFill>
-          <a:ln>
-            <a:solidFill>
-              <a:srgbClr val="000000"/>
-            </a:solidFill>
-            <a:round/>
-          </a:ln>
-        </p:spPr>
-        <p:style>
-          <a:lnRef idx="2">
-            <a:schemeClr val="accent1">
-              <a:shade val="15000"/>
-            </a:schemeClr>
-          </a:lnRef>
-          <a:fillRef idx="1">
-            <a:schemeClr val="accent1"/>
-          </a:fillRef>
-          <a:effectRef idx="0">
-            <a:schemeClr val="accent1"/>
-          </a:effectRef>
-          <a:fontRef idx="minor"/>
-        </p:style>
-        <p:txBody>
-          <a:bodyPr lIns="90000" tIns="45000" rIns="90000" bIns="45000" anchor="ctr">
-            <a:noAutofit/>
-          </a:bodyPr>
-          <a:lstStyle/>
-          <a:p>
-            <a:pPr algn="ctr">
-              <a:lnSpc>
-                <a:spcPct val="100000"/>
-              </a:lnSpc>
-            </a:pPr>
-            <a:endParaRPr lang="en-US" sz="1400" b="0" strike="noStrike" spc="-1">
-              <a:solidFill>
-                <a:schemeClr val="lt1"/>
-              </a:solidFill>
-              <a:latin typeface="Arial"/>
-              <a:ea typeface="Arial"/>
-            </a:endParaRPr>
-          </a:p>
-        </p:txBody>
-      </p:sp>
-      <p:sp>
-        <p:nvSpPr>
-          <p:cNvPr id="81" name="箭號: 向下 20"/>
-          <p:cNvSpPr/>
-          <p:nvPr/>
-        </p:nvSpPr>
-        <p:spPr>
-          <a:xfrm rot="10800000">
-            <a:off x="6108069" y="4510558"/>
-            <a:ext cx="249120" cy="479520"/>
-          </a:xfrm>
-          <a:prstGeom prst="downArrow">
-            <a:avLst>
-              <a:gd name="adj1" fmla="val 50000"/>
-              <a:gd name="adj2" fmla="val 50000"/>
-            </a:avLst>
-          </a:prstGeom>
-          <a:solidFill>
-            <a:schemeClr val="tx1"/>
-          </a:solidFill>
-          <a:ln>
-            <a:solidFill>
-              <a:srgbClr val="000000"/>
-            </a:solidFill>
-            <a:round/>
-          </a:ln>
-        </p:spPr>
-        <p:style>
-          <a:lnRef idx="2">
-            <a:schemeClr val="accent1">
-              <a:shade val="15000"/>
-            </a:schemeClr>
-          </a:lnRef>
-          <a:fillRef idx="1">
-            <a:schemeClr val="accent1"/>
-          </a:fillRef>
-          <a:effectRef idx="0">
-            <a:schemeClr val="accent1"/>
-          </a:effectRef>
-          <a:fontRef idx="minor"/>
-        </p:style>
-        <p:txBody>
-          <a:bodyPr lIns="90000" tIns="45000" rIns="90000" bIns="45000" anchor="ctr">
-            <a:noAutofit/>
-          </a:bodyPr>
-          <a:lstStyle/>
-          <a:p>
-            <a:pPr algn="ctr">
-              <a:lnSpc>
-                <a:spcPct val="100000"/>
-              </a:lnSpc>
-            </a:pPr>
-            <a:endParaRPr lang="en-US" sz="1400" b="0" strike="noStrike" spc="-1">
-              <a:solidFill>
-                <a:schemeClr val="lt1"/>
-              </a:solidFill>
-              <a:latin typeface="Arial"/>
-              <a:ea typeface="Arial"/>
-            </a:endParaRPr>
-          </a:p>
-        </p:txBody>
-      </p:sp>
-      <p:sp>
-        <p:nvSpPr>
-          <p:cNvPr id="82" name="箭號: 向下 21"/>
-          <p:cNvSpPr/>
-          <p:nvPr/>
-        </p:nvSpPr>
-        <p:spPr>
-          <a:xfrm>
-            <a:off x="7679407" y="3643266"/>
-            <a:ext cx="249120" cy="479520"/>
-          </a:xfrm>
-          <a:prstGeom prst="downArrow">
-            <a:avLst>
-              <a:gd name="adj1" fmla="val 50000"/>
-              <a:gd name="adj2" fmla="val 50000"/>
-            </a:avLst>
-          </a:prstGeom>
-          <a:solidFill>
-            <a:schemeClr val="tx1"/>
-          </a:solidFill>
-          <a:ln>
-            <a:solidFill>
-              <a:srgbClr val="000000"/>
-            </a:solidFill>
-            <a:round/>
-          </a:ln>
-        </p:spPr>
-        <p:style>
-          <a:lnRef idx="2">
-            <a:schemeClr val="accent1">
-              <a:shade val="15000"/>
-            </a:schemeClr>
-          </a:lnRef>
-          <a:fillRef idx="1">
-            <a:schemeClr val="accent1"/>
-          </a:fillRef>
-          <a:effectRef idx="0">
-            <a:schemeClr val="accent1"/>
-          </a:effectRef>
-          <a:fontRef idx="minor"/>
-        </p:style>
-        <p:txBody>
-          <a:bodyPr lIns="90000" tIns="45000" rIns="90000" bIns="45000" anchor="ctr">
-            <a:noAutofit/>
-          </a:bodyPr>
-          <a:lstStyle/>
-          <a:p>
-            <a:pPr algn="ctr">
-              <a:lnSpc>
-                <a:spcPct val="100000"/>
-              </a:lnSpc>
-            </a:pPr>
-            <a:endParaRPr lang="en-US" sz="1400" b="0" strike="noStrike" spc="-1" dirty="0">
-              <a:solidFill>
-                <a:schemeClr val="lt1"/>
-              </a:solidFill>
-              <a:latin typeface="Arial"/>
-              <a:ea typeface="Arial"/>
-            </a:endParaRPr>
-          </a:p>
-        </p:txBody>
-      </p:sp>
-      <p:sp>
-        <p:nvSpPr>
           <p:cNvPr id="83" name="文字方塊 22"/>
           <p:cNvSpPr/>
           <p:nvPr/>
         </p:nvSpPr>
         <p:spPr>
           <a:xfrm>
-            <a:off x="5659332" y="1540686"/>
+            <a:off x="7589977" y="1502815"/>
             <a:ext cx="1373040" cy="943560"/>
           </a:xfrm>
           <a:prstGeom prst="rect">
@@ -21228,68 +21438,6 @@
       </p:sp>
       <p:sp>
         <p:nvSpPr>
-          <p:cNvPr id="85" name="箭號: 向下 24"/>
-          <p:cNvSpPr/>
-          <p:nvPr/>
-        </p:nvSpPr>
-        <p:spPr>
-          <a:xfrm rot="10800000">
-            <a:off x="1409044" y="4485563"/>
-            <a:ext cx="249120" cy="479520"/>
-          </a:xfrm>
-          <a:prstGeom prst="downArrow">
-            <a:avLst>
-              <a:gd name="adj1" fmla="val 50000"/>
-              <a:gd name="adj2" fmla="val 50000"/>
-            </a:avLst>
-          </a:prstGeom>
-          <a:solidFill>
-            <a:schemeClr val="tx1"/>
-          </a:solidFill>
-          <a:ln>
-            <a:solidFill>
-              <a:srgbClr val="000000"/>
-            </a:solidFill>
-            <a:round/>
-          </a:ln>
-        </p:spPr>
-        <p:style>
-          <a:lnRef idx="2">
-            <a:schemeClr val="accent1">
-              <a:shade val="15000"/>
-            </a:schemeClr>
-          </a:lnRef>
-          <a:fillRef idx="1">
-            <a:schemeClr val="accent1"/>
-          </a:fillRef>
-          <a:effectRef idx="0">
-            <a:schemeClr val="accent1"/>
-          </a:effectRef>
-          <a:fontRef idx="minor"/>
-        </p:style>
-        <p:txBody>
-          <a:bodyPr lIns="90000" tIns="45000" rIns="90000" bIns="45000" anchor="ctr">
-            <a:noAutofit/>
-          </a:bodyPr>
-          <a:lstStyle/>
-          <a:p>
-            <a:pPr algn="ctr">
-              <a:lnSpc>
-                <a:spcPct val="100000"/>
-              </a:lnSpc>
-            </a:pPr>
-            <a:endParaRPr lang="en-US" sz="1400" b="0" strike="noStrike" spc="-1">
-              <a:solidFill>
-                <a:schemeClr val="lt1"/>
-              </a:solidFill>
-              <a:latin typeface="Arial"/>
-              <a:ea typeface="Arial"/>
-            </a:endParaRPr>
-          </a:p>
-        </p:txBody>
-      </p:sp>
-      <p:sp>
-        <p:nvSpPr>
           <p:cNvPr id="86" name="文字方塊 27"/>
           <p:cNvSpPr/>
           <p:nvPr/>
@@ -21349,50 +21497,6 @@
           </a:p>
         </p:txBody>
       </p:sp>
-      <p:cxnSp>
-        <p:nvCxnSpPr>
-          <p:cNvPr id="87" name="直線單箭頭接點 32"/>
-          <p:cNvCxnSpPr/>
-          <p:nvPr/>
-        </p:nvCxnSpPr>
-        <p:spPr>
-          <a:xfrm flipV="1">
-            <a:off x="885604" y="3088161"/>
-            <a:ext cx="648720" cy="8280"/>
-          </a:xfrm>
-          <a:prstGeom prst="straightConnector1">
-            <a:avLst/>
-          </a:prstGeom>
-          <a:ln w="0">
-            <a:solidFill>
-              <a:srgbClr val="000000"/>
-            </a:solidFill>
-            <a:tailEnd type="triangle" w="med" len="med"/>
-          </a:ln>
-        </p:spPr>
-      </p:cxnSp>
-      <p:cxnSp>
-        <p:nvCxnSpPr>
-          <p:cNvPr id="88" name="直線單箭頭接點 33"/>
-          <p:cNvCxnSpPr/>
-          <p:nvPr/>
-        </p:nvCxnSpPr>
-        <p:spPr>
-          <a:xfrm flipH="1">
-            <a:off x="885604" y="3303801"/>
-            <a:ext cx="648720" cy="720"/>
-          </a:xfrm>
-          <a:prstGeom prst="straightConnector1">
-            <a:avLst/>
-          </a:prstGeom>
-          <a:ln w="0">
-            <a:solidFill>
-              <a:srgbClr val="000000"/>
-            </a:solidFill>
-            <a:tailEnd type="triangle" w="med" len="med"/>
-          </a:ln>
-        </p:spPr>
-      </p:cxnSp>
       <p:sp>
         <p:nvSpPr>
           <p:cNvPr id="89" name="矩形: 圓角 40"/>
@@ -21670,7 +21774,7 @@
         </p:nvSpPr>
         <p:spPr>
           <a:xfrm>
-            <a:off x="6667370" y="1540338"/>
+            <a:off x="8598015" y="1502467"/>
             <a:ext cx="2331002" cy="1168097"/>
           </a:xfrm>
           <a:prstGeom prst="rect">
@@ -21818,7 +21922,7 @@
         </p:nvCxnSpPr>
         <p:spPr>
           <a:xfrm flipV="1">
-            <a:off x="9477353" y="2492991"/>
+            <a:off x="11407998" y="2455120"/>
             <a:ext cx="0" cy="231800"/>
           </a:xfrm>
           <a:prstGeom prst="straightConnector1">
@@ -21846,7 +21950,7 @@
         </p:nvSpPr>
         <p:spPr>
           <a:xfrm>
-            <a:off x="8790833" y="1540338"/>
+            <a:off x="10721478" y="1502467"/>
             <a:ext cx="1373040" cy="952653"/>
           </a:xfrm>
           <a:prstGeom prst="rect">
@@ -22163,7 +22267,178 @@
         </p:nvSpPr>
         <p:spPr>
           <a:xfrm>
-            <a:off x="2522163" y="5096263"/>
+            <a:off x="5626749" y="2589235"/>
+            <a:ext cx="1208160" cy="1007963"/>
+          </a:xfrm>
+          <a:prstGeom prst="roundRect">
+            <a:avLst>
+              <a:gd name="adj" fmla="val 16667"/>
+            </a:avLst>
+          </a:prstGeom>
+          <a:solidFill>
+            <a:schemeClr val="bg2">
+              <a:lumMod val="40000"/>
+              <a:lumOff val="60000"/>
+            </a:schemeClr>
+          </a:solidFill>
+          <a:ln>
+            <a:solidFill>
+              <a:srgbClr val="516263"/>
+            </a:solidFill>
+            <a:round/>
+          </a:ln>
+        </p:spPr>
+        <p:style>
+          <a:lnRef idx="2">
+            <a:schemeClr val="accent1">
+              <a:shade val="15000"/>
+            </a:schemeClr>
+          </a:lnRef>
+          <a:fillRef idx="1">
+            <a:schemeClr val="accent1"/>
+          </a:fillRef>
+          <a:effectRef idx="0">
+            <a:schemeClr val="accent1"/>
+          </a:effectRef>
+          <a:fontRef idx="minor"/>
+        </p:style>
+        <p:txBody>
+          <a:bodyPr lIns="90000" tIns="45000" rIns="90000" bIns="45000" anchor="ctr">
+            <a:noAutofit/>
+          </a:bodyPr>
+          <a:lstStyle/>
+          <a:p>
+            <a:pPr algn="ctr">
+              <a:lnSpc>
+                <a:spcPct val="100000"/>
+              </a:lnSpc>
+            </a:pPr>
+            <a:r>
+              <a:rPr lang="en-US" sz="1400" b="0" strike="noStrike" spc="-1" dirty="0">
+                <a:solidFill>
+                  <a:schemeClr val="dk1"/>
+                </a:solidFill>
+                <a:latin typeface="Arial"/>
+                <a:ea typeface="Arial"/>
+              </a:rPr>
+              <a:t>AXI</a:t>
+            </a:r>
+          </a:p>
+          <a:p>
+            <a:pPr algn="ctr">
+              <a:lnSpc>
+                <a:spcPct val="100000"/>
+              </a:lnSpc>
+            </a:pPr>
+            <a:r>
+              <a:rPr lang="en-US" sz="1400" b="0" strike="noStrike" spc="-1" dirty="0">
+                <a:solidFill>
+                  <a:schemeClr val="dk1"/>
+                </a:solidFill>
+                <a:latin typeface="Arial"/>
+              </a:rPr>
+              <a:t>EMC</a:t>
+            </a:r>
+            <a:endParaRPr lang="en-US" sz="1400" b="0" strike="noStrike" spc="-1" dirty="0">
+              <a:solidFill>
+                <a:srgbClr val="000000"/>
+              </a:solidFill>
+              <a:latin typeface="Arial"/>
+            </a:endParaRPr>
+          </a:p>
+        </p:txBody>
+      </p:sp>
+      <p:sp>
+        <p:nvSpPr>
+          <p:cNvPr id="22" name="矩形: 圓角 7">
+            <a:extLst>
+              <a:ext uri="{FF2B5EF4-FFF2-40B4-BE49-F238E27FC236}">
+                <a16:creationId xmlns:a16="http://schemas.microsoft.com/office/drawing/2014/main" id="{3CD0F37B-9DA2-D176-A81E-E939E0E21476}"/>
+              </a:ext>
+            </a:extLst>
+          </p:cNvPr>
+          <p:cNvSpPr/>
+          <p:nvPr/>
+        </p:nvSpPr>
+        <p:spPr>
+          <a:xfrm>
+            <a:off x="4451242" y="5218709"/>
+            <a:ext cx="1209600" cy="1045080"/>
+          </a:xfrm>
+          <a:prstGeom prst="roundRect">
+            <a:avLst>
+              <a:gd name="adj" fmla="val 16667"/>
+            </a:avLst>
+          </a:prstGeom>
+          <a:solidFill>
+            <a:srgbClr val="BBE0E3"/>
+          </a:solidFill>
+          <a:ln>
+            <a:solidFill>
+              <a:srgbClr val="516263"/>
+            </a:solidFill>
+            <a:round/>
+          </a:ln>
+        </p:spPr>
+        <p:style>
+          <a:lnRef idx="2">
+            <a:schemeClr val="accent1">
+              <a:shade val="15000"/>
+            </a:schemeClr>
+          </a:lnRef>
+          <a:fillRef idx="1">
+            <a:schemeClr val="accent1"/>
+          </a:fillRef>
+          <a:effectRef idx="0">
+            <a:schemeClr val="accent1"/>
+          </a:effectRef>
+          <a:fontRef idx="minor"/>
+        </p:style>
+        <p:txBody>
+          <a:bodyPr lIns="90000" tIns="45000" rIns="90000" bIns="45000" anchor="ctr">
+            <a:noAutofit/>
+          </a:bodyPr>
+          <a:lstStyle/>
+          <a:p>
+            <a:pPr algn="ctr">
+              <a:lnSpc>
+                <a:spcPct val="100000"/>
+              </a:lnSpc>
+            </a:pPr>
+            <a:r>
+              <a:rPr lang="en-US" sz="1400" b="0" strike="noStrike" spc="-1">
+                <a:solidFill>
+                  <a:schemeClr val="dk1"/>
+                </a:solidFill>
+                <a:latin typeface="Arial"/>
+                <a:ea typeface="Arial"/>
+              </a:rPr>
+              <a:t>AXI Timer</a:t>
+            </a:r>
+            <a:endParaRPr lang="en-US" sz="1400" b="0" strike="noStrike" spc="-1">
+              <a:solidFill>
+                <a:srgbClr val="000000"/>
+              </a:solidFill>
+              <a:latin typeface="Arial"/>
+            </a:endParaRPr>
+          </a:p>
+        </p:txBody>
+      </p:sp>
+      <p:sp>
+        <p:nvSpPr>
+          <p:cNvPr id="23" name="矩形: 圓角 23">
+            <a:extLst>
+              <a:ext uri="{FF2B5EF4-FFF2-40B4-BE49-F238E27FC236}">
+                <a16:creationId xmlns:a16="http://schemas.microsoft.com/office/drawing/2014/main" id="{E96307AD-B419-E9A2-D850-7104ADA12FBB}"/>
+              </a:ext>
+            </a:extLst>
+          </p:cNvPr>
+          <p:cNvSpPr/>
+          <p:nvPr/>
+        </p:nvSpPr>
+        <p:spPr>
+          <a:xfrm>
+            <a:off x="5626749" y="1241755"/>
             <a:ext cx="1209600" cy="1045080"/>
           </a:xfrm>
           <a:prstGeom prst="roundRect">
@@ -22212,12 +22487,11 @@
             <a:r>
               <a:rPr lang="en-US" sz="1400" b="0" strike="noStrike" spc="-1" dirty="0">
                 <a:solidFill>
-                  <a:schemeClr val="dk1"/>
+                  <a:srgbClr val="000000"/>
                 </a:solidFill>
                 <a:latin typeface="Arial"/>
-                <a:ea typeface="Arial"/>
-              </a:rPr>
-              <a:t>AXI</a:t>
+              </a:rPr>
+              <a:t>SRAM</a:t>
             </a:r>
           </a:p>
           <a:p>
@@ -22227,13 +22501,13 @@
               </a:lnSpc>
             </a:pPr>
             <a:r>
-              <a:rPr lang="en-US" sz="1400" b="0" strike="noStrike" spc="-1" dirty="0">
-                <a:solidFill>
-                  <a:schemeClr val="dk1"/>
+              <a:rPr lang="en-US" sz="1400" spc="-1" dirty="0">
+                <a:solidFill>
+                  <a:srgbClr val="000000"/>
                 </a:solidFill>
                 <a:latin typeface="Arial"/>
               </a:rPr>
-              <a:t>EMC</a:t>
+              <a:t>512KB</a:t>
             </a:r>
             <a:endParaRPr lang="en-US" sz="1400" b="0" strike="noStrike" spc="-1" dirty="0">
               <a:solidFill>
@@ -22244,80 +22518,46 @@
           </a:p>
         </p:txBody>
       </p:sp>
-      <p:sp>
-        <p:nvSpPr>
-          <p:cNvPr id="21" name="箭號: 向下 24">
+      <p:cxnSp>
+        <p:nvCxnSpPr>
+          <p:cNvPr id="24" name="直線單箭頭接點 48">
             <a:extLst>
               <a:ext uri="{FF2B5EF4-FFF2-40B4-BE49-F238E27FC236}">
-                <a16:creationId xmlns:a16="http://schemas.microsoft.com/office/drawing/2014/main" id="{1571C252-84DC-AE1D-F6AC-165974568586}"/>
+                <a16:creationId xmlns:a16="http://schemas.microsoft.com/office/drawing/2014/main" id="{AAECC454-CF63-C6AD-AF6F-8D6B3422BA87}"/>
               </a:ext>
             </a:extLst>
           </p:cNvPr>
-          <p:cNvSpPr/>
+          <p:cNvCxnSpPr>
+            <a:cxnSpLocks/>
+            <a:stCxn id="23" idx="2"/>
+            <a:endCxn id="20" idx="0"/>
+          </p:cNvCxnSpPr>
           <p:nvPr/>
-        </p:nvSpPr>
+        </p:nvCxnSpPr>
         <p:spPr>
-          <a:xfrm rot="10800000">
-            <a:off x="3002403" y="4510558"/>
-            <a:ext cx="249120" cy="479520"/>
+          <a:xfrm flipH="1">
+            <a:off x="6230829" y="2286835"/>
+            <a:ext cx="720" cy="302400"/>
           </a:xfrm>
-          <a:prstGeom prst="downArrow">
-            <a:avLst>
-              <a:gd name="adj1" fmla="val 50000"/>
-              <a:gd name="adj2" fmla="val 50000"/>
-            </a:avLst>
+          <a:prstGeom prst="straightConnector1">
+            <a:avLst/>
           </a:prstGeom>
-          <a:solidFill>
-            <a:schemeClr val="tx1"/>
-          </a:solidFill>
-          <a:ln>
+          <a:ln w="28575">
             <a:solidFill>
               <a:srgbClr val="000000"/>
             </a:solidFill>
             <a:round/>
+            <a:headEnd type="arrow" w="med" len="med"/>
+            <a:tailEnd type="arrow" w="med" len="med"/>
           </a:ln>
         </p:spPr>
-        <p:style>
-          <a:lnRef idx="2">
-            <a:schemeClr val="accent1">
-              <a:shade val="15000"/>
-            </a:schemeClr>
-          </a:lnRef>
-          <a:fillRef idx="1">
-            <a:schemeClr val="accent1"/>
-          </a:fillRef>
-          <a:effectRef idx="0">
-            <a:schemeClr val="accent1"/>
-          </a:effectRef>
-          <a:fontRef idx="minor"/>
-        </p:style>
-        <p:txBody>
-          <a:bodyPr lIns="90000" tIns="45000" rIns="90000" bIns="45000" anchor="ctr">
-            <a:noAutofit/>
-          </a:bodyPr>
-          <a:lstStyle/>
-          <a:p>
-            <a:pPr algn="ctr">
-              <a:lnSpc>
-                <a:spcPct val="100000"/>
-              </a:lnSpc>
-            </a:pPr>
-            <a:endParaRPr lang="en-US" sz="1400" b="0" strike="noStrike" spc="-1">
-              <a:solidFill>
-                <a:schemeClr val="lt1"/>
-              </a:solidFill>
-              <a:latin typeface="Arial"/>
-              <a:ea typeface="Arial"/>
-            </a:endParaRPr>
-          </a:p>
-        </p:txBody>
-      </p:sp>
+      </p:cxnSp>
       <p:sp>
         <p:nvSpPr>
-          <p:cNvPr id="22" name="矩形: 圓角 7">
+          <p:cNvPr id="36" name="矩形: 圓角 7">
             <a:extLst>
               <a:ext uri="{FF2B5EF4-FFF2-40B4-BE49-F238E27FC236}">
-                <a16:creationId xmlns:a16="http://schemas.microsoft.com/office/drawing/2014/main" id="{3CD0F37B-9DA2-D176-A81E-E939E0E21476}"/>
+                <a16:creationId xmlns:a16="http://schemas.microsoft.com/office/drawing/2014/main" id="{AD1C6C7A-1D74-BC78-85FF-55DDBC96EF90}"/>
               </a:ext>
             </a:extLst>
           </p:cNvPr>
@@ -22326,7 +22566,7 @@
         </p:nvSpPr>
         <p:spPr>
           <a:xfrm>
-            <a:off x="5779149" y="5198998"/>
+            <a:off x="4603642" y="5371109"/>
             <a:ext cx="1209600" cy="1045080"/>
           </a:xfrm>
           <a:prstGeom prst="roundRect">
@@ -22370,16 +22610,33 @@
               </a:lnSpc>
             </a:pPr>
             <a:r>
-              <a:rPr lang="en-US" sz="1400" b="0" strike="noStrike" spc="-1">
+              <a:rPr lang="en-US" sz="1400" b="0" strike="noStrike" spc="-1" dirty="0">
                 <a:solidFill>
                   <a:schemeClr val="dk1"/>
                 </a:solidFill>
                 <a:latin typeface="Arial"/>
                 <a:ea typeface="Arial"/>
               </a:rPr>
-              <a:t>AXI Timer</a:t>
-            </a:r>
-            <a:endParaRPr lang="en-US" sz="1400" b="0" strike="noStrike" spc="-1">
+              <a:t>AXI Timer </a:t>
+            </a:r>
+          </a:p>
+          <a:p>
+            <a:pPr algn="ctr">
+              <a:lnSpc>
+                <a:spcPct val="100000"/>
+              </a:lnSpc>
+            </a:pPr>
+            <a:r>
+              <a:rPr lang="en-US" sz="1400" spc="-1" dirty="0">
+                <a:solidFill>
+                  <a:schemeClr val="dk1"/>
+                </a:solidFill>
+                <a:latin typeface="Arial"/>
+                <a:ea typeface="Arial"/>
+              </a:rPr>
+              <a:t>* 6</a:t>
+            </a:r>
+            <a:endParaRPr lang="en-US" sz="1400" b="0" strike="noStrike" spc="-1" dirty="0">
               <a:solidFill>
                 <a:srgbClr val="000000"/>
               </a:solidFill>
@@ -22388,12 +22645,42 @@
           </a:p>
         </p:txBody>
       </p:sp>
+      <p:cxnSp>
+        <p:nvCxnSpPr>
+          <p:cNvPr id="41" name="直線單箭頭接點 14">
+            <a:extLst>
+              <a:ext uri="{FF2B5EF4-FFF2-40B4-BE49-F238E27FC236}">
+                <a16:creationId xmlns:a16="http://schemas.microsoft.com/office/drawing/2014/main" id="{97F12786-E992-176A-A299-FCE60215DAF4}"/>
+              </a:ext>
+            </a:extLst>
+          </p:cNvPr>
+          <p:cNvCxnSpPr>
+            <a:cxnSpLocks/>
+          </p:cNvCxnSpPr>
+          <p:nvPr/>
+        </p:nvCxnSpPr>
+        <p:spPr>
+          <a:xfrm>
+            <a:off x="5162849" y="6416189"/>
+            <a:ext cx="0" cy="170277"/>
+          </a:xfrm>
+          <a:prstGeom prst="straightConnector1">
+            <a:avLst/>
+          </a:prstGeom>
+          <a:ln w="0">
+            <a:solidFill>
+              <a:srgbClr val="000000"/>
+            </a:solidFill>
+            <a:tailEnd type="triangle" w="med" len="med"/>
+          </a:ln>
+        </p:spPr>
+      </p:cxnSp>
       <p:sp>
         <p:nvSpPr>
-          <p:cNvPr id="23" name="矩形: 圓角 23">
+          <p:cNvPr id="63" name="文字方塊 22">
             <a:extLst>
               <a:ext uri="{FF2B5EF4-FFF2-40B4-BE49-F238E27FC236}">
-                <a16:creationId xmlns:a16="http://schemas.microsoft.com/office/drawing/2014/main" id="{E96307AD-B419-E9A2-D850-7104ADA12FBB}"/>
+                <a16:creationId xmlns:a16="http://schemas.microsoft.com/office/drawing/2014/main" id="{9F64AD77-728F-8091-ED23-3F0BE579DCF1}"/>
               </a:ext>
             </a:extLst>
           </p:cNvPr>
@@ -22402,7 +22689,1539 @@
         </p:nvSpPr>
         <p:spPr>
           <a:xfrm>
-            <a:off x="4039163" y="5096263"/>
+            <a:off x="3182202" y="6571388"/>
+            <a:ext cx="3968312" cy="306323"/>
+          </a:xfrm>
+          <a:prstGeom prst="rect">
+            <a:avLst/>
+          </a:prstGeom>
+          <a:noFill/>
+          <a:ln w="0">
+            <a:noFill/>
+          </a:ln>
+        </p:spPr>
+        <p:style>
+          <a:lnRef idx="0">
+            <a:scrgbClr r="0" g="0" b="0"/>
+          </a:lnRef>
+          <a:fillRef idx="0">
+            <a:scrgbClr r="0" g="0" b="0"/>
+          </a:fillRef>
+          <a:effectRef idx="0">
+            <a:scrgbClr r="0" g="0" b="0"/>
+          </a:effectRef>
+          <a:fontRef idx="minor"/>
+        </p:style>
+        <p:txBody>
+          <a:bodyPr wrap="square" lIns="90000" tIns="45000" rIns="90000" bIns="45000" anchor="t">
+            <a:spAutoFit/>
+          </a:bodyPr>
+          <a:lstStyle/>
+          <a:p>
+            <a:pPr algn="ctr"/>
+            <a:r>
+              <a:rPr lang="en-US" sz="1400" b="0" strike="noStrike" spc="-1" dirty="0">
+                <a:solidFill>
+                  <a:srgbClr val="000000"/>
+                </a:solidFill>
+                <a:latin typeface="Arial"/>
+              </a:rPr>
+              <a:t>PWM</a:t>
+            </a:r>
+            <a:r>
+              <a:rPr lang="en-US" altLang="zh-TW" sz="1400" b="0" strike="noStrike" spc="-1" dirty="0">
+                <a:solidFill>
+                  <a:srgbClr val="000000"/>
+                </a:solidFill>
+                <a:latin typeface="Arial"/>
+              </a:rPr>
+              <a:t>_</a:t>
+            </a:r>
+            <a:r>
+              <a:rPr lang="en-US" sz="1400" b="0" strike="noStrike" spc="-1" dirty="0">
+                <a:solidFill>
+                  <a:srgbClr val="000000"/>
+                </a:solidFill>
+                <a:latin typeface="Arial"/>
+              </a:rPr>
+              <a:t>0 ~ PWM</a:t>
+            </a:r>
+            <a:r>
+              <a:rPr lang="en-US" altLang="zh-TW" sz="1400" b="0" strike="noStrike" spc="-1" dirty="0">
+                <a:solidFill>
+                  <a:srgbClr val="000000"/>
+                </a:solidFill>
+                <a:latin typeface="Arial"/>
+              </a:rPr>
+              <a:t>_2</a:t>
+            </a:r>
+            <a:endParaRPr lang="en-US" sz="1400" b="0" strike="noStrike" spc="-1" dirty="0">
+              <a:solidFill>
+                <a:srgbClr val="000000"/>
+              </a:solidFill>
+              <a:latin typeface="Arial"/>
+            </a:endParaRPr>
+          </a:p>
+        </p:txBody>
+      </p:sp>
+      <p:sp>
+        <p:nvSpPr>
+          <p:cNvPr id="65" name="矩形: 圓角 23">
+            <a:extLst>
+              <a:ext uri="{FF2B5EF4-FFF2-40B4-BE49-F238E27FC236}">
+                <a16:creationId xmlns:a16="http://schemas.microsoft.com/office/drawing/2014/main" id="{84D86F3F-5693-67BE-3F09-3BFE184E8E2F}"/>
+              </a:ext>
+            </a:extLst>
+          </p:cNvPr>
+          <p:cNvSpPr/>
+          <p:nvPr/>
+        </p:nvSpPr>
+        <p:spPr>
+          <a:xfrm>
+            <a:off x="6038828" y="5117271"/>
+            <a:ext cx="1209600" cy="1045080"/>
+          </a:xfrm>
+          <a:prstGeom prst="roundRect">
+            <a:avLst>
+              <a:gd name="adj" fmla="val 16667"/>
+            </a:avLst>
+          </a:prstGeom>
+          <a:solidFill>
+            <a:srgbClr val="00B050"/>
+          </a:solidFill>
+          <a:ln>
+            <a:solidFill>
+              <a:srgbClr val="516263"/>
+            </a:solidFill>
+            <a:round/>
+          </a:ln>
+        </p:spPr>
+        <p:style>
+          <a:lnRef idx="2">
+            <a:schemeClr val="accent1">
+              <a:shade val="15000"/>
+            </a:schemeClr>
+          </a:lnRef>
+          <a:fillRef idx="1">
+            <a:schemeClr val="accent1"/>
+          </a:fillRef>
+          <a:effectRef idx="0">
+            <a:schemeClr val="accent1"/>
+          </a:effectRef>
+          <a:fontRef idx="minor"/>
+        </p:style>
+        <p:txBody>
+          <a:bodyPr lIns="90000" tIns="45000" rIns="90000" bIns="45000" anchor="ctr">
+            <a:noAutofit/>
+          </a:bodyPr>
+          <a:lstStyle/>
+          <a:p>
+            <a:pPr algn="ctr">
+              <a:lnSpc>
+                <a:spcPct val="100000"/>
+              </a:lnSpc>
+            </a:pPr>
+            <a:r>
+              <a:rPr lang="en-US" sz="1400" b="0" strike="noStrike" spc="-1" dirty="0">
+                <a:solidFill>
+                  <a:schemeClr val="dk1"/>
+                </a:solidFill>
+                <a:latin typeface="Arial"/>
+                <a:ea typeface="Arial"/>
+              </a:rPr>
+              <a:t>AXI</a:t>
+            </a:r>
+          </a:p>
+          <a:p>
+            <a:pPr algn="ctr">
+              <a:lnSpc>
+                <a:spcPct val="100000"/>
+              </a:lnSpc>
+            </a:pPr>
+            <a:r>
+              <a:rPr lang="en-US" sz="1400" spc="-1" dirty="0">
+                <a:solidFill>
+                  <a:schemeClr val="dk1"/>
+                </a:solidFill>
+                <a:latin typeface="Arial"/>
+              </a:rPr>
+              <a:t>Quad-SPI</a:t>
+            </a:r>
+            <a:endParaRPr lang="en-US" sz="1400" b="0" strike="noStrike" spc="-1" dirty="0">
+              <a:solidFill>
+                <a:srgbClr val="000000"/>
+              </a:solidFill>
+              <a:latin typeface="Arial"/>
+            </a:endParaRPr>
+          </a:p>
+        </p:txBody>
+      </p:sp>
+      <p:sp>
+        <p:nvSpPr>
+          <p:cNvPr id="66" name="矩形: 圓角 23">
+            <a:extLst>
+              <a:ext uri="{FF2B5EF4-FFF2-40B4-BE49-F238E27FC236}">
+                <a16:creationId xmlns:a16="http://schemas.microsoft.com/office/drawing/2014/main" id="{631FA26B-FA41-A9C7-3023-64348F6D51EF}"/>
+              </a:ext>
+            </a:extLst>
+          </p:cNvPr>
+          <p:cNvSpPr/>
+          <p:nvPr/>
+        </p:nvSpPr>
+        <p:spPr>
+          <a:xfrm>
+            <a:off x="7528500" y="5117271"/>
+            <a:ext cx="1209600" cy="1045080"/>
+          </a:xfrm>
+          <a:prstGeom prst="roundRect">
+            <a:avLst>
+              <a:gd name="adj" fmla="val 16667"/>
+            </a:avLst>
+          </a:prstGeom>
+          <a:solidFill>
+            <a:srgbClr val="00B050"/>
+          </a:solidFill>
+          <a:ln>
+            <a:solidFill>
+              <a:srgbClr val="516263"/>
+            </a:solidFill>
+            <a:round/>
+          </a:ln>
+        </p:spPr>
+        <p:style>
+          <a:lnRef idx="2">
+            <a:schemeClr val="accent1">
+              <a:shade val="15000"/>
+            </a:schemeClr>
+          </a:lnRef>
+          <a:fillRef idx="1">
+            <a:schemeClr val="accent1"/>
+          </a:fillRef>
+          <a:effectRef idx="0">
+            <a:schemeClr val="accent1"/>
+          </a:effectRef>
+          <a:fontRef idx="minor"/>
+        </p:style>
+        <p:txBody>
+          <a:bodyPr lIns="90000" tIns="45000" rIns="90000" bIns="45000" anchor="ctr">
+            <a:noAutofit/>
+          </a:bodyPr>
+          <a:lstStyle/>
+          <a:p>
+            <a:pPr algn="ctr">
+              <a:lnSpc>
+                <a:spcPct val="100000"/>
+              </a:lnSpc>
+            </a:pPr>
+            <a:r>
+              <a:rPr lang="en-US" sz="1400" spc="-1" dirty="0">
+                <a:solidFill>
+                  <a:srgbClr val="000000"/>
+                </a:solidFill>
+                <a:latin typeface="Arial"/>
+              </a:rPr>
+              <a:t>Flash</a:t>
+            </a:r>
+          </a:p>
+          <a:p>
+            <a:pPr algn="ctr">
+              <a:lnSpc>
+                <a:spcPct val="100000"/>
+              </a:lnSpc>
+            </a:pPr>
+            <a:r>
+              <a:rPr lang="en-US" sz="1400" b="0" strike="noStrike" spc="-1" dirty="0">
+                <a:solidFill>
+                  <a:srgbClr val="000000"/>
+                </a:solidFill>
+                <a:latin typeface="Arial"/>
+              </a:rPr>
+              <a:t>4MB</a:t>
+            </a:r>
+          </a:p>
+        </p:txBody>
+      </p:sp>
+      <p:cxnSp>
+        <p:nvCxnSpPr>
+          <p:cNvPr id="67" name="直線單箭頭接點 48">
+            <a:extLst>
+              <a:ext uri="{FF2B5EF4-FFF2-40B4-BE49-F238E27FC236}">
+                <a16:creationId xmlns:a16="http://schemas.microsoft.com/office/drawing/2014/main" id="{70D58A8C-FC41-A1E5-288E-2675A1821F65}"/>
+              </a:ext>
+            </a:extLst>
+          </p:cNvPr>
+          <p:cNvCxnSpPr>
+            <a:cxnSpLocks/>
+            <a:stCxn id="66" idx="1"/>
+            <a:endCxn id="65" idx="3"/>
+          </p:cNvCxnSpPr>
+          <p:nvPr/>
+        </p:nvCxnSpPr>
+        <p:spPr>
+          <a:xfrm flipH="1">
+            <a:off x="7248428" y="5639811"/>
+            <a:ext cx="280072" cy="0"/>
+          </a:xfrm>
+          <a:prstGeom prst="straightConnector1">
+            <a:avLst/>
+          </a:prstGeom>
+          <a:ln w="28575">
+            <a:solidFill>
+              <a:srgbClr val="000000"/>
+            </a:solidFill>
+            <a:round/>
+            <a:headEnd type="arrow" w="med" len="med"/>
+            <a:tailEnd type="arrow" w="med" len="med"/>
+          </a:ln>
+        </p:spPr>
+      </p:cxnSp>
+      <p:sp>
+        <p:nvSpPr>
+          <p:cNvPr id="97" name="矩形: 圓角 23">
+            <a:extLst>
+              <a:ext uri="{FF2B5EF4-FFF2-40B4-BE49-F238E27FC236}">
+                <a16:creationId xmlns:a16="http://schemas.microsoft.com/office/drawing/2014/main" id="{AEC72BD8-9FAC-F5CF-41EC-7310309AE2B4}"/>
+              </a:ext>
+            </a:extLst>
+          </p:cNvPr>
+          <p:cNvSpPr/>
+          <p:nvPr/>
+        </p:nvSpPr>
+        <p:spPr>
+          <a:xfrm>
+            <a:off x="9133467" y="5115974"/>
+            <a:ext cx="1209600" cy="1045080"/>
+          </a:xfrm>
+          <a:prstGeom prst="roundRect">
+            <a:avLst>
+              <a:gd name="adj" fmla="val 16667"/>
+            </a:avLst>
+          </a:prstGeom>
+          <a:solidFill>
+            <a:srgbClr val="FAFA9E"/>
+          </a:solidFill>
+          <a:ln>
+            <a:solidFill>
+              <a:srgbClr val="516263"/>
+            </a:solidFill>
+            <a:round/>
+          </a:ln>
+        </p:spPr>
+        <p:style>
+          <a:lnRef idx="2">
+            <a:schemeClr val="accent1">
+              <a:shade val="15000"/>
+            </a:schemeClr>
+          </a:lnRef>
+          <a:fillRef idx="1">
+            <a:schemeClr val="accent1"/>
+          </a:fillRef>
+          <a:effectRef idx="0">
+            <a:schemeClr val="accent1"/>
+          </a:effectRef>
+          <a:fontRef idx="minor"/>
+        </p:style>
+        <p:txBody>
+          <a:bodyPr lIns="90000" tIns="45000" rIns="90000" bIns="45000" anchor="ctr">
+            <a:noAutofit/>
+          </a:bodyPr>
+          <a:lstStyle/>
+          <a:p>
+            <a:pPr algn="ctr">
+              <a:lnSpc>
+                <a:spcPct val="100000"/>
+              </a:lnSpc>
+            </a:pPr>
+            <a:r>
+              <a:rPr lang="en-US" sz="1400" spc="-1" dirty="0">
+                <a:solidFill>
+                  <a:schemeClr val="dk1"/>
+                </a:solidFill>
+                <a:latin typeface="Arial"/>
+                <a:ea typeface="Arial"/>
+              </a:rPr>
+              <a:t>XADC</a:t>
+            </a:r>
+            <a:endParaRPr lang="en-US" sz="1400" b="0" strike="noStrike" spc="-1" dirty="0">
+              <a:solidFill>
+                <a:schemeClr val="dk1"/>
+              </a:solidFill>
+              <a:latin typeface="Arial"/>
+              <a:ea typeface="Arial"/>
+            </a:endParaRPr>
+          </a:p>
+        </p:txBody>
+      </p:sp>
+      <p:cxnSp>
+        <p:nvCxnSpPr>
+          <p:cNvPr id="99" name="直線單箭頭接點 14">
+            <a:extLst>
+              <a:ext uri="{FF2B5EF4-FFF2-40B4-BE49-F238E27FC236}">
+                <a16:creationId xmlns:a16="http://schemas.microsoft.com/office/drawing/2014/main" id="{3208B2BB-4CEF-C9E8-9A01-2C47D408A4A3}"/>
+              </a:ext>
+            </a:extLst>
+          </p:cNvPr>
+          <p:cNvCxnSpPr>
+            <a:cxnSpLocks/>
+            <a:stCxn id="97" idx="2"/>
+            <a:endCxn id="100" idx="0"/>
+          </p:cNvCxnSpPr>
+          <p:nvPr/>
+        </p:nvCxnSpPr>
+        <p:spPr>
+          <a:xfrm>
+            <a:off x="9738267" y="6161054"/>
+            <a:ext cx="0" cy="380843"/>
+          </a:xfrm>
+          <a:prstGeom prst="straightConnector1">
+            <a:avLst/>
+          </a:prstGeom>
+          <a:ln w="0">
+            <a:solidFill>
+              <a:srgbClr val="000000"/>
+            </a:solidFill>
+            <a:tailEnd type="triangle" w="med" len="med"/>
+          </a:ln>
+        </p:spPr>
+      </p:cxnSp>
+      <p:sp>
+        <p:nvSpPr>
+          <p:cNvPr id="100" name="文字方塊 22">
+            <a:extLst>
+              <a:ext uri="{FF2B5EF4-FFF2-40B4-BE49-F238E27FC236}">
+                <a16:creationId xmlns:a16="http://schemas.microsoft.com/office/drawing/2014/main" id="{E3FC18B7-03B7-E5E0-0495-E3C4E803DDB4}"/>
+              </a:ext>
+            </a:extLst>
+          </p:cNvPr>
+          <p:cNvSpPr/>
+          <p:nvPr/>
+        </p:nvSpPr>
+        <p:spPr>
+          <a:xfrm>
+            <a:off x="7754111" y="6541897"/>
+            <a:ext cx="3968312" cy="306323"/>
+          </a:xfrm>
+          <a:prstGeom prst="rect">
+            <a:avLst/>
+          </a:prstGeom>
+          <a:noFill/>
+          <a:ln w="0">
+            <a:noFill/>
+          </a:ln>
+        </p:spPr>
+        <p:style>
+          <a:lnRef idx="0">
+            <a:scrgbClr r="0" g="0" b="0"/>
+          </a:lnRef>
+          <a:fillRef idx="0">
+            <a:scrgbClr r="0" g="0" b="0"/>
+          </a:fillRef>
+          <a:effectRef idx="0">
+            <a:scrgbClr r="0" g="0" b="0"/>
+          </a:effectRef>
+          <a:fontRef idx="minor"/>
+        </p:style>
+        <p:txBody>
+          <a:bodyPr wrap="square" lIns="90000" tIns="45000" rIns="90000" bIns="45000" anchor="t">
+            <a:spAutoFit/>
+          </a:bodyPr>
+          <a:lstStyle/>
+          <a:p>
+            <a:pPr algn="ctr"/>
+            <a:r>
+              <a:rPr lang="en-US" sz="1400" b="0" strike="noStrike" spc="-1" dirty="0">
+                <a:solidFill>
+                  <a:srgbClr val="000000"/>
+                </a:solidFill>
+                <a:latin typeface="Arial"/>
+              </a:rPr>
+              <a:t>ADC_0 / ADC_1</a:t>
+            </a:r>
+          </a:p>
+        </p:txBody>
+      </p:sp>
+      <p:sp>
+        <p:nvSpPr>
+          <p:cNvPr id="6" name="Slide Number Placeholder 5">
+            <a:extLst>
+              <a:ext uri="{FF2B5EF4-FFF2-40B4-BE49-F238E27FC236}">
+                <a16:creationId xmlns:a16="http://schemas.microsoft.com/office/drawing/2014/main" id="{F170CACE-C115-81D7-ECFE-1E67B74E90A9}"/>
+              </a:ext>
+            </a:extLst>
+          </p:cNvPr>
+          <p:cNvSpPr>
+            <a:spLocks noGrp="1"/>
+          </p:cNvSpPr>
+          <p:nvPr>
+            <p:ph type="sldNum" idx="10"/>
+          </p:nvPr>
+        </p:nvSpPr>
+        <p:spPr/>
+        <p:txBody>
+          <a:bodyPr/>
+          <a:lstStyle/>
+          <a:p>
+            <a:fld id="{5E7A655E-BA10-45EB-B439-1EA08694B58E}" type="slidenum">
+              <a:rPr lang="en-TW" smtClean="0"/>
+              <a:t>8</a:t>
+            </a:fld>
+            <a:endParaRPr lang="en-TW"/>
+          </a:p>
+        </p:txBody>
+      </p:sp>
+      <p:sp>
+        <p:nvSpPr>
+          <p:cNvPr id="31" name="箭號: 左-右雙向 30">
+            <a:extLst>
+              <a:ext uri="{FF2B5EF4-FFF2-40B4-BE49-F238E27FC236}">
+                <a16:creationId xmlns:a16="http://schemas.microsoft.com/office/drawing/2014/main" id="{BA056A37-2C82-8458-EB0C-6E3969F99DB1}"/>
+              </a:ext>
+            </a:extLst>
+          </p:cNvPr>
+          <p:cNvSpPr/>
+          <p:nvPr/>
+        </p:nvSpPr>
+        <p:spPr>
+          <a:xfrm rot="5400000">
+            <a:off x="3670975" y="3763709"/>
+            <a:ext cx="495978" cy="249120"/>
+          </a:xfrm>
+          <a:prstGeom prst="leftRightArrow">
+            <a:avLst/>
+          </a:prstGeom>
+          <a:solidFill>
+            <a:schemeClr val="tx1"/>
+          </a:solidFill>
+        </p:spPr>
+        <p:style>
+          <a:lnRef idx="2">
+            <a:schemeClr val="accent1">
+              <a:shade val="15000"/>
+            </a:schemeClr>
+          </a:lnRef>
+          <a:fillRef idx="1">
+            <a:schemeClr val="accent1"/>
+          </a:fillRef>
+          <a:effectRef idx="0">
+            <a:schemeClr val="accent1"/>
+          </a:effectRef>
+          <a:fontRef idx="minor">
+            <a:schemeClr val="lt1"/>
+          </a:fontRef>
+        </p:style>
+        <p:txBody>
+          <a:bodyPr rtlCol="0" anchor="ctr"/>
+          <a:lstStyle/>
+          <a:p>
+            <a:pPr algn="ctr"/>
+            <a:endParaRPr lang="en-US"/>
+          </a:p>
+        </p:txBody>
+      </p:sp>
+      <p:cxnSp>
+        <p:nvCxnSpPr>
+          <p:cNvPr id="32" name="直線單箭頭接點 51">
+            <a:extLst>
+              <a:ext uri="{FF2B5EF4-FFF2-40B4-BE49-F238E27FC236}">
+                <a16:creationId xmlns:a16="http://schemas.microsoft.com/office/drawing/2014/main" id="{05A595BA-6F4D-1A8E-AD8D-459A8B0F84F5}"/>
+              </a:ext>
+            </a:extLst>
+          </p:cNvPr>
+          <p:cNvCxnSpPr>
+            <a:cxnSpLocks/>
+            <a:stCxn id="71" idx="3"/>
+            <a:endCxn id="70" idx="1"/>
+          </p:cNvCxnSpPr>
+          <p:nvPr/>
+        </p:nvCxnSpPr>
+        <p:spPr>
+          <a:xfrm>
+            <a:off x="2597404" y="3175281"/>
+            <a:ext cx="562320" cy="0"/>
+          </a:xfrm>
+          <a:prstGeom prst="straightConnector1">
+            <a:avLst/>
+          </a:prstGeom>
+          <a:ln w="28575">
+            <a:solidFill>
+              <a:srgbClr val="000000"/>
+            </a:solidFill>
+            <a:round/>
+            <a:headEnd type="arrow" w="med" len="med"/>
+            <a:tailEnd type="arrow" w="med" len="med"/>
+          </a:ln>
+        </p:spPr>
+      </p:cxnSp>
+      <p:cxnSp>
+        <p:nvCxnSpPr>
+          <p:cNvPr id="35" name="直線單箭頭接點 51">
+            <a:extLst>
+              <a:ext uri="{FF2B5EF4-FFF2-40B4-BE49-F238E27FC236}">
+                <a16:creationId xmlns:a16="http://schemas.microsoft.com/office/drawing/2014/main" id="{80EE79C7-9CA0-EDBC-5909-C43791CBD57F}"/>
+              </a:ext>
+            </a:extLst>
+          </p:cNvPr>
+          <p:cNvCxnSpPr>
+            <a:cxnSpLocks/>
+            <a:stCxn id="86" idx="3"/>
+            <a:endCxn id="71" idx="1"/>
+          </p:cNvCxnSpPr>
+          <p:nvPr/>
+        </p:nvCxnSpPr>
+        <p:spPr>
+          <a:xfrm>
+            <a:off x="885604" y="3175281"/>
+            <a:ext cx="648000" cy="0"/>
+          </a:xfrm>
+          <a:prstGeom prst="straightConnector1">
+            <a:avLst/>
+          </a:prstGeom>
+          <a:ln w="28575">
+            <a:solidFill>
+              <a:srgbClr val="000000"/>
+            </a:solidFill>
+            <a:round/>
+            <a:headEnd type="arrow" w="med" len="med"/>
+            <a:tailEnd type="arrow" w="med" len="med"/>
+          </a:ln>
+        </p:spPr>
+      </p:cxnSp>
+      <p:sp>
+        <p:nvSpPr>
+          <p:cNvPr id="39" name="箭號: 左-右雙向 38">
+            <a:extLst>
+              <a:ext uri="{FF2B5EF4-FFF2-40B4-BE49-F238E27FC236}">
+                <a16:creationId xmlns:a16="http://schemas.microsoft.com/office/drawing/2014/main" id="{BF11FCEC-B937-91DA-764E-28D5A1070F86}"/>
+              </a:ext>
+            </a:extLst>
+          </p:cNvPr>
+          <p:cNvSpPr/>
+          <p:nvPr/>
+        </p:nvSpPr>
+        <p:spPr>
+          <a:xfrm rot="5400000">
+            <a:off x="5983560" y="3763709"/>
+            <a:ext cx="495978" cy="249120"/>
+          </a:xfrm>
+          <a:prstGeom prst="leftRightArrow">
+            <a:avLst/>
+          </a:prstGeom>
+          <a:solidFill>
+            <a:schemeClr val="tx1"/>
+          </a:solidFill>
+        </p:spPr>
+        <p:style>
+          <a:lnRef idx="2">
+            <a:schemeClr val="accent1">
+              <a:shade val="15000"/>
+            </a:schemeClr>
+          </a:lnRef>
+          <a:fillRef idx="1">
+            <a:schemeClr val="accent1"/>
+          </a:fillRef>
+          <a:effectRef idx="0">
+            <a:schemeClr val="accent1"/>
+          </a:effectRef>
+          <a:fontRef idx="minor">
+            <a:schemeClr val="lt1"/>
+          </a:fontRef>
+        </p:style>
+        <p:txBody>
+          <a:bodyPr rtlCol="0" anchor="ctr"/>
+          <a:lstStyle/>
+          <a:p>
+            <a:pPr algn="ctr"/>
+            <a:endParaRPr lang="en-US"/>
+          </a:p>
+        </p:txBody>
+      </p:sp>
+      <p:sp>
+        <p:nvSpPr>
+          <p:cNvPr id="43" name="箭號: 左-右雙向 42">
+            <a:extLst>
+              <a:ext uri="{FF2B5EF4-FFF2-40B4-BE49-F238E27FC236}">
+                <a16:creationId xmlns:a16="http://schemas.microsoft.com/office/drawing/2014/main" id="{19641AAB-F992-B2C9-1BC1-52F2BFBC9365}"/>
+              </a:ext>
+            </a:extLst>
+          </p:cNvPr>
+          <p:cNvSpPr/>
+          <p:nvPr/>
+        </p:nvSpPr>
+        <p:spPr>
+          <a:xfrm rot="5400000">
+            <a:off x="9524836" y="3727351"/>
+            <a:ext cx="495978" cy="249120"/>
+          </a:xfrm>
+          <a:prstGeom prst="leftRightArrow">
+            <a:avLst/>
+          </a:prstGeom>
+          <a:solidFill>
+            <a:schemeClr val="tx1"/>
+          </a:solidFill>
+        </p:spPr>
+        <p:style>
+          <a:lnRef idx="2">
+            <a:schemeClr val="accent1">
+              <a:shade val="15000"/>
+            </a:schemeClr>
+          </a:lnRef>
+          <a:fillRef idx="1">
+            <a:schemeClr val="accent1"/>
+          </a:fillRef>
+          <a:effectRef idx="0">
+            <a:schemeClr val="accent1"/>
+          </a:effectRef>
+          <a:fontRef idx="minor">
+            <a:schemeClr val="lt1"/>
+          </a:fontRef>
+        </p:style>
+        <p:txBody>
+          <a:bodyPr rtlCol="0" anchor="ctr"/>
+          <a:lstStyle/>
+          <a:p>
+            <a:pPr algn="ctr"/>
+            <a:endParaRPr lang="en-US"/>
+          </a:p>
+        </p:txBody>
+      </p:sp>
+      <p:sp>
+        <p:nvSpPr>
+          <p:cNvPr id="44" name="箭號: 左-右雙向 43">
+            <a:extLst>
+              <a:ext uri="{FF2B5EF4-FFF2-40B4-BE49-F238E27FC236}">
+                <a16:creationId xmlns:a16="http://schemas.microsoft.com/office/drawing/2014/main" id="{EDCF191D-2F8A-0641-3810-F5ACA131B656}"/>
+              </a:ext>
+            </a:extLst>
+          </p:cNvPr>
+          <p:cNvSpPr/>
+          <p:nvPr/>
+        </p:nvSpPr>
+        <p:spPr>
+          <a:xfrm rot="5400000">
+            <a:off x="9517412" y="4672364"/>
+            <a:ext cx="495978" cy="249120"/>
+          </a:xfrm>
+          <a:prstGeom prst="leftRightArrow">
+            <a:avLst/>
+          </a:prstGeom>
+          <a:solidFill>
+            <a:schemeClr val="tx1"/>
+          </a:solidFill>
+        </p:spPr>
+        <p:style>
+          <a:lnRef idx="2">
+            <a:schemeClr val="accent1">
+              <a:shade val="15000"/>
+            </a:schemeClr>
+          </a:lnRef>
+          <a:fillRef idx="1">
+            <a:schemeClr val="accent1"/>
+          </a:fillRef>
+          <a:effectRef idx="0">
+            <a:schemeClr val="accent1"/>
+          </a:effectRef>
+          <a:fontRef idx="minor">
+            <a:schemeClr val="lt1"/>
+          </a:fontRef>
+        </p:style>
+        <p:txBody>
+          <a:bodyPr rtlCol="0" anchor="ctr"/>
+          <a:lstStyle/>
+          <a:p>
+            <a:pPr algn="ctr"/>
+            <a:endParaRPr lang="en-US"/>
+          </a:p>
+        </p:txBody>
+      </p:sp>
+      <p:sp>
+        <p:nvSpPr>
+          <p:cNvPr id="45" name="箭號: 左-右雙向 44">
+            <a:extLst>
+              <a:ext uri="{FF2B5EF4-FFF2-40B4-BE49-F238E27FC236}">
+                <a16:creationId xmlns:a16="http://schemas.microsoft.com/office/drawing/2014/main" id="{6B504B2D-292A-A2BE-E1ED-9B196188AB25}"/>
+              </a:ext>
+            </a:extLst>
+          </p:cNvPr>
+          <p:cNvSpPr/>
+          <p:nvPr/>
+        </p:nvSpPr>
+        <p:spPr>
+          <a:xfrm rot="5400000">
+            <a:off x="6395639" y="4672364"/>
+            <a:ext cx="495978" cy="249120"/>
+          </a:xfrm>
+          <a:prstGeom prst="leftRightArrow">
+            <a:avLst/>
+          </a:prstGeom>
+          <a:solidFill>
+            <a:schemeClr val="tx1"/>
+          </a:solidFill>
+        </p:spPr>
+        <p:style>
+          <a:lnRef idx="2">
+            <a:schemeClr val="accent1">
+              <a:shade val="15000"/>
+            </a:schemeClr>
+          </a:lnRef>
+          <a:fillRef idx="1">
+            <a:schemeClr val="accent1"/>
+          </a:fillRef>
+          <a:effectRef idx="0">
+            <a:schemeClr val="accent1"/>
+          </a:effectRef>
+          <a:fontRef idx="minor">
+            <a:schemeClr val="lt1"/>
+          </a:fontRef>
+        </p:style>
+        <p:txBody>
+          <a:bodyPr rtlCol="0" anchor="ctr"/>
+          <a:lstStyle/>
+          <a:p>
+            <a:pPr algn="ctr"/>
+            <a:endParaRPr lang="en-US"/>
+          </a:p>
+        </p:txBody>
+      </p:sp>
+      <p:sp>
+        <p:nvSpPr>
+          <p:cNvPr id="46" name="箭號: 左-右雙向 45">
+            <a:extLst>
+              <a:ext uri="{FF2B5EF4-FFF2-40B4-BE49-F238E27FC236}">
+                <a16:creationId xmlns:a16="http://schemas.microsoft.com/office/drawing/2014/main" id="{F15D40AB-1C79-6CA8-BB68-EF82449878DB}"/>
+              </a:ext>
+            </a:extLst>
+          </p:cNvPr>
+          <p:cNvSpPr/>
+          <p:nvPr/>
+        </p:nvSpPr>
+        <p:spPr>
+          <a:xfrm rot="5400000">
+            <a:off x="4655653" y="4672364"/>
+            <a:ext cx="495978" cy="249120"/>
+          </a:xfrm>
+          <a:prstGeom prst="leftRightArrow">
+            <a:avLst/>
+          </a:prstGeom>
+          <a:solidFill>
+            <a:schemeClr val="tx1"/>
+          </a:solidFill>
+        </p:spPr>
+        <p:style>
+          <a:lnRef idx="2">
+            <a:schemeClr val="accent1">
+              <a:shade val="15000"/>
+            </a:schemeClr>
+          </a:lnRef>
+          <a:fillRef idx="1">
+            <a:schemeClr val="accent1"/>
+          </a:fillRef>
+          <a:effectRef idx="0">
+            <a:schemeClr val="accent1"/>
+          </a:effectRef>
+          <a:fontRef idx="minor">
+            <a:schemeClr val="lt1"/>
+          </a:fontRef>
+        </p:style>
+        <p:txBody>
+          <a:bodyPr rtlCol="0" anchor="ctr"/>
+          <a:lstStyle/>
+          <a:p>
+            <a:pPr algn="ctr"/>
+            <a:endParaRPr lang="en-US"/>
+          </a:p>
+        </p:txBody>
+      </p:sp>
+      <p:sp>
+        <p:nvSpPr>
+          <p:cNvPr id="47" name="箭號: 左-右雙向 46">
+            <a:extLst>
+              <a:ext uri="{FF2B5EF4-FFF2-40B4-BE49-F238E27FC236}">
+                <a16:creationId xmlns:a16="http://schemas.microsoft.com/office/drawing/2014/main" id="{28BFA901-37AE-2970-E717-B2600913A954}"/>
+              </a:ext>
+            </a:extLst>
+          </p:cNvPr>
+          <p:cNvSpPr/>
+          <p:nvPr/>
+        </p:nvSpPr>
+        <p:spPr>
+          <a:xfrm rot="5400000">
+            <a:off x="1349897" y="4660335"/>
+            <a:ext cx="495978" cy="249120"/>
+          </a:xfrm>
+          <a:prstGeom prst="leftRightArrow">
+            <a:avLst/>
+          </a:prstGeom>
+          <a:solidFill>
+            <a:schemeClr val="tx1"/>
+          </a:solidFill>
+        </p:spPr>
+        <p:style>
+          <a:lnRef idx="2">
+            <a:schemeClr val="accent1">
+              <a:shade val="15000"/>
+            </a:schemeClr>
+          </a:lnRef>
+          <a:fillRef idx="1">
+            <a:schemeClr val="accent1"/>
+          </a:fillRef>
+          <a:effectRef idx="0">
+            <a:schemeClr val="accent1"/>
+          </a:effectRef>
+          <a:fontRef idx="minor">
+            <a:schemeClr val="lt1"/>
+          </a:fontRef>
+        </p:style>
+        <p:txBody>
+          <a:bodyPr rtlCol="0" anchor="ctr"/>
+          <a:lstStyle/>
+          <a:p>
+            <a:pPr algn="ctr"/>
+            <a:endParaRPr lang="en-US"/>
+          </a:p>
+        </p:txBody>
+      </p:sp>
+    </p:spTree>
+  </p:cSld>
+  <p:clrMapOvr>
+    <a:masterClrMapping/>
+  </p:clrMapOvr>
+</p:sld>
+</file>
+
+<file path=ppt/slides/slide9.xml><?xml version="1.0" encoding="utf-8"?>
+<p:sld xmlns:a="http://schemas.openxmlformats.org/drawingml/2006/main" xmlns:r="http://schemas.openxmlformats.org/officeDocument/2006/relationships" xmlns:p="http://schemas.openxmlformats.org/presentationml/2006/main">
+  <p:cSld>
+    <p:spTree>
+      <p:nvGrpSpPr>
+        <p:cNvPr id="1" name="">
+          <a:extLst>
+            <a:ext uri="{FF2B5EF4-FFF2-40B4-BE49-F238E27FC236}">
+              <a16:creationId xmlns:a16="http://schemas.microsoft.com/office/drawing/2014/main" id="{AC9B3EDC-A309-94C5-D7DC-F5AD3B1C34F4}"/>
+            </a:ext>
+          </a:extLst>
+        </p:cNvPr>
+        <p:cNvGrpSpPr/>
+        <p:nvPr/>
+      </p:nvGrpSpPr>
+      <p:grpSpPr>
+        <a:xfrm>
+          <a:off x="0" y="0"/>
+          <a:ext cx="0" cy="0"/>
+          <a:chOff x="0" y="0"/>
+          <a:chExt cx="0" cy="0"/>
+        </a:xfrm>
+      </p:grpSpPr>
+      <p:sp>
+        <p:nvSpPr>
+          <p:cNvPr id="69" name="PlaceHolder 1">
+            <a:extLst>
+              <a:ext uri="{FF2B5EF4-FFF2-40B4-BE49-F238E27FC236}">
+                <a16:creationId xmlns:a16="http://schemas.microsoft.com/office/drawing/2014/main" id="{4F7665A9-AC2C-762D-2B6E-C4436CF0B993}"/>
+              </a:ext>
+            </a:extLst>
+          </p:cNvPr>
+          <p:cNvSpPr>
+            <a:spLocks noGrp="1"/>
+          </p:cNvSpPr>
+          <p:nvPr>
+            <p:ph type="title"/>
+          </p:nvPr>
+        </p:nvSpPr>
+        <p:spPr>
+          <a:xfrm>
+            <a:off x="1015920" y="0"/>
+            <a:ext cx="10972080" cy="1142280"/>
+          </a:xfrm>
+          <a:prstGeom prst="rect">
+            <a:avLst/>
+          </a:prstGeom>
+          <a:noFill/>
+          <a:ln w="0">
+            <a:noFill/>
+          </a:ln>
+        </p:spPr>
+        <p:txBody>
+          <a:bodyPr lIns="91440" tIns="45720" rIns="91440" bIns="45720" anchor="ctr">
+            <a:noAutofit/>
+          </a:bodyPr>
+          <a:lstStyle/>
+          <a:p>
+            <a:pPr indent="0">
+              <a:lnSpc>
+                <a:spcPct val="100000"/>
+              </a:lnSpc>
+              <a:buNone/>
+              <a:tabLst>
+                <a:tab pos="0" algn="l"/>
+              </a:tabLst>
+            </a:pPr>
+            <a:r>
+              <a:rPr lang="en-US" sz="4000" b="1" strike="noStrike" spc="-1" dirty="0">
+                <a:solidFill>
+                  <a:srgbClr val="DDDDDD"/>
+                </a:solidFill>
+                <a:latin typeface="Calibri"/>
+                <a:ea typeface="Calibri"/>
+              </a:rPr>
+              <a:t>Instruction Path vs Data Path for SRAM</a:t>
+            </a:r>
+            <a:endParaRPr lang="en-US" sz="4000" b="0" strike="noStrike" spc="-1" dirty="0">
+              <a:solidFill>
+                <a:srgbClr val="000000"/>
+              </a:solidFill>
+              <a:latin typeface="Arial"/>
+            </a:endParaRPr>
+          </a:p>
+        </p:txBody>
+      </p:sp>
+      <p:sp>
+        <p:nvSpPr>
+          <p:cNvPr id="70" name="矩形: 圓角 3">
+            <a:extLst>
+              <a:ext uri="{FF2B5EF4-FFF2-40B4-BE49-F238E27FC236}">
+                <a16:creationId xmlns:a16="http://schemas.microsoft.com/office/drawing/2014/main" id="{4B38E0FB-8E8C-E904-6AAD-00DAF005670B}"/>
+              </a:ext>
+            </a:extLst>
+          </p:cNvPr>
+          <p:cNvSpPr/>
+          <p:nvPr/>
+        </p:nvSpPr>
+        <p:spPr>
+          <a:xfrm>
+            <a:off x="3499652" y="4100583"/>
+            <a:ext cx="1518840" cy="815040"/>
+          </a:xfrm>
+          <a:prstGeom prst="roundRect">
+            <a:avLst>
+              <a:gd name="adj" fmla="val 16667"/>
+            </a:avLst>
+          </a:prstGeom>
+          <a:solidFill>
+            <a:srgbClr val="FFC000"/>
+          </a:solidFill>
+          <a:ln>
+            <a:solidFill>
+              <a:srgbClr val="000000"/>
+            </a:solidFill>
+            <a:round/>
+          </a:ln>
+        </p:spPr>
+        <p:style>
+          <a:lnRef idx="2">
+            <a:schemeClr val="dk1">
+              <a:shade val="15000"/>
+            </a:schemeClr>
+          </a:lnRef>
+          <a:fillRef idx="1">
+            <a:schemeClr val="dk1"/>
+          </a:fillRef>
+          <a:effectRef idx="0">
+            <a:schemeClr val="dk1"/>
+          </a:effectRef>
+          <a:fontRef idx="minor"/>
+        </p:style>
+        <p:txBody>
+          <a:bodyPr lIns="90000" tIns="45000" rIns="90000" bIns="45000" anchor="ctr">
+            <a:noAutofit/>
+          </a:bodyPr>
+          <a:lstStyle/>
+          <a:p>
+            <a:pPr algn="ctr">
+              <a:lnSpc>
+                <a:spcPct val="100000"/>
+              </a:lnSpc>
+            </a:pPr>
+            <a:r>
+              <a:rPr lang="en-US" sz="1400" b="0" strike="noStrike" spc="-1">
+                <a:solidFill>
+                  <a:schemeClr val="dk1"/>
+                </a:solidFill>
+                <a:latin typeface="Arial"/>
+                <a:ea typeface="Arial"/>
+              </a:rPr>
+              <a:t>MicroBlaze V</a:t>
+            </a:r>
+            <a:endParaRPr lang="en-US" sz="1400" b="0" strike="noStrike" spc="-1">
+              <a:solidFill>
+                <a:srgbClr val="000000"/>
+              </a:solidFill>
+              <a:latin typeface="Arial"/>
+            </a:endParaRPr>
+          </a:p>
+        </p:txBody>
+      </p:sp>
+      <p:sp>
+        <p:nvSpPr>
+          <p:cNvPr id="76" name="矩形 12">
+            <a:extLst>
+              <a:ext uri="{FF2B5EF4-FFF2-40B4-BE49-F238E27FC236}">
+                <a16:creationId xmlns:a16="http://schemas.microsoft.com/office/drawing/2014/main" id="{F8CE3DE0-AB66-3F9D-A39F-187E999E9BE5}"/>
+              </a:ext>
+            </a:extLst>
+          </p:cNvPr>
+          <p:cNvSpPr/>
+          <p:nvPr/>
+        </p:nvSpPr>
+        <p:spPr>
+          <a:xfrm>
+            <a:off x="357783" y="6072961"/>
+            <a:ext cx="11476434" cy="254880"/>
+          </a:xfrm>
+          <a:prstGeom prst="rect">
+            <a:avLst/>
+          </a:prstGeom>
+          <a:solidFill>
+            <a:schemeClr val="tx1"/>
+          </a:solidFill>
+          <a:ln>
+            <a:solidFill>
+              <a:srgbClr val="516263"/>
+            </a:solidFill>
+            <a:round/>
+          </a:ln>
+        </p:spPr>
+        <p:style>
+          <a:lnRef idx="2">
+            <a:schemeClr val="accent1">
+              <a:shade val="15000"/>
+            </a:schemeClr>
+          </a:lnRef>
+          <a:fillRef idx="1">
+            <a:schemeClr val="accent1"/>
+          </a:fillRef>
+          <a:effectRef idx="0">
+            <a:schemeClr val="accent1"/>
+          </a:effectRef>
+          <a:fontRef idx="minor"/>
+        </p:style>
+        <p:txBody>
+          <a:bodyPr lIns="90000" tIns="45000" rIns="90000" bIns="45000" anchor="ctr">
+            <a:noAutofit/>
+          </a:bodyPr>
+          <a:lstStyle/>
+          <a:p>
+            <a:pPr algn="ctr">
+              <a:lnSpc>
+                <a:spcPct val="100000"/>
+              </a:lnSpc>
+            </a:pPr>
+            <a:r>
+              <a:rPr lang="en-US" sz="2000" b="0" strike="noStrike" spc="-1">
+                <a:solidFill>
+                  <a:schemeClr val="lt1"/>
+                </a:solidFill>
+                <a:latin typeface="Arial"/>
+                <a:ea typeface="Arial"/>
+              </a:rPr>
+              <a:t>AXI Interconnect (BUS)</a:t>
+            </a:r>
+            <a:endParaRPr lang="en-US" sz="2000" b="0" strike="noStrike" spc="-1">
+              <a:solidFill>
+                <a:srgbClr val="FFFFFF"/>
+              </a:solidFill>
+              <a:latin typeface="Arial"/>
+            </a:endParaRPr>
+          </a:p>
+        </p:txBody>
+      </p:sp>
+      <p:sp>
+        <p:nvSpPr>
+          <p:cNvPr id="89" name="矩形: 圓角 40">
+            <a:extLst>
+              <a:ext uri="{FF2B5EF4-FFF2-40B4-BE49-F238E27FC236}">
+                <a16:creationId xmlns:a16="http://schemas.microsoft.com/office/drawing/2014/main" id="{B7F58E37-A80C-88D4-5AF6-9295E3766375}"/>
+              </a:ext>
+            </a:extLst>
+          </p:cNvPr>
+          <p:cNvSpPr/>
+          <p:nvPr/>
+        </p:nvSpPr>
+        <p:spPr>
+          <a:xfrm>
+            <a:off x="3499652" y="2955063"/>
+            <a:ext cx="1518840" cy="815040"/>
+          </a:xfrm>
+          <a:prstGeom prst="roundRect">
+            <a:avLst>
+              <a:gd name="adj" fmla="val 16667"/>
+            </a:avLst>
+          </a:prstGeom>
+          <a:solidFill>
+            <a:srgbClr val="FFC000"/>
+          </a:solidFill>
+          <a:ln>
+            <a:solidFill>
+              <a:srgbClr val="000000"/>
+            </a:solidFill>
+            <a:round/>
+          </a:ln>
+        </p:spPr>
+        <p:style>
+          <a:lnRef idx="2">
+            <a:schemeClr val="dk1">
+              <a:shade val="15000"/>
+            </a:schemeClr>
+          </a:lnRef>
+          <a:fillRef idx="1">
+            <a:schemeClr val="dk1"/>
+          </a:fillRef>
+          <a:effectRef idx="0">
+            <a:schemeClr val="dk1"/>
+          </a:effectRef>
+          <a:fontRef idx="minor"/>
+        </p:style>
+        <p:txBody>
+          <a:bodyPr lIns="90000" tIns="45000" rIns="90000" bIns="45000" anchor="ctr">
+            <a:noAutofit/>
+          </a:bodyPr>
+          <a:lstStyle/>
+          <a:p>
+            <a:pPr algn="ctr">
+              <a:lnSpc>
+                <a:spcPct val="100000"/>
+              </a:lnSpc>
+            </a:pPr>
+            <a:r>
+              <a:rPr lang="en-US" sz="1400" b="0" strike="noStrike" spc="-1">
+                <a:solidFill>
+                  <a:schemeClr val="dk1"/>
+                </a:solidFill>
+                <a:latin typeface="Arial"/>
+                <a:ea typeface="Arial"/>
+              </a:rPr>
+              <a:t>Local Memory</a:t>
+            </a:r>
+            <a:endParaRPr lang="en-US" sz="1400" b="0" strike="noStrike" spc="-1">
+              <a:solidFill>
+                <a:srgbClr val="000000"/>
+              </a:solidFill>
+              <a:latin typeface="Arial"/>
+            </a:endParaRPr>
+          </a:p>
+          <a:p>
+            <a:pPr algn="ctr">
+              <a:lnSpc>
+                <a:spcPct val="100000"/>
+              </a:lnSpc>
+            </a:pPr>
+            <a:r>
+              <a:rPr lang="en-US" sz="1400" b="0" strike="noStrike" spc="-1">
+                <a:solidFill>
+                  <a:schemeClr val="dk1"/>
+                </a:solidFill>
+                <a:latin typeface="Arial"/>
+                <a:ea typeface="Arial"/>
+              </a:rPr>
+              <a:t>Bus</a:t>
+            </a:r>
+            <a:endParaRPr lang="en-US" sz="1400" b="0" strike="noStrike" spc="-1">
+              <a:solidFill>
+                <a:srgbClr val="000000"/>
+              </a:solidFill>
+              <a:latin typeface="Arial"/>
+            </a:endParaRPr>
+          </a:p>
+        </p:txBody>
+      </p:sp>
+      <p:cxnSp>
+        <p:nvCxnSpPr>
+          <p:cNvPr id="90" name="直線單箭頭接點 43">
+            <a:extLst>
+              <a:ext uri="{FF2B5EF4-FFF2-40B4-BE49-F238E27FC236}">
+                <a16:creationId xmlns:a16="http://schemas.microsoft.com/office/drawing/2014/main" id="{F9AF19C2-5090-702C-D170-6E609FFD4EB8}"/>
+              </a:ext>
+            </a:extLst>
+          </p:cNvPr>
+          <p:cNvCxnSpPr>
+            <a:stCxn id="89" idx="2"/>
+            <a:endCxn id="70" idx="0"/>
+          </p:cNvCxnSpPr>
+          <p:nvPr/>
+        </p:nvCxnSpPr>
+        <p:spPr>
+          <a:xfrm>
+            <a:off x="4258892" y="3770103"/>
+            <a:ext cx="360" cy="330840"/>
+          </a:xfrm>
+          <a:prstGeom prst="straightConnector1">
+            <a:avLst/>
+          </a:prstGeom>
+          <a:ln w="28575">
+            <a:solidFill>
+              <a:srgbClr val="000000"/>
+            </a:solidFill>
+            <a:round/>
+            <a:headEnd type="arrow" w="med" len="med"/>
+            <a:tailEnd type="arrow" w="med" len="med"/>
+          </a:ln>
+        </p:spPr>
+      </p:cxnSp>
+      <p:sp>
+        <p:nvSpPr>
+          <p:cNvPr id="91" name="矩形: 圓角 44">
+            <a:extLst>
+              <a:ext uri="{FF2B5EF4-FFF2-40B4-BE49-F238E27FC236}">
+                <a16:creationId xmlns:a16="http://schemas.microsoft.com/office/drawing/2014/main" id="{544A8586-0A13-B205-8F07-59222A176CE6}"/>
+              </a:ext>
+            </a:extLst>
+          </p:cNvPr>
+          <p:cNvSpPr/>
+          <p:nvPr/>
+        </p:nvSpPr>
+        <p:spPr>
+          <a:xfrm>
+            <a:off x="3499472" y="1809343"/>
+            <a:ext cx="1518840" cy="815040"/>
+          </a:xfrm>
+          <a:prstGeom prst="roundRect">
+            <a:avLst>
+              <a:gd name="adj" fmla="val 16667"/>
+            </a:avLst>
+          </a:prstGeom>
+          <a:solidFill>
+            <a:srgbClr val="FFC000"/>
+          </a:solidFill>
+          <a:ln>
+            <a:solidFill>
+              <a:srgbClr val="000000"/>
+            </a:solidFill>
+            <a:round/>
+          </a:ln>
+        </p:spPr>
+        <p:style>
+          <a:lnRef idx="2">
+            <a:schemeClr val="dk1">
+              <a:shade val="15000"/>
+            </a:schemeClr>
+          </a:lnRef>
+          <a:fillRef idx="1">
+            <a:schemeClr val="dk1"/>
+          </a:fillRef>
+          <a:effectRef idx="0">
+            <a:schemeClr val="dk1"/>
+          </a:effectRef>
+          <a:fontRef idx="minor"/>
+        </p:style>
+        <p:txBody>
+          <a:bodyPr lIns="90000" tIns="45000" rIns="90000" bIns="45000" anchor="ctr">
+            <a:noAutofit/>
+          </a:bodyPr>
+          <a:lstStyle/>
+          <a:p>
+            <a:pPr algn="ctr">
+              <a:lnSpc>
+                <a:spcPct val="100000"/>
+              </a:lnSpc>
+            </a:pPr>
+            <a:r>
+              <a:rPr lang="en-US" sz="1400" b="0" strike="noStrike" spc="-1" dirty="0">
+                <a:solidFill>
+                  <a:schemeClr val="dk1"/>
+                </a:solidFill>
+                <a:latin typeface="Arial"/>
+                <a:ea typeface="Arial"/>
+              </a:rPr>
+              <a:t>Data Mem /</a:t>
+            </a:r>
+            <a:endParaRPr lang="en-US" sz="1400" spc="-1" dirty="0">
+              <a:solidFill>
+                <a:schemeClr val="dk1"/>
+              </a:solidFill>
+              <a:latin typeface="Arial"/>
+              <a:ea typeface="Arial"/>
+            </a:endParaRPr>
+          </a:p>
+          <a:p>
+            <a:pPr algn="ctr">
+              <a:lnSpc>
+                <a:spcPct val="100000"/>
+              </a:lnSpc>
+            </a:pPr>
+            <a:r>
+              <a:rPr lang="en-US" sz="1400" b="0" strike="noStrike" spc="-1" dirty="0">
+                <a:solidFill>
+                  <a:schemeClr val="dk1"/>
+                </a:solidFill>
+                <a:latin typeface="Arial"/>
+              </a:rPr>
+              <a:t>Inst Mem /</a:t>
+            </a:r>
+            <a:endParaRPr lang="en-US" sz="1400" b="0" strike="noStrike" spc="-1" dirty="0">
+              <a:solidFill>
+                <a:srgbClr val="000000"/>
+              </a:solidFill>
+              <a:latin typeface="Arial"/>
+            </a:endParaRPr>
+          </a:p>
+          <a:p>
+            <a:pPr algn="ctr">
+              <a:lnSpc>
+                <a:spcPct val="100000"/>
+              </a:lnSpc>
+            </a:pPr>
+            <a:r>
+              <a:rPr lang="en-US" sz="1400" b="0" strike="noStrike" spc="-1" dirty="0">
+                <a:solidFill>
+                  <a:schemeClr val="dk1"/>
+                </a:solidFill>
+                <a:latin typeface="Arial"/>
+                <a:ea typeface="Arial"/>
+              </a:rPr>
+              <a:t>Shared 128KB</a:t>
+            </a:r>
+            <a:endParaRPr lang="en-US" sz="1400" b="0" strike="noStrike" spc="-1" dirty="0">
+              <a:solidFill>
+                <a:srgbClr val="000000"/>
+              </a:solidFill>
+              <a:latin typeface="Arial"/>
+            </a:endParaRPr>
+          </a:p>
+        </p:txBody>
+      </p:sp>
+      <p:cxnSp>
+        <p:nvCxnSpPr>
+          <p:cNvPr id="94" name="直線單箭頭接點 51">
+            <a:extLst>
+              <a:ext uri="{FF2B5EF4-FFF2-40B4-BE49-F238E27FC236}">
+                <a16:creationId xmlns:a16="http://schemas.microsoft.com/office/drawing/2014/main" id="{A08B72DD-477E-5AEF-02CB-D6883BD66362}"/>
+              </a:ext>
+            </a:extLst>
+          </p:cNvPr>
+          <p:cNvCxnSpPr>
+            <a:cxnSpLocks/>
+            <a:stCxn id="91" idx="2"/>
+            <a:endCxn id="89" idx="0"/>
+          </p:cNvCxnSpPr>
+          <p:nvPr/>
+        </p:nvCxnSpPr>
+        <p:spPr>
+          <a:xfrm>
+            <a:off x="4258892" y="2624383"/>
+            <a:ext cx="180" cy="330680"/>
+          </a:xfrm>
+          <a:prstGeom prst="straightConnector1">
+            <a:avLst/>
+          </a:prstGeom>
+          <a:ln w="28575">
+            <a:solidFill>
+              <a:srgbClr val="000000"/>
+            </a:solidFill>
+            <a:round/>
+            <a:headEnd type="arrow" w="med" len="med"/>
+            <a:tailEnd type="arrow" w="med" len="med"/>
+          </a:ln>
+        </p:spPr>
+      </p:cxnSp>
+      <p:sp>
+        <p:nvSpPr>
+          <p:cNvPr id="20" name="矩形: 圓角 23">
+            <a:extLst>
+              <a:ext uri="{FF2B5EF4-FFF2-40B4-BE49-F238E27FC236}">
+                <a16:creationId xmlns:a16="http://schemas.microsoft.com/office/drawing/2014/main" id="{FA75E766-E83B-E04C-8A4A-2C300FA40729}"/>
+              </a:ext>
+            </a:extLst>
+          </p:cNvPr>
+          <p:cNvSpPr/>
+          <p:nvPr/>
+        </p:nvSpPr>
+        <p:spPr>
+          <a:xfrm>
+            <a:off x="6568710" y="3914550"/>
+            <a:ext cx="1208160" cy="1007963"/>
+          </a:xfrm>
+          <a:prstGeom prst="roundRect">
+            <a:avLst>
+              <a:gd name="adj" fmla="val 16667"/>
+            </a:avLst>
+          </a:prstGeom>
+          <a:solidFill>
+            <a:schemeClr val="bg2">
+              <a:lumMod val="40000"/>
+              <a:lumOff val="60000"/>
+            </a:schemeClr>
+          </a:solidFill>
+          <a:ln>
+            <a:solidFill>
+              <a:srgbClr val="516263"/>
+            </a:solidFill>
+            <a:round/>
+          </a:ln>
+        </p:spPr>
+        <p:style>
+          <a:lnRef idx="2">
+            <a:schemeClr val="accent1">
+              <a:shade val="15000"/>
+            </a:schemeClr>
+          </a:lnRef>
+          <a:fillRef idx="1">
+            <a:schemeClr val="accent1"/>
+          </a:fillRef>
+          <a:effectRef idx="0">
+            <a:schemeClr val="accent1"/>
+          </a:effectRef>
+          <a:fontRef idx="minor"/>
+        </p:style>
+        <p:txBody>
+          <a:bodyPr lIns="90000" tIns="45000" rIns="90000" bIns="45000" anchor="ctr">
+            <a:noAutofit/>
+          </a:bodyPr>
+          <a:lstStyle/>
+          <a:p>
+            <a:pPr algn="ctr">
+              <a:lnSpc>
+                <a:spcPct val="100000"/>
+              </a:lnSpc>
+            </a:pPr>
+            <a:r>
+              <a:rPr lang="en-US" sz="1400" b="0" strike="noStrike" spc="-1" dirty="0">
+                <a:solidFill>
+                  <a:schemeClr val="dk1"/>
+                </a:solidFill>
+                <a:latin typeface="Arial"/>
+                <a:ea typeface="Arial"/>
+              </a:rPr>
+              <a:t>AXI</a:t>
+            </a:r>
+          </a:p>
+          <a:p>
+            <a:pPr algn="ctr">
+              <a:lnSpc>
+                <a:spcPct val="100000"/>
+              </a:lnSpc>
+            </a:pPr>
+            <a:r>
+              <a:rPr lang="en-US" sz="1400" b="0" strike="noStrike" spc="-1" dirty="0">
+                <a:solidFill>
+                  <a:schemeClr val="dk1"/>
+                </a:solidFill>
+                <a:latin typeface="Arial"/>
+              </a:rPr>
+              <a:t>EMC</a:t>
+            </a:r>
+            <a:endParaRPr lang="en-US" sz="1400" b="0" strike="noStrike" spc="-1" dirty="0">
+              <a:solidFill>
+                <a:srgbClr val="000000"/>
+              </a:solidFill>
+              <a:latin typeface="Arial"/>
+            </a:endParaRPr>
+          </a:p>
+        </p:txBody>
+      </p:sp>
+      <p:sp>
+        <p:nvSpPr>
+          <p:cNvPr id="23" name="矩形: 圓角 23">
+            <a:extLst>
+              <a:ext uri="{FF2B5EF4-FFF2-40B4-BE49-F238E27FC236}">
+                <a16:creationId xmlns:a16="http://schemas.microsoft.com/office/drawing/2014/main" id="{B7BC6666-9CF9-EE27-835B-44D9039D2EA5}"/>
+              </a:ext>
+            </a:extLst>
+          </p:cNvPr>
+          <p:cNvSpPr/>
+          <p:nvPr/>
+        </p:nvSpPr>
+        <p:spPr>
+          <a:xfrm>
+            <a:off x="6568710" y="2567070"/>
             <a:ext cx="1209600" cy="1045080"/>
           </a:xfrm>
           <a:prstGeom prst="roundRect">
@@ -22487,21 +24306,21 @@
           <p:cNvPr id="24" name="直線單箭頭接點 48">
             <a:extLst>
               <a:ext uri="{FF2B5EF4-FFF2-40B4-BE49-F238E27FC236}">
-                <a16:creationId xmlns:a16="http://schemas.microsoft.com/office/drawing/2014/main" id="{AAECC454-CF63-C6AD-AF6F-8D6B3422BA87}"/>
+                <a16:creationId xmlns:a16="http://schemas.microsoft.com/office/drawing/2014/main" id="{24A8A9E0-019A-7D11-C114-AE960F16CC3E}"/>
               </a:ext>
             </a:extLst>
           </p:cNvPr>
           <p:cNvCxnSpPr>
             <a:cxnSpLocks/>
-            <a:stCxn id="23" idx="1"/>
-            <a:endCxn id="20" idx="3"/>
+            <a:stCxn id="23" idx="2"/>
+            <a:endCxn id="20" idx="0"/>
           </p:cNvCxnSpPr>
           <p:nvPr/>
         </p:nvCxnSpPr>
         <p:spPr>
           <a:xfrm flipH="1">
-            <a:off x="3731763" y="5618803"/>
-            <a:ext cx="307400" cy="0"/>
+            <a:off x="7172790" y="3612150"/>
+            <a:ext cx="720" cy="302400"/>
           </a:xfrm>
           <a:prstGeom prst="straightConnector1">
             <a:avLst/>
@@ -22518,734 +24337,10 @@
       </p:cxnSp>
       <p:sp>
         <p:nvSpPr>
-          <p:cNvPr id="36" name="矩形: 圓角 7">
-            <a:extLst>
-              <a:ext uri="{FF2B5EF4-FFF2-40B4-BE49-F238E27FC236}">
-                <a16:creationId xmlns:a16="http://schemas.microsoft.com/office/drawing/2014/main" id="{AD1C6C7A-1D74-BC78-85FF-55DDBC96EF90}"/>
-              </a:ext>
-            </a:extLst>
-          </p:cNvPr>
-          <p:cNvSpPr/>
-          <p:nvPr/>
-        </p:nvSpPr>
-        <p:spPr>
-          <a:xfrm>
-            <a:off x="5931549" y="5351398"/>
-            <a:ext cx="1209600" cy="1045080"/>
-          </a:xfrm>
-          <a:prstGeom prst="roundRect">
-            <a:avLst>
-              <a:gd name="adj" fmla="val 16667"/>
-            </a:avLst>
-          </a:prstGeom>
-          <a:solidFill>
-            <a:srgbClr val="BBE0E3"/>
-          </a:solidFill>
-          <a:ln>
-            <a:solidFill>
-              <a:srgbClr val="516263"/>
-            </a:solidFill>
-            <a:round/>
-          </a:ln>
-        </p:spPr>
-        <p:style>
-          <a:lnRef idx="2">
-            <a:schemeClr val="accent1">
-              <a:shade val="15000"/>
-            </a:schemeClr>
-          </a:lnRef>
-          <a:fillRef idx="1">
-            <a:schemeClr val="accent1"/>
-          </a:fillRef>
-          <a:effectRef idx="0">
-            <a:schemeClr val="accent1"/>
-          </a:effectRef>
-          <a:fontRef idx="minor"/>
-        </p:style>
-        <p:txBody>
-          <a:bodyPr lIns="90000" tIns="45000" rIns="90000" bIns="45000" anchor="ctr">
-            <a:noAutofit/>
-          </a:bodyPr>
-          <a:lstStyle/>
-          <a:p>
-            <a:pPr algn="ctr">
-              <a:lnSpc>
-                <a:spcPct val="100000"/>
-              </a:lnSpc>
-            </a:pPr>
-            <a:r>
-              <a:rPr lang="en-US" sz="1400" b="0" strike="noStrike" spc="-1" dirty="0">
-                <a:solidFill>
-                  <a:schemeClr val="dk1"/>
-                </a:solidFill>
-                <a:latin typeface="Arial"/>
-                <a:ea typeface="Arial"/>
-              </a:rPr>
-              <a:t>AXI Timer </a:t>
-            </a:r>
-          </a:p>
-          <a:p>
-            <a:pPr algn="ctr">
-              <a:lnSpc>
-                <a:spcPct val="100000"/>
-              </a:lnSpc>
-            </a:pPr>
-            <a:r>
-              <a:rPr lang="en-US" sz="1400" spc="-1" dirty="0">
-                <a:solidFill>
-                  <a:schemeClr val="dk1"/>
-                </a:solidFill>
-                <a:latin typeface="Arial"/>
-                <a:ea typeface="Arial"/>
-              </a:rPr>
-              <a:t>* 6</a:t>
-            </a:r>
-            <a:endParaRPr lang="en-US" sz="1400" b="0" strike="noStrike" spc="-1" dirty="0">
-              <a:solidFill>
-                <a:srgbClr val="000000"/>
-              </a:solidFill>
-              <a:latin typeface="Arial"/>
-            </a:endParaRPr>
-          </a:p>
-        </p:txBody>
-      </p:sp>
-      <p:cxnSp>
-        <p:nvCxnSpPr>
-          <p:cNvPr id="41" name="直線單箭頭接點 14">
-            <a:extLst>
-              <a:ext uri="{FF2B5EF4-FFF2-40B4-BE49-F238E27FC236}">
-                <a16:creationId xmlns:a16="http://schemas.microsoft.com/office/drawing/2014/main" id="{97F12786-E992-176A-A299-FCE60215DAF4}"/>
-              </a:ext>
-            </a:extLst>
-          </p:cNvPr>
-          <p:cNvCxnSpPr>
-            <a:cxnSpLocks/>
-          </p:cNvCxnSpPr>
-          <p:nvPr/>
-        </p:nvCxnSpPr>
-        <p:spPr>
-          <a:xfrm>
-            <a:off x="6490756" y="6396478"/>
-            <a:ext cx="0" cy="170277"/>
-          </a:xfrm>
-          <a:prstGeom prst="straightConnector1">
-            <a:avLst/>
-          </a:prstGeom>
-          <a:ln w="0">
-            <a:solidFill>
-              <a:srgbClr val="000000"/>
-            </a:solidFill>
-            <a:tailEnd type="triangle" w="med" len="med"/>
-          </a:ln>
-        </p:spPr>
-      </p:cxnSp>
-      <p:sp>
-        <p:nvSpPr>
-          <p:cNvPr id="63" name="文字方塊 22">
-            <a:extLst>
-              <a:ext uri="{FF2B5EF4-FFF2-40B4-BE49-F238E27FC236}">
-                <a16:creationId xmlns:a16="http://schemas.microsoft.com/office/drawing/2014/main" id="{9F64AD77-728F-8091-ED23-3F0BE579DCF1}"/>
-              </a:ext>
-            </a:extLst>
-          </p:cNvPr>
-          <p:cNvSpPr/>
-          <p:nvPr/>
-        </p:nvSpPr>
-        <p:spPr>
-          <a:xfrm>
-            <a:off x="4510109" y="6551677"/>
-            <a:ext cx="3968312" cy="306323"/>
-          </a:xfrm>
-          <a:prstGeom prst="rect">
-            <a:avLst/>
-          </a:prstGeom>
-          <a:noFill/>
-          <a:ln w="0">
-            <a:noFill/>
-          </a:ln>
-        </p:spPr>
-        <p:style>
-          <a:lnRef idx="0">
-            <a:scrgbClr r="0" g="0" b="0"/>
-          </a:lnRef>
-          <a:fillRef idx="0">
-            <a:scrgbClr r="0" g="0" b="0"/>
-          </a:fillRef>
-          <a:effectRef idx="0">
-            <a:scrgbClr r="0" g="0" b="0"/>
-          </a:effectRef>
-          <a:fontRef idx="minor"/>
-        </p:style>
-        <p:txBody>
-          <a:bodyPr wrap="square" lIns="90000" tIns="45000" rIns="90000" bIns="45000" anchor="t">
-            <a:spAutoFit/>
-          </a:bodyPr>
-          <a:lstStyle/>
-          <a:p>
-            <a:pPr algn="ctr"/>
-            <a:r>
-              <a:rPr lang="en-US" sz="1400" b="0" strike="noStrike" spc="-1" dirty="0">
-                <a:solidFill>
-                  <a:srgbClr val="000000"/>
-                </a:solidFill>
-                <a:latin typeface="Arial"/>
-              </a:rPr>
-              <a:t>PWM</a:t>
-            </a:r>
-            <a:r>
-              <a:rPr lang="en-US" altLang="zh-TW" sz="1400" b="0" strike="noStrike" spc="-1" dirty="0">
-                <a:solidFill>
-                  <a:srgbClr val="000000"/>
-                </a:solidFill>
-                <a:latin typeface="Arial"/>
-              </a:rPr>
-              <a:t>_</a:t>
-            </a:r>
-            <a:r>
-              <a:rPr lang="en-US" sz="1400" b="0" strike="noStrike" spc="-1" dirty="0">
-                <a:solidFill>
-                  <a:srgbClr val="000000"/>
-                </a:solidFill>
-                <a:latin typeface="Arial"/>
-              </a:rPr>
-              <a:t>0 ~ PWM</a:t>
-            </a:r>
-            <a:r>
-              <a:rPr lang="en-US" altLang="zh-TW" sz="1400" b="0" strike="noStrike" spc="-1" dirty="0">
-                <a:solidFill>
-                  <a:srgbClr val="000000"/>
-                </a:solidFill>
-                <a:latin typeface="Arial"/>
-              </a:rPr>
-              <a:t>_2</a:t>
-            </a:r>
-            <a:endParaRPr lang="en-US" sz="1400" b="0" strike="noStrike" spc="-1" dirty="0">
-              <a:solidFill>
-                <a:srgbClr val="000000"/>
-              </a:solidFill>
-              <a:latin typeface="Arial"/>
-            </a:endParaRPr>
-          </a:p>
-        </p:txBody>
-      </p:sp>
-      <p:sp>
-        <p:nvSpPr>
-          <p:cNvPr id="64" name="箭號: 向下 20">
-            <a:extLst>
-              <a:ext uri="{FF2B5EF4-FFF2-40B4-BE49-F238E27FC236}">
-                <a16:creationId xmlns:a16="http://schemas.microsoft.com/office/drawing/2014/main" id="{CAB304BD-ACCA-8743-CCCC-1FCDAFA90F3C}"/>
-              </a:ext>
-            </a:extLst>
-          </p:cNvPr>
-          <p:cNvSpPr/>
-          <p:nvPr/>
-        </p:nvSpPr>
-        <p:spPr>
-          <a:xfrm rot="10800000">
-            <a:off x="7820135" y="4505855"/>
-            <a:ext cx="249120" cy="479520"/>
-          </a:xfrm>
-          <a:prstGeom prst="downArrow">
-            <a:avLst>
-              <a:gd name="adj1" fmla="val 50000"/>
-              <a:gd name="adj2" fmla="val 50000"/>
-            </a:avLst>
-          </a:prstGeom>
-          <a:solidFill>
-            <a:schemeClr val="tx1"/>
-          </a:solidFill>
-          <a:ln>
-            <a:solidFill>
-              <a:srgbClr val="000000"/>
-            </a:solidFill>
-            <a:round/>
-          </a:ln>
-        </p:spPr>
-        <p:style>
-          <a:lnRef idx="2">
-            <a:schemeClr val="accent1">
-              <a:shade val="15000"/>
-            </a:schemeClr>
-          </a:lnRef>
-          <a:fillRef idx="1">
-            <a:schemeClr val="accent1"/>
-          </a:fillRef>
-          <a:effectRef idx="0">
-            <a:schemeClr val="accent1"/>
-          </a:effectRef>
-          <a:fontRef idx="minor"/>
-        </p:style>
-        <p:txBody>
-          <a:bodyPr lIns="90000" tIns="45000" rIns="90000" bIns="45000" anchor="ctr">
-            <a:noAutofit/>
-          </a:bodyPr>
-          <a:lstStyle/>
-          <a:p>
-            <a:pPr algn="ctr">
-              <a:lnSpc>
-                <a:spcPct val="100000"/>
-              </a:lnSpc>
-            </a:pPr>
-            <a:endParaRPr lang="en-US" sz="1400" b="0" strike="noStrike" spc="-1">
-              <a:solidFill>
-                <a:schemeClr val="lt1"/>
-              </a:solidFill>
-              <a:latin typeface="Arial"/>
-              <a:ea typeface="Arial"/>
-            </a:endParaRPr>
-          </a:p>
-        </p:txBody>
-      </p:sp>
-      <p:sp>
-        <p:nvSpPr>
-          <p:cNvPr id="65" name="矩形: 圓角 23">
-            <a:extLst>
-              <a:ext uri="{FF2B5EF4-FFF2-40B4-BE49-F238E27FC236}">
-                <a16:creationId xmlns:a16="http://schemas.microsoft.com/office/drawing/2014/main" id="{84D86F3F-5693-67BE-3F09-3BFE184E8E2F}"/>
-              </a:ext>
-            </a:extLst>
-          </p:cNvPr>
-          <p:cNvSpPr/>
-          <p:nvPr/>
-        </p:nvSpPr>
-        <p:spPr>
-          <a:xfrm>
-            <a:off x="7366735" y="5097560"/>
-            <a:ext cx="1209600" cy="1045080"/>
-          </a:xfrm>
-          <a:prstGeom prst="roundRect">
-            <a:avLst>
-              <a:gd name="adj" fmla="val 16667"/>
-            </a:avLst>
-          </a:prstGeom>
-          <a:solidFill>
-            <a:srgbClr val="00B050"/>
-          </a:solidFill>
-          <a:ln>
-            <a:solidFill>
-              <a:srgbClr val="516263"/>
-            </a:solidFill>
-            <a:round/>
-          </a:ln>
-        </p:spPr>
-        <p:style>
-          <a:lnRef idx="2">
-            <a:schemeClr val="accent1">
-              <a:shade val="15000"/>
-            </a:schemeClr>
-          </a:lnRef>
-          <a:fillRef idx="1">
-            <a:schemeClr val="accent1"/>
-          </a:fillRef>
-          <a:effectRef idx="0">
-            <a:schemeClr val="accent1"/>
-          </a:effectRef>
-          <a:fontRef idx="minor"/>
-        </p:style>
-        <p:txBody>
-          <a:bodyPr lIns="90000" tIns="45000" rIns="90000" bIns="45000" anchor="ctr">
-            <a:noAutofit/>
-          </a:bodyPr>
-          <a:lstStyle/>
-          <a:p>
-            <a:pPr algn="ctr">
-              <a:lnSpc>
-                <a:spcPct val="100000"/>
-              </a:lnSpc>
-            </a:pPr>
-            <a:r>
-              <a:rPr lang="en-US" sz="1400" b="0" strike="noStrike" spc="-1" dirty="0">
-                <a:solidFill>
-                  <a:schemeClr val="dk1"/>
-                </a:solidFill>
-                <a:latin typeface="Arial"/>
-                <a:ea typeface="Arial"/>
-              </a:rPr>
-              <a:t>AXI</a:t>
-            </a:r>
-          </a:p>
-          <a:p>
-            <a:pPr algn="ctr">
-              <a:lnSpc>
-                <a:spcPct val="100000"/>
-              </a:lnSpc>
-            </a:pPr>
-            <a:r>
-              <a:rPr lang="en-US" sz="1400" spc="-1" dirty="0">
-                <a:solidFill>
-                  <a:schemeClr val="dk1"/>
-                </a:solidFill>
-                <a:latin typeface="Arial"/>
-              </a:rPr>
-              <a:t>Quad-SPI</a:t>
-            </a:r>
-            <a:endParaRPr lang="en-US" sz="1400" b="0" strike="noStrike" spc="-1" dirty="0">
-              <a:solidFill>
-                <a:srgbClr val="000000"/>
-              </a:solidFill>
-              <a:latin typeface="Arial"/>
-            </a:endParaRPr>
-          </a:p>
-        </p:txBody>
-      </p:sp>
-      <p:sp>
-        <p:nvSpPr>
-          <p:cNvPr id="66" name="矩形: 圓角 23">
-            <a:extLst>
-              <a:ext uri="{FF2B5EF4-FFF2-40B4-BE49-F238E27FC236}">
-                <a16:creationId xmlns:a16="http://schemas.microsoft.com/office/drawing/2014/main" id="{631FA26B-FA41-A9C7-3023-64348F6D51EF}"/>
-              </a:ext>
-            </a:extLst>
-          </p:cNvPr>
-          <p:cNvSpPr/>
-          <p:nvPr/>
-        </p:nvSpPr>
-        <p:spPr>
-          <a:xfrm>
-            <a:off x="8856407" y="5097560"/>
-            <a:ext cx="1209600" cy="1045080"/>
-          </a:xfrm>
-          <a:prstGeom prst="roundRect">
-            <a:avLst>
-              <a:gd name="adj" fmla="val 16667"/>
-            </a:avLst>
-          </a:prstGeom>
-          <a:solidFill>
-            <a:srgbClr val="00B050"/>
-          </a:solidFill>
-          <a:ln>
-            <a:solidFill>
-              <a:srgbClr val="516263"/>
-            </a:solidFill>
-            <a:round/>
-          </a:ln>
-        </p:spPr>
-        <p:style>
-          <a:lnRef idx="2">
-            <a:schemeClr val="accent1">
-              <a:shade val="15000"/>
-            </a:schemeClr>
-          </a:lnRef>
-          <a:fillRef idx="1">
-            <a:schemeClr val="accent1"/>
-          </a:fillRef>
-          <a:effectRef idx="0">
-            <a:schemeClr val="accent1"/>
-          </a:effectRef>
-          <a:fontRef idx="minor"/>
-        </p:style>
-        <p:txBody>
-          <a:bodyPr lIns="90000" tIns="45000" rIns="90000" bIns="45000" anchor="ctr">
-            <a:noAutofit/>
-          </a:bodyPr>
-          <a:lstStyle/>
-          <a:p>
-            <a:pPr algn="ctr">
-              <a:lnSpc>
-                <a:spcPct val="100000"/>
-              </a:lnSpc>
-            </a:pPr>
-            <a:r>
-              <a:rPr lang="en-US" sz="1400" spc="-1" dirty="0">
-                <a:solidFill>
-                  <a:srgbClr val="000000"/>
-                </a:solidFill>
-                <a:latin typeface="Arial"/>
-              </a:rPr>
-              <a:t>Flash</a:t>
-            </a:r>
-          </a:p>
-          <a:p>
-            <a:pPr algn="ctr">
-              <a:lnSpc>
-                <a:spcPct val="100000"/>
-              </a:lnSpc>
-            </a:pPr>
-            <a:r>
-              <a:rPr lang="en-US" sz="1400" b="0" strike="noStrike" spc="-1" dirty="0">
-                <a:solidFill>
-                  <a:srgbClr val="000000"/>
-                </a:solidFill>
-                <a:latin typeface="Arial"/>
-              </a:rPr>
-              <a:t>4MB</a:t>
-            </a:r>
-          </a:p>
-        </p:txBody>
-      </p:sp>
-      <p:cxnSp>
-        <p:nvCxnSpPr>
-          <p:cNvPr id="67" name="直線單箭頭接點 48">
-            <a:extLst>
-              <a:ext uri="{FF2B5EF4-FFF2-40B4-BE49-F238E27FC236}">
-                <a16:creationId xmlns:a16="http://schemas.microsoft.com/office/drawing/2014/main" id="{70D58A8C-FC41-A1E5-288E-2675A1821F65}"/>
-              </a:ext>
-            </a:extLst>
-          </p:cNvPr>
-          <p:cNvCxnSpPr>
-            <a:cxnSpLocks/>
-            <a:stCxn id="66" idx="1"/>
-            <a:endCxn id="65" idx="3"/>
-          </p:cNvCxnSpPr>
-          <p:nvPr/>
-        </p:nvCxnSpPr>
-        <p:spPr>
-          <a:xfrm flipH="1">
-            <a:off x="8576335" y="5620100"/>
-            <a:ext cx="280072" cy="0"/>
-          </a:xfrm>
-          <a:prstGeom prst="straightConnector1">
-            <a:avLst/>
-          </a:prstGeom>
-          <a:ln w="28575">
-            <a:solidFill>
-              <a:srgbClr val="000000"/>
-            </a:solidFill>
-            <a:round/>
-            <a:headEnd type="arrow" w="med" len="med"/>
-            <a:tailEnd type="arrow" w="med" len="med"/>
-          </a:ln>
-        </p:spPr>
-      </p:cxnSp>
-      <p:sp>
-        <p:nvSpPr>
-          <p:cNvPr id="97" name="矩形: 圓角 23">
-            <a:extLst>
-              <a:ext uri="{FF2B5EF4-FFF2-40B4-BE49-F238E27FC236}">
-                <a16:creationId xmlns:a16="http://schemas.microsoft.com/office/drawing/2014/main" id="{AEC72BD8-9FAC-F5CF-41EC-7310309AE2B4}"/>
-              </a:ext>
-            </a:extLst>
-          </p:cNvPr>
-          <p:cNvSpPr/>
-          <p:nvPr/>
-        </p:nvSpPr>
-        <p:spPr>
-          <a:xfrm>
-            <a:off x="10461374" y="5096263"/>
-            <a:ext cx="1209600" cy="1045080"/>
-          </a:xfrm>
-          <a:prstGeom prst="roundRect">
-            <a:avLst>
-              <a:gd name="adj" fmla="val 16667"/>
-            </a:avLst>
-          </a:prstGeom>
-          <a:solidFill>
-            <a:srgbClr val="FAFA9E"/>
-          </a:solidFill>
-          <a:ln>
-            <a:solidFill>
-              <a:srgbClr val="516263"/>
-            </a:solidFill>
-            <a:round/>
-          </a:ln>
-        </p:spPr>
-        <p:style>
-          <a:lnRef idx="2">
-            <a:schemeClr val="accent1">
-              <a:shade val="15000"/>
-            </a:schemeClr>
-          </a:lnRef>
-          <a:fillRef idx="1">
-            <a:schemeClr val="accent1"/>
-          </a:fillRef>
-          <a:effectRef idx="0">
-            <a:schemeClr val="accent1"/>
-          </a:effectRef>
-          <a:fontRef idx="minor"/>
-        </p:style>
-        <p:txBody>
-          <a:bodyPr lIns="90000" tIns="45000" rIns="90000" bIns="45000" anchor="ctr">
-            <a:noAutofit/>
-          </a:bodyPr>
-          <a:lstStyle/>
-          <a:p>
-            <a:pPr algn="ctr">
-              <a:lnSpc>
-                <a:spcPct val="100000"/>
-              </a:lnSpc>
-            </a:pPr>
-            <a:r>
-              <a:rPr lang="en-US" sz="1400" spc="-1" dirty="0">
-                <a:solidFill>
-                  <a:schemeClr val="dk1"/>
-                </a:solidFill>
-                <a:latin typeface="Arial"/>
-                <a:ea typeface="Arial"/>
-              </a:rPr>
-              <a:t>XADC</a:t>
-            </a:r>
-            <a:endParaRPr lang="en-US" sz="1400" b="0" strike="noStrike" spc="-1" dirty="0">
-              <a:solidFill>
-                <a:schemeClr val="dk1"/>
-              </a:solidFill>
-              <a:latin typeface="Arial"/>
-              <a:ea typeface="Arial"/>
-            </a:endParaRPr>
-          </a:p>
-        </p:txBody>
-      </p:sp>
-      <p:sp>
-        <p:nvSpPr>
-          <p:cNvPr id="98" name="箭號: 向下 24">
-            <a:extLst>
-              <a:ext uri="{FF2B5EF4-FFF2-40B4-BE49-F238E27FC236}">
-                <a16:creationId xmlns:a16="http://schemas.microsoft.com/office/drawing/2014/main" id="{14AC65FC-3D02-7228-ABD3-81C9634C06CA}"/>
-              </a:ext>
-            </a:extLst>
-          </p:cNvPr>
-          <p:cNvSpPr/>
-          <p:nvPr/>
-        </p:nvSpPr>
-        <p:spPr>
-          <a:xfrm rot="10800000">
-            <a:off x="10941614" y="4510558"/>
-            <a:ext cx="249120" cy="479520"/>
-          </a:xfrm>
-          <a:prstGeom prst="downArrow">
-            <a:avLst>
-              <a:gd name="adj1" fmla="val 50000"/>
-              <a:gd name="adj2" fmla="val 50000"/>
-            </a:avLst>
-          </a:prstGeom>
-          <a:solidFill>
-            <a:schemeClr val="tx1"/>
-          </a:solidFill>
-          <a:ln>
-            <a:solidFill>
-              <a:srgbClr val="000000"/>
-            </a:solidFill>
-            <a:round/>
-          </a:ln>
-        </p:spPr>
-        <p:style>
-          <a:lnRef idx="2">
-            <a:schemeClr val="accent1">
-              <a:shade val="15000"/>
-            </a:schemeClr>
-          </a:lnRef>
-          <a:fillRef idx="1">
-            <a:schemeClr val="accent1"/>
-          </a:fillRef>
-          <a:effectRef idx="0">
-            <a:schemeClr val="accent1"/>
-          </a:effectRef>
-          <a:fontRef idx="minor"/>
-        </p:style>
-        <p:txBody>
-          <a:bodyPr lIns="90000" tIns="45000" rIns="90000" bIns="45000" anchor="ctr">
-            <a:noAutofit/>
-          </a:bodyPr>
-          <a:lstStyle/>
-          <a:p>
-            <a:pPr algn="ctr">
-              <a:lnSpc>
-                <a:spcPct val="100000"/>
-              </a:lnSpc>
-            </a:pPr>
-            <a:endParaRPr lang="en-US" sz="1400" b="0" strike="noStrike" spc="-1">
-              <a:solidFill>
-                <a:schemeClr val="lt1"/>
-              </a:solidFill>
-              <a:latin typeface="Arial"/>
-              <a:ea typeface="Arial"/>
-            </a:endParaRPr>
-          </a:p>
-        </p:txBody>
-      </p:sp>
-      <p:cxnSp>
-        <p:nvCxnSpPr>
-          <p:cNvPr id="99" name="直線單箭頭接點 14">
-            <a:extLst>
-              <a:ext uri="{FF2B5EF4-FFF2-40B4-BE49-F238E27FC236}">
-                <a16:creationId xmlns:a16="http://schemas.microsoft.com/office/drawing/2014/main" id="{3208B2BB-4CEF-C9E8-9A01-2C47D408A4A3}"/>
-              </a:ext>
-            </a:extLst>
-          </p:cNvPr>
-          <p:cNvCxnSpPr>
-            <a:cxnSpLocks/>
-            <a:stCxn id="97" idx="2"/>
-            <a:endCxn id="100" idx="0"/>
-          </p:cNvCxnSpPr>
-          <p:nvPr/>
-        </p:nvCxnSpPr>
-        <p:spPr>
-          <a:xfrm>
-            <a:off x="11066174" y="6141343"/>
-            <a:ext cx="0" cy="380843"/>
-          </a:xfrm>
-          <a:prstGeom prst="straightConnector1">
-            <a:avLst/>
-          </a:prstGeom>
-          <a:ln w="0">
-            <a:solidFill>
-              <a:srgbClr val="000000"/>
-            </a:solidFill>
-            <a:tailEnd type="triangle" w="med" len="med"/>
-          </a:ln>
-        </p:spPr>
-      </p:cxnSp>
-      <p:sp>
-        <p:nvSpPr>
-          <p:cNvPr id="100" name="文字方塊 22">
-            <a:extLst>
-              <a:ext uri="{FF2B5EF4-FFF2-40B4-BE49-F238E27FC236}">
-                <a16:creationId xmlns:a16="http://schemas.microsoft.com/office/drawing/2014/main" id="{E3FC18B7-03B7-E5E0-0495-E3C4E803DDB4}"/>
-              </a:ext>
-            </a:extLst>
-          </p:cNvPr>
-          <p:cNvSpPr/>
-          <p:nvPr/>
-        </p:nvSpPr>
-        <p:spPr>
-          <a:xfrm>
-            <a:off x="9082018" y="6522186"/>
-            <a:ext cx="3968312" cy="306323"/>
-          </a:xfrm>
-          <a:prstGeom prst="rect">
-            <a:avLst/>
-          </a:prstGeom>
-          <a:noFill/>
-          <a:ln w="0">
-            <a:noFill/>
-          </a:ln>
-        </p:spPr>
-        <p:style>
-          <a:lnRef idx="0">
-            <a:scrgbClr r="0" g="0" b="0"/>
-          </a:lnRef>
-          <a:fillRef idx="0">
-            <a:scrgbClr r="0" g="0" b="0"/>
-          </a:fillRef>
-          <a:effectRef idx="0">
-            <a:scrgbClr r="0" g="0" b="0"/>
-          </a:effectRef>
-          <a:fontRef idx="minor"/>
-        </p:style>
-        <p:txBody>
-          <a:bodyPr wrap="square" lIns="90000" tIns="45000" rIns="90000" bIns="45000" anchor="t">
-            <a:spAutoFit/>
-          </a:bodyPr>
-          <a:lstStyle/>
-          <a:p>
-            <a:pPr algn="ctr"/>
-            <a:r>
-              <a:rPr lang="en-US" sz="1400" b="0" strike="noStrike" spc="-1" dirty="0">
-                <a:solidFill>
-                  <a:srgbClr val="000000"/>
-                </a:solidFill>
-                <a:latin typeface="Arial"/>
-              </a:rPr>
-              <a:t>ADC_0 / ADC_1</a:t>
-            </a:r>
-          </a:p>
-        </p:txBody>
-      </p:sp>
-      <p:sp>
-        <p:nvSpPr>
           <p:cNvPr id="6" name="Slide Number Placeholder 5">
             <a:extLst>
               <a:ext uri="{FF2B5EF4-FFF2-40B4-BE49-F238E27FC236}">
-                <a16:creationId xmlns:a16="http://schemas.microsoft.com/office/drawing/2014/main" id="{F170CACE-C115-81D7-ECFE-1E67B74E90A9}"/>
+                <a16:creationId xmlns:a16="http://schemas.microsoft.com/office/drawing/2014/main" id="{0F1FBA3D-0F12-BC37-F542-0C79282917FC}"/>
               </a:ext>
             </a:extLst>
           </p:cNvPr>
@@ -23263,194 +24358,348 @@
           <a:p>
             <a:fld id="{5E7A655E-BA10-45EB-B439-1EA08694B58E}" type="slidenum">
               <a:rPr lang="en-TW" smtClean="0"/>
-              <a:t>8</a:t>
+              <a:t>9</a:t>
             </a:fld>
             <a:endParaRPr lang="en-TW"/>
-          </a:p>
-        </p:txBody>
-      </p:sp>
-    </p:spTree>
-  </p:cSld>
-  <p:clrMapOvr>
-    <a:masterClrMapping/>
-  </p:clrMapOvr>
-</p:sld>
-</file>
-
-<file path=ppt/slides/slide9.xml><?xml version="1.0" encoding="utf-8"?>
-<p:sld xmlns:a="http://schemas.openxmlformats.org/drawingml/2006/main" xmlns:r="http://schemas.openxmlformats.org/officeDocument/2006/relationships" xmlns:p="http://schemas.openxmlformats.org/presentationml/2006/main">
-  <p:cSld>
-    <p:spTree>
-      <p:nvGrpSpPr>
-        <p:cNvPr id="1" name="">
-          <a:extLst>
-            <a:ext uri="{FF2B5EF4-FFF2-40B4-BE49-F238E27FC236}">
-              <a16:creationId xmlns:a16="http://schemas.microsoft.com/office/drawing/2014/main" id="{4421CBEE-344E-4473-44B9-BC4555CCD284}"/>
-            </a:ext>
-          </a:extLst>
-        </p:cNvPr>
-        <p:cNvGrpSpPr/>
-        <p:nvPr/>
-      </p:nvGrpSpPr>
-      <p:grpSpPr>
-        <a:xfrm>
-          <a:off x="0" y="0"/>
-          <a:ext cx="0" cy="0"/>
-          <a:chOff x="0" y="0"/>
-          <a:chExt cx="0" cy="0"/>
-        </a:xfrm>
-      </p:grpSpPr>
-      <p:sp>
-        <p:nvSpPr>
-          <p:cNvPr id="2" name="標題 1">
-            <a:extLst>
-              <a:ext uri="{FF2B5EF4-FFF2-40B4-BE49-F238E27FC236}">
-                <a16:creationId xmlns:a16="http://schemas.microsoft.com/office/drawing/2014/main" id="{FBC8B1B4-C4CF-32E2-281A-8D71EAB23F40}"/>
-              </a:ext>
-            </a:extLst>
-          </p:cNvPr>
-          <p:cNvSpPr>
-            <a:spLocks noGrp="1"/>
-          </p:cNvSpPr>
-          <p:nvPr>
-            <p:ph type="title"/>
-          </p:nvPr>
-        </p:nvSpPr>
-        <p:spPr/>
-        <p:txBody>
-          <a:bodyPr/>
-          <a:lstStyle/>
-          <a:p>
-            <a:r>
-              <a:rPr lang="en-US" sz="4000" b="1" dirty="0">
-                <a:solidFill>
-                  <a:schemeClr val="bg1">
-                    <a:lumMod val="85000"/>
-                  </a:schemeClr>
-                </a:solidFill>
-                <a:latin typeface="Calibri" panose="020F0502020204030204" pitchFamily="34" charset="0"/>
-                <a:cs typeface="Calibri" panose="020F0502020204030204" pitchFamily="34" charset="0"/>
-              </a:rPr>
-              <a:t>Memory-Mapped I/O vs SFR</a:t>
-            </a:r>
           </a:p>
         </p:txBody>
       </p:sp>
       <p:sp>
         <p:nvSpPr>
-          <p:cNvPr id="3" name="文字版面配置區 2">
+          <p:cNvPr id="31" name="箭號: 左-右雙向 30">
             <a:extLst>
               <a:ext uri="{FF2B5EF4-FFF2-40B4-BE49-F238E27FC236}">
-                <a16:creationId xmlns:a16="http://schemas.microsoft.com/office/drawing/2014/main" id="{9AF33343-238B-E602-E1A4-D78BF8167BD8}"/>
+                <a16:creationId xmlns:a16="http://schemas.microsoft.com/office/drawing/2014/main" id="{2DA41A05-6416-5C1E-8EAC-1A4252128A0B}"/>
               </a:ext>
             </a:extLst>
           </p:cNvPr>
-          <p:cNvSpPr>
-            <a:spLocks noGrp="1"/>
-          </p:cNvSpPr>
-          <p:nvPr>
-            <p:ph type="body" idx="1"/>
-          </p:nvPr>
+          <p:cNvSpPr/>
+          <p:nvPr/>
         </p:nvSpPr>
-        <p:spPr/>
+        <p:spPr>
+          <a:xfrm rot="5400000">
+            <a:off x="3461257" y="5369732"/>
+            <a:ext cx="991956" cy="249120"/>
+          </a:xfrm>
+          <a:prstGeom prst="leftRightArrow">
+            <a:avLst/>
+          </a:prstGeom>
+          <a:solidFill>
+            <a:schemeClr val="tx1"/>
+          </a:solidFill>
+        </p:spPr>
+        <p:style>
+          <a:lnRef idx="2">
+            <a:schemeClr val="accent1">
+              <a:shade val="15000"/>
+            </a:schemeClr>
+          </a:lnRef>
+          <a:fillRef idx="1">
+            <a:schemeClr val="accent1"/>
+          </a:fillRef>
+          <a:effectRef idx="0">
+            <a:schemeClr val="accent1"/>
+          </a:effectRef>
+          <a:fontRef idx="minor">
+            <a:schemeClr val="lt1"/>
+          </a:fontRef>
+        </p:style>
         <p:txBody>
-          <a:bodyPr/>
+          <a:bodyPr rtlCol="0" anchor="ctr"/>
           <a:lstStyle/>
           <a:p>
-            <a:r>
-              <a:rPr lang="en-US" sz="2400" dirty="0">
-                <a:latin typeface="Times New Roman" panose="02020603050405020304" pitchFamily="18" charset="0"/>
-                <a:cs typeface="Times New Roman" panose="02020603050405020304" pitchFamily="18" charset="0"/>
-              </a:rPr>
-              <a:t>Memory-Mapped I/O (MMIO): </a:t>
-            </a:r>
-          </a:p>
-          <a:p>
-            <a:pPr lvl="1"/>
-            <a:r>
-              <a:rPr lang="en-US" dirty="0">
-                <a:solidFill>
-                  <a:srgbClr val="FF0000"/>
-                </a:solidFill>
-                <a:latin typeface="Times New Roman" panose="02020603050405020304" pitchFamily="18" charset="0"/>
-                <a:cs typeface="Times New Roman" panose="02020603050405020304" pitchFamily="18" charset="0"/>
-              </a:rPr>
-              <a:t>Peripherals are mapped into the memory address space </a:t>
-            </a:r>
-          </a:p>
-          <a:p>
-            <a:pPr lvl="1"/>
-            <a:r>
-              <a:rPr lang="en-US" dirty="0">
-                <a:latin typeface="Times New Roman" panose="02020603050405020304" pitchFamily="18" charset="0"/>
-                <a:cs typeface="Times New Roman" panose="02020603050405020304" pitchFamily="18" charset="0"/>
-              </a:rPr>
-              <a:t>Accessed using normal load/store instructions </a:t>
-            </a:r>
-          </a:p>
-          <a:p>
-            <a:pPr lvl="1"/>
-            <a:r>
-              <a:rPr lang="en-US" dirty="0">
-                <a:latin typeface="Times New Roman" panose="02020603050405020304" pitchFamily="18" charset="0"/>
-                <a:cs typeface="Times New Roman" panose="02020603050405020304" pitchFamily="18" charset="0"/>
-              </a:rPr>
-              <a:t>Easy to integrate and extend (add new devices by assigning new addresses) </a:t>
-            </a:r>
-          </a:p>
-          <a:p>
-            <a:endParaRPr lang="en-US" sz="2400" dirty="0">
-              <a:latin typeface="Times New Roman" panose="02020603050405020304" pitchFamily="18" charset="0"/>
-              <a:cs typeface="Times New Roman" panose="02020603050405020304" pitchFamily="18" charset="0"/>
-            </a:endParaRPr>
-          </a:p>
-          <a:p>
-            <a:r>
-              <a:rPr lang="en-US" sz="2400" dirty="0">
-                <a:latin typeface="Times New Roman" panose="02020603050405020304" pitchFamily="18" charset="0"/>
-                <a:cs typeface="Times New Roman" panose="02020603050405020304" pitchFamily="18" charset="0"/>
-              </a:rPr>
-              <a:t>SFR (Special Function Registers) in traditional MCUs (e.g., PIC): </a:t>
-            </a:r>
-          </a:p>
-          <a:p>
-            <a:pPr lvl="1"/>
-            <a:r>
-              <a:rPr lang="en-US" dirty="0">
-                <a:solidFill>
-                  <a:srgbClr val="FF0000"/>
-                </a:solidFill>
-                <a:latin typeface="Times New Roman" panose="02020603050405020304" pitchFamily="18" charset="0"/>
-                <a:cs typeface="Times New Roman" panose="02020603050405020304" pitchFamily="18" charset="0"/>
-              </a:rPr>
-              <a:t>Peripheral control uses dedicated special registers</a:t>
-            </a:r>
-            <a:r>
-              <a:rPr lang="en-US" dirty="0">
-                <a:latin typeface="Times New Roman" panose="02020603050405020304" pitchFamily="18" charset="0"/>
-                <a:cs typeface="Times New Roman" panose="02020603050405020304" pitchFamily="18" charset="0"/>
-              </a:rPr>
-              <a:t> </a:t>
-            </a:r>
-          </a:p>
-          <a:p>
-            <a:pPr lvl="1"/>
-            <a:r>
-              <a:rPr lang="en-US" dirty="0">
-                <a:latin typeface="Times New Roman" panose="02020603050405020304" pitchFamily="18" charset="0"/>
-                <a:cs typeface="Times New Roman" panose="02020603050405020304" pitchFamily="18" charset="0"/>
-              </a:rPr>
-              <a:t>Often requires bank selection / bit-level control </a:t>
-            </a:r>
-          </a:p>
-          <a:p>
-            <a:pPr lvl="1"/>
-            <a:r>
-              <a:rPr lang="en-US" dirty="0">
-                <a:latin typeface="Times New Roman" panose="02020603050405020304" pitchFamily="18" charset="0"/>
-                <a:cs typeface="Times New Roman" panose="02020603050405020304" pitchFamily="18" charset="0"/>
-              </a:rPr>
-              <a:t>Less flexible when scaling to more peripherals</a:t>
+            <a:pPr algn="ctr"/>
+            <a:endParaRPr lang="en-US"/>
+          </a:p>
+        </p:txBody>
+      </p:sp>
+      <p:sp>
+        <p:nvSpPr>
+          <p:cNvPr id="10" name="箭號: 左-右雙向 9">
+            <a:extLst>
+              <a:ext uri="{FF2B5EF4-FFF2-40B4-BE49-F238E27FC236}">
+                <a16:creationId xmlns:a16="http://schemas.microsoft.com/office/drawing/2014/main" id="{9478FF48-59AA-D23B-2B37-D1D3D43C7CCB}"/>
+              </a:ext>
+            </a:extLst>
+          </p:cNvPr>
+          <p:cNvSpPr/>
+          <p:nvPr/>
+        </p:nvSpPr>
+        <p:spPr>
+          <a:xfrm rot="5400000">
+            <a:off x="4037863" y="5371266"/>
+            <a:ext cx="991956" cy="249120"/>
+          </a:xfrm>
+          <a:prstGeom prst="leftRightArrow">
+            <a:avLst/>
+          </a:prstGeom>
+          <a:solidFill>
+            <a:schemeClr val="tx1"/>
+          </a:solidFill>
+        </p:spPr>
+        <p:style>
+          <a:lnRef idx="2">
+            <a:schemeClr val="accent1">
+              <a:shade val="15000"/>
+            </a:schemeClr>
+          </a:lnRef>
+          <a:fillRef idx="1">
+            <a:schemeClr val="accent1"/>
+          </a:fillRef>
+          <a:effectRef idx="0">
+            <a:schemeClr val="accent1"/>
+          </a:effectRef>
+          <a:fontRef idx="minor">
+            <a:schemeClr val="lt1"/>
+          </a:fontRef>
+        </p:style>
+        <p:txBody>
+          <a:bodyPr rtlCol="0" anchor="ctr"/>
+          <a:lstStyle/>
+          <a:p>
+            <a:pPr algn="ctr"/>
+            <a:endParaRPr lang="en-US"/>
+          </a:p>
+        </p:txBody>
+      </p:sp>
+      <p:sp>
+        <p:nvSpPr>
+          <p:cNvPr id="11" name="箭號: 左-右雙向 10">
+            <a:extLst>
+              <a:ext uri="{FF2B5EF4-FFF2-40B4-BE49-F238E27FC236}">
+                <a16:creationId xmlns:a16="http://schemas.microsoft.com/office/drawing/2014/main" id="{3DC3A253-8676-1BA7-1395-F47C8BF049E7}"/>
+              </a:ext>
+            </a:extLst>
+          </p:cNvPr>
+          <p:cNvSpPr/>
+          <p:nvPr/>
+        </p:nvSpPr>
+        <p:spPr>
+          <a:xfrm rot="5400000">
+            <a:off x="6421298" y="5368965"/>
+            <a:ext cx="991956" cy="249120"/>
+          </a:xfrm>
+          <a:prstGeom prst="leftRightArrow">
+            <a:avLst/>
+          </a:prstGeom>
+          <a:solidFill>
+            <a:schemeClr val="tx1"/>
+          </a:solidFill>
+        </p:spPr>
+        <p:style>
+          <a:lnRef idx="2">
+            <a:schemeClr val="accent1">
+              <a:shade val="15000"/>
+            </a:schemeClr>
+          </a:lnRef>
+          <a:fillRef idx="1">
+            <a:schemeClr val="accent1"/>
+          </a:fillRef>
+          <a:effectRef idx="0">
+            <a:schemeClr val="accent1"/>
+          </a:effectRef>
+          <a:fontRef idx="minor">
+            <a:schemeClr val="lt1"/>
+          </a:fontRef>
+        </p:style>
+        <p:txBody>
+          <a:bodyPr rtlCol="0" anchor="ctr"/>
+          <a:lstStyle/>
+          <a:p>
+            <a:pPr algn="ctr"/>
+            <a:endParaRPr lang="en-US"/>
+          </a:p>
+        </p:txBody>
+      </p:sp>
+      <p:sp>
+        <p:nvSpPr>
+          <p:cNvPr id="14" name="箭號: 左-右雙向 13">
+            <a:extLst>
+              <a:ext uri="{FF2B5EF4-FFF2-40B4-BE49-F238E27FC236}">
+                <a16:creationId xmlns:a16="http://schemas.microsoft.com/office/drawing/2014/main" id="{3C19D0A3-7057-020B-9110-1B0E205EE477}"/>
+              </a:ext>
+            </a:extLst>
+          </p:cNvPr>
+          <p:cNvSpPr/>
+          <p:nvPr/>
+        </p:nvSpPr>
+        <p:spPr>
+          <a:xfrm rot="5400000">
+            <a:off x="6913063" y="5368965"/>
+            <a:ext cx="991956" cy="249120"/>
+          </a:xfrm>
+          <a:prstGeom prst="leftRightArrow">
+            <a:avLst/>
+          </a:prstGeom>
+          <a:solidFill>
+            <a:schemeClr val="tx1"/>
+          </a:solidFill>
+        </p:spPr>
+        <p:style>
+          <a:lnRef idx="2">
+            <a:schemeClr val="accent1">
+              <a:shade val="15000"/>
+            </a:schemeClr>
+          </a:lnRef>
+          <a:fillRef idx="1">
+            <a:schemeClr val="accent1"/>
+          </a:fillRef>
+          <a:effectRef idx="0">
+            <a:schemeClr val="accent1"/>
+          </a:effectRef>
+          <a:fontRef idx="minor">
+            <a:schemeClr val="lt1"/>
+          </a:fontRef>
+        </p:style>
+        <p:txBody>
+          <a:bodyPr rtlCol="0" anchor="ctr"/>
+          <a:lstStyle/>
+          <a:p>
+            <a:pPr algn="ctr"/>
+            <a:endParaRPr lang="en-US"/>
+          </a:p>
+        </p:txBody>
+      </p:sp>
+      <p:sp>
+        <p:nvSpPr>
+          <p:cNvPr id="15" name="文字方塊 14">
+            <a:extLst>
+              <a:ext uri="{FF2B5EF4-FFF2-40B4-BE49-F238E27FC236}">
+                <a16:creationId xmlns:a16="http://schemas.microsoft.com/office/drawing/2014/main" id="{806B00BD-FDE7-4B07-33A6-F5C99AAEFB34}"/>
+              </a:ext>
+            </a:extLst>
+          </p:cNvPr>
+          <p:cNvSpPr txBox="1"/>
+          <p:nvPr/>
+        </p:nvSpPr>
+        <p:spPr>
+          <a:xfrm>
+            <a:off x="2811093" y="5321962"/>
+            <a:ext cx="857839" cy="369332"/>
+          </a:xfrm>
+          <a:prstGeom prst="rect">
+            <a:avLst/>
+          </a:prstGeom>
+          <a:noFill/>
+        </p:spPr>
+        <p:txBody>
+          <a:bodyPr wrap="square" rtlCol="0">
+            <a:spAutoFit/>
+          </a:bodyPr>
+          <a:lstStyle/>
+          <a:p>
+            <a:pPr algn="ctr"/>
+            <a:r>
+              <a:rPr lang="en-US" dirty="0"/>
+              <a:t>DP</a:t>
+            </a:r>
+          </a:p>
+        </p:txBody>
+      </p:sp>
+      <p:sp>
+        <p:nvSpPr>
+          <p:cNvPr id="16" name="文字方塊 15">
+            <a:extLst>
+              <a:ext uri="{FF2B5EF4-FFF2-40B4-BE49-F238E27FC236}">
+                <a16:creationId xmlns:a16="http://schemas.microsoft.com/office/drawing/2014/main" id="{38ECBB6B-C648-DDD4-1044-DDECB7873AE7}"/>
+              </a:ext>
+            </a:extLst>
+          </p:cNvPr>
+          <p:cNvSpPr txBox="1"/>
+          <p:nvPr/>
+        </p:nvSpPr>
+        <p:spPr>
+          <a:xfrm>
+            <a:off x="5963157" y="5309626"/>
+            <a:ext cx="857839" cy="369332"/>
+          </a:xfrm>
+          <a:prstGeom prst="rect">
+            <a:avLst/>
+          </a:prstGeom>
+          <a:noFill/>
+        </p:spPr>
+        <p:txBody>
+          <a:bodyPr wrap="square" rtlCol="0">
+            <a:spAutoFit/>
+          </a:bodyPr>
+          <a:lstStyle/>
+          <a:p>
+            <a:pPr algn="ctr"/>
+            <a:r>
+              <a:rPr lang="en-US" dirty="0"/>
+              <a:t>DP</a:t>
+            </a:r>
+          </a:p>
+        </p:txBody>
+      </p:sp>
+      <p:sp>
+        <p:nvSpPr>
+          <p:cNvPr id="17" name="文字方塊 16">
+            <a:extLst>
+              <a:ext uri="{FF2B5EF4-FFF2-40B4-BE49-F238E27FC236}">
+                <a16:creationId xmlns:a16="http://schemas.microsoft.com/office/drawing/2014/main" id="{12C292B4-5C55-E4D4-0031-948718334209}"/>
+              </a:ext>
+            </a:extLst>
+          </p:cNvPr>
+          <p:cNvSpPr txBox="1"/>
+          <p:nvPr/>
+        </p:nvSpPr>
+        <p:spPr>
+          <a:xfrm>
+            <a:off x="4650879" y="5308859"/>
+            <a:ext cx="857839" cy="369332"/>
+          </a:xfrm>
+          <a:prstGeom prst="rect">
+            <a:avLst/>
+          </a:prstGeom>
+          <a:noFill/>
+        </p:spPr>
+        <p:txBody>
+          <a:bodyPr wrap="square" rtlCol="0">
+            <a:spAutoFit/>
+          </a:bodyPr>
+          <a:lstStyle/>
+          <a:p>
+            <a:pPr algn="ctr"/>
+            <a:r>
+              <a:rPr lang="en-US" dirty="0"/>
+              <a:t>IP</a:t>
+            </a:r>
+          </a:p>
+        </p:txBody>
+      </p:sp>
+      <p:sp>
+        <p:nvSpPr>
+          <p:cNvPr id="18" name="文字方塊 17">
+            <a:extLst>
+              <a:ext uri="{FF2B5EF4-FFF2-40B4-BE49-F238E27FC236}">
+                <a16:creationId xmlns:a16="http://schemas.microsoft.com/office/drawing/2014/main" id="{00C8ED77-2BC0-CA86-CD18-C3CC4E181EB7}"/>
+              </a:ext>
+            </a:extLst>
+          </p:cNvPr>
+          <p:cNvSpPr txBox="1"/>
+          <p:nvPr/>
+        </p:nvSpPr>
+        <p:spPr>
+          <a:xfrm>
+            <a:off x="7526080" y="5269745"/>
+            <a:ext cx="857839" cy="369332"/>
+          </a:xfrm>
+          <a:prstGeom prst="rect">
+            <a:avLst/>
+          </a:prstGeom>
+          <a:noFill/>
+        </p:spPr>
+        <p:txBody>
+          <a:bodyPr wrap="square" rtlCol="0">
+            <a:spAutoFit/>
+          </a:bodyPr>
+          <a:lstStyle/>
+          <a:p>
+            <a:pPr algn="ctr"/>
+            <a:r>
+              <a:rPr lang="en-US" dirty="0"/>
+              <a:t>IP</a:t>
             </a:r>
           </a:p>
         </p:txBody>
@@ -23458,7 +24707,7 @@
     </p:spTree>
     <p:extLst>
       <p:ext uri="{BB962C8B-B14F-4D97-AF65-F5344CB8AC3E}">
-        <p14:creationId xmlns:p14="http://schemas.microsoft.com/office/powerpoint/2010/main" val="2803053597"/>
+        <p14:creationId xmlns:p14="http://schemas.microsoft.com/office/powerpoint/2010/main" val="298182491"/>
       </p:ext>
     </p:extLst>
   </p:cSld>

--- a/Intro_PPT/RISCV-MCU.pptx
+++ b/Intro_PPT/RISCV-MCU.pptx
@@ -5,10 +5,10 @@
     <p:sldMasterId id="2147483660" r:id="rId1"/>
   </p:sldMasterIdLst>
   <p:notesMasterIdLst>
-    <p:notesMasterId r:id="rId37"/>
+    <p:notesMasterId r:id="rId36"/>
   </p:notesMasterIdLst>
   <p:handoutMasterIdLst>
-    <p:handoutMasterId r:id="rId38"/>
+    <p:handoutMasterId r:id="rId37"/>
   </p:handoutMasterIdLst>
   <p:sldIdLst>
     <p:sldId id="353" r:id="rId2"/>
@@ -19,33 +19,32 @@
     <p:sldId id="279" r:id="rId7"/>
     <p:sldId id="356" r:id="rId8"/>
     <p:sldId id="257" r:id="rId9"/>
-    <p:sldId id="305" r:id="rId10"/>
-    <p:sldId id="306" r:id="rId11"/>
-    <p:sldId id="293" r:id="rId12"/>
-    <p:sldId id="262" r:id="rId13"/>
-    <p:sldId id="357" r:id="rId14"/>
-    <p:sldId id="360" r:id="rId15"/>
-    <p:sldId id="381" r:id="rId16"/>
-    <p:sldId id="271" r:id="rId17"/>
-    <p:sldId id="377" r:id="rId18"/>
-    <p:sldId id="378" r:id="rId19"/>
-    <p:sldId id="376" r:id="rId20"/>
-    <p:sldId id="362" r:id="rId21"/>
-    <p:sldId id="363" r:id="rId22"/>
-    <p:sldId id="302" r:id="rId23"/>
-    <p:sldId id="364" r:id="rId24"/>
-    <p:sldId id="263" r:id="rId25"/>
-    <p:sldId id="365" r:id="rId26"/>
-    <p:sldId id="272" r:id="rId27"/>
-    <p:sldId id="289" r:id="rId28"/>
-    <p:sldId id="366" r:id="rId29"/>
-    <p:sldId id="367" r:id="rId30"/>
-    <p:sldId id="368" r:id="rId31"/>
-    <p:sldId id="369" r:id="rId32"/>
-    <p:sldId id="370" r:id="rId33"/>
-    <p:sldId id="264" r:id="rId34"/>
-    <p:sldId id="382" r:id="rId35"/>
-    <p:sldId id="374" r:id="rId36"/>
+    <p:sldId id="357" r:id="rId10"/>
+    <p:sldId id="360" r:id="rId11"/>
+    <p:sldId id="384" r:id="rId12"/>
+    <p:sldId id="305" r:id="rId13"/>
+    <p:sldId id="383" r:id="rId14"/>
+    <p:sldId id="381" r:id="rId15"/>
+    <p:sldId id="271" r:id="rId16"/>
+    <p:sldId id="377" r:id="rId17"/>
+    <p:sldId id="378" r:id="rId18"/>
+    <p:sldId id="376" r:id="rId19"/>
+    <p:sldId id="362" r:id="rId20"/>
+    <p:sldId id="363" r:id="rId21"/>
+    <p:sldId id="302" r:id="rId22"/>
+    <p:sldId id="364" r:id="rId23"/>
+    <p:sldId id="263" r:id="rId24"/>
+    <p:sldId id="365" r:id="rId25"/>
+    <p:sldId id="272" r:id="rId26"/>
+    <p:sldId id="289" r:id="rId27"/>
+    <p:sldId id="366" r:id="rId28"/>
+    <p:sldId id="367" r:id="rId29"/>
+    <p:sldId id="368" r:id="rId30"/>
+    <p:sldId id="369" r:id="rId31"/>
+    <p:sldId id="370" r:id="rId32"/>
+    <p:sldId id="264" r:id="rId33"/>
+    <p:sldId id="382" r:id="rId34"/>
+    <p:sldId id="374" r:id="rId35"/>
   </p:sldIdLst>
   <p:sldSz cx="12192000" cy="6858000"/>
   <p:notesSz cx="6797675" cy="9926638"/>
@@ -234,7 +233,7 @@
           <a:p>
             <a:fld id="{FB399F11-57D9-4294-A5FE-64EE127CA968}" type="datetimeFigureOut">
               <a:rPr lang="zh-TW" altLang="en-US" smtClean="0"/>
-              <a:t>2026/4/15</a:t>
+              <a:t>2026/4/19</a:t>
             </a:fld>
             <a:endParaRPr lang="zh-TW" altLang="en-US"/>
           </a:p>
@@ -400,7 +399,7 @@
           <a:p>
             <a:fld id="{62527D1B-DA63-41BA-9798-D609BF505076}" type="datetimeFigureOut">
               <a:rPr lang="zh-TW" altLang="en-US" smtClean="0"/>
-              <a:t>2026/4/15</a:t>
+              <a:t>2026/4/19</a:t>
             </a:fld>
             <a:endParaRPr lang="zh-TW" altLang="en-US"/>
           </a:p>
@@ -2175,7 +2174,7 @@
                   <a:srgbClr val="000000"/>
                 </a:solidFill>
               </a:rPr>
-              <a:t>2026/4/15</a:t>
+              <a:t>2026/4/19</a:t>
             </a:fld>
             <a:endParaRPr lang="zh-TW" altLang="en-US">
               <a:solidFill>
@@ -2348,7 +2347,7 @@
           <a:p>
             <a:fld id="{AC144876-D6B9-4FEE-BE3A-F4CD2EEB4379}" type="datetime1">
               <a:rPr lang="zh-TW" altLang="en-US" smtClean="0"/>
-              <a:t>2026/4/15</a:t>
+              <a:t>2026/4/19</a:t>
             </a:fld>
             <a:endParaRPr lang="zh-TW" altLang="en-US"/>
           </a:p>
@@ -2545,7 +2544,7 @@
           <a:p>
             <a:fld id="{1BA259BF-DE45-49FA-A477-968460ED4E03}" type="datetime1">
               <a:rPr lang="zh-TW" altLang="en-US" smtClean="0"/>
-              <a:t>2026/4/15</a:t>
+              <a:t>2026/4/19</a:t>
             </a:fld>
             <a:endParaRPr lang="zh-TW" altLang="en-US"/>
           </a:p>
@@ -2920,7 +2919,7 @@
           <a:p>
             <a:fld id="{06BD1EBB-F0A8-4B9C-9D4E-C17A8A5A2449}" type="datetime1">
               <a:rPr lang="zh-TW" altLang="en-US" smtClean="0"/>
-              <a:t>2026/4/15</a:t>
+              <a:t>2026/4/19</a:t>
             </a:fld>
             <a:endParaRPr lang="zh-TW" altLang="en-US"/>
           </a:p>
@@ -3138,7 +3137,7 @@
           <a:p>
             <a:fld id="{F492EEED-A9B7-42BC-A1F2-60B82C4FBAE6}" type="datetime1">
               <a:rPr lang="zh-TW" altLang="en-US" smtClean="0"/>
-              <a:t>2026/4/15</a:t>
+              <a:t>2026/4/19</a:t>
             </a:fld>
             <a:endParaRPr lang="zh-TW" altLang="en-US"/>
           </a:p>
@@ -3442,7 +3441,7 @@
           <a:p>
             <a:fld id="{86B513EE-F750-4072-AF1B-A20318CC106B}" type="datetime1">
               <a:rPr lang="zh-TW" altLang="en-US" smtClean="0"/>
-              <a:t>2026/4/15</a:t>
+              <a:t>2026/4/19</a:t>
             </a:fld>
             <a:endParaRPr lang="zh-TW" altLang="en-US"/>
           </a:p>
@@ -3889,7 +3888,7 @@
           <a:p>
             <a:fld id="{0103FB19-3342-4E79-ADCE-9DB99AA56126}" type="datetime1">
               <a:rPr lang="zh-TW" altLang="en-US" smtClean="0"/>
-              <a:t>2026/4/15</a:t>
+              <a:t>2026/4/19</a:t>
             </a:fld>
             <a:endParaRPr lang="zh-TW" altLang="en-US"/>
           </a:p>
@@ -4025,7 +4024,7 @@
           <a:p>
             <a:fld id="{53B2D14A-D3C7-490B-A8E1-96FA496324EF}" type="datetime1">
               <a:rPr lang="zh-TW" altLang="en-US" smtClean="0"/>
-              <a:t>2026/4/15</a:t>
+              <a:t>2026/4/19</a:t>
             </a:fld>
             <a:endParaRPr lang="zh-TW" altLang="en-US"/>
           </a:p>
@@ -4139,7 +4138,7 @@
           <a:p>
             <a:fld id="{57E911DC-77C9-4ADC-B07E-272A68DBFA14}" type="datetime1">
               <a:rPr lang="zh-TW" altLang="en-US" smtClean="0"/>
-              <a:t>2026/4/15</a:t>
+              <a:t>2026/4/19</a:t>
             </a:fld>
             <a:endParaRPr lang="zh-TW" altLang="en-US"/>
           </a:p>
@@ -4433,7 +4432,7 @@
           <a:p>
             <a:fld id="{B95B21CB-16DD-4E49-B691-7AAC81A3EA8C}" type="datetime1">
               <a:rPr lang="zh-TW" altLang="en-US" smtClean="0"/>
-              <a:t>2026/4/15</a:t>
+              <a:t>2026/4/19</a:t>
             </a:fld>
             <a:endParaRPr lang="zh-TW" altLang="en-US"/>
           </a:p>
@@ -4708,7 +4707,7 @@
           <a:p>
             <a:fld id="{CEF4F6D1-4FC1-4DE7-B4BC-17972AA62A4A}" type="datetime1">
               <a:rPr lang="zh-TW" altLang="en-US" smtClean="0"/>
-              <a:t>2026/4/15</a:t>
+              <a:t>2026/4/19</a:t>
             </a:fld>
             <a:endParaRPr lang="zh-TW" altLang="en-US"/>
           </a:p>
@@ -5050,7 +5049,7 @@
           <a:p>
             <a:fld id="{6B6E154F-CDA9-41F4-98F3-1230ED3328AC}" type="datetime1">
               <a:rPr lang="zh-TW" altLang="en-US" smtClean="0"/>
-              <a:t>2026/4/15</a:t>
+              <a:t>2026/4/19</a:t>
             </a:fld>
             <a:endParaRPr lang="zh-TW" altLang="en-US"/>
           </a:p>
@@ -6062,804 +6061,6 @@
         <p:cNvPr id="1" name="">
           <a:extLst>
             <a:ext uri="{FF2B5EF4-FFF2-40B4-BE49-F238E27FC236}">
-              <a16:creationId xmlns:a16="http://schemas.microsoft.com/office/drawing/2014/main" id="{A5A25FA8-6701-FE87-7508-884C773C8FB6}"/>
-            </a:ext>
-          </a:extLst>
-        </p:cNvPr>
-        <p:cNvGrpSpPr/>
-        <p:nvPr/>
-      </p:nvGrpSpPr>
-      <p:grpSpPr>
-        <a:xfrm>
-          <a:off x="0" y="0"/>
-          <a:ext cx="0" cy="0"/>
-          <a:chOff x="0" y="0"/>
-          <a:chExt cx="0" cy="0"/>
-        </a:xfrm>
-      </p:grpSpPr>
-      <p:sp>
-        <p:nvSpPr>
-          <p:cNvPr id="69" name="PlaceHolder 1">
-            <a:extLst>
-              <a:ext uri="{FF2B5EF4-FFF2-40B4-BE49-F238E27FC236}">
-                <a16:creationId xmlns:a16="http://schemas.microsoft.com/office/drawing/2014/main" id="{A37A3AAA-108C-313C-A6F1-D6EB5172A3B5}"/>
-              </a:ext>
-            </a:extLst>
-          </p:cNvPr>
-          <p:cNvSpPr>
-            <a:spLocks noGrp="1"/>
-          </p:cNvSpPr>
-          <p:nvPr>
-            <p:ph type="title"/>
-          </p:nvPr>
-        </p:nvSpPr>
-        <p:spPr>
-          <a:xfrm>
-            <a:off x="1015920" y="0"/>
-            <a:ext cx="10972080" cy="1142280"/>
-          </a:xfrm>
-          <a:prstGeom prst="rect">
-            <a:avLst/>
-          </a:prstGeom>
-          <a:noFill/>
-          <a:ln w="0">
-            <a:noFill/>
-          </a:ln>
-        </p:spPr>
-        <p:txBody>
-          <a:bodyPr lIns="91440" tIns="45720" rIns="91440" bIns="45720" anchor="ctr">
-            <a:noAutofit/>
-          </a:bodyPr>
-          <a:lstStyle/>
-          <a:p>
-            <a:pPr indent="0">
-              <a:lnSpc>
-                <a:spcPct val="100000"/>
-              </a:lnSpc>
-              <a:buNone/>
-              <a:tabLst>
-                <a:tab pos="0" algn="l"/>
-              </a:tabLst>
-            </a:pPr>
-            <a:r>
-              <a:rPr lang="en-US" sz="4000" b="1" strike="noStrike" spc="-1" dirty="0">
-                <a:solidFill>
-                  <a:srgbClr val="DDDDDD"/>
-                </a:solidFill>
-                <a:ea typeface="Calibri"/>
-              </a:rPr>
-              <a:t>Instruction </a:t>
-            </a:r>
-            <a:r>
-              <a:rPr lang="en-US" altLang="zh-TW" sz="4000" b="1" spc="-1" dirty="0">
-                <a:solidFill>
-                  <a:srgbClr val="DDDDDD"/>
-                </a:solidFill>
-                <a:ea typeface="Calibri"/>
-              </a:rPr>
-              <a:t>Network</a:t>
-            </a:r>
-            <a:r>
-              <a:rPr lang="en-US" sz="4000" b="1" strike="noStrike" spc="-1" dirty="0">
-                <a:solidFill>
-                  <a:srgbClr val="DDDDDD"/>
-                </a:solidFill>
-                <a:ea typeface="Calibri"/>
-              </a:rPr>
-              <a:t> / Data Network</a:t>
-            </a:r>
-            <a:endParaRPr lang="en-US" sz="4000" b="0" strike="noStrike" spc="-1" dirty="0">
-              <a:solidFill>
-                <a:srgbClr val="000000"/>
-              </a:solidFill>
-            </a:endParaRPr>
-          </a:p>
-        </p:txBody>
-      </p:sp>
-      <p:sp>
-        <p:nvSpPr>
-          <p:cNvPr id="6" name="Slide Number Placeholder 5">
-            <a:extLst>
-              <a:ext uri="{FF2B5EF4-FFF2-40B4-BE49-F238E27FC236}">
-                <a16:creationId xmlns:a16="http://schemas.microsoft.com/office/drawing/2014/main" id="{FB94BD7F-4885-2101-FDE4-CC5D8F72E6DB}"/>
-              </a:ext>
-            </a:extLst>
-          </p:cNvPr>
-          <p:cNvSpPr>
-            <a:spLocks noGrp="1"/>
-          </p:cNvSpPr>
-          <p:nvPr>
-            <p:ph type="sldNum" idx="10"/>
-          </p:nvPr>
-        </p:nvSpPr>
-        <p:spPr/>
-        <p:txBody>
-          <a:bodyPr/>
-          <a:lstStyle/>
-          <a:p>
-            <a:fld id="{5E7A655E-BA10-45EB-B439-1EA08694B58E}" type="slidenum">
-              <a:rPr lang="en-TW" smtClean="0">
-                <a:latin typeface="+mj-lt"/>
-              </a:rPr>
-              <a:t>10</a:t>
-            </a:fld>
-            <a:endParaRPr lang="en-TW">
-              <a:latin typeface="+mj-lt"/>
-            </a:endParaRPr>
-          </a:p>
-        </p:txBody>
-      </p:sp>
-      <p:pic>
-        <p:nvPicPr>
-          <p:cNvPr id="3" name="圖片 2">
-            <a:extLst>
-              <a:ext uri="{FF2B5EF4-FFF2-40B4-BE49-F238E27FC236}">
-                <a16:creationId xmlns:a16="http://schemas.microsoft.com/office/drawing/2014/main" id="{926046B6-0CB9-8E26-B12E-49ECD1A0873B}"/>
-              </a:ext>
-            </a:extLst>
-          </p:cNvPr>
-          <p:cNvPicPr>
-            <a:picLocks noChangeAspect="1"/>
-          </p:cNvPicPr>
-          <p:nvPr/>
-        </p:nvPicPr>
-        <p:blipFill>
-          <a:blip r:embed="rId2"/>
-          <a:stretch>
-            <a:fillRect/>
-          </a:stretch>
-        </p:blipFill>
-        <p:spPr>
-          <a:xfrm>
-            <a:off x="2331967" y="1299246"/>
-            <a:ext cx="7528066" cy="5382929"/>
-          </a:xfrm>
-          <a:prstGeom prst="rect">
-            <a:avLst/>
-          </a:prstGeom>
-        </p:spPr>
-      </p:pic>
-    </p:spTree>
-    <p:extLst>
-      <p:ext uri="{BB962C8B-B14F-4D97-AF65-F5344CB8AC3E}">
-        <p14:creationId xmlns:p14="http://schemas.microsoft.com/office/powerpoint/2010/main" val="2466545452"/>
-      </p:ext>
-    </p:extLst>
-  </p:cSld>
-  <p:clrMapOvr>
-    <a:masterClrMapping/>
-  </p:clrMapOvr>
-</p:sld>
-</file>
-
-<file path=ppt/slides/slide11.xml><?xml version="1.0" encoding="utf-8"?>
-<p:sld xmlns:a="http://schemas.openxmlformats.org/drawingml/2006/main" xmlns:r="http://schemas.openxmlformats.org/officeDocument/2006/relationships" xmlns:p="http://schemas.openxmlformats.org/presentationml/2006/main">
-  <p:cSld>
-    <p:spTree>
-      <p:nvGrpSpPr>
-        <p:cNvPr id="1" name="">
-          <a:extLst>
-            <a:ext uri="{FF2B5EF4-FFF2-40B4-BE49-F238E27FC236}">
-              <a16:creationId xmlns:a16="http://schemas.microsoft.com/office/drawing/2014/main" id="{4421CBEE-344E-4473-44B9-BC4555CCD284}"/>
-            </a:ext>
-          </a:extLst>
-        </p:cNvPr>
-        <p:cNvGrpSpPr/>
-        <p:nvPr/>
-      </p:nvGrpSpPr>
-      <p:grpSpPr>
-        <a:xfrm>
-          <a:off x="0" y="0"/>
-          <a:ext cx="0" cy="0"/>
-          <a:chOff x="0" y="0"/>
-          <a:chExt cx="0" cy="0"/>
-        </a:xfrm>
-      </p:grpSpPr>
-      <p:sp>
-        <p:nvSpPr>
-          <p:cNvPr id="2" name="標題 1">
-            <a:extLst>
-              <a:ext uri="{FF2B5EF4-FFF2-40B4-BE49-F238E27FC236}">
-                <a16:creationId xmlns:a16="http://schemas.microsoft.com/office/drawing/2014/main" id="{FBC8B1B4-C4CF-32E2-281A-8D71EAB23F40}"/>
-              </a:ext>
-            </a:extLst>
-          </p:cNvPr>
-          <p:cNvSpPr>
-            <a:spLocks noGrp="1"/>
-          </p:cNvSpPr>
-          <p:nvPr>
-            <p:ph type="title"/>
-          </p:nvPr>
-        </p:nvSpPr>
-        <p:spPr/>
-        <p:txBody>
-          <a:bodyPr/>
-          <a:lstStyle/>
-          <a:p>
-            <a:r>
-              <a:rPr lang="en-US" sz="4000" b="1" dirty="0">
-                <a:solidFill>
-                  <a:schemeClr val="bg1">
-                    <a:lumMod val="85000"/>
-                  </a:schemeClr>
-                </a:solidFill>
-                <a:cs typeface="Calibri" panose="020F0502020204030204" pitchFamily="34" charset="0"/>
-              </a:rPr>
-              <a:t>Memory-Mapped I/O vs SFR</a:t>
-            </a:r>
-          </a:p>
-        </p:txBody>
-      </p:sp>
-      <p:sp>
-        <p:nvSpPr>
-          <p:cNvPr id="3" name="文字版面配置區 2">
-            <a:extLst>
-              <a:ext uri="{FF2B5EF4-FFF2-40B4-BE49-F238E27FC236}">
-                <a16:creationId xmlns:a16="http://schemas.microsoft.com/office/drawing/2014/main" id="{9AF33343-238B-E602-E1A4-D78BF8167BD8}"/>
-              </a:ext>
-            </a:extLst>
-          </p:cNvPr>
-          <p:cNvSpPr>
-            <a:spLocks noGrp="1"/>
-          </p:cNvSpPr>
-          <p:nvPr>
-            <p:ph type="body" idx="1"/>
-          </p:nvPr>
-        </p:nvSpPr>
-        <p:spPr/>
-        <p:txBody>
-          <a:bodyPr/>
-          <a:lstStyle/>
-          <a:p>
-            <a:r>
-              <a:rPr lang="en-US" sz="2400" dirty="0">
-                <a:cs typeface="Times New Roman" panose="02020603050405020304" pitchFamily="18" charset="0"/>
-              </a:rPr>
-              <a:t>Memory-Mapped I/O (MMIO): </a:t>
-            </a:r>
-          </a:p>
-          <a:p>
-            <a:pPr lvl="1"/>
-            <a:r>
-              <a:rPr lang="en-US" dirty="0">
-                <a:solidFill>
-                  <a:srgbClr val="FF0000"/>
-                </a:solidFill>
-                <a:cs typeface="Times New Roman" panose="02020603050405020304" pitchFamily="18" charset="0"/>
-              </a:rPr>
-              <a:t>Peripherals are mapped into the memory address space </a:t>
-            </a:r>
-          </a:p>
-          <a:p>
-            <a:pPr lvl="1"/>
-            <a:r>
-              <a:rPr lang="en-US" dirty="0">
-                <a:cs typeface="Times New Roman" panose="02020603050405020304" pitchFamily="18" charset="0"/>
-              </a:rPr>
-              <a:t>Accessed using normal load/store instructions </a:t>
-            </a:r>
-          </a:p>
-          <a:p>
-            <a:pPr lvl="1"/>
-            <a:r>
-              <a:rPr lang="en-US" dirty="0">
-                <a:cs typeface="Times New Roman" panose="02020603050405020304" pitchFamily="18" charset="0"/>
-              </a:rPr>
-              <a:t>Easy to integrate and extend (add new devices by assigning new addresses) </a:t>
-            </a:r>
-          </a:p>
-          <a:p>
-            <a:endParaRPr lang="en-US" sz="2400" dirty="0">
-              <a:cs typeface="Times New Roman" panose="02020603050405020304" pitchFamily="18" charset="0"/>
-            </a:endParaRPr>
-          </a:p>
-          <a:p>
-            <a:r>
-              <a:rPr lang="en-US" sz="2400" dirty="0">
-                <a:cs typeface="Times New Roman" panose="02020603050405020304" pitchFamily="18" charset="0"/>
-              </a:rPr>
-              <a:t>SFR (Special Function Registers) in traditional MCUs (e.g., PIC): </a:t>
-            </a:r>
-          </a:p>
-          <a:p>
-            <a:pPr lvl="1"/>
-            <a:r>
-              <a:rPr lang="en-US" dirty="0">
-                <a:solidFill>
-                  <a:srgbClr val="FF0000"/>
-                </a:solidFill>
-                <a:cs typeface="Times New Roman" panose="02020603050405020304" pitchFamily="18" charset="0"/>
-              </a:rPr>
-              <a:t>Peripheral control uses dedicated special registers</a:t>
-            </a:r>
-            <a:r>
-              <a:rPr lang="en-US" dirty="0">
-                <a:cs typeface="Times New Roman" panose="02020603050405020304" pitchFamily="18" charset="0"/>
-              </a:rPr>
-              <a:t> </a:t>
-            </a:r>
-          </a:p>
-          <a:p>
-            <a:pPr lvl="1"/>
-            <a:r>
-              <a:rPr lang="en-US" dirty="0">
-                <a:cs typeface="Times New Roman" panose="02020603050405020304" pitchFamily="18" charset="0"/>
-              </a:rPr>
-              <a:t>Often requires bank selection / bit-level control </a:t>
-            </a:r>
-          </a:p>
-          <a:p>
-            <a:pPr lvl="1"/>
-            <a:r>
-              <a:rPr lang="en-US" dirty="0">
-                <a:cs typeface="Times New Roman" panose="02020603050405020304" pitchFamily="18" charset="0"/>
-              </a:rPr>
-              <a:t>Less flexible when scaling to more peripherals</a:t>
-            </a:r>
-          </a:p>
-        </p:txBody>
-      </p:sp>
-    </p:spTree>
-    <p:extLst>
-      <p:ext uri="{BB962C8B-B14F-4D97-AF65-F5344CB8AC3E}">
-        <p14:creationId xmlns:p14="http://schemas.microsoft.com/office/powerpoint/2010/main" val="2803053597"/>
-      </p:ext>
-    </p:extLst>
-  </p:cSld>
-  <p:clrMapOvr>
-    <a:masterClrMapping/>
-  </p:clrMapOvr>
-</p:sld>
-</file>
-
-<file path=ppt/slides/slide12.xml><?xml version="1.0" encoding="utf-8"?>
-<p:sld xmlns:a="http://schemas.openxmlformats.org/drawingml/2006/main" xmlns:r="http://schemas.openxmlformats.org/officeDocument/2006/relationships" xmlns:p="http://schemas.openxmlformats.org/presentationml/2006/main">
-  <p:cSld>
-    <p:spTree>
-      <p:nvGrpSpPr>
-        <p:cNvPr id="1" name="">
-          <a:extLst>
-            <a:ext uri="{FF2B5EF4-FFF2-40B4-BE49-F238E27FC236}">
-              <a16:creationId xmlns:a16="http://schemas.microsoft.com/office/drawing/2014/main" id="{D37A883E-C9AB-0CAE-0BBB-12C928044276}"/>
-            </a:ext>
-          </a:extLst>
-        </p:cNvPr>
-        <p:cNvGrpSpPr/>
-        <p:nvPr/>
-      </p:nvGrpSpPr>
-      <p:grpSpPr>
-        <a:xfrm>
-          <a:off x="0" y="0"/>
-          <a:ext cx="0" cy="0"/>
-          <a:chOff x="0" y="0"/>
-          <a:chExt cx="0" cy="0"/>
-        </a:xfrm>
-      </p:grpSpPr>
-      <p:sp>
-        <p:nvSpPr>
-          <p:cNvPr id="2" name="標題 1">
-            <a:extLst>
-              <a:ext uri="{FF2B5EF4-FFF2-40B4-BE49-F238E27FC236}">
-                <a16:creationId xmlns:a16="http://schemas.microsoft.com/office/drawing/2014/main" id="{F4BEBA76-2919-629E-6585-B915CDBC258D}"/>
-              </a:ext>
-            </a:extLst>
-          </p:cNvPr>
-          <p:cNvSpPr>
-            <a:spLocks noGrp="1"/>
-          </p:cNvSpPr>
-          <p:nvPr>
-            <p:ph type="title"/>
-          </p:nvPr>
-        </p:nvSpPr>
-        <p:spPr/>
-        <p:txBody>
-          <a:bodyPr/>
-          <a:lstStyle/>
-          <a:p>
-            <a:r>
-              <a:rPr lang="en-US" altLang="zh-TW" sz="4000" b="1" dirty="0">
-                <a:solidFill>
-                  <a:schemeClr val="bg1">
-                    <a:lumMod val="85000"/>
-                  </a:schemeClr>
-                </a:solidFill>
-                <a:cs typeface="Calibri" panose="020F0502020204030204" pitchFamily="34" charset="0"/>
-              </a:rPr>
-              <a:t>AXI Mapping</a:t>
-            </a:r>
-            <a:endParaRPr lang="en-US" sz="4000" b="1" dirty="0">
-              <a:solidFill>
-                <a:schemeClr val="bg1">
-                  <a:lumMod val="85000"/>
-                </a:schemeClr>
-              </a:solidFill>
-              <a:cs typeface="Calibri" panose="020F0502020204030204" pitchFamily="34" charset="0"/>
-            </a:endParaRPr>
-          </a:p>
-        </p:txBody>
-      </p:sp>
-      <p:sp>
-        <p:nvSpPr>
-          <p:cNvPr id="3" name="文字版面配置區 2">
-            <a:extLst>
-              <a:ext uri="{FF2B5EF4-FFF2-40B4-BE49-F238E27FC236}">
-                <a16:creationId xmlns:a16="http://schemas.microsoft.com/office/drawing/2014/main" id="{D58CDDF9-280C-6BDC-C755-4CEC7130244F}"/>
-              </a:ext>
-            </a:extLst>
-          </p:cNvPr>
-          <p:cNvSpPr>
-            <a:spLocks noGrp="1"/>
-          </p:cNvSpPr>
-          <p:nvPr>
-            <p:ph type="body" idx="1"/>
-          </p:nvPr>
-        </p:nvSpPr>
-        <p:spPr>
-          <a:xfrm>
-            <a:off x="334963" y="1482725"/>
-            <a:ext cx="5761037" cy="5113338"/>
-          </a:xfrm>
-        </p:spPr>
-        <p:txBody>
-          <a:bodyPr/>
-          <a:lstStyle/>
-          <a:p>
-            <a:r>
-              <a:rPr lang="en-US" sz="2400" dirty="0">
-                <a:latin typeface="Times New Roman" panose="02020603050405020304" pitchFamily="18" charset="0"/>
-                <a:cs typeface="Times New Roman" panose="02020603050405020304" pitchFamily="18" charset="0"/>
-              </a:rPr>
-              <a:t>Although each peripheral is mapped to a memory address range, </a:t>
-            </a:r>
-            <a:r>
-              <a:rPr lang="en-US" sz="2400" dirty="0">
-                <a:solidFill>
-                  <a:srgbClr val="FF0000"/>
-                </a:solidFill>
-                <a:latin typeface="Times New Roman" panose="02020603050405020304" pitchFamily="18" charset="0"/>
-                <a:cs typeface="Times New Roman" panose="02020603050405020304" pitchFamily="18" charset="0"/>
-              </a:rPr>
-              <a:t>this address region does not correspond to physical RAM</a:t>
-            </a:r>
-            <a:r>
-              <a:rPr lang="en-US" sz="2400" dirty="0">
-                <a:latin typeface="Times New Roman" panose="02020603050405020304" pitchFamily="18" charset="0"/>
-                <a:cs typeface="Times New Roman" panose="02020603050405020304" pitchFamily="18" charset="0"/>
-              </a:rPr>
-              <a:t>. </a:t>
-            </a:r>
-          </a:p>
-          <a:p>
-            <a:endParaRPr lang="en-US" sz="2400" dirty="0">
-              <a:latin typeface="Times New Roman" panose="02020603050405020304" pitchFamily="18" charset="0"/>
-              <a:cs typeface="Times New Roman" panose="02020603050405020304" pitchFamily="18" charset="0"/>
-            </a:endParaRPr>
-          </a:p>
-          <a:p>
-            <a:r>
-              <a:rPr lang="en-US" sz="2400" dirty="0">
-                <a:latin typeface="Times New Roman" panose="02020603050405020304" pitchFamily="18" charset="0"/>
-                <a:cs typeface="Times New Roman" panose="02020603050405020304" pitchFamily="18" charset="0"/>
-              </a:rPr>
-              <a:t>Instead, AXI address decoding and </a:t>
-            </a:r>
-            <a:r>
-              <a:rPr lang="en-US" sz="2400" dirty="0">
-                <a:solidFill>
-                  <a:srgbClr val="FF0000"/>
-                </a:solidFill>
-                <a:latin typeface="Times New Roman" panose="02020603050405020304" pitchFamily="18" charset="0"/>
-                <a:cs typeface="Times New Roman" panose="02020603050405020304" pitchFamily="18" charset="0"/>
-              </a:rPr>
-              <a:t>routing logic forwards</a:t>
-            </a:r>
-            <a:r>
-              <a:rPr lang="en-US" sz="2400" dirty="0">
-                <a:latin typeface="Times New Roman" panose="02020603050405020304" pitchFamily="18" charset="0"/>
-                <a:cs typeface="Times New Roman" panose="02020603050405020304" pitchFamily="18" charset="0"/>
-              </a:rPr>
-              <a:t> these transactions to the target peripheral’s register interface (MMIO).</a:t>
-            </a:r>
-          </a:p>
-        </p:txBody>
-      </p:sp>
-      <p:pic>
-        <p:nvPicPr>
-          <p:cNvPr id="6" name="圖片 5" descr="一張含有 文字, 圖表, 螢幕擷取畫面, 平行 的圖片&#10;&#10;AI 產生的內容可能不正確。">
-            <a:extLst>
-              <a:ext uri="{FF2B5EF4-FFF2-40B4-BE49-F238E27FC236}">
-                <a16:creationId xmlns:a16="http://schemas.microsoft.com/office/drawing/2014/main" id="{24751282-FBD7-F506-7998-893B5B9A1E4C}"/>
-              </a:ext>
-            </a:extLst>
-          </p:cNvPr>
-          <p:cNvPicPr>
-            <a:picLocks noChangeAspect="1"/>
-          </p:cNvPicPr>
-          <p:nvPr/>
-        </p:nvPicPr>
-        <p:blipFill>
-          <a:blip r:embed="rId2"/>
-          <a:stretch>
-            <a:fillRect/>
-          </a:stretch>
-        </p:blipFill>
-        <p:spPr>
-          <a:xfrm>
-            <a:off x="6502400" y="1906172"/>
-            <a:ext cx="5640959" cy="3834884"/>
-          </a:xfrm>
-          <a:prstGeom prst="rect">
-            <a:avLst/>
-          </a:prstGeom>
-        </p:spPr>
-      </p:pic>
-    </p:spTree>
-    <p:extLst>
-      <p:ext uri="{BB962C8B-B14F-4D97-AF65-F5344CB8AC3E}">
-        <p14:creationId xmlns:p14="http://schemas.microsoft.com/office/powerpoint/2010/main" val="3508454355"/>
-      </p:ext>
-    </p:extLst>
-  </p:cSld>
-  <p:clrMapOvr>
-    <a:masterClrMapping/>
-  </p:clrMapOvr>
-</p:sld>
-</file>
-
-<file path=ppt/slides/slide13.xml><?xml version="1.0" encoding="utf-8"?>
-<p:sld xmlns:a="http://schemas.openxmlformats.org/drawingml/2006/main" xmlns:r="http://schemas.openxmlformats.org/officeDocument/2006/relationships" xmlns:p="http://schemas.openxmlformats.org/presentationml/2006/main">
-  <p:cSld>
-    <p:spTree>
-      <p:nvGrpSpPr>
-        <p:cNvPr id="1" name=""/>
-        <p:cNvGrpSpPr/>
-        <p:nvPr/>
-      </p:nvGrpSpPr>
-      <p:grpSpPr>
-        <a:xfrm>
-          <a:off x="0" y="0"/>
-          <a:ext cx="0" cy="0"/>
-          <a:chOff x="0" y="0"/>
-          <a:chExt cx="0" cy="0"/>
-        </a:xfrm>
-      </p:grpSpPr>
-      <p:sp>
-        <p:nvSpPr>
-          <p:cNvPr id="2" name="標題 1">
-            <a:extLst>
-              <a:ext uri="{FF2B5EF4-FFF2-40B4-BE49-F238E27FC236}">
-                <a16:creationId xmlns:a16="http://schemas.microsoft.com/office/drawing/2014/main" id="{160021F1-BA58-7AF4-2F56-55F9FF8F2256}"/>
-              </a:ext>
-            </a:extLst>
-          </p:cNvPr>
-          <p:cNvSpPr>
-            <a:spLocks noGrp="1"/>
-          </p:cNvSpPr>
-          <p:nvPr>
-            <p:ph type="title"/>
-          </p:nvPr>
-        </p:nvSpPr>
-        <p:spPr/>
-        <p:txBody>
-          <a:bodyPr/>
-          <a:lstStyle/>
-          <a:p>
-            <a:r>
-              <a:rPr lang="en-US" dirty="0"/>
-              <a:t>Microcontroller Overview</a:t>
-            </a:r>
-            <a:r>
-              <a:rPr lang="en-US" altLang="zh-TW" dirty="0"/>
-              <a:t> </a:t>
-            </a:r>
-            <a:endParaRPr lang="en-US" dirty="0"/>
-          </a:p>
-        </p:txBody>
-      </p:sp>
-      <p:sp>
-        <p:nvSpPr>
-          <p:cNvPr id="3" name="內容版面配置區 2">
-            <a:extLst>
-              <a:ext uri="{FF2B5EF4-FFF2-40B4-BE49-F238E27FC236}">
-                <a16:creationId xmlns:a16="http://schemas.microsoft.com/office/drawing/2014/main" id="{3F24A009-F66A-9ACC-E755-3676A3BD118C}"/>
-              </a:ext>
-            </a:extLst>
-          </p:cNvPr>
-          <p:cNvSpPr>
-            <a:spLocks noGrp="1"/>
-          </p:cNvSpPr>
-          <p:nvPr>
-            <p:ph idx="1"/>
-          </p:nvPr>
-        </p:nvSpPr>
-        <p:spPr/>
-        <p:txBody>
-          <a:bodyPr/>
-          <a:lstStyle/>
-          <a:p>
-            <a:pPr>
-              <a:lnSpc>
-                <a:spcPct val="150000"/>
-              </a:lnSpc>
-            </a:pPr>
-            <a:r>
-              <a:rPr lang="en-US" sz="2400" dirty="0"/>
-              <a:t>Processor: MicroBlaze RISC-V, </a:t>
-            </a:r>
-            <a:r>
-              <a:rPr lang="en-US" sz="2400" dirty="0">
-                <a:solidFill>
-                  <a:srgbClr val="FF0000"/>
-                </a:solidFill>
-              </a:rPr>
-              <a:t>32-bit</a:t>
-            </a:r>
-            <a:r>
-              <a:rPr lang="en-US" sz="2400" dirty="0"/>
-              <a:t>, Single Core, </a:t>
-            </a:r>
-            <a:r>
-              <a:rPr lang="en-US" sz="2400" dirty="0">
-                <a:solidFill>
-                  <a:srgbClr val="FF0000"/>
-                </a:solidFill>
-              </a:rPr>
-              <a:t>5-Stage Pipeline</a:t>
-            </a:r>
-          </a:p>
-          <a:p>
-            <a:pPr>
-              <a:lnSpc>
-                <a:spcPct val="150000"/>
-              </a:lnSpc>
-            </a:pPr>
-            <a:r>
-              <a:rPr lang="en-US" sz="2400" dirty="0"/>
-              <a:t>Clock: 100 MHz (12 MHz OSC → Clocking Wizard PLL)</a:t>
-            </a:r>
-          </a:p>
-          <a:p>
-            <a:pPr>
-              <a:lnSpc>
-                <a:spcPct val="150000"/>
-              </a:lnSpc>
-            </a:pPr>
-            <a:r>
-              <a:rPr lang="en-US" sz="2400" dirty="0"/>
-              <a:t>ISA Extensions: </a:t>
-            </a:r>
-            <a:r>
-              <a:rPr lang="en-US" sz="2400" b="1" dirty="0"/>
-              <a:t>RV32IM_Zba_Zbb_Zbc_Zbs</a:t>
-            </a:r>
-          </a:p>
-          <a:p>
-            <a:pPr>
-              <a:lnSpc>
-                <a:spcPct val="150000"/>
-              </a:lnSpc>
-            </a:pPr>
-            <a:r>
-              <a:rPr lang="en-US" sz="2400" dirty="0"/>
-              <a:t>Local Memory: 128 KB BRAM (ILMB + DLMB)</a:t>
-            </a:r>
-          </a:p>
-          <a:p>
-            <a:pPr>
-              <a:lnSpc>
-                <a:spcPct val="150000"/>
-              </a:lnSpc>
-            </a:pPr>
-            <a:r>
-              <a:rPr lang="en-US" sz="2400" dirty="0"/>
-              <a:t>Cache: </a:t>
-            </a:r>
-            <a:r>
-              <a:rPr lang="en-US" sz="2400" dirty="0">
-                <a:solidFill>
-                  <a:srgbClr val="FF0000"/>
-                </a:solidFill>
-              </a:rPr>
-              <a:t>Disabled</a:t>
-            </a:r>
-            <a:r>
-              <a:rPr lang="en-US" sz="2400" dirty="0"/>
-              <a:t> (I-Cache &amp; D-Cache both off)</a:t>
-            </a:r>
-          </a:p>
-          <a:p>
-            <a:pPr>
-              <a:lnSpc>
-                <a:spcPct val="150000"/>
-              </a:lnSpc>
-            </a:pPr>
-            <a:r>
-              <a:rPr lang="en-US" sz="2400" dirty="0"/>
-              <a:t>Debug: </a:t>
-            </a:r>
-            <a:r>
-              <a:rPr lang="en-US" sz="2400" dirty="0">
-                <a:solidFill>
-                  <a:srgbClr val="FF0000"/>
-                </a:solidFill>
-              </a:rPr>
-              <a:t>MDM JTAG </a:t>
-            </a:r>
-            <a:r>
-              <a:rPr lang="en-US" sz="2400" dirty="0"/>
-              <a:t>— breakpoints, register, memory R/W</a:t>
-            </a:r>
-          </a:p>
-          <a:p>
-            <a:pPr>
-              <a:lnSpc>
-                <a:spcPct val="150000"/>
-              </a:lnSpc>
-            </a:pPr>
-            <a:r>
-              <a:rPr lang="en-US" sz="2400" dirty="0"/>
-              <a:t>Interrupt: AXI INTC, 6 sources (3 Timer + 2 UART + 1 GPIO)</a:t>
-            </a:r>
-          </a:p>
-          <a:p>
-            <a:pPr marL="0" indent="0">
-              <a:buNone/>
-            </a:pPr>
-            <a:endParaRPr lang="en-US" sz="2400" dirty="0"/>
-          </a:p>
-        </p:txBody>
-      </p:sp>
-      <p:sp>
-        <p:nvSpPr>
-          <p:cNvPr id="4" name="投影片編號版面配置區 3">
-            <a:extLst>
-              <a:ext uri="{FF2B5EF4-FFF2-40B4-BE49-F238E27FC236}">
-                <a16:creationId xmlns:a16="http://schemas.microsoft.com/office/drawing/2014/main" id="{915DF62F-4D23-B66F-49B5-B952C77664CB}"/>
-              </a:ext>
-            </a:extLst>
-          </p:cNvPr>
-          <p:cNvSpPr>
-            <a:spLocks noGrp="1"/>
-          </p:cNvSpPr>
-          <p:nvPr>
-            <p:ph type="sldNum" sz="quarter" idx="12"/>
-          </p:nvPr>
-        </p:nvSpPr>
-        <p:spPr/>
-        <p:txBody>
-          <a:bodyPr/>
-          <a:lstStyle/>
-          <a:p>
-            <a:fld id="{F9F9ED32-46C6-469E-9D81-E8934DBD0961}" type="slidenum">
-              <a:rPr lang="zh-TW" altLang="en-US" smtClean="0"/>
-              <a:pPr/>
-              <a:t>13</a:t>
-            </a:fld>
-            <a:endParaRPr lang="zh-TW" altLang="en-US" dirty="0"/>
-          </a:p>
-        </p:txBody>
-      </p:sp>
-    </p:spTree>
-    <p:extLst>
-      <p:ext uri="{BB962C8B-B14F-4D97-AF65-F5344CB8AC3E}">
-        <p14:creationId xmlns:p14="http://schemas.microsoft.com/office/powerpoint/2010/main" val="4145163537"/>
-      </p:ext>
-    </p:extLst>
-  </p:cSld>
-  <p:clrMapOvr>
-    <a:masterClrMapping/>
-  </p:clrMapOvr>
-</p:sld>
-</file>
-
-<file path=ppt/slides/slide14.xml><?xml version="1.0" encoding="utf-8"?>
-<p:sld xmlns:a="http://schemas.openxmlformats.org/drawingml/2006/main" xmlns:r="http://schemas.openxmlformats.org/officeDocument/2006/relationships" xmlns:p="http://schemas.openxmlformats.org/presentationml/2006/main">
-  <p:cSld>
-    <p:spTree>
-      <p:nvGrpSpPr>
-        <p:cNvPr id="1" name="">
-          <a:extLst>
-            <a:ext uri="{FF2B5EF4-FFF2-40B4-BE49-F238E27FC236}">
               <a16:creationId xmlns:a16="http://schemas.microsoft.com/office/drawing/2014/main" id="{62701C01-7C92-39CC-4B8F-4B1732B5E088}"/>
             </a:ext>
           </a:extLst>
@@ -6936,21 +6137,51 @@
               </a:spcBef>
             </a:pPr>
             <a:r>
-              <a:rPr lang="en-US" sz="2400" dirty="0">
+              <a:rPr lang="en-US" altLang="zh-TW" sz="2400" dirty="0">
                 <a:latin typeface="Times New Roman" panose="02020603050405020304" pitchFamily="18" charset="0"/>
                 <a:cs typeface="Times New Roman" panose="02020603050405020304" pitchFamily="18" charset="0"/>
               </a:rPr>
-              <a:t>MDM / GPIO / Interrupt System / </a:t>
-            </a:r>
-            <a:r>
-              <a:rPr lang="zh-TW" altLang="en-US" sz="2400" dirty="0">
+              <a:t>Data Path / Instruction Path</a:t>
+            </a:r>
+            <a:endParaRPr lang="en-US" sz="2400" dirty="0">
+              <a:solidFill>
+                <a:schemeClr val="bg2"/>
+              </a:solidFill>
+              <a:latin typeface="Times New Roman" panose="02020603050405020304" pitchFamily="18" charset="0"/>
+              <a:cs typeface="Times New Roman" panose="02020603050405020304" pitchFamily="18" charset="0"/>
+            </a:endParaRPr>
+          </a:p>
+          <a:p>
+            <a:pPr>
+              <a:spcBef>
+                <a:spcPts val="1200"/>
+              </a:spcBef>
+            </a:pPr>
+            <a:r>
+              <a:rPr lang="en-US" sz="2400" dirty="0">
+                <a:solidFill>
+                  <a:schemeClr val="bg2"/>
+                </a:solidFill>
                 <a:latin typeface="Times New Roman" panose="02020603050405020304" pitchFamily="18" charset="0"/>
                 <a:cs typeface="Times New Roman" panose="02020603050405020304" pitchFamily="18" charset="0"/>
               </a:rPr>
+              <a:t>MDM / GPIO / Interrupt System / </a:t>
+            </a:r>
+            <a:r>
+              <a:rPr lang="zh-TW" altLang="en-US" sz="2400" dirty="0">
+                <a:solidFill>
+                  <a:schemeClr val="bg2"/>
+                </a:solidFill>
+                <a:latin typeface="Times New Roman" panose="02020603050405020304" pitchFamily="18" charset="0"/>
+                <a:cs typeface="Times New Roman" panose="02020603050405020304" pitchFamily="18" charset="0"/>
+              </a:rPr>
               <a:t> </a:t>
             </a:r>
             <a:r>
               <a:rPr lang="en-US" altLang="zh-TW" sz="2400" dirty="0">
+                <a:solidFill>
+                  <a:schemeClr val="bg2"/>
+                </a:solidFill>
                 <a:latin typeface="Times New Roman" panose="02020603050405020304" pitchFamily="18" charset="0"/>
                 <a:cs typeface="Times New Roman" panose="02020603050405020304" pitchFamily="18" charset="0"/>
               </a:rPr>
@@ -7074,7 +6305,7 @@
           <a:p>
             <a:fld id="{F9F9ED32-46C6-469E-9D81-E8934DBD0961}" type="slidenum">
               <a:rPr lang="zh-TW" altLang="en-US" smtClean="0"/>
-              <a:t>14</a:t>
+              <a:t>10</a:t>
             </a:fld>
             <a:endParaRPr lang="zh-TW" altLang="en-US" dirty="0"/>
           </a:p>
@@ -7105,7 +6336,7 @@
 </p:sld>
 </file>
 
-<file path=ppt/slides/slide15.xml><?xml version="1.0" encoding="utf-8"?>
+<file path=ppt/slides/slide11.xml><?xml version="1.0" encoding="utf-8"?>
 <p:sld xmlns:a="http://schemas.openxmlformats.org/drawingml/2006/main" xmlns:r="http://schemas.openxmlformats.org/officeDocument/2006/relationships" xmlns:p="http://schemas.openxmlformats.org/presentationml/2006/main">
   <p:cSld>
     <p:spTree>
@@ -7124,6 +6355,2002 @@
       </p:grpSpPr>
       <p:sp>
         <p:nvSpPr>
+          <p:cNvPr id="4" name="投影片編號版面配置區 3">
+            <a:extLst>
+              <a:ext uri="{FF2B5EF4-FFF2-40B4-BE49-F238E27FC236}">
+                <a16:creationId xmlns:a16="http://schemas.microsoft.com/office/drawing/2014/main" id="{9E48E67A-CBE1-4B47-7516-7466DD8CC9D3}"/>
+              </a:ext>
+            </a:extLst>
+          </p:cNvPr>
+          <p:cNvSpPr>
+            <a:spLocks noGrp="1"/>
+          </p:cNvSpPr>
+          <p:nvPr>
+            <p:ph type="sldNum" sz="quarter" idx="12"/>
+          </p:nvPr>
+        </p:nvSpPr>
+        <p:spPr/>
+        <p:txBody>
+          <a:bodyPr/>
+          <a:lstStyle/>
+          <a:p>
+            <a:fld id="{F9F9ED32-46C6-469E-9D81-E8934DBD0961}" type="slidenum">
+              <a:rPr lang="zh-TW" altLang="en-US" smtClean="0"/>
+              <a:pPr/>
+              <a:t>11</a:t>
+            </a:fld>
+            <a:endParaRPr lang="zh-TW" altLang="en-US" dirty="0"/>
+          </a:p>
+        </p:txBody>
+      </p:sp>
+      <p:pic>
+        <p:nvPicPr>
+          <p:cNvPr id="15" name="圖形 14">
+            <a:extLst>
+              <a:ext uri="{FF2B5EF4-FFF2-40B4-BE49-F238E27FC236}">
+                <a16:creationId xmlns:a16="http://schemas.microsoft.com/office/drawing/2014/main" id="{E9CC251C-9826-175B-8B7F-39BB8B80FB1E}"/>
+              </a:ext>
+            </a:extLst>
+          </p:cNvPr>
+          <p:cNvPicPr>
+            <a:picLocks noChangeAspect="1"/>
+          </p:cNvPicPr>
+          <p:nvPr/>
+        </p:nvPicPr>
+        <p:blipFill>
+          <a:blip>
+            <a:extLst>
+              <a:ext uri="{96DAC541-7B7A-43D3-8B79-37D633B846F1}">
+                <asvg:svgBlip xmlns:asvg="http://schemas.microsoft.com/office/drawing/2016/SVG/main" r:embed="rId2"/>
+              </a:ext>
+            </a:extLst>
+          </a:blip>
+          <a:stretch>
+            <a:fillRect/>
+          </a:stretch>
+        </p:blipFill>
+        <p:spPr>
+          <a:xfrm>
+            <a:off x="1577788" y="0"/>
+            <a:ext cx="9036424" cy="6858000"/>
+          </a:xfrm>
+          <a:prstGeom prst="rect">
+            <a:avLst/>
+          </a:prstGeom>
+        </p:spPr>
+      </p:pic>
+    </p:spTree>
+    <p:extLst>
+      <p:ext uri="{BB962C8B-B14F-4D97-AF65-F5344CB8AC3E}">
+        <p14:creationId xmlns:p14="http://schemas.microsoft.com/office/powerpoint/2010/main" val="3894383251"/>
+      </p:ext>
+    </p:extLst>
+  </p:cSld>
+  <p:clrMapOvr>
+    <a:masterClrMapping/>
+  </p:clrMapOvr>
+</p:sld>
+</file>
+
+<file path=ppt/slides/slide12.xml><?xml version="1.0" encoding="utf-8"?>
+<p:sld xmlns:a="http://schemas.openxmlformats.org/drawingml/2006/main" xmlns:r="http://schemas.openxmlformats.org/officeDocument/2006/relationships" xmlns:p="http://schemas.openxmlformats.org/presentationml/2006/main">
+  <p:cSld>
+    <p:spTree>
+      <p:nvGrpSpPr>
+        <p:cNvPr id="1" name="">
+          <a:extLst>
+            <a:ext uri="{FF2B5EF4-FFF2-40B4-BE49-F238E27FC236}">
+              <a16:creationId xmlns:a16="http://schemas.microsoft.com/office/drawing/2014/main" id="{AC9B3EDC-A309-94C5-D7DC-F5AD3B1C34F4}"/>
+            </a:ext>
+          </a:extLst>
+        </p:cNvPr>
+        <p:cNvGrpSpPr/>
+        <p:nvPr/>
+      </p:nvGrpSpPr>
+      <p:grpSpPr>
+        <a:xfrm>
+          <a:off x="0" y="0"/>
+          <a:ext cx="0" cy="0"/>
+          <a:chOff x="0" y="0"/>
+          <a:chExt cx="0" cy="0"/>
+        </a:xfrm>
+      </p:grpSpPr>
+      <p:sp>
+        <p:nvSpPr>
+          <p:cNvPr id="69" name="PlaceHolder 1">
+            <a:extLst>
+              <a:ext uri="{FF2B5EF4-FFF2-40B4-BE49-F238E27FC236}">
+                <a16:creationId xmlns:a16="http://schemas.microsoft.com/office/drawing/2014/main" id="{4F7665A9-AC2C-762D-2B6E-C4436CF0B993}"/>
+              </a:ext>
+            </a:extLst>
+          </p:cNvPr>
+          <p:cNvSpPr>
+            <a:spLocks noGrp="1"/>
+          </p:cNvSpPr>
+          <p:nvPr>
+            <p:ph type="title"/>
+          </p:nvPr>
+        </p:nvSpPr>
+        <p:spPr>
+          <a:xfrm>
+            <a:off x="1015920" y="0"/>
+            <a:ext cx="10972080" cy="1142280"/>
+          </a:xfrm>
+          <a:prstGeom prst="rect">
+            <a:avLst/>
+          </a:prstGeom>
+          <a:noFill/>
+          <a:ln w="0">
+            <a:noFill/>
+          </a:ln>
+        </p:spPr>
+        <p:txBody>
+          <a:bodyPr lIns="91440" tIns="45720" rIns="91440" bIns="45720" anchor="ctr">
+            <a:noAutofit/>
+          </a:bodyPr>
+          <a:lstStyle/>
+          <a:p>
+            <a:pPr indent="0">
+              <a:lnSpc>
+                <a:spcPct val="100000"/>
+              </a:lnSpc>
+              <a:buNone/>
+              <a:tabLst>
+                <a:tab pos="0" algn="l"/>
+              </a:tabLst>
+            </a:pPr>
+            <a:r>
+              <a:rPr lang="en-US" dirty="0"/>
+              <a:t>Memory Subsystem Architecture</a:t>
+            </a:r>
+            <a:endParaRPr lang="en-US" sz="4000" b="0" strike="noStrike" spc="-1" dirty="0">
+              <a:solidFill>
+                <a:srgbClr val="000000"/>
+              </a:solidFill>
+              <a:latin typeface="+mn-lt"/>
+            </a:endParaRPr>
+          </a:p>
+        </p:txBody>
+      </p:sp>
+      <p:sp>
+        <p:nvSpPr>
+          <p:cNvPr id="70" name="矩形: 圓角 3">
+            <a:extLst>
+              <a:ext uri="{FF2B5EF4-FFF2-40B4-BE49-F238E27FC236}">
+                <a16:creationId xmlns:a16="http://schemas.microsoft.com/office/drawing/2014/main" id="{4B38E0FB-8E8C-E904-6AAD-00DAF005670B}"/>
+              </a:ext>
+            </a:extLst>
+          </p:cNvPr>
+          <p:cNvSpPr/>
+          <p:nvPr/>
+        </p:nvSpPr>
+        <p:spPr>
+          <a:xfrm>
+            <a:off x="2217504" y="4047149"/>
+            <a:ext cx="1518840" cy="815040"/>
+          </a:xfrm>
+          <a:prstGeom prst="roundRect">
+            <a:avLst>
+              <a:gd name="adj" fmla="val 16667"/>
+            </a:avLst>
+          </a:prstGeom>
+          <a:solidFill>
+            <a:srgbClr val="FFC000"/>
+          </a:solidFill>
+          <a:ln>
+            <a:solidFill>
+              <a:srgbClr val="000000"/>
+            </a:solidFill>
+            <a:round/>
+          </a:ln>
+        </p:spPr>
+        <p:style>
+          <a:lnRef idx="2">
+            <a:schemeClr val="dk1">
+              <a:shade val="15000"/>
+            </a:schemeClr>
+          </a:lnRef>
+          <a:fillRef idx="1">
+            <a:schemeClr val="dk1"/>
+          </a:fillRef>
+          <a:effectRef idx="0">
+            <a:schemeClr val="dk1"/>
+          </a:effectRef>
+          <a:fontRef idx="minor"/>
+        </p:style>
+        <p:txBody>
+          <a:bodyPr lIns="90000" tIns="45000" rIns="90000" bIns="45000" anchor="ctr">
+            <a:noAutofit/>
+          </a:bodyPr>
+          <a:lstStyle/>
+          <a:p>
+            <a:pPr algn="ctr">
+              <a:lnSpc>
+                <a:spcPct val="100000"/>
+              </a:lnSpc>
+            </a:pPr>
+            <a:r>
+              <a:rPr lang="en-US" sz="1400" b="0" strike="noStrike" spc="-1" dirty="0">
+                <a:solidFill>
+                  <a:schemeClr val="dk1"/>
+                </a:solidFill>
+                <a:ea typeface="Arial"/>
+              </a:rPr>
+              <a:t>MicroBlaze V</a:t>
+            </a:r>
+            <a:endParaRPr lang="en-US" sz="1400" b="0" strike="noStrike" spc="-1" dirty="0">
+              <a:solidFill>
+                <a:srgbClr val="000000"/>
+              </a:solidFill>
+            </a:endParaRPr>
+          </a:p>
+        </p:txBody>
+      </p:sp>
+      <p:sp>
+        <p:nvSpPr>
+          <p:cNvPr id="76" name="矩形 12">
+            <a:extLst>
+              <a:ext uri="{FF2B5EF4-FFF2-40B4-BE49-F238E27FC236}">
+                <a16:creationId xmlns:a16="http://schemas.microsoft.com/office/drawing/2014/main" id="{F8CE3DE0-AB66-3F9D-A39F-187E999E9BE5}"/>
+              </a:ext>
+            </a:extLst>
+          </p:cNvPr>
+          <p:cNvSpPr/>
+          <p:nvPr/>
+        </p:nvSpPr>
+        <p:spPr>
+          <a:xfrm>
+            <a:off x="357783" y="6072961"/>
+            <a:ext cx="11476434" cy="254880"/>
+          </a:xfrm>
+          <a:prstGeom prst="rect">
+            <a:avLst/>
+          </a:prstGeom>
+          <a:solidFill>
+            <a:schemeClr val="tx1"/>
+          </a:solidFill>
+          <a:ln>
+            <a:solidFill>
+              <a:srgbClr val="516263"/>
+            </a:solidFill>
+            <a:round/>
+          </a:ln>
+        </p:spPr>
+        <p:style>
+          <a:lnRef idx="2">
+            <a:schemeClr val="accent1">
+              <a:shade val="15000"/>
+            </a:schemeClr>
+          </a:lnRef>
+          <a:fillRef idx="1">
+            <a:schemeClr val="accent1"/>
+          </a:fillRef>
+          <a:effectRef idx="0">
+            <a:schemeClr val="accent1"/>
+          </a:effectRef>
+          <a:fontRef idx="minor"/>
+        </p:style>
+        <p:txBody>
+          <a:bodyPr lIns="90000" tIns="45000" rIns="90000" bIns="45000" anchor="ctr">
+            <a:noAutofit/>
+          </a:bodyPr>
+          <a:lstStyle/>
+          <a:p>
+            <a:pPr algn="ctr">
+              <a:lnSpc>
+                <a:spcPct val="100000"/>
+              </a:lnSpc>
+            </a:pPr>
+            <a:r>
+              <a:rPr lang="en-US" sz="2000" b="0" strike="noStrike" spc="-1">
+                <a:solidFill>
+                  <a:schemeClr val="lt1"/>
+                </a:solidFill>
+                <a:ea typeface="Arial"/>
+              </a:rPr>
+              <a:t>AXI Interconnect (BUS)</a:t>
+            </a:r>
+            <a:endParaRPr lang="en-US" sz="2000" b="0" strike="noStrike" spc="-1">
+              <a:solidFill>
+                <a:srgbClr val="FFFFFF"/>
+              </a:solidFill>
+            </a:endParaRPr>
+          </a:p>
+        </p:txBody>
+      </p:sp>
+      <p:sp>
+        <p:nvSpPr>
+          <p:cNvPr id="89" name="矩形: 圓角 40">
+            <a:extLst>
+              <a:ext uri="{FF2B5EF4-FFF2-40B4-BE49-F238E27FC236}">
+                <a16:creationId xmlns:a16="http://schemas.microsoft.com/office/drawing/2014/main" id="{B7F58E37-A80C-88D4-5AF6-9295E3766375}"/>
+              </a:ext>
+            </a:extLst>
+          </p:cNvPr>
+          <p:cNvSpPr/>
+          <p:nvPr/>
+        </p:nvSpPr>
+        <p:spPr>
+          <a:xfrm>
+            <a:off x="2217504" y="2901629"/>
+            <a:ext cx="1518840" cy="815040"/>
+          </a:xfrm>
+          <a:prstGeom prst="roundRect">
+            <a:avLst>
+              <a:gd name="adj" fmla="val 16667"/>
+            </a:avLst>
+          </a:prstGeom>
+          <a:solidFill>
+            <a:srgbClr val="FFC000"/>
+          </a:solidFill>
+          <a:ln>
+            <a:solidFill>
+              <a:srgbClr val="000000"/>
+            </a:solidFill>
+            <a:round/>
+          </a:ln>
+        </p:spPr>
+        <p:style>
+          <a:lnRef idx="2">
+            <a:schemeClr val="dk1">
+              <a:shade val="15000"/>
+            </a:schemeClr>
+          </a:lnRef>
+          <a:fillRef idx="1">
+            <a:schemeClr val="dk1"/>
+          </a:fillRef>
+          <a:effectRef idx="0">
+            <a:schemeClr val="dk1"/>
+          </a:effectRef>
+          <a:fontRef idx="minor"/>
+        </p:style>
+        <p:txBody>
+          <a:bodyPr lIns="90000" tIns="45000" rIns="90000" bIns="45000" anchor="ctr">
+            <a:noAutofit/>
+          </a:bodyPr>
+          <a:lstStyle/>
+          <a:p>
+            <a:pPr algn="ctr">
+              <a:lnSpc>
+                <a:spcPct val="100000"/>
+              </a:lnSpc>
+            </a:pPr>
+            <a:r>
+              <a:rPr lang="en-US" sz="1400" b="0" strike="noStrike" spc="-1">
+                <a:solidFill>
+                  <a:schemeClr val="dk1"/>
+                </a:solidFill>
+                <a:ea typeface="Arial"/>
+              </a:rPr>
+              <a:t>Local Memory</a:t>
+            </a:r>
+            <a:endParaRPr lang="en-US" sz="1400" b="0" strike="noStrike" spc="-1">
+              <a:solidFill>
+                <a:srgbClr val="000000"/>
+              </a:solidFill>
+            </a:endParaRPr>
+          </a:p>
+          <a:p>
+            <a:pPr algn="ctr">
+              <a:lnSpc>
+                <a:spcPct val="100000"/>
+              </a:lnSpc>
+            </a:pPr>
+            <a:r>
+              <a:rPr lang="en-US" sz="1400" b="0" strike="noStrike" spc="-1">
+                <a:solidFill>
+                  <a:schemeClr val="dk1"/>
+                </a:solidFill>
+                <a:ea typeface="Arial"/>
+              </a:rPr>
+              <a:t>Bus</a:t>
+            </a:r>
+            <a:endParaRPr lang="en-US" sz="1400" b="0" strike="noStrike" spc="-1">
+              <a:solidFill>
+                <a:srgbClr val="000000"/>
+              </a:solidFill>
+            </a:endParaRPr>
+          </a:p>
+        </p:txBody>
+      </p:sp>
+      <p:cxnSp>
+        <p:nvCxnSpPr>
+          <p:cNvPr id="90" name="直線單箭頭接點 43">
+            <a:extLst>
+              <a:ext uri="{FF2B5EF4-FFF2-40B4-BE49-F238E27FC236}">
+                <a16:creationId xmlns:a16="http://schemas.microsoft.com/office/drawing/2014/main" id="{F9AF19C2-5090-702C-D170-6E609FFD4EB8}"/>
+              </a:ext>
+            </a:extLst>
+          </p:cNvPr>
+          <p:cNvCxnSpPr>
+            <a:stCxn id="89" idx="2"/>
+            <a:endCxn id="70" idx="0"/>
+          </p:cNvCxnSpPr>
+          <p:nvPr/>
+        </p:nvCxnSpPr>
+        <p:spPr>
+          <a:xfrm>
+            <a:off x="2976744" y="3716669"/>
+            <a:ext cx="360" cy="330840"/>
+          </a:xfrm>
+          <a:prstGeom prst="straightConnector1">
+            <a:avLst/>
+          </a:prstGeom>
+          <a:ln w="28575">
+            <a:solidFill>
+              <a:srgbClr val="000000"/>
+            </a:solidFill>
+            <a:round/>
+            <a:headEnd type="arrow" w="med" len="med"/>
+            <a:tailEnd type="arrow" w="med" len="med"/>
+          </a:ln>
+        </p:spPr>
+      </p:cxnSp>
+      <p:sp>
+        <p:nvSpPr>
+          <p:cNvPr id="91" name="矩形: 圓角 44">
+            <a:extLst>
+              <a:ext uri="{FF2B5EF4-FFF2-40B4-BE49-F238E27FC236}">
+                <a16:creationId xmlns:a16="http://schemas.microsoft.com/office/drawing/2014/main" id="{544A8586-0A13-B205-8F07-59222A176CE6}"/>
+              </a:ext>
+            </a:extLst>
+          </p:cNvPr>
+          <p:cNvSpPr/>
+          <p:nvPr/>
+        </p:nvSpPr>
+        <p:spPr>
+          <a:xfrm>
+            <a:off x="2217324" y="1755909"/>
+            <a:ext cx="1518840" cy="815040"/>
+          </a:xfrm>
+          <a:prstGeom prst="roundRect">
+            <a:avLst>
+              <a:gd name="adj" fmla="val 16667"/>
+            </a:avLst>
+          </a:prstGeom>
+          <a:solidFill>
+            <a:srgbClr val="FFC000"/>
+          </a:solidFill>
+          <a:ln>
+            <a:solidFill>
+              <a:srgbClr val="000000"/>
+            </a:solidFill>
+            <a:round/>
+          </a:ln>
+        </p:spPr>
+        <p:style>
+          <a:lnRef idx="2">
+            <a:schemeClr val="dk1">
+              <a:shade val="15000"/>
+            </a:schemeClr>
+          </a:lnRef>
+          <a:fillRef idx="1">
+            <a:schemeClr val="dk1"/>
+          </a:fillRef>
+          <a:effectRef idx="0">
+            <a:schemeClr val="dk1"/>
+          </a:effectRef>
+          <a:fontRef idx="minor"/>
+        </p:style>
+        <p:txBody>
+          <a:bodyPr lIns="90000" tIns="45000" rIns="90000" bIns="45000" anchor="ctr">
+            <a:noAutofit/>
+          </a:bodyPr>
+          <a:lstStyle/>
+          <a:p>
+            <a:pPr algn="ctr">
+              <a:lnSpc>
+                <a:spcPct val="100000"/>
+              </a:lnSpc>
+            </a:pPr>
+            <a:r>
+              <a:rPr lang="en-US" sz="1400" b="0" strike="noStrike" spc="-1" dirty="0">
+                <a:solidFill>
+                  <a:schemeClr val="dk1"/>
+                </a:solidFill>
+                <a:ea typeface="Arial"/>
+              </a:rPr>
+              <a:t>Data Mem /</a:t>
+            </a:r>
+            <a:endParaRPr lang="en-US" sz="1400" spc="-1" dirty="0">
+              <a:solidFill>
+                <a:schemeClr val="dk1"/>
+              </a:solidFill>
+              <a:ea typeface="Arial"/>
+            </a:endParaRPr>
+          </a:p>
+          <a:p>
+            <a:pPr algn="ctr">
+              <a:lnSpc>
+                <a:spcPct val="100000"/>
+              </a:lnSpc>
+            </a:pPr>
+            <a:r>
+              <a:rPr lang="en-US" sz="1400" b="0" strike="noStrike" spc="-1" dirty="0">
+                <a:solidFill>
+                  <a:schemeClr val="dk1"/>
+                </a:solidFill>
+              </a:rPr>
+              <a:t>Inst Mem /</a:t>
+            </a:r>
+            <a:endParaRPr lang="en-US" sz="1400" b="0" strike="noStrike" spc="-1" dirty="0">
+              <a:solidFill>
+                <a:srgbClr val="000000"/>
+              </a:solidFill>
+            </a:endParaRPr>
+          </a:p>
+          <a:p>
+            <a:pPr algn="ctr">
+              <a:lnSpc>
+                <a:spcPct val="100000"/>
+              </a:lnSpc>
+            </a:pPr>
+            <a:r>
+              <a:rPr lang="en-US" sz="1400" b="0" strike="noStrike" spc="-1" dirty="0">
+                <a:solidFill>
+                  <a:schemeClr val="dk1"/>
+                </a:solidFill>
+                <a:ea typeface="Arial"/>
+              </a:rPr>
+              <a:t>Shared 128KB</a:t>
+            </a:r>
+            <a:endParaRPr lang="en-US" sz="1400" b="0" strike="noStrike" spc="-1" dirty="0">
+              <a:solidFill>
+                <a:srgbClr val="000000"/>
+              </a:solidFill>
+            </a:endParaRPr>
+          </a:p>
+        </p:txBody>
+      </p:sp>
+      <p:cxnSp>
+        <p:nvCxnSpPr>
+          <p:cNvPr id="94" name="直線單箭頭接點 51">
+            <a:extLst>
+              <a:ext uri="{FF2B5EF4-FFF2-40B4-BE49-F238E27FC236}">
+                <a16:creationId xmlns:a16="http://schemas.microsoft.com/office/drawing/2014/main" id="{A08B72DD-477E-5AEF-02CB-D6883BD66362}"/>
+              </a:ext>
+            </a:extLst>
+          </p:cNvPr>
+          <p:cNvCxnSpPr>
+            <a:cxnSpLocks/>
+            <a:stCxn id="91" idx="2"/>
+            <a:endCxn id="89" idx="0"/>
+          </p:cNvCxnSpPr>
+          <p:nvPr/>
+        </p:nvCxnSpPr>
+        <p:spPr>
+          <a:xfrm>
+            <a:off x="2976744" y="2570949"/>
+            <a:ext cx="180" cy="330680"/>
+          </a:xfrm>
+          <a:prstGeom prst="straightConnector1">
+            <a:avLst/>
+          </a:prstGeom>
+          <a:ln w="28575">
+            <a:solidFill>
+              <a:srgbClr val="000000"/>
+            </a:solidFill>
+            <a:round/>
+            <a:headEnd type="arrow" w="med" len="med"/>
+            <a:tailEnd type="arrow" w="med" len="med"/>
+          </a:ln>
+        </p:spPr>
+      </p:cxnSp>
+      <p:sp>
+        <p:nvSpPr>
+          <p:cNvPr id="20" name="矩形: 圓角 23">
+            <a:extLst>
+              <a:ext uri="{FF2B5EF4-FFF2-40B4-BE49-F238E27FC236}">
+                <a16:creationId xmlns:a16="http://schemas.microsoft.com/office/drawing/2014/main" id="{FA75E766-E83B-E04C-8A4A-2C300FA40729}"/>
+              </a:ext>
+            </a:extLst>
+          </p:cNvPr>
+          <p:cNvSpPr/>
+          <p:nvPr/>
+        </p:nvSpPr>
+        <p:spPr>
+          <a:xfrm>
+            <a:off x="5091018" y="3858610"/>
+            <a:ext cx="1208160" cy="1007963"/>
+          </a:xfrm>
+          <a:prstGeom prst="roundRect">
+            <a:avLst>
+              <a:gd name="adj" fmla="val 16667"/>
+            </a:avLst>
+          </a:prstGeom>
+          <a:solidFill>
+            <a:schemeClr val="bg2">
+              <a:lumMod val="40000"/>
+              <a:lumOff val="60000"/>
+            </a:schemeClr>
+          </a:solidFill>
+          <a:ln>
+            <a:solidFill>
+              <a:srgbClr val="516263"/>
+            </a:solidFill>
+            <a:round/>
+          </a:ln>
+        </p:spPr>
+        <p:style>
+          <a:lnRef idx="2">
+            <a:schemeClr val="accent1">
+              <a:shade val="15000"/>
+            </a:schemeClr>
+          </a:lnRef>
+          <a:fillRef idx="1">
+            <a:schemeClr val="accent1"/>
+          </a:fillRef>
+          <a:effectRef idx="0">
+            <a:schemeClr val="accent1"/>
+          </a:effectRef>
+          <a:fontRef idx="minor"/>
+        </p:style>
+        <p:txBody>
+          <a:bodyPr lIns="90000" tIns="45000" rIns="90000" bIns="45000" anchor="ctr">
+            <a:noAutofit/>
+          </a:bodyPr>
+          <a:lstStyle/>
+          <a:p>
+            <a:pPr algn="ctr">
+              <a:lnSpc>
+                <a:spcPct val="100000"/>
+              </a:lnSpc>
+            </a:pPr>
+            <a:r>
+              <a:rPr lang="en-US" sz="1400" b="0" strike="noStrike" spc="-1" dirty="0">
+                <a:solidFill>
+                  <a:schemeClr val="dk1"/>
+                </a:solidFill>
+                <a:ea typeface="Arial"/>
+              </a:rPr>
+              <a:t>AXI</a:t>
+            </a:r>
+          </a:p>
+          <a:p>
+            <a:pPr algn="ctr">
+              <a:lnSpc>
+                <a:spcPct val="100000"/>
+              </a:lnSpc>
+            </a:pPr>
+            <a:r>
+              <a:rPr lang="en-US" sz="1400" b="0" strike="noStrike" spc="-1" dirty="0">
+                <a:solidFill>
+                  <a:schemeClr val="dk1"/>
+                </a:solidFill>
+              </a:rPr>
+              <a:t>EMC</a:t>
+            </a:r>
+            <a:endParaRPr lang="en-US" sz="1400" b="0" strike="noStrike" spc="-1" dirty="0">
+              <a:solidFill>
+                <a:srgbClr val="000000"/>
+              </a:solidFill>
+            </a:endParaRPr>
+          </a:p>
+        </p:txBody>
+      </p:sp>
+      <p:sp>
+        <p:nvSpPr>
+          <p:cNvPr id="23" name="矩形: 圓角 23">
+            <a:extLst>
+              <a:ext uri="{FF2B5EF4-FFF2-40B4-BE49-F238E27FC236}">
+                <a16:creationId xmlns:a16="http://schemas.microsoft.com/office/drawing/2014/main" id="{B7BC6666-9CF9-EE27-835B-44D9039D2EA5}"/>
+              </a:ext>
+            </a:extLst>
+          </p:cNvPr>
+          <p:cNvSpPr/>
+          <p:nvPr/>
+        </p:nvSpPr>
+        <p:spPr>
+          <a:xfrm>
+            <a:off x="5091018" y="2511130"/>
+            <a:ext cx="1209600" cy="1045080"/>
+          </a:xfrm>
+          <a:prstGeom prst="roundRect">
+            <a:avLst>
+              <a:gd name="adj" fmla="val 16667"/>
+            </a:avLst>
+          </a:prstGeom>
+          <a:solidFill>
+            <a:schemeClr val="bg2">
+              <a:lumMod val="40000"/>
+              <a:lumOff val="60000"/>
+            </a:schemeClr>
+          </a:solidFill>
+          <a:ln>
+            <a:solidFill>
+              <a:srgbClr val="516263"/>
+            </a:solidFill>
+            <a:round/>
+          </a:ln>
+        </p:spPr>
+        <p:style>
+          <a:lnRef idx="2">
+            <a:schemeClr val="accent1">
+              <a:shade val="15000"/>
+            </a:schemeClr>
+          </a:lnRef>
+          <a:fillRef idx="1">
+            <a:schemeClr val="accent1"/>
+          </a:fillRef>
+          <a:effectRef idx="0">
+            <a:schemeClr val="accent1"/>
+          </a:effectRef>
+          <a:fontRef idx="minor"/>
+        </p:style>
+        <p:txBody>
+          <a:bodyPr lIns="90000" tIns="45000" rIns="90000" bIns="45000" anchor="ctr">
+            <a:noAutofit/>
+          </a:bodyPr>
+          <a:lstStyle/>
+          <a:p>
+            <a:pPr algn="ctr">
+              <a:lnSpc>
+                <a:spcPct val="100000"/>
+              </a:lnSpc>
+            </a:pPr>
+            <a:r>
+              <a:rPr lang="en-US" sz="1400" b="0" strike="noStrike" spc="-1" dirty="0">
+                <a:solidFill>
+                  <a:srgbClr val="000000"/>
+                </a:solidFill>
+              </a:rPr>
+              <a:t>SRAM</a:t>
+            </a:r>
+          </a:p>
+          <a:p>
+            <a:pPr algn="ctr">
+              <a:lnSpc>
+                <a:spcPct val="100000"/>
+              </a:lnSpc>
+            </a:pPr>
+            <a:r>
+              <a:rPr lang="en-US" sz="1400" spc="-1" dirty="0">
+                <a:solidFill>
+                  <a:srgbClr val="000000"/>
+                </a:solidFill>
+              </a:rPr>
+              <a:t>512KB</a:t>
+            </a:r>
+            <a:endParaRPr lang="en-US" sz="1400" b="0" strike="noStrike" spc="-1" dirty="0">
+              <a:solidFill>
+                <a:srgbClr val="000000"/>
+              </a:solidFill>
+            </a:endParaRPr>
+          </a:p>
+        </p:txBody>
+      </p:sp>
+      <p:cxnSp>
+        <p:nvCxnSpPr>
+          <p:cNvPr id="24" name="直線單箭頭接點 48">
+            <a:extLst>
+              <a:ext uri="{FF2B5EF4-FFF2-40B4-BE49-F238E27FC236}">
+                <a16:creationId xmlns:a16="http://schemas.microsoft.com/office/drawing/2014/main" id="{24A8A9E0-019A-7D11-C114-AE960F16CC3E}"/>
+              </a:ext>
+            </a:extLst>
+          </p:cNvPr>
+          <p:cNvCxnSpPr>
+            <a:cxnSpLocks/>
+            <a:stCxn id="23" idx="2"/>
+            <a:endCxn id="20" idx="0"/>
+          </p:cNvCxnSpPr>
+          <p:nvPr/>
+        </p:nvCxnSpPr>
+        <p:spPr>
+          <a:xfrm flipH="1">
+            <a:off x="5695098" y="3556210"/>
+            <a:ext cx="720" cy="302400"/>
+          </a:xfrm>
+          <a:prstGeom prst="straightConnector1">
+            <a:avLst/>
+          </a:prstGeom>
+          <a:ln w="28575">
+            <a:solidFill>
+              <a:srgbClr val="000000"/>
+            </a:solidFill>
+            <a:round/>
+            <a:headEnd type="arrow" w="med" len="med"/>
+            <a:tailEnd type="arrow" w="med" len="med"/>
+          </a:ln>
+        </p:spPr>
+      </p:cxnSp>
+      <p:sp>
+        <p:nvSpPr>
+          <p:cNvPr id="6" name="Slide Number Placeholder 5">
+            <a:extLst>
+              <a:ext uri="{FF2B5EF4-FFF2-40B4-BE49-F238E27FC236}">
+                <a16:creationId xmlns:a16="http://schemas.microsoft.com/office/drawing/2014/main" id="{0F1FBA3D-0F12-BC37-F542-0C79282917FC}"/>
+              </a:ext>
+            </a:extLst>
+          </p:cNvPr>
+          <p:cNvSpPr>
+            <a:spLocks noGrp="1"/>
+          </p:cNvSpPr>
+          <p:nvPr>
+            <p:ph type="sldNum" idx="10"/>
+          </p:nvPr>
+        </p:nvSpPr>
+        <p:spPr/>
+        <p:txBody>
+          <a:bodyPr/>
+          <a:lstStyle/>
+          <a:p>
+            <a:fld id="{5E7A655E-BA10-45EB-B439-1EA08694B58E}" type="slidenum">
+              <a:rPr lang="en-TW" smtClean="0">
+                <a:latin typeface="+mn-lt"/>
+              </a:rPr>
+              <a:t>12</a:t>
+            </a:fld>
+            <a:endParaRPr lang="en-TW">
+              <a:latin typeface="+mn-lt"/>
+            </a:endParaRPr>
+          </a:p>
+        </p:txBody>
+      </p:sp>
+      <p:sp>
+        <p:nvSpPr>
+          <p:cNvPr id="31" name="箭號: 左-右雙向 30">
+            <a:extLst>
+              <a:ext uri="{FF2B5EF4-FFF2-40B4-BE49-F238E27FC236}">
+                <a16:creationId xmlns:a16="http://schemas.microsoft.com/office/drawing/2014/main" id="{2DA41A05-6416-5C1E-8EAC-1A4252128A0B}"/>
+              </a:ext>
+            </a:extLst>
+          </p:cNvPr>
+          <p:cNvSpPr/>
+          <p:nvPr/>
+        </p:nvSpPr>
+        <p:spPr>
+          <a:xfrm rot="5400000">
+            <a:off x="2179109" y="5316298"/>
+            <a:ext cx="991956" cy="249120"/>
+          </a:xfrm>
+          <a:prstGeom prst="leftRightArrow">
+            <a:avLst/>
+          </a:prstGeom>
+          <a:solidFill>
+            <a:schemeClr val="tx1"/>
+          </a:solidFill>
+          <a:ln>
+            <a:solidFill>
+              <a:schemeClr val="tx1"/>
+            </a:solidFill>
+          </a:ln>
+        </p:spPr>
+        <p:style>
+          <a:lnRef idx="2">
+            <a:schemeClr val="accent1">
+              <a:shade val="15000"/>
+            </a:schemeClr>
+          </a:lnRef>
+          <a:fillRef idx="1">
+            <a:schemeClr val="accent1"/>
+          </a:fillRef>
+          <a:effectRef idx="0">
+            <a:schemeClr val="accent1"/>
+          </a:effectRef>
+          <a:fontRef idx="minor">
+            <a:schemeClr val="lt1"/>
+          </a:fontRef>
+        </p:style>
+        <p:txBody>
+          <a:bodyPr rtlCol="0" anchor="ctr"/>
+          <a:lstStyle/>
+          <a:p>
+            <a:pPr algn="ctr"/>
+            <a:endParaRPr lang="en-US"/>
+          </a:p>
+        </p:txBody>
+      </p:sp>
+      <p:sp>
+        <p:nvSpPr>
+          <p:cNvPr id="10" name="箭號: 左-右雙向 9">
+            <a:extLst>
+              <a:ext uri="{FF2B5EF4-FFF2-40B4-BE49-F238E27FC236}">
+                <a16:creationId xmlns:a16="http://schemas.microsoft.com/office/drawing/2014/main" id="{9478FF48-59AA-D23B-2B37-D1D3D43C7CCB}"/>
+              </a:ext>
+            </a:extLst>
+          </p:cNvPr>
+          <p:cNvSpPr/>
+          <p:nvPr/>
+        </p:nvSpPr>
+        <p:spPr>
+          <a:xfrm rot="5400000">
+            <a:off x="2755715" y="5317832"/>
+            <a:ext cx="991956" cy="249120"/>
+          </a:xfrm>
+          <a:prstGeom prst="leftRightArrow">
+            <a:avLst/>
+          </a:prstGeom>
+          <a:solidFill>
+            <a:schemeClr val="tx1"/>
+          </a:solidFill>
+          <a:ln>
+            <a:solidFill>
+              <a:schemeClr val="tx1"/>
+            </a:solidFill>
+          </a:ln>
+        </p:spPr>
+        <p:style>
+          <a:lnRef idx="2">
+            <a:schemeClr val="accent1">
+              <a:shade val="15000"/>
+            </a:schemeClr>
+          </a:lnRef>
+          <a:fillRef idx="1">
+            <a:schemeClr val="accent1"/>
+          </a:fillRef>
+          <a:effectRef idx="0">
+            <a:schemeClr val="accent1"/>
+          </a:effectRef>
+          <a:fontRef idx="minor">
+            <a:schemeClr val="lt1"/>
+          </a:fontRef>
+        </p:style>
+        <p:txBody>
+          <a:bodyPr rtlCol="0" anchor="ctr"/>
+          <a:lstStyle/>
+          <a:p>
+            <a:pPr algn="ctr"/>
+            <a:endParaRPr lang="en-US"/>
+          </a:p>
+        </p:txBody>
+      </p:sp>
+      <p:sp>
+        <p:nvSpPr>
+          <p:cNvPr id="11" name="箭號: 左-右雙向 10">
+            <a:extLst>
+              <a:ext uri="{FF2B5EF4-FFF2-40B4-BE49-F238E27FC236}">
+                <a16:creationId xmlns:a16="http://schemas.microsoft.com/office/drawing/2014/main" id="{3DC3A253-8676-1BA7-1395-F47C8BF049E7}"/>
+              </a:ext>
+            </a:extLst>
+          </p:cNvPr>
+          <p:cNvSpPr/>
+          <p:nvPr/>
+        </p:nvSpPr>
+        <p:spPr>
+          <a:xfrm rot="5400000">
+            <a:off x="4953545" y="5372844"/>
+            <a:ext cx="991956" cy="249120"/>
+          </a:xfrm>
+          <a:prstGeom prst="leftRightArrow">
+            <a:avLst/>
+          </a:prstGeom>
+          <a:solidFill>
+            <a:schemeClr val="tx1"/>
+          </a:solidFill>
+          <a:ln>
+            <a:solidFill>
+              <a:schemeClr val="tx1"/>
+            </a:solidFill>
+          </a:ln>
+        </p:spPr>
+        <p:style>
+          <a:lnRef idx="2">
+            <a:schemeClr val="accent1">
+              <a:shade val="15000"/>
+            </a:schemeClr>
+          </a:lnRef>
+          <a:fillRef idx="1">
+            <a:schemeClr val="accent1"/>
+          </a:fillRef>
+          <a:effectRef idx="0">
+            <a:schemeClr val="accent1"/>
+          </a:effectRef>
+          <a:fontRef idx="minor">
+            <a:schemeClr val="lt1"/>
+          </a:fontRef>
+        </p:style>
+        <p:txBody>
+          <a:bodyPr rtlCol="0" anchor="ctr"/>
+          <a:lstStyle/>
+          <a:p>
+            <a:pPr algn="ctr"/>
+            <a:endParaRPr lang="en-US"/>
+          </a:p>
+        </p:txBody>
+      </p:sp>
+      <p:sp>
+        <p:nvSpPr>
+          <p:cNvPr id="14" name="箭號: 左-右雙向 13">
+            <a:extLst>
+              <a:ext uri="{FF2B5EF4-FFF2-40B4-BE49-F238E27FC236}">
+                <a16:creationId xmlns:a16="http://schemas.microsoft.com/office/drawing/2014/main" id="{3C19D0A3-7057-020B-9110-1B0E205EE477}"/>
+              </a:ext>
+            </a:extLst>
+          </p:cNvPr>
+          <p:cNvSpPr/>
+          <p:nvPr/>
+        </p:nvSpPr>
+        <p:spPr>
+          <a:xfrm rot="5400000">
+            <a:off x="5445310" y="5372844"/>
+            <a:ext cx="991956" cy="249120"/>
+          </a:xfrm>
+          <a:prstGeom prst="leftRightArrow">
+            <a:avLst/>
+          </a:prstGeom>
+          <a:solidFill>
+            <a:schemeClr val="tx1"/>
+          </a:solidFill>
+          <a:ln>
+            <a:solidFill>
+              <a:schemeClr val="tx1"/>
+            </a:solidFill>
+          </a:ln>
+        </p:spPr>
+        <p:style>
+          <a:lnRef idx="2">
+            <a:schemeClr val="accent1">
+              <a:shade val="15000"/>
+            </a:schemeClr>
+          </a:lnRef>
+          <a:fillRef idx="1">
+            <a:schemeClr val="accent1"/>
+          </a:fillRef>
+          <a:effectRef idx="0">
+            <a:schemeClr val="accent1"/>
+          </a:effectRef>
+          <a:fontRef idx="minor">
+            <a:schemeClr val="lt1"/>
+          </a:fontRef>
+        </p:style>
+        <p:txBody>
+          <a:bodyPr rtlCol="0" anchor="ctr"/>
+          <a:lstStyle/>
+          <a:p>
+            <a:pPr algn="ctr"/>
+            <a:endParaRPr lang="en-US"/>
+          </a:p>
+        </p:txBody>
+      </p:sp>
+      <p:sp>
+        <p:nvSpPr>
+          <p:cNvPr id="15" name="文字方塊 14">
+            <a:extLst>
+              <a:ext uri="{FF2B5EF4-FFF2-40B4-BE49-F238E27FC236}">
+                <a16:creationId xmlns:a16="http://schemas.microsoft.com/office/drawing/2014/main" id="{806B00BD-FDE7-4B07-33A6-F5C99AAEFB34}"/>
+              </a:ext>
+            </a:extLst>
+          </p:cNvPr>
+          <p:cNvSpPr txBox="1"/>
+          <p:nvPr/>
+        </p:nvSpPr>
+        <p:spPr>
+          <a:xfrm>
+            <a:off x="1528945" y="5268528"/>
+            <a:ext cx="857839" cy="369332"/>
+          </a:xfrm>
+          <a:prstGeom prst="rect">
+            <a:avLst/>
+          </a:prstGeom>
+          <a:noFill/>
+        </p:spPr>
+        <p:txBody>
+          <a:bodyPr wrap="square" rtlCol="0">
+            <a:spAutoFit/>
+          </a:bodyPr>
+          <a:lstStyle/>
+          <a:p>
+            <a:pPr algn="ctr"/>
+            <a:r>
+              <a:rPr lang="en-US" dirty="0"/>
+              <a:t>DP</a:t>
+            </a:r>
+          </a:p>
+        </p:txBody>
+      </p:sp>
+      <p:sp>
+        <p:nvSpPr>
+          <p:cNvPr id="16" name="文字方塊 15">
+            <a:extLst>
+              <a:ext uri="{FF2B5EF4-FFF2-40B4-BE49-F238E27FC236}">
+                <a16:creationId xmlns:a16="http://schemas.microsoft.com/office/drawing/2014/main" id="{38ECBB6B-C648-DDD4-1044-DDECB7873AE7}"/>
+              </a:ext>
+            </a:extLst>
+          </p:cNvPr>
+          <p:cNvSpPr txBox="1"/>
+          <p:nvPr/>
+        </p:nvSpPr>
+        <p:spPr>
+          <a:xfrm>
+            <a:off x="4495404" y="5313505"/>
+            <a:ext cx="857839" cy="369332"/>
+          </a:xfrm>
+          <a:prstGeom prst="rect">
+            <a:avLst/>
+          </a:prstGeom>
+          <a:noFill/>
+        </p:spPr>
+        <p:txBody>
+          <a:bodyPr wrap="square" rtlCol="0">
+            <a:spAutoFit/>
+          </a:bodyPr>
+          <a:lstStyle/>
+          <a:p>
+            <a:pPr algn="ctr"/>
+            <a:r>
+              <a:rPr lang="en-US" dirty="0"/>
+              <a:t>DP</a:t>
+            </a:r>
+          </a:p>
+        </p:txBody>
+      </p:sp>
+      <p:sp>
+        <p:nvSpPr>
+          <p:cNvPr id="17" name="文字方塊 16">
+            <a:extLst>
+              <a:ext uri="{FF2B5EF4-FFF2-40B4-BE49-F238E27FC236}">
+                <a16:creationId xmlns:a16="http://schemas.microsoft.com/office/drawing/2014/main" id="{12C292B4-5C55-E4D4-0031-948718334209}"/>
+              </a:ext>
+            </a:extLst>
+          </p:cNvPr>
+          <p:cNvSpPr txBox="1"/>
+          <p:nvPr/>
+        </p:nvSpPr>
+        <p:spPr>
+          <a:xfrm>
+            <a:off x="3368731" y="5255425"/>
+            <a:ext cx="857839" cy="369332"/>
+          </a:xfrm>
+          <a:prstGeom prst="rect">
+            <a:avLst/>
+          </a:prstGeom>
+          <a:noFill/>
+        </p:spPr>
+        <p:txBody>
+          <a:bodyPr wrap="square" rtlCol="0">
+            <a:spAutoFit/>
+          </a:bodyPr>
+          <a:lstStyle/>
+          <a:p>
+            <a:pPr algn="ctr"/>
+            <a:r>
+              <a:rPr lang="en-US" dirty="0"/>
+              <a:t>IP</a:t>
+            </a:r>
+          </a:p>
+        </p:txBody>
+      </p:sp>
+      <p:sp>
+        <p:nvSpPr>
+          <p:cNvPr id="18" name="文字方塊 17">
+            <a:extLst>
+              <a:ext uri="{FF2B5EF4-FFF2-40B4-BE49-F238E27FC236}">
+                <a16:creationId xmlns:a16="http://schemas.microsoft.com/office/drawing/2014/main" id="{00C8ED77-2BC0-CA86-CD18-C3CC4E181EB7}"/>
+              </a:ext>
+            </a:extLst>
+          </p:cNvPr>
+          <p:cNvSpPr txBox="1"/>
+          <p:nvPr/>
+        </p:nvSpPr>
+        <p:spPr>
+          <a:xfrm>
+            <a:off x="6058327" y="5273624"/>
+            <a:ext cx="857839" cy="369332"/>
+          </a:xfrm>
+          <a:prstGeom prst="rect">
+            <a:avLst/>
+          </a:prstGeom>
+          <a:noFill/>
+        </p:spPr>
+        <p:txBody>
+          <a:bodyPr wrap="square" rtlCol="0">
+            <a:spAutoFit/>
+          </a:bodyPr>
+          <a:lstStyle/>
+          <a:p>
+            <a:pPr algn="ctr"/>
+            <a:r>
+              <a:rPr lang="en-US" dirty="0"/>
+              <a:t>IP</a:t>
+            </a:r>
+          </a:p>
+        </p:txBody>
+      </p:sp>
+      <p:sp>
+        <p:nvSpPr>
+          <p:cNvPr id="2" name="矩形: 圓角 23">
+            <a:extLst>
+              <a:ext uri="{FF2B5EF4-FFF2-40B4-BE49-F238E27FC236}">
+                <a16:creationId xmlns:a16="http://schemas.microsoft.com/office/drawing/2014/main" id="{1D2970AF-7377-52C0-77D3-B7E742CE4BFD}"/>
+              </a:ext>
+            </a:extLst>
+          </p:cNvPr>
+          <p:cNvSpPr/>
+          <p:nvPr/>
+        </p:nvSpPr>
+        <p:spPr>
+          <a:xfrm>
+            <a:off x="7653852" y="3843276"/>
+            <a:ext cx="1209600" cy="1045080"/>
+          </a:xfrm>
+          <a:prstGeom prst="roundRect">
+            <a:avLst>
+              <a:gd name="adj" fmla="val 16667"/>
+            </a:avLst>
+          </a:prstGeom>
+          <a:solidFill>
+            <a:srgbClr val="00B050"/>
+          </a:solidFill>
+          <a:ln>
+            <a:solidFill>
+              <a:srgbClr val="516263"/>
+            </a:solidFill>
+            <a:round/>
+          </a:ln>
+        </p:spPr>
+        <p:style>
+          <a:lnRef idx="2">
+            <a:schemeClr val="accent1">
+              <a:shade val="15000"/>
+            </a:schemeClr>
+          </a:lnRef>
+          <a:fillRef idx="1">
+            <a:schemeClr val="accent1"/>
+          </a:fillRef>
+          <a:effectRef idx="0">
+            <a:schemeClr val="accent1"/>
+          </a:effectRef>
+          <a:fontRef idx="minor"/>
+        </p:style>
+        <p:txBody>
+          <a:bodyPr lIns="90000" tIns="45000" rIns="90000" bIns="45000" anchor="ctr">
+            <a:noAutofit/>
+          </a:bodyPr>
+          <a:lstStyle/>
+          <a:p>
+            <a:pPr algn="ctr">
+              <a:lnSpc>
+                <a:spcPct val="100000"/>
+              </a:lnSpc>
+            </a:pPr>
+            <a:r>
+              <a:rPr lang="en-US" sz="1400" b="0" strike="noStrike" spc="-1" dirty="0">
+                <a:solidFill>
+                  <a:schemeClr val="dk1"/>
+                </a:solidFill>
+                <a:ea typeface="Arial"/>
+              </a:rPr>
+              <a:t>AXI</a:t>
+            </a:r>
+          </a:p>
+          <a:p>
+            <a:pPr algn="ctr">
+              <a:lnSpc>
+                <a:spcPct val="100000"/>
+              </a:lnSpc>
+            </a:pPr>
+            <a:r>
+              <a:rPr lang="en-US" sz="1400" spc="-1" dirty="0">
+                <a:solidFill>
+                  <a:schemeClr val="dk1"/>
+                </a:solidFill>
+              </a:rPr>
+              <a:t>Quad-SPI</a:t>
+            </a:r>
+            <a:endParaRPr lang="en-US" sz="1400" b="0" strike="noStrike" spc="-1" dirty="0">
+              <a:solidFill>
+                <a:srgbClr val="000000"/>
+              </a:solidFill>
+            </a:endParaRPr>
+          </a:p>
+        </p:txBody>
+      </p:sp>
+      <p:sp>
+        <p:nvSpPr>
+          <p:cNvPr id="3" name="矩形: 圓角 23">
+            <a:extLst>
+              <a:ext uri="{FF2B5EF4-FFF2-40B4-BE49-F238E27FC236}">
+                <a16:creationId xmlns:a16="http://schemas.microsoft.com/office/drawing/2014/main" id="{76C09D02-6452-2912-EC84-9A94FC086A37}"/>
+              </a:ext>
+            </a:extLst>
+          </p:cNvPr>
+          <p:cNvSpPr/>
+          <p:nvPr/>
+        </p:nvSpPr>
+        <p:spPr>
+          <a:xfrm>
+            <a:off x="7653852" y="2457879"/>
+            <a:ext cx="1209600" cy="1045080"/>
+          </a:xfrm>
+          <a:prstGeom prst="roundRect">
+            <a:avLst>
+              <a:gd name="adj" fmla="val 16667"/>
+            </a:avLst>
+          </a:prstGeom>
+          <a:solidFill>
+            <a:srgbClr val="00B050"/>
+          </a:solidFill>
+          <a:ln>
+            <a:solidFill>
+              <a:srgbClr val="516263"/>
+            </a:solidFill>
+            <a:round/>
+          </a:ln>
+        </p:spPr>
+        <p:style>
+          <a:lnRef idx="2">
+            <a:schemeClr val="accent1">
+              <a:shade val="15000"/>
+            </a:schemeClr>
+          </a:lnRef>
+          <a:fillRef idx="1">
+            <a:schemeClr val="accent1"/>
+          </a:fillRef>
+          <a:effectRef idx="0">
+            <a:schemeClr val="accent1"/>
+          </a:effectRef>
+          <a:fontRef idx="minor"/>
+        </p:style>
+        <p:txBody>
+          <a:bodyPr lIns="90000" tIns="45000" rIns="90000" bIns="45000" anchor="ctr">
+            <a:noAutofit/>
+          </a:bodyPr>
+          <a:lstStyle/>
+          <a:p>
+            <a:pPr algn="ctr">
+              <a:lnSpc>
+                <a:spcPct val="100000"/>
+              </a:lnSpc>
+            </a:pPr>
+            <a:r>
+              <a:rPr lang="en-US" altLang="zh-TW" sz="1400" spc="-1" dirty="0">
+                <a:solidFill>
+                  <a:srgbClr val="000000"/>
+                </a:solidFill>
+              </a:rPr>
+              <a:t>NOR</a:t>
+            </a:r>
+            <a:endParaRPr lang="en-US" sz="1400" spc="-1" dirty="0">
+              <a:solidFill>
+                <a:srgbClr val="000000"/>
+              </a:solidFill>
+            </a:endParaRPr>
+          </a:p>
+          <a:p>
+            <a:pPr algn="ctr">
+              <a:lnSpc>
+                <a:spcPct val="100000"/>
+              </a:lnSpc>
+            </a:pPr>
+            <a:r>
+              <a:rPr lang="en-US" sz="1400" spc="-1" dirty="0">
+                <a:solidFill>
+                  <a:srgbClr val="000000"/>
+                </a:solidFill>
+              </a:rPr>
+              <a:t>Flash</a:t>
+            </a:r>
+          </a:p>
+          <a:p>
+            <a:pPr algn="ctr">
+              <a:lnSpc>
+                <a:spcPct val="100000"/>
+              </a:lnSpc>
+            </a:pPr>
+            <a:r>
+              <a:rPr lang="en-US" sz="1400" b="0" strike="noStrike" spc="-1" dirty="0">
+                <a:solidFill>
+                  <a:srgbClr val="000000"/>
+                </a:solidFill>
+              </a:rPr>
+              <a:t>4MB</a:t>
+            </a:r>
+          </a:p>
+        </p:txBody>
+      </p:sp>
+      <p:cxnSp>
+        <p:nvCxnSpPr>
+          <p:cNvPr id="4" name="直線單箭頭接點 48">
+            <a:extLst>
+              <a:ext uri="{FF2B5EF4-FFF2-40B4-BE49-F238E27FC236}">
+                <a16:creationId xmlns:a16="http://schemas.microsoft.com/office/drawing/2014/main" id="{9985DF57-585C-5757-002F-AFF8B93B366C}"/>
+              </a:ext>
+            </a:extLst>
+          </p:cNvPr>
+          <p:cNvCxnSpPr>
+            <a:cxnSpLocks/>
+            <a:stCxn id="3" idx="2"/>
+            <a:endCxn id="2" idx="0"/>
+          </p:cNvCxnSpPr>
+          <p:nvPr/>
+        </p:nvCxnSpPr>
+        <p:spPr>
+          <a:xfrm>
+            <a:off x="8258652" y="3502959"/>
+            <a:ext cx="0" cy="340317"/>
+          </a:xfrm>
+          <a:prstGeom prst="straightConnector1">
+            <a:avLst/>
+          </a:prstGeom>
+          <a:ln w="28575">
+            <a:solidFill>
+              <a:srgbClr val="000000"/>
+            </a:solidFill>
+            <a:round/>
+            <a:headEnd type="arrow" w="med" len="med"/>
+            <a:tailEnd type="arrow" w="med" len="med"/>
+          </a:ln>
+        </p:spPr>
+      </p:cxnSp>
+      <p:sp>
+        <p:nvSpPr>
+          <p:cNvPr id="9" name="箭號: 左-右雙向 8">
+            <a:extLst>
+              <a:ext uri="{FF2B5EF4-FFF2-40B4-BE49-F238E27FC236}">
+                <a16:creationId xmlns:a16="http://schemas.microsoft.com/office/drawing/2014/main" id="{C1EE47B8-9007-D52B-C6E5-42BDD313FFA5}"/>
+              </a:ext>
+            </a:extLst>
+          </p:cNvPr>
+          <p:cNvSpPr/>
+          <p:nvPr/>
+        </p:nvSpPr>
+        <p:spPr>
+          <a:xfrm rot="5400000">
+            <a:off x="7587182" y="5316298"/>
+            <a:ext cx="991956" cy="249120"/>
+          </a:xfrm>
+          <a:prstGeom prst="leftRightArrow">
+            <a:avLst/>
+          </a:prstGeom>
+          <a:solidFill>
+            <a:schemeClr val="tx1"/>
+          </a:solidFill>
+          <a:ln>
+            <a:solidFill>
+              <a:schemeClr val="tx1"/>
+            </a:solidFill>
+          </a:ln>
+        </p:spPr>
+        <p:style>
+          <a:lnRef idx="2">
+            <a:schemeClr val="accent1">
+              <a:shade val="15000"/>
+            </a:schemeClr>
+          </a:lnRef>
+          <a:fillRef idx="1">
+            <a:schemeClr val="accent1"/>
+          </a:fillRef>
+          <a:effectRef idx="0">
+            <a:schemeClr val="accent1"/>
+          </a:effectRef>
+          <a:fontRef idx="minor">
+            <a:schemeClr val="lt1"/>
+          </a:fontRef>
+        </p:style>
+        <p:txBody>
+          <a:bodyPr rtlCol="0" anchor="ctr"/>
+          <a:lstStyle/>
+          <a:p>
+            <a:pPr algn="ctr"/>
+            <a:endParaRPr lang="en-US"/>
+          </a:p>
+        </p:txBody>
+      </p:sp>
+      <p:sp>
+        <p:nvSpPr>
+          <p:cNvPr id="12" name="文字方塊 11">
+            <a:extLst>
+              <a:ext uri="{FF2B5EF4-FFF2-40B4-BE49-F238E27FC236}">
+                <a16:creationId xmlns:a16="http://schemas.microsoft.com/office/drawing/2014/main" id="{D3AF3847-B1D6-F433-9017-10AE2E12D3BF}"/>
+              </a:ext>
+            </a:extLst>
+          </p:cNvPr>
+          <p:cNvSpPr txBox="1"/>
+          <p:nvPr/>
+        </p:nvSpPr>
+        <p:spPr>
+          <a:xfrm>
+            <a:off x="7157000" y="5262293"/>
+            <a:ext cx="857839" cy="369332"/>
+          </a:xfrm>
+          <a:prstGeom prst="rect">
+            <a:avLst/>
+          </a:prstGeom>
+          <a:noFill/>
+        </p:spPr>
+        <p:txBody>
+          <a:bodyPr wrap="square" rtlCol="0">
+            <a:spAutoFit/>
+          </a:bodyPr>
+          <a:lstStyle/>
+          <a:p>
+            <a:pPr algn="ctr"/>
+            <a:r>
+              <a:rPr lang="en-US" dirty="0"/>
+              <a:t>DP</a:t>
+            </a:r>
+          </a:p>
+        </p:txBody>
+      </p:sp>
+      <p:sp>
+        <p:nvSpPr>
+          <p:cNvPr id="13" name="文字方塊 12">
+            <a:extLst>
+              <a:ext uri="{FF2B5EF4-FFF2-40B4-BE49-F238E27FC236}">
+                <a16:creationId xmlns:a16="http://schemas.microsoft.com/office/drawing/2014/main" id="{EFD0DFC2-61B2-9D5F-C002-CBAE2354E191}"/>
+              </a:ext>
+            </a:extLst>
+          </p:cNvPr>
+          <p:cNvSpPr txBox="1"/>
+          <p:nvPr/>
+        </p:nvSpPr>
+        <p:spPr>
+          <a:xfrm>
+            <a:off x="9310249" y="2657253"/>
+            <a:ext cx="2677749" cy="646331"/>
+          </a:xfrm>
+          <a:prstGeom prst="rect">
+            <a:avLst/>
+          </a:prstGeom>
+          <a:noFill/>
+        </p:spPr>
+        <p:txBody>
+          <a:bodyPr wrap="square" rtlCol="0">
+            <a:spAutoFit/>
+          </a:bodyPr>
+          <a:lstStyle/>
+          <a:p>
+            <a:r>
+              <a:rPr lang="en-US" altLang="zh-TW" dirty="0"/>
+              <a:t>XIP (Execute in Place) is</a:t>
+            </a:r>
+            <a:r>
+              <a:rPr lang="zh-TW" altLang="en-US" dirty="0"/>
+              <a:t> </a:t>
+            </a:r>
+            <a:r>
+              <a:rPr lang="en-US" altLang="zh-TW" dirty="0"/>
+              <a:t>supported, Read Only</a:t>
+            </a:r>
+            <a:endParaRPr lang="en-US" dirty="0"/>
+          </a:p>
+        </p:txBody>
+      </p:sp>
+      <p:cxnSp>
+        <p:nvCxnSpPr>
+          <p:cNvPr id="21" name="直線單箭頭接點 20">
+            <a:extLst>
+              <a:ext uri="{FF2B5EF4-FFF2-40B4-BE49-F238E27FC236}">
+                <a16:creationId xmlns:a16="http://schemas.microsoft.com/office/drawing/2014/main" id="{3E275E0A-0C6C-05AA-8DB5-2886262EF066}"/>
+              </a:ext>
+            </a:extLst>
+          </p:cNvPr>
+          <p:cNvCxnSpPr>
+            <a:cxnSpLocks/>
+            <a:stCxn id="3" idx="3"/>
+            <a:endCxn id="13" idx="1"/>
+          </p:cNvCxnSpPr>
+          <p:nvPr/>
+        </p:nvCxnSpPr>
+        <p:spPr>
+          <a:xfrm>
+            <a:off x="8863452" y="2980419"/>
+            <a:ext cx="446797" cy="0"/>
+          </a:xfrm>
+          <a:prstGeom prst="straightConnector1">
+            <a:avLst/>
+          </a:prstGeom>
+          <a:ln w="38100">
+            <a:solidFill>
+              <a:schemeClr val="tx1"/>
+            </a:solidFill>
+            <a:tailEnd type="triangle"/>
+          </a:ln>
+        </p:spPr>
+        <p:style>
+          <a:lnRef idx="1">
+            <a:schemeClr val="accent1"/>
+          </a:lnRef>
+          <a:fillRef idx="0">
+            <a:schemeClr val="accent1"/>
+          </a:fillRef>
+          <a:effectRef idx="0">
+            <a:schemeClr val="accent1"/>
+          </a:effectRef>
+          <a:fontRef idx="minor">
+            <a:schemeClr val="tx1"/>
+          </a:fontRef>
+        </p:style>
+      </p:cxnSp>
+      <p:sp>
+        <p:nvSpPr>
+          <p:cNvPr id="25" name="箭號: 左-右雙向 24">
+            <a:extLst>
+              <a:ext uri="{FF2B5EF4-FFF2-40B4-BE49-F238E27FC236}">
+                <a16:creationId xmlns:a16="http://schemas.microsoft.com/office/drawing/2014/main" id="{32AD87AD-19FC-11F5-2572-0BAFDBDFCA3F}"/>
+              </a:ext>
+            </a:extLst>
+          </p:cNvPr>
+          <p:cNvSpPr/>
+          <p:nvPr/>
+        </p:nvSpPr>
+        <p:spPr>
+          <a:xfrm rot="5400000">
+            <a:off x="7995125" y="5314235"/>
+            <a:ext cx="991956" cy="249120"/>
+          </a:xfrm>
+          <a:prstGeom prst="leftRightArrow">
+            <a:avLst/>
+          </a:prstGeom>
+          <a:solidFill>
+            <a:schemeClr val="tx1"/>
+          </a:solidFill>
+          <a:ln>
+            <a:solidFill>
+              <a:schemeClr val="tx1"/>
+            </a:solidFill>
+          </a:ln>
+        </p:spPr>
+        <p:style>
+          <a:lnRef idx="2">
+            <a:schemeClr val="accent1">
+              <a:shade val="15000"/>
+            </a:schemeClr>
+          </a:lnRef>
+          <a:fillRef idx="1">
+            <a:schemeClr val="accent1"/>
+          </a:fillRef>
+          <a:effectRef idx="0">
+            <a:schemeClr val="accent1"/>
+          </a:effectRef>
+          <a:fontRef idx="minor">
+            <a:schemeClr val="lt1"/>
+          </a:fontRef>
+        </p:style>
+        <p:txBody>
+          <a:bodyPr rtlCol="0" anchor="ctr"/>
+          <a:lstStyle/>
+          <a:p>
+            <a:pPr algn="ctr"/>
+            <a:endParaRPr lang="en-US"/>
+          </a:p>
+        </p:txBody>
+      </p:sp>
+      <p:sp>
+        <p:nvSpPr>
+          <p:cNvPr id="26" name="文字方塊 25">
+            <a:extLst>
+              <a:ext uri="{FF2B5EF4-FFF2-40B4-BE49-F238E27FC236}">
+                <a16:creationId xmlns:a16="http://schemas.microsoft.com/office/drawing/2014/main" id="{2C183AF0-4C0B-C5D6-F705-89C4F5527C9D}"/>
+              </a:ext>
+            </a:extLst>
+          </p:cNvPr>
+          <p:cNvSpPr txBox="1"/>
+          <p:nvPr/>
+        </p:nvSpPr>
+        <p:spPr>
+          <a:xfrm>
+            <a:off x="8608142" y="5215015"/>
+            <a:ext cx="857839" cy="369332"/>
+          </a:xfrm>
+          <a:prstGeom prst="rect">
+            <a:avLst/>
+          </a:prstGeom>
+          <a:noFill/>
+        </p:spPr>
+        <p:txBody>
+          <a:bodyPr wrap="square" rtlCol="0">
+            <a:spAutoFit/>
+          </a:bodyPr>
+          <a:lstStyle/>
+          <a:p>
+            <a:pPr algn="ctr"/>
+            <a:r>
+              <a:rPr lang="en-US" dirty="0"/>
+              <a:t>IP</a:t>
+            </a:r>
+          </a:p>
+        </p:txBody>
+      </p:sp>
+    </p:spTree>
+    <p:extLst>
+      <p:ext uri="{BB962C8B-B14F-4D97-AF65-F5344CB8AC3E}">
+        <p14:creationId xmlns:p14="http://schemas.microsoft.com/office/powerpoint/2010/main" val="298182491"/>
+      </p:ext>
+    </p:extLst>
+  </p:cSld>
+  <p:clrMapOvr>
+    <a:masterClrMapping/>
+  </p:clrMapOvr>
+</p:sld>
+</file>
+
+<file path=ppt/slides/slide13.xml><?xml version="1.0" encoding="utf-8"?>
+<p:sld xmlns:a="http://schemas.openxmlformats.org/drawingml/2006/main" xmlns:r="http://schemas.openxmlformats.org/officeDocument/2006/relationships" xmlns:p="http://schemas.openxmlformats.org/presentationml/2006/main">
+  <p:cSld>
+    <p:spTree>
+      <p:nvGrpSpPr>
+        <p:cNvPr id="1" name="">
+          <a:extLst>
+            <a:ext uri="{FF2B5EF4-FFF2-40B4-BE49-F238E27FC236}">
+              <a16:creationId xmlns:a16="http://schemas.microsoft.com/office/drawing/2014/main" id="{07FDE4E8-2456-AE75-0FBC-9BFA615D4BB7}"/>
+            </a:ext>
+          </a:extLst>
+        </p:cNvPr>
+        <p:cNvGrpSpPr/>
+        <p:nvPr/>
+      </p:nvGrpSpPr>
+      <p:grpSpPr>
+        <a:xfrm>
+          <a:off x="0" y="0"/>
+          <a:ext cx="0" cy="0"/>
+          <a:chOff x="0" y="0"/>
+          <a:chExt cx="0" cy="0"/>
+        </a:xfrm>
+      </p:grpSpPr>
+      <p:sp>
+        <p:nvSpPr>
+          <p:cNvPr id="3" name="內容版面配置區 2">
+            <a:extLst>
+              <a:ext uri="{FF2B5EF4-FFF2-40B4-BE49-F238E27FC236}">
+                <a16:creationId xmlns:a16="http://schemas.microsoft.com/office/drawing/2014/main" id="{B3E7ABA0-E5AE-22E4-E4D8-63217C1A1B24}"/>
+              </a:ext>
+            </a:extLst>
+          </p:cNvPr>
+          <p:cNvSpPr>
+            <a:spLocks noGrp="1"/>
+          </p:cNvSpPr>
+          <p:nvPr>
+            <p:ph idx="1"/>
+          </p:nvPr>
+        </p:nvSpPr>
+        <p:spPr/>
+        <p:txBody>
+          <a:bodyPr/>
+          <a:lstStyle/>
+          <a:p>
+            <a:pPr>
+              <a:spcBef>
+                <a:spcPts val="1200"/>
+              </a:spcBef>
+            </a:pPr>
+            <a:r>
+              <a:rPr lang="en-US" sz="2400" dirty="0">
+                <a:solidFill>
+                  <a:schemeClr val="bg2"/>
+                </a:solidFill>
+                <a:latin typeface="Times New Roman" panose="02020603050405020304" pitchFamily="18" charset="0"/>
+                <a:cs typeface="Times New Roman" panose="02020603050405020304" pitchFamily="18" charset="0"/>
+              </a:rPr>
+              <a:t>FPGA Selection and Spec</a:t>
+            </a:r>
+          </a:p>
+          <a:p>
+            <a:pPr>
+              <a:spcBef>
+                <a:spcPts val="1200"/>
+              </a:spcBef>
+            </a:pPr>
+            <a:r>
+              <a:rPr lang="en-US" sz="2400" dirty="0">
+                <a:solidFill>
+                  <a:schemeClr val="bg2"/>
+                </a:solidFill>
+                <a:latin typeface="Times New Roman" panose="02020603050405020304" pitchFamily="18" charset="0"/>
+                <a:cs typeface="Times New Roman" panose="02020603050405020304" pitchFamily="18" charset="0"/>
+              </a:rPr>
+              <a:t>Microcontroller Overview</a:t>
+            </a:r>
+          </a:p>
+          <a:p>
+            <a:pPr>
+              <a:spcBef>
+                <a:spcPts val="1200"/>
+              </a:spcBef>
+            </a:pPr>
+            <a:r>
+              <a:rPr lang="en-US" altLang="zh-TW" sz="2400" dirty="0">
+                <a:solidFill>
+                  <a:schemeClr val="bg2"/>
+                </a:solidFill>
+                <a:latin typeface="Times New Roman" panose="02020603050405020304" pitchFamily="18" charset="0"/>
+                <a:cs typeface="Times New Roman" panose="02020603050405020304" pitchFamily="18" charset="0"/>
+              </a:rPr>
+              <a:t>Data Path / Instruction Path</a:t>
+            </a:r>
+            <a:endParaRPr lang="en-US" sz="2400" dirty="0">
+              <a:solidFill>
+                <a:schemeClr val="bg2"/>
+              </a:solidFill>
+              <a:latin typeface="Times New Roman" panose="02020603050405020304" pitchFamily="18" charset="0"/>
+              <a:cs typeface="Times New Roman" panose="02020603050405020304" pitchFamily="18" charset="0"/>
+            </a:endParaRPr>
+          </a:p>
+          <a:p>
+            <a:pPr>
+              <a:spcBef>
+                <a:spcPts val="1200"/>
+              </a:spcBef>
+            </a:pPr>
+            <a:r>
+              <a:rPr lang="en-US" sz="2400" dirty="0">
+                <a:latin typeface="Times New Roman" panose="02020603050405020304" pitchFamily="18" charset="0"/>
+                <a:cs typeface="Times New Roman" panose="02020603050405020304" pitchFamily="18" charset="0"/>
+              </a:rPr>
+              <a:t>MDM / GPIO / Interrupt System / </a:t>
+            </a:r>
+            <a:r>
+              <a:rPr lang="zh-TW" altLang="en-US" sz="2400" dirty="0">
+                <a:latin typeface="Times New Roman" panose="02020603050405020304" pitchFamily="18" charset="0"/>
+                <a:cs typeface="Times New Roman" panose="02020603050405020304" pitchFamily="18" charset="0"/>
+              </a:rPr>
+              <a:t> </a:t>
+            </a:r>
+            <a:r>
+              <a:rPr lang="en-US" altLang="zh-TW" sz="2400" dirty="0">
+                <a:latin typeface="Times New Roman" panose="02020603050405020304" pitchFamily="18" charset="0"/>
+                <a:cs typeface="Times New Roman" panose="02020603050405020304" pitchFamily="18" charset="0"/>
+              </a:rPr>
+              <a:t>Timer &amp; PWM / XADC / UART</a:t>
+            </a:r>
+          </a:p>
+          <a:p>
+            <a:pPr>
+              <a:spcBef>
+                <a:spcPts val="1200"/>
+              </a:spcBef>
+            </a:pPr>
+            <a:r>
+              <a:rPr lang="en-US" altLang="zh-TW" sz="2400" dirty="0">
+                <a:solidFill>
+                  <a:schemeClr val="bg2"/>
+                </a:solidFill>
+                <a:latin typeface="Times New Roman" panose="02020603050405020304" pitchFamily="18" charset="0"/>
+                <a:cs typeface="Times New Roman" panose="02020603050405020304" pitchFamily="18" charset="0"/>
+              </a:rPr>
+              <a:t>Memory Hierarchy</a:t>
+            </a:r>
+          </a:p>
+          <a:p>
+            <a:pPr>
+              <a:spcBef>
+                <a:spcPts val="1200"/>
+              </a:spcBef>
+            </a:pPr>
+            <a:r>
+              <a:rPr lang="en-US" altLang="zh-TW" sz="2400" dirty="0">
+                <a:solidFill>
+                  <a:schemeClr val="bg2"/>
+                </a:solidFill>
+                <a:latin typeface="Times New Roman" panose="02020603050405020304" pitchFamily="18" charset="0"/>
+                <a:cs typeface="Times New Roman" panose="02020603050405020304" pitchFamily="18" charset="0"/>
+              </a:rPr>
+              <a:t>Hardware Report</a:t>
+            </a:r>
+            <a:endParaRPr lang="en-US" sz="2400" dirty="0">
+              <a:solidFill>
+                <a:schemeClr val="bg2"/>
+              </a:solidFill>
+              <a:latin typeface="Times New Roman" panose="02020603050405020304" pitchFamily="18" charset="0"/>
+              <a:cs typeface="Times New Roman" panose="02020603050405020304" pitchFamily="18" charset="0"/>
+            </a:endParaRPr>
+          </a:p>
+          <a:p>
+            <a:pPr>
+              <a:spcBef>
+                <a:spcPts val="1200"/>
+              </a:spcBef>
+            </a:pPr>
+            <a:r>
+              <a:rPr lang="en-US" sz="2400" dirty="0">
+                <a:solidFill>
+                  <a:schemeClr val="bg2"/>
+                </a:solidFill>
+                <a:latin typeface="Times New Roman" panose="02020603050405020304" pitchFamily="18" charset="0"/>
+                <a:cs typeface="Times New Roman" panose="02020603050405020304" pitchFamily="18" charset="0"/>
+              </a:rPr>
+              <a:t>Software Design Flow</a:t>
+            </a:r>
+          </a:p>
+          <a:p>
+            <a:pPr>
+              <a:spcBef>
+                <a:spcPts val="1200"/>
+              </a:spcBef>
+            </a:pPr>
+            <a:r>
+              <a:rPr lang="en-US" sz="2400" dirty="0">
+                <a:solidFill>
+                  <a:schemeClr val="bg2"/>
+                </a:solidFill>
+                <a:latin typeface="Times New Roman" panose="02020603050405020304" pitchFamily="18" charset="0"/>
+                <a:cs typeface="Times New Roman" panose="02020603050405020304" pitchFamily="18" charset="0"/>
+              </a:rPr>
+              <a:t>JTAG Debug Flow</a:t>
+            </a:r>
+          </a:p>
+          <a:p>
+            <a:pPr>
+              <a:spcBef>
+                <a:spcPts val="1200"/>
+              </a:spcBef>
+            </a:pPr>
+            <a:r>
+              <a:rPr lang="en-US" sz="2400" dirty="0">
+                <a:solidFill>
+                  <a:schemeClr val="bg2"/>
+                </a:solidFill>
+                <a:latin typeface="Times New Roman" panose="02020603050405020304" pitchFamily="18" charset="0"/>
+                <a:cs typeface="Times New Roman" panose="02020603050405020304" pitchFamily="18" charset="0"/>
+              </a:rPr>
+              <a:t>Standalone Boot Sequence</a:t>
+            </a:r>
+          </a:p>
+        </p:txBody>
+      </p:sp>
+      <p:sp>
+        <p:nvSpPr>
+          <p:cNvPr id="4" name="投影片編號版面配置區 3">
+            <a:extLst>
+              <a:ext uri="{FF2B5EF4-FFF2-40B4-BE49-F238E27FC236}">
+                <a16:creationId xmlns:a16="http://schemas.microsoft.com/office/drawing/2014/main" id="{69DD5341-D222-BF47-A1A3-ECE155E5E9DC}"/>
+              </a:ext>
+            </a:extLst>
+          </p:cNvPr>
+          <p:cNvSpPr>
+            <a:spLocks noGrp="1"/>
+          </p:cNvSpPr>
+          <p:nvPr>
+            <p:ph type="sldNum" sz="quarter" idx="12"/>
+          </p:nvPr>
+        </p:nvSpPr>
+        <p:spPr/>
+        <p:txBody>
+          <a:bodyPr/>
+          <a:lstStyle/>
+          <a:p>
+            <a:fld id="{F9F9ED32-46C6-469E-9D81-E8934DBD0961}" type="slidenum">
+              <a:rPr lang="zh-TW" altLang="en-US" smtClean="0"/>
+              <a:t>13</a:t>
+            </a:fld>
+            <a:endParaRPr lang="zh-TW" altLang="en-US" dirty="0"/>
+          </a:p>
+        </p:txBody>
+      </p:sp>
+    </p:spTree>
+    <p:extLst>
+      <p:ext uri="{BB962C8B-B14F-4D97-AF65-F5344CB8AC3E}">
+        <p14:creationId xmlns:p14="http://schemas.microsoft.com/office/powerpoint/2010/main" val="1441700357"/>
+      </p:ext>
+    </p:extLst>
+  </p:cSld>
+  <p:clrMapOvr>
+    <a:masterClrMapping/>
+  </p:clrMapOvr>
+  <mc:AlternateContent xmlns:mc="http://schemas.openxmlformats.org/markup-compatibility/2006" xmlns:p14="http://schemas.microsoft.com/office/powerpoint/2010/main">
+    <mc:Choice Requires="p14">
+      <p:transition spd="slow" p14:dur="2000">
+        <p:cut/>
+      </p:transition>
+    </mc:Choice>
+    <mc:Fallback xmlns="">
+      <p:transition spd="slow">
+        <p:cut/>
+      </p:transition>
+    </mc:Fallback>
+  </mc:AlternateContent>
+</p:sld>
+</file>
+
+<file path=ppt/slides/slide14.xml><?xml version="1.0" encoding="utf-8"?>
+<p:sld xmlns:a="http://schemas.openxmlformats.org/drawingml/2006/main" xmlns:r="http://schemas.openxmlformats.org/officeDocument/2006/relationships" xmlns:p="http://schemas.openxmlformats.org/presentationml/2006/main">
+  <p:cSld>
+    <p:spTree>
+      <p:nvGrpSpPr>
+        <p:cNvPr id="1" name=""/>
+        <p:cNvGrpSpPr/>
+        <p:nvPr/>
+      </p:nvGrpSpPr>
+      <p:grpSpPr>
+        <a:xfrm>
+          <a:off x="0" y="0"/>
+          <a:ext cx="0" cy="0"/>
+          <a:chOff x="0" y="0"/>
+          <a:chExt cx="0" cy="0"/>
+        </a:xfrm>
+      </p:grpSpPr>
+      <p:sp>
+        <p:nvSpPr>
           <p:cNvPr id="2" name="標題 1">
             <a:extLst>
               <a:ext uri="{FF2B5EF4-FFF2-40B4-BE49-F238E27FC236}">
@@ -7314,7 +8541,7 @@
             <a:fld id="{F9F9ED32-46C6-469E-9D81-E8934DBD0961}" type="slidenum">
               <a:rPr lang="zh-TW" altLang="en-US" smtClean="0"/>
               <a:pPr/>
-              <a:t>15</a:t>
+              <a:t>14</a:t>
             </a:fld>
             <a:endParaRPr lang="zh-TW" altLang="en-US" dirty="0"/>
           </a:p>
@@ -7333,7 +8560,7 @@
 </p:sld>
 </file>
 
-<file path=ppt/slides/slide16.xml><?xml version="1.0" encoding="utf-8"?>
+<file path=ppt/slides/slide15.xml><?xml version="1.0" encoding="utf-8"?>
 <p:sld xmlns:a="http://schemas.openxmlformats.org/drawingml/2006/main" xmlns:r="http://schemas.openxmlformats.org/officeDocument/2006/relationships" xmlns:p="http://schemas.openxmlformats.org/presentationml/2006/main">
   <p:cSld>
     <p:spTree>
@@ -8324,7 +9551,7 @@
               <a:rPr lang="en-TW" smtClean="0">
                 <a:latin typeface="+mn-lt"/>
               </a:rPr>
-              <a:t>16</a:t>
+              <a:t>15</a:t>
             </a:fld>
             <a:endParaRPr lang="en-TW">
               <a:latin typeface="+mn-lt"/>
@@ -8345,7 +9572,7 @@
 </p:sld>
 </file>
 
-<file path=ppt/slides/slide17.xml><?xml version="1.0" encoding="utf-8"?>
+<file path=ppt/slides/slide16.xml><?xml version="1.0" encoding="utf-8"?>
 <p:sld xmlns:a="http://schemas.openxmlformats.org/drawingml/2006/main" xmlns:r="http://schemas.openxmlformats.org/officeDocument/2006/relationships" xmlns:p="http://schemas.openxmlformats.org/presentationml/2006/main">
   <p:cSld>
     <p:spTree>
@@ -8422,7 +9649,7 @@
           <a:p>
             <a:fld id="{F9F9ED32-46C6-469E-9D81-E8934DBD0961}" type="slidenum">
               <a:rPr lang="zh-TW" altLang="en-US" smtClean="0"/>
-              <a:t>17</a:t>
+              <a:t>16</a:t>
             </a:fld>
             <a:endParaRPr lang="zh-TW" altLang="en-US" dirty="0"/>
           </a:p>
@@ -9863,7 +11090,7 @@
 </p:sld>
 </file>
 
-<file path=ppt/slides/slide18.xml><?xml version="1.0" encoding="utf-8"?>
+<file path=ppt/slides/slide17.xml><?xml version="1.0" encoding="utf-8"?>
 <p:sld xmlns:a="http://schemas.openxmlformats.org/drawingml/2006/main" xmlns:r="http://schemas.openxmlformats.org/officeDocument/2006/relationships" xmlns:p="http://schemas.openxmlformats.org/presentationml/2006/main">
   <p:cSld>
     <p:spTree>
@@ -9940,7 +11167,7 @@
           <a:p>
             <a:fld id="{F9F9ED32-46C6-469E-9D81-E8934DBD0961}" type="slidenum">
               <a:rPr lang="zh-TW" altLang="en-US" smtClean="0"/>
-              <a:t>18</a:t>
+              <a:t>17</a:t>
             </a:fld>
             <a:endParaRPr lang="zh-TW" altLang="en-US" dirty="0"/>
           </a:p>
@@ -10609,7 +11836,7 @@
 </p:sld>
 </file>
 
-<file path=ppt/slides/slide19.xml><?xml version="1.0" encoding="utf-8"?>
+<file path=ppt/slides/slide18.xml><?xml version="1.0" encoding="utf-8"?>
 <p:sld xmlns:a="http://schemas.openxmlformats.org/drawingml/2006/main" xmlns:r="http://schemas.openxmlformats.org/officeDocument/2006/relationships" xmlns:p="http://schemas.openxmlformats.org/presentationml/2006/main">
   <p:cSld>
     <p:spTree>
@@ -10829,7 +12056,7 @@
           <a:p>
             <a:fld id="{F9F9ED32-46C6-469E-9D81-E8934DBD0961}" type="slidenum">
               <a:rPr lang="zh-TW" altLang="en-US" smtClean="0"/>
-              <a:t>19</a:t>
+              <a:t>18</a:t>
             </a:fld>
             <a:endParaRPr lang="zh-TW" altLang="en-US" dirty="0"/>
           </a:p>
@@ -10951,278 +12178,7 @@
 </p:sld>
 </file>
 
-<file path=ppt/slides/slide2.xml><?xml version="1.0" encoding="utf-8"?>
-<p:sld xmlns:a="http://schemas.openxmlformats.org/drawingml/2006/main" xmlns:r="http://schemas.openxmlformats.org/officeDocument/2006/relationships" xmlns:p="http://schemas.openxmlformats.org/presentationml/2006/main">
-  <p:cSld>
-    <p:spTree>
-      <p:nvGrpSpPr>
-        <p:cNvPr id="1" name="">
-          <a:extLst>
-            <a:ext uri="{FF2B5EF4-FFF2-40B4-BE49-F238E27FC236}">
-              <a16:creationId xmlns:a16="http://schemas.microsoft.com/office/drawing/2014/main" id="{B69280E7-411B-5B87-EFAC-03C9325D8EB4}"/>
-            </a:ext>
-          </a:extLst>
-        </p:cNvPr>
-        <p:cNvGrpSpPr/>
-        <p:nvPr/>
-      </p:nvGrpSpPr>
-      <p:grpSpPr>
-        <a:xfrm>
-          <a:off x="0" y="0"/>
-          <a:ext cx="0" cy="0"/>
-          <a:chOff x="0" y="0"/>
-          <a:chExt cx="0" cy="0"/>
-        </a:xfrm>
-      </p:grpSpPr>
-      <p:sp>
-        <p:nvSpPr>
-          <p:cNvPr id="2" name="標題 1">
-            <a:extLst>
-              <a:ext uri="{FF2B5EF4-FFF2-40B4-BE49-F238E27FC236}">
-                <a16:creationId xmlns:a16="http://schemas.microsoft.com/office/drawing/2014/main" id="{4743D012-99B4-A6AC-0CD2-999158835AC4}"/>
-              </a:ext>
-            </a:extLst>
-          </p:cNvPr>
-          <p:cNvSpPr>
-            <a:spLocks noGrp="1"/>
-          </p:cNvSpPr>
-          <p:nvPr>
-            <p:ph type="title"/>
-          </p:nvPr>
-        </p:nvSpPr>
-        <p:spPr/>
-        <p:txBody>
-          <a:bodyPr/>
-          <a:lstStyle/>
-          <a:p>
-            <a:r>
-              <a:rPr lang="en-US" altLang="zh-TW" dirty="0"/>
-              <a:t>Outline</a:t>
-            </a:r>
-            <a:endParaRPr lang="zh-TW" altLang="en-US" dirty="0"/>
-          </a:p>
-        </p:txBody>
-      </p:sp>
-      <p:sp>
-        <p:nvSpPr>
-          <p:cNvPr id="3" name="內容版面配置區 2">
-            <a:extLst>
-              <a:ext uri="{FF2B5EF4-FFF2-40B4-BE49-F238E27FC236}">
-                <a16:creationId xmlns:a16="http://schemas.microsoft.com/office/drawing/2014/main" id="{130A0642-98CF-9CEF-6C6D-052CB538B24A}"/>
-              </a:ext>
-            </a:extLst>
-          </p:cNvPr>
-          <p:cNvSpPr>
-            <a:spLocks noGrp="1"/>
-          </p:cNvSpPr>
-          <p:nvPr>
-            <p:ph idx="1"/>
-          </p:nvPr>
-        </p:nvSpPr>
-        <p:spPr/>
-        <p:txBody>
-          <a:bodyPr/>
-          <a:lstStyle/>
-          <a:p>
-            <a:pPr>
-              <a:spcBef>
-                <a:spcPts val="1200"/>
-              </a:spcBef>
-            </a:pPr>
-            <a:r>
-              <a:rPr lang="en-US" sz="2400" dirty="0">
-                <a:latin typeface="Times New Roman" panose="02020603050405020304" pitchFamily="18" charset="0"/>
-                <a:cs typeface="Times New Roman" panose="02020603050405020304" pitchFamily="18" charset="0"/>
-              </a:rPr>
-              <a:t>FPGA Selection and Spec</a:t>
-            </a:r>
-          </a:p>
-          <a:p>
-            <a:pPr>
-              <a:spcBef>
-                <a:spcPts val="1200"/>
-              </a:spcBef>
-            </a:pPr>
-            <a:r>
-              <a:rPr lang="en-US" sz="2400" dirty="0">
-                <a:latin typeface="Times New Roman" panose="02020603050405020304" pitchFamily="18" charset="0"/>
-                <a:cs typeface="Times New Roman" panose="02020603050405020304" pitchFamily="18" charset="0"/>
-              </a:rPr>
-              <a:t>Microcontroller Overview</a:t>
-            </a:r>
-            <a:endParaRPr lang="en-US" sz="2400" dirty="0">
-              <a:solidFill>
-                <a:schemeClr val="bg2"/>
-              </a:solidFill>
-              <a:latin typeface="Times New Roman" panose="02020603050405020304" pitchFamily="18" charset="0"/>
-              <a:cs typeface="Times New Roman" panose="02020603050405020304" pitchFamily="18" charset="0"/>
-            </a:endParaRPr>
-          </a:p>
-          <a:p>
-            <a:pPr>
-              <a:spcBef>
-                <a:spcPts val="1200"/>
-              </a:spcBef>
-            </a:pPr>
-            <a:r>
-              <a:rPr lang="en-US" sz="2400" dirty="0">
-                <a:latin typeface="Times New Roman" panose="02020603050405020304" pitchFamily="18" charset="0"/>
-                <a:cs typeface="Times New Roman" panose="02020603050405020304" pitchFamily="18" charset="0"/>
-              </a:rPr>
-              <a:t>MDM / GPIO / Interrupt System / </a:t>
-            </a:r>
-            <a:r>
-              <a:rPr lang="zh-TW" altLang="en-US" sz="2400" dirty="0">
-                <a:latin typeface="Times New Roman" panose="02020603050405020304" pitchFamily="18" charset="0"/>
-                <a:cs typeface="Times New Roman" panose="02020603050405020304" pitchFamily="18" charset="0"/>
-              </a:rPr>
-              <a:t> </a:t>
-            </a:r>
-            <a:r>
-              <a:rPr lang="en-US" altLang="zh-TW" sz="2400" dirty="0">
-                <a:latin typeface="Times New Roman" panose="02020603050405020304" pitchFamily="18" charset="0"/>
-                <a:cs typeface="Times New Roman" panose="02020603050405020304" pitchFamily="18" charset="0"/>
-              </a:rPr>
-              <a:t>Timer &amp; PWM / XADC / UART</a:t>
-            </a:r>
-          </a:p>
-          <a:p>
-            <a:pPr>
-              <a:spcBef>
-                <a:spcPts val="1200"/>
-              </a:spcBef>
-            </a:pPr>
-            <a:r>
-              <a:rPr lang="en-US" altLang="zh-TW" sz="2400" dirty="0">
-                <a:solidFill>
-                  <a:srgbClr val="FF0000"/>
-                </a:solidFill>
-                <a:latin typeface="Times New Roman" panose="02020603050405020304" pitchFamily="18" charset="0"/>
-                <a:cs typeface="Times New Roman" panose="02020603050405020304" pitchFamily="18" charset="0"/>
-              </a:rPr>
-              <a:t>Memory Hierarchy</a:t>
-            </a:r>
-          </a:p>
-          <a:p>
-            <a:pPr>
-              <a:spcBef>
-                <a:spcPts val="1200"/>
-              </a:spcBef>
-            </a:pPr>
-            <a:r>
-              <a:rPr lang="en-US" altLang="zh-TW" sz="2400" dirty="0">
-                <a:latin typeface="Times New Roman" panose="02020603050405020304" pitchFamily="18" charset="0"/>
-                <a:cs typeface="Times New Roman" panose="02020603050405020304" pitchFamily="18" charset="0"/>
-              </a:rPr>
-              <a:t>Hardware Report</a:t>
-            </a:r>
-            <a:endParaRPr lang="en-US" sz="2400" dirty="0">
-              <a:latin typeface="Times New Roman" panose="02020603050405020304" pitchFamily="18" charset="0"/>
-              <a:cs typeface="Times New Roman" panose="02020603050405020304" pitchFamily="18" charset="0"/>
-            </a:endParaRPr>
-          </a:p>
-          <a:p>
-            <a:pPr>
-              <a:spcBef>
-                <a:spcPts val="1200"/>
-              </a:spcBef>
-            </a:pPr>
-            <a:r>
-              <a:rPr lang="en-US" sz="2400" dirty="0">
-                <a:latin typeface="Times New Roman" panose="02020603050405020304" pitchFamily="18" charset="0"/>
-                <a:cs typeface="Times New Roman" panose="02020603050405020304" pitchFamily="18" charset="0"/>
-              </a:rPr>
-              <a:t>Software Design Flow</a:t>
-            </a:r>
-          </a:p>
-          <a:p>
-            <a:pPr>
-              <a:spcBef>
-                <a:spcPts val="1200"/>
-              </a:spcBef>
-            </a:pPr>
-            <a:r>
-              <a:rPr lang="en-US" sz="2400" dirty="0">
-                <a:latin typeface="Times New Roman" panose="02020603050405020304" pitchFamily="18" charset="0"/>
-                <a:cs typeface="Times New Roman" panose="02020603050405020304" pitchFamily="18" charset="0"/>
-              </a:rPr>
-              <a:t>JTAG Debug Flow</a:t>
-            </a:r>
-          </a:p>
-          <a:p>
-            <a:pPr>
-              <a:spcBef>
-                <a:spcPts val="1200"/>
-              </a:spcBef>
-            </a:pPr>
-            <a:r>
-              <a:rPr lang="en-US" sz="2400" dirty="0">
-                <a:solidFill>
-                  <a:srgbClr val="FF0000"/>
-                </a:solidFill>
-                <a:latin typeface="Times New Roman" panose="02020603050405020304" pitchFamily="18" charset="0"/>
-                <a:cs typeface="Times New Roman" panose="02020603050405020304" pitchFamily="18" charset="0"/>
-              </a:rPr>
-              <a:t>Standalone Boot Sequence</a:t>
-            </a:r>
-          </a:p>
-        </p:txBody>
-      </p:sp>
-      <p:sp>
-        <p:nvSpPr>
-          <p:cNvPr id="4" name="投影片編號版面配置區 3">
-            <a:extLst>
-              <a:ext uri="{FF2B5EF4-FFF2-40B4-BE49-F238E27FC236}">
-                <a16:creationId xmlns:a16="http://schemas.microsoft.com/office/drawing/2014/main" id="{2026C914-5B87-BB1E-25CB-FED0FD0FBFCC}"/>
-              </a:ext>
-            </a:extLst>
-          </p:cNvPr>
-          <p:cNvSpPr>
-            <a:spLocks noGrp="1"/>
-          </p:cNvSpPr>
-          <p:nvPr>
-            <p:ph type="sldNum" sz="quarter" idx="12"/>
-          </p:nvPr>
-        </p:nvSpPr>
-        <p:spPr/>
-        <p:txBody>
-          <a:bodyPr/>
-          <a:lstStyle/>
-          <a:p>
-            <a:fld id="{F9F9ED32-46C6-469E-9D81-E8934DBD0961}" type="slidenum">
-              <a:rPr lang="zh-TW" altLang="en-US" smtClean="0"/>
-              <a:t>2</a:t>
-            </a:fld>
-            <a:endParaRPr lang="zh-TW" altLang="en-US" dirty="0"/>
-          </a:p>
-        </p:txBody>
-      </p:sp>
-    </p:spTree>
-    <p:extLst>
-      <p:ext uri="{BB962C8B-B14F-4D97-AF65-F5344CB8AC3E}">
-        <p14:creationId xmlns:p14="http://schemas.microsoft.com/office/powerpoint/2010/main" val="219506187"/>
-      </p:ext>
-    </p:extLst>
-  </p:cSld>
-  <p:clrMapOvr>
-    <a:masterClrMapping/>
-  </p:clrMapOvr>
-  <mc:AlternateContent xmlns:mc="http://schemas.openxmlformats.org/markup-compatibility/2006" xmlns:p14="http://schemas.microsoft.com/office/powerpoint/2010/main">
-    <mc:Choice Requires="p14">
-      <p:transition spd="slow" p14:dur="2000">
-        <p:cut/>
-      </p:transition>
-    </mc:Choice>
-    <mc:Fallback xmlns="">
-      <p:transition spd="slow">
-        <p:cut/>
-      </p:transition>
-    </mc:Fallback>
-  </mc:AlternateContent>
-</p:sld>
-</file>
-
-<file path=ppt/slides/slide20.xml><?xml version="1.0" encoding="utf-8"?>
+<file path=ppt/slides/slide19.xml><?xml version="1.0" encoding="utf-8"?>
 <p:sld xmlns:a="http://schemas.openxmlformats.org/drawingml/2006/main" xmlns:r="http://schemas.openxmlformats.org/officeDocument/2006/relationships" xmlns:p="http://schemas.openxmlformats.org/presentationml/2006/main">
   <p:cSld>
     <p:spTree>
@@ -11290,7 +12246,7 @@
           <a:p>
             <a:fld id="{5E7A655E-BA10-45EB-B439-1EA08694B58E}" type="slidenum">
               <a:rPr lang="en-US" smtClean="0"/>
-              <a:t>20</a:t>
+              <a:t>19</a:t>
             </a:fld>
             <a:endParaRPr lang="en-US"/>
           </a:p>
@@ -13173,7 +14129,289 @@
 </p:sld>
 </file>
 
-<file path=ppt/slides/slide21.xml><?xml version="1.0" encoding="utf-8"?>
+<file path=ppt/slides/slide2.xml><?xml version="1.0" encoding="utf-8"?>
+<p:sld xmlns:a="http://schemas.openxmlformats.org/drawingml/2006/main" xmlns:r="http://schemas.openxmlformats.org/officeDocument/2006/relationships" xmlns:p="http://schemas.openxmlformats.org/presentationml/2006/main">
+  <p:cSld>
+    <p:spTree>
+      <p:nvGrpSpPr>
+        <p:cNvPr id="1" name="">
+          <a:extLst>
+            <a:ext uri="{FF2B5EF4-FFF2-40B4-BE49-F238E27FC236}">
+              <a16:creationId xmlns:a16="http://schemas.microsoft.com/office/drawing/2014/main" id="{B69280E7-411B-5B87-EFAC-03C9325D8EB4}"/>
+            </a:ext>
+          </a:extLst>
+        </p:cNvPr>
+        <p:cNvGrpSpPr/>
+        <p:nvPr/>
+      </p:nvGrpSpPr>
+      <p:grpSpPr>
+        <a:xfrm>
+          <a:off x="0" y="0"/>
+          <a:ext cx="0" cy="0"/>
+          <a:chOff x="0" y="0"/>
+          <a:chExt cx="0" cy="0"/>
+        </a:xfrm>
+      </p:grpSpPr>
+      <p:sp>
+        <p:nvSpPr>
+          <p:cNvPr id="2" name="標題 1">
+            <a:extLst>
+              <a:ext uri="{FF2B5EF4-FFF2-40B4-BE49-F238E27FC236}">
+                <a16:creationId xmlns:a16="http://schemas.microsoft.com/office/drawing/2014/main" id="{4743D012-99B4-A6AC-0CD2-999158835AC4}"/>
+              </a:ext>
+            </a:extLst>
+          </p:cNvPr>
+          <p:cNvSpPr>
+            <a:spLocks noGrp="1"/>
+          </p:cNvSpPr>
+          <p:nvPr>
+            <p:ph type="title"/>
+          </p:nvPr>
+        </p:nvSpPr>
+        <p:spPr/>
+        <p:txBody>
+          <a:bodyPr/>
+          <a:lstStyle/>
+          <a:p>
+            <a:r>
+              <a:rPr lang="en-US" altLang="zh-TW" dirty="0"/>
+              <a:t>Outline</a:t>
+            </a:r>
+            <a:endParaRPr lang="zh-TW" altLang="en-US" dirty="0"/>
+          </a:p>
+        </p:txBody>
+      </p:sp>
+      <p:sp>
+        <p:nvSpPr>
+          <p:cNvPr id="3" name="內容版面配置區 2">
+            <a:extLst>
+              <a:ext uri="{FF2B5EF4-FFF2-40B4-BE49-F238E27FC236}">
+                <a16:creationId xmlns:a16="http://schemas.microsoft.com/office/drawing/2014/main" id="{130A0642-98CF-9CEF-6C6D-052CB538B24A}"/>
+              </a:ext>
+            </a:extLst>
+          </p:cNvPr>
+          <p:cNvSpPr>
+            <a:spLocks noGrp="1"/>
+          </p:cNvSpPr>
+          <p:nvPr>
+            <p:ph idx="1"/>
+          </p:nvPr>
+        </p:nvSpPr>
+        <p:spPr/>
+        <p:txBody>
+          <a:bodyPr/>
+          <a:lstStyle/>
+          <a:p>
+            <a:pPr>
+              <a:spcBef>
+                <a:spcPts val="1200"/>
+              </a:spcBef>
+            </a:pPr>
+            <a:r>
+              <a:rPr lang="en-US" sz="2400" dirty="0">
+                <a:latin typeface="Times New Roman" panose="02020603050405020304" pitchFamily="18" charset="0"/>
+                <a:cs typeface="Times New Roman" panose="02020603050405020304" pitchFamily="18" charset="0"/>
+              </a:rPr>
+              <a:t>FPGA Selection and Spec</a:t>
+            </a:r>
+          </a:p>
+          <a:p>
+            <a:pPr>
+              <a:spcBef>
+                <a:spcPts val="1200"/>
+              </a:spcBef>
+            </a:pPr>
+            <a:r>
+              <a:rPr lang="en-US" sz="2400" dirty="0">
+                <a:latin typeface="Times New Roman" panose="02020603050405020304" pitchFamily="18" charset="0"/>
+                <a:cs typeface="Times New Roman" panose="02020603050405020304" pitchFamily="18" charset="0"/>
+              </a:rPr>
+              <a:t>Microcontroller Overview</a:t>
+            </a:r>
+          </a:p>
+          <a:p>
+            <a:pPr>
+              <a:spcBef>
+                <a:spcPts val="1200"/>
+              </a:spcBef>
+            </a:pPr>
+            <a:r>
+              <a:rPr lang="en-US" altLang="zh-TW" sz="2400" dirty="0">
+                <a:latin typeface="Times New Roman" panose="02020603050405020304" pitchFamily="18" charset="0"/>
+                <a:cs typeface="Times New Roman" panose="02020603050405020304" pitchFamily="18" charset="0"/>
+              </a:rPr>
+              <a:t>Data Path / Instruction Path</a:t>
+            </a:r>
+            <a:endParaRPr lang="en-US" sz="2400" dirty="0">
+              <a:latin typeface="Times New Roman" panose="02020603050405020304" pitchFamily="18" charset="0"/>
+              <a:cs typeface="Times New Roman" panose="02020603050405020304" pitchFamily="18" charset="0"/>
+            </a:endParaRPr>
+          </a:p>
+          <a:p>
+            <a:pPr>
+              <a:spcBef>
+                <a:spcPts val="1200"/>
+              </a:spcBef>
+            </a:pPr>
+            <a:r>
+              <a:rPr lang="en-US" sz="2400" dirty="0">
+                <a:latin typeface="Times New Roman" panose="02020603050405020304" pitchFamily="18" charset="0"/>
+                <a:cs typeface="Times New Roman" panose="02020603050405020304" pitchFamily="18" charset="0"/>
+              </a:rPr>
+              <a:t>MDM / GPIO / Interrupt System / </a:t>
+            </a:r>
+            <a:r>
+              <a:rPr lang="zh-TW" altLang="en-US" sz="2400" dirty="0">
+                <a:latin typeface="Times New Roman" panose="02020603050405020304" pitchFamily="18" charset="0"/>
+                <a:cs typeface="Times New Roman" panose="02020603050405020304" pitchFamily="18" charset="0"/>
+              </a:rPr>
+              <a:t> </a:t>
+            </a:r>
+            <a:r>
+              <a:rPr lang="en-US" altLang="zh-TW" sz="2400" dirty="0">
+                <a:latin typeface="Times New Roman" panose="02020603050405020304" pitchFamily="18" charset="0"/>
+                <a:cs typeface="Times New Roman" panose="02020603050405020304" pitchFamily="18" charset="0"/>
+              </a:rPr>
+              <a:t>Timer &amp; PWM / XADC / UART</a:t>
+            </a:r>
+          </a:p>
+          <a:p>
+            <a:pPr>
+              <a:spcBef>
+                <a:spcPts val="1200"/>
+              </a:spcBef>
+            </a:pPr>
+            <a:r>
+              <a:rPr lang="en-US" altLang="zh-TW" sz="2400" dirty="0">
+                <a:solidFill>
+                  <a:srgbClr val="FF0000"/>
+                </a:solidFill>
+                <a:latin typeface="Times New Roman" panose="02020603050405020304" pitchFamily="18" charset="0"/>
+                <a:cs typeface="Times New Roman" panose="02020603050405020304" pitchFamily="18" charset="0"/>
+              </a:rPr>
+              <a:t>Memory Hierarchy</a:t>
+            </a:r>
+          </a:p>
+          <a:p>
+            <a:pPr>
+              <a:spcBef>
+                <a:spcPts val="1200"/>
+              </a:spcBef>
+            </a:pPr>
+            <a:r>
+              <a:rPr lang="en-US" altLang="zh-TW" sz="2400" dirty="0">
+                <a:latin typeface="Times New Roman" panose="02020603050405020304" pitchFamily="18" charset="0"/>
+                <a:cs typeface="Times New Roman" panose="02020603050405020304" pitchFamily="18" charset="0"/>
+              </a:rPr>
+              <a:t>Hardware Report</a:t>
+            </a:r>
+            <a:endParaRPr lang="en-US" sz="2400" dirty="0">
+              <a:latin typeface="Times New Roman" panose="02020603050405020304" pitchFamily="18" charset="0"/>
+              <a:cs typeface="Times New Roman" panose="02020603050405020304" pitchFamily="18" charset="0"/>
+            </a:endParaRPr>
+          </a:p>
+          <a:p>
+            <a:pPr>
+              <a:spcBef>
+                <a:spcPts val="1200"/>
+              </a:spcBef>
+            </a:pPr>
+            <a:r>
+              <a:rPr lang="en-US" sz="2400" dirty="0">
+                <a:latin typeface="Times New Roman" panose="02020603050405020304" pitchFamily="18" charset="0"/>
+                <a:cs typeface="Times New Roman" panose="02020603050405020304" pitchFamily="18" charset="0"/>
+              </a:rPr>
+              <a:t>Software Design Flow</a:t>
+            </a:r>
+          </a:p>
+          <a:p>
+            <a:pPr>
+              <a:spcBef>
+                <a:spcPts val="1200"/>
+              </a:spcBef>
+            </a:pPr>
+            <a:r>
+              <a:rPr lang="en-US" sz="2400" dirty="0">
+                <a:latin typeface="Times New Roman" panose="02020603050405020304" pitchFamily="18" charset="0"/>
+                <a:cs typeface="Times New Roman" panose="02020603050405020304" pitchFamily="18" charset="0"/>
+              </a:rPr>
+              <a:t>JTAG Debug Flow</a:t>
+            </a:r>
+          </a:p>
+          <a:p>
+            <a:pPr>
+              <a:spcBef>
+                <a:spcPts val="1200"/>
+              </a:spcBef>
+            </a:pPr>
+            <a:r>
+              <a:rPr lang="en-US" sz="2400" dirty="0">
+                <a:solidFill>
+                  <a:srgbClr val="FF0000"/>
+                </a:solidFill>
+                <a:latin typeface="Times New Roman" panose="02020603050405020304" pitchFamily="18" charset="0"/>
+                <a:cs typeface="Times New Roman" panose="02020603050405020304" pitchFamily="18" charset="0"/>
+              </a:rPr>
+              <a:t>Standalone Boot Sequence</a:t>
+            </a:r>
+          </a:p>
+        </p:txBody>
+      </p:sp>
+      <p:sp>
+        <p:nvSpPr>
+          <p:cNvPr id="4" name="投影片編號版面配置區 3">
+            <a:extLst>
+              <a:ext uri="{FF2B5EF4-FFF2-40B4-BE49-F238E27FC236}">
+                <a16:creationId xmlns:a16="http://schemas.microsoft.com/office/drawing/2014/main" id="{2026C914-5B87-BB1E-25CB-FED0FD0FBFCC}"/>
+              </a:ext>
+            </a:extLst>
+          </p:cNvPr>
+          <p:cNvSpPr>
+            <a:spLocks noGrp="1"/>
+          </p:cNvSpPr>
+          <p:nvPr>
+            <p:ph type="sldNum" sz="quarter" idx="12"/>
+          </p:nvPr>
+        </p:nvSpPr>
+        <p:spPr/>
+        <p:txBody>
+          <a:bodyPr/>
+          <a:lstStyle/>
+          <a:p>
+            <a:fld id="{F9F9ED32-46C6-469E-9D81-E8934DBD0961}" type="slidenum">
+              <a:rPr lang="zh-TW" altLang="en-US" smtClean="0"/>
+              <a:t>2</a:t>
+            </a:fld>
+            <a:endParaRPr lang="zh-TW" altLang="en-US" dirty="0"/>
+          </a:p>
+        </p:txBody>
+      </p:sp>
+    </p:spTree>
+    <p:extLst>
+      <p:ext uri="{BB962C8B-B14F-4D97-AF65-F5344CB8AC3E}">
+        <p14:creationId xmlns:p14="http://schemas.microsoft.com/office/powerpoint/2010/main" val="219506187"/>
+      </p:ext>
+    </p:extLst>
+  </p:cSld>
+  <p:clrMapOvr>
+    <a:masterClrMapping/>
+  </p:clrMapOvr>
+  <mc:AlternateContent xmlns:mc="http://schemas.openxmlformats.org/markup-compatibility/2006" xmlns:p14="http://schemas.microsoft.com/office/powerpoint/2010/main">
+    <mc:Choice Requires="p14">
+      <p:transition spd="slow" p14:dur="2000">
+        <p:cut/>
+      </p:transition>
+    </mc:Choice>
+    <mc:Fallback xmlns="">
+      <p:transition spd="slow">
+        <p:cut/>
+      </p:transition>
+    </mc:Fallback>
+  </mc:AlternateContent>
+</p:sld>
+</file>
+
+<file path=ppt/slides/slide20.xml><?xml version="1.0" encoding="utf-8"?>
 <p:sld xmlns:a="http://schemas.openxmlformats.org/drawingml/2006/main" xmlns:r="http://schemas.openxmlformats.org/officeDocument/2006/relationships" xmlns:p="http://schemas.openxmlformats.org/presentationml/2006/main">
   <p:cSld>
     <p:spTree>
@@ -13257,6 +14495,30 @@
               </a:spcBef>
             </a:pPr>
             <a:r>
+              <a:rPr lang="en-US" altLang="zh-TW" sz="2400" dirty="0">
+                <a:solidFill>
+                  <a:schemeClr val="bg2"/>
+                </a:solidFill>
+                <a:latin typeface="Times New Roman" panose="02020603050405020304" pitchFamily="18" charset="0"/>
+                <a:cs typeface="Times New Roman" panose="02020603050405020304" pitchFamily="18" charset="0"/>
+              </a:rPr>
+              <a:t>Data Path / Instruction Path</a:t>
+            </a:r>
+            <a:endParaRPr lang="en-US" sz="2400" dirty="0">
+              <a:solidFill>
+                <a:schemeClr val="bg2"/>
+              </a:solidFill>
+              <a:latin typeface="Times New Roman" panose="02020603050405020304" pitchFamily="18" charset="0"/>
+              <a:cs typeface="Times New Roman" panose="02020603050405020304" pitchFamily="18" charset="0"/>
+            </a:endParaRPr>
+          </a:p>
+          <a:p>
+            <a:pPr>
+              <a:spcBef>
+                <a:spcPts val="1200"/>
+              </a:spcBef>
+            </a:pPr>
+            <a:r>
               <a:rPr lang="en-US" sz="2400" dirty="0">
                 <a:solidFill>
                   <a:schemeClr val="bg2"/>
@@ -13401,7 +14663,7 @@
           <a:p>
             <a:fld id="{F9F9ED32-46C6-469E-9D81-E8934DBD0961}" type="slidenum">
               <a:rPr lang="zh-TW" altLang="en-US" smtClean="0"/>
-              <a:t>21</a:t>
+              <a:t>20</a:t>
             </a:fld>
             <a:endParaRPr lang="zh-TW" altLang="en-US" dirty="0"/>
           </a:p>
@@ -13432,7 +14694,7 @@
 </p:sld>
 </file>
 
-<file path=ppt/slides/slide22.xml><?xml version="1.0" encoding="utf-8"?>
+<file path=ppt/slides/slide21.xml><?xml version="1.0" encoding="utf-8"?>
 <p:sld xmlns:a="http://schemas.openxmlformats.org/drawingml/2006/main" xmlns:r="http://schemas.openxmlformats.org/officeDocument/2006/relationships" xmlns:p="http://schemas.openxmlformats.org/presentationml/2006/main">
   <p:cSld>
     <p:spTree>
@@ -13506,7 +14768,7 @@
           <a:p>
             <a:fld id="{9856DA5A-CF52-47BD-AC49-21DC5CAD2230}" type="slidenum">
               <a:rPr lang="en-TW" smtClean="0"/>
-              <a:t>22</a:t>
+              <a:t>21</a:t>
             </a:fld>
             <a:endParaRPr lang="en-TW"/>
           </a:p>
@@ -13572,7 +14834,7 @@
 </p:sld>
 </file>
 
-<file path=ppt/slides/slide23.xml><?xml version="1.0" encoding="utf-8"?>
+<file path=ppt/slides/slide22.xml><?xml version="1.0" encoding="utf-8"?>
 <p:sld xmlns:a="http://schemas.openxmlformats.org/drawingml/2006/main" xmlns:r="http://schemas.openxmlformats.org/officeDocument/2006/relationships" xmlns:p="http://schemas.openxmlformats.org/presentationml/2006/main">
   <p:cSld>
     <p:spTree>
@@ -13656,6 +14918,30 @@
               </a:spcBef>
             </a:pPr>
             <a:r>
+              <a:rPr lang="en-US" altLang="zh-TW" sz="2400" dirty="0">
+                <a:solidFill>
+                  <a:schemeClr val="bg2"/>
+                </a:solidFill>
+                <a:latin typeface="Times New Roman" panose="02020603050405020304" pitchFamily="18" charset="0"/>
+                <a:cs typeface="Times New Roman" panose="02020603050405020304" pitchFamily="18" charset="0"/>
+              </a:rPr>
+              <a:t>Data Path / Instruction Path</a:t>
+            </a:r>
+            <a:endParaRPr lang="en-US" sz="2400" dirty="0">
+              <a:solidFill>
+                <a:schemeClr val="bg2"/>
+              </a:solidFill>
+              <a:latin typeface="Times New Roman" panose="02020603050405020304" pitchFamily="18" charset="0"/>
+              <a:cs typeface="Times New Roman" panose="02020603050405020304" pitchFamily="18" charset="0"/>
+            </a:endParaRPr>
+          </a:p>
+          <a:p>
+            <a:pPr>
+              <a:spcBef>
+                <a:spcPts val="1200"/>
+              </a:spcBef>
+            </a:pPr>
+            <a:r>
               <a:rPr lang="en-US" sz="2400" dirty="0">
                 <a:solidFill>
                   <a:schemeClr val="bg2"/>
@@ -13797,7 +15083,7 @@
           <a:p>
             <a:fld id="{F9F9ED32-46C6-469E-9D81-E8934DBD0961}" type="slidenum">
               <a:rPr lang="zh-TW" altLang="en-US" smtClean="0"/>
-              <a:t>23</a:t>
+              <a:t>22</a:t>
             </a:fld>
             <a:endParaRPr lang="zh-TW" altLang="en-US" dirty="0"/>
           </a:p>
@@ -13828,7 +15114,7 @@
 </p:sld>
 </file>
 
-<file path=ppt/slides/slide24.xml><?xml version="1.0" encoding="utf-8"?>
+<file path=ppt/slides/slide23.xml><?xml version="1.0" encoding="utf-8"?>
 <p:sld xmlns:a="http://schemas.openxmlformats.org/drawingml/2006/main" xmlns:r="http://schemas.openxmlformats.org/officeDocument/2006/relationships" xmlns:p="http://schemas.openxmlformats.org/presentationml/2006/main">
   <p:cSld>
     <p:spTree>
@@ -14068,7 +15354,7 @@
           <a:p>
             <a:fld id="{5E7A655E-BA10-45EB-B439-1EA08694B58E}" type="slidenum">
               <a:rPr lang="en-TW" smtClean="0"/>
-              <a:t>24</a:t>
+              <a:t>23</a:t>
             </a:fld>
             <a:endParaRPr lang="en-TW"/>
           </a:p>
@@ -14082,7 +15368,7 @@
 </p:sld>
 </file>
 
-<file path=ppt/slides/slide25.xml><?xml version="1.0" encoding="utf-8"?>
+<file path=ppt/slides/slide24.xml><?xml version="1.0" encoding="utf-8"?>
 <p:sld xmlns:a="http://schemas.openxmlformats.org/drawingml/2006/main" xmlns:r="http://schemas.openxmlformats.org/officeDocument/2006/relationships" xmlns:p="http://schemas.openxmlformats.org/presentationml/2006/main">
   <p:cSld>
     <p:spTree>
@@ -14166,6 +15452,30 @@
               </a:spcBef>
             </a:pPr>
             <a:r>
+              <a:rPr lang="en-US" altLang="zh-TW" sz="2400" dirty="0">
+                <a:solidFill>
+                  <a:schemeClr val="bg2"/>
+                </a:solidFill>
+                <a:latin typeface="Times New Roman" panose="02020603050405020304" pitchFamily="18" charset="0"/>
+                <a:cs typeface="Times New Roman" panose="02020603050405020304" pitchFamily="18" charset="0"/>
+              </a:rPr>
+              <a:t>Data Path / Instruction Path</a:t>
+            </a:r>
+            <a:endParaRPr lang="en-US" sz="2400" dirty="0">
+              <a:solidFill>
+                <a:schemeClr val="bg2"/>
+              </a:solidFill>
+              <a:latin typeface="Times New Roman" panose="02020603050405020304" pitchFamily="18" charset="0"/>
+              <a:cs typeface="Times New Roman" panose="02020603050405020304" pitchFamily="18" charset="0"/>
+            </a:endParaRPr>
+          </a:p>
+          <a:p>
+            <a:pPr>
+              <a:spcBef>
+                <a:spcPts val="1200"/>
+              </a:spcBef>
+            </a:pPr>
+            <a:r>
               <a:rPr lang="en-US" sz="2400" dirty="0">
                 <a:solidFill>
                   <a:schemeClr val="bg2"/>
@@ -14310,7 +15620,7 @@
           <a:p>
             <a:fld id="{F9F9ED32-46C6-469E-9D81-E8934DBD0961}" type="slidenum">
               <a:rPr lang="zh-TW" altLang="en-US" smtClean="0"/>
-              <a:t>25</a:t>
+              <a:t>24</a:t>
             </a:fld>
             <a:endParaRPr lang="zh-TW" altLang="en-US" dirty="0"/>
           </a:p>
@@ -14341,7 +15651,7 @@
 </p:sld>
 </file>
 
-<file path=ppt/slides/slide26.xml><?xml version="1.0" encoding="utf-8"?>
+<file path=ppt/slides/slide25.xml><?xml version="1.0" encoding="utf-8"?>
 <p:sld xmlns:a="http://schemas.openxmlformats.org/drawingml/2006/main" xmlns:r="http://schemas.openxmlformats.org/officeDocument/2006/relationships" xmlns:p="http://schemas.openxmlformats.org/presentationml/2006/main">
   <p:cSld>
     <p:spTree>
@@ -14465,7 +15775,7 @@
             </a:pPr>
             <a:fld id="{00000000-1234-1234-1234-123412341234}" type="slidenum">
               <a:rPr lang="en-US" smtClean="0"/>
-              <a:t>26</a:t>
+              <a:t>25</a:t>
             </a:fld>
             <a:endParaRPr lang="en-US"/>
           </a:p>
@@ -14484,7 +15794,7 @@
 </p:sld>
 </file>
 
-<file path=ppt/slides/slide27.xml><?xml version="1.0" encoding="utf-8"?>
+<file path=ppt/slides/slide26.xml><?xml version="1.0" encoding="utf-8"?>
 <p:sld xmlns:a="http://schemas.openxmlformats.org/drawingml/2006/main" xmlns:r="http://schemas.openxmlformats.org/officeDocument/2006/relationships" xmlns:p="http://schemas.openxmlformats.org/presentationml/2006/main">
   <p:cSld>
     <p:spTree>
@@ -14719,7 +16029,7 @@
             </a:pPr>
             <a:fld id="{00000000-1234-1234-1234-123412341234}" type="slidenum">
               <a:rPr lang="en-US" smtClean="0"/>
-              <a:t>27</a:t>
+              <a:t>26</a:t>
             </a:fld>
             <a:endParaRPr lang="en-US"/>
           </a:p>
@@ -14738,7 +16048,7 @@
 </p:sld>
 </file>
 
-<file path=ppt/slides/slide28.xml><?xml version="1.0" encoding="utf-8"?>
+<file path=ppt/slides/slide27.xml><?xml version="1.0" encoding="utf-8"?>
 <p:sld xmlns:a="http://schemas.openxmlformats.org/drawingml/2006/main" xmlns:r="http://schemas.openxmlformats.org/officeDocument/2006/relationships" xmlns:p="http://schemas.openxmlformats.org/presentationml/2006/main">
   <p:cSld>
     <p:spTree>
@@ -15015,7 +16325,7 @@
             <a:fld id="{F9F9ED32-46C6-469E-9D81-E8934DBD0961}" type="slidenum">
               <a:rPr lang="zh-TW" altLang="en-US" smtClean="0"/>
               <a:pPr/>
-              <a:t>28</a:t>
+              <a:t>27</a:t>
             </a:fld>
             <a:endParaRPr lang="zh-TW" altLang="en-US" dirty="0"/>
           </a:p>
@@ -15110,7 +16420,7 @@
 </p:sld>
 </file>
 
-<file path=ppt/slides/slide29.xml><?xml version="1.0" encoding="utf-8"?>
+<file path=ppt/slides/slide28.xml><?xml version="1.0" encoding="utf-8"?>
 <p:sld xmlns:a="http://schemas.openxmlformats.org/drawingml/2006/main" xmlns:r="http://schemas.openxmlformats.org/officeDocument/2006/relationships" xmlns:p="http://schemas.openxmlformats.org/presentationml/2006/main">
   <p:cSld>
     <p:spTree>
@@ -15334,7 +16644,7 @@
             <a:fld id="{F9F9ED32-46C6-469E-9D81-E8934DBD0961}" type="slidenum">
               <a:rPr lang="zh-TW" altLang="en-US" smtClean="0"/>
               <a:pPr/>
-              <a:t>29</a:t>
+              <a:t>28</a:t>
             </a:fld>
             <a:endParaRPr lang="zh-TW" altLang="en-US" dirty="0"/>
           </a:p>
@@ -15350,6 +16660,289 @@
   <p:clrMapOvr>
     <a:masterClrMapping/>
   </p:clrMapOvr>
+</p:sld>
+</file>
+
+<file path=ppt/slides/slide29.xml><?xml version="1.0" encoding="utf-8"?>
+<p:sld xmlns:a="http://schemas.openxmlformats.org/drawingml/2006/main" xmlns:r="http://schemas.openxmlformats.org/officeDocument/2006/relationships" xmlns:p="http://schemas.openxmlformats.org/presentationml/2006/main">
+  <p:cSld>
+    <p:spTree>
+      <p:nvGrpSpPr>
+        <p:cNvPr id="1" name="">
+          <a:extLst>
+            <a:ext uri="{FF2B5EF4-FFF2-40B4-BE49-F238E27FC236}">
+              <a16:creationId xmlns:a16="http://schemas.microsoft.com/office/drawing/2014/main" id="{A5F8769B-96D5-FB86-647F-9E84199D00DD}"/>
+            </a:ext>
+          </a:extLst>
+        </p:cNvPr>
+        <p:cNvGrpSpPr/>
+        <p:nvPr/>
+      </p:nvGrpSpPr>
+      <p:grpSpPr>
+        <a:xfrm>
+          <a:off x="0" y="0"/>
+          <a:ext cx="0" cy="0"/>
+          <a:chOff x="0" y="0"/>
+          <a:chExt cx="0" cy="0"/>
+        </a:xfrm>
+      </p:grpSpPr>
+      <p:sp>
+        <p:nvSpPr>
+          <p:cNvPr id="3" name="內容版面配置區 2">
+            <a:extLst>
+              <a:ext uri="{FF2B5EF4-FFF2-40B4-BE49-F238E27FC236}">
+                <a16:creationId xmlns:a16="http://schemas.microsoft.com/office/drawing/2014/main" id="{6CAFB584-589A-4323-19D7-1DC80633D59A}"/>
+              </a:ext>
+            </a:extLst>
+          </p:cNvPr>
+          <p:cNvSpPr>
+            <a:spLocks noGrp="1"/>
+          </p:cNvSpPr>
+          <p:nvPr>
+            <p:ph idx="1"/>
+          </p:nvPr>
+        </p:nvSpPr>
+        <p:spPr/>
+        <p:txBody>
+          <a:bodyPr/>
+          <a:lstStyle/>
+          <a:p>
+            <a:pPr>
+              <a:spcBef>
+                <a:spcPts val="1200"/>
+              </a:spcBef>
+            </a:pPr>
+            <a:r>
+              <a:rPr lang="en-US" sz="2400" dirty="0">
+                <a:solidFill>
+                  <a:schemeClr val="bg2"/>
+                </a:solidFill>
+                <a:latin typeface="Times New Roman" panose="02020603050405020304" pitchFamily="18" charset="0"/>
+                <a:cs typeface="Times New Roman" panose="02020603050405020304" pitchFamily="18" charset="0"/>
+              </a:rPr>
+              <a:t>FPGA Selection and Spec</a:t>
+            </a:r>
+          </a:p>
+          <a:p>
+            <a:pPr>
+              <a:spcBef>
+                <a:spcPts val="1200"/>
+              </a:spcBef>
+            </a:pPr>
+            <a:r>
+              <a:rPr lang="en-US" sz="2400" dirty="0">
+                <a:solidFill>
+                  <a:schemeClr val="bg2"/>
+                </a:solidFill>
+                <a:latin typeface="Times New Roman" panose="02020603050405020304" pitchFamily="18" charset="0"/>
+                <a:cs typeface="Times New Roman" panose="02020603050405020304" pitchFamily="18" charset="0"/>
+              </a:rPr>
+              <a:t>Microcontroller Overview</a:t>
+            </a:r>
+          </a:p>
+          <a:p>
+            <a:pPr>
+              <a:spcBef>
+                <a:spcPts val="1200"/>
+              </a:spcBef>
+            </a:pPr>
+            <a:r>
+              <a:rPr lang="en-US" altLang="zh-TW" sz="2400" dirty="0">
+                <a:solidFill>
+                  <a:schemeClr val="bg2"/>
+                </a:solidFill>
+                <a:latin typeface="Times New Roman" panose="02020603050405020304" pitchFamily="18" charset="0"/>
+                <a:cs typeface="Times New Roman" panose="02020603050405020304" pitchFamily="18" charset="0"/>
+              </a:rPr>
+              <a:t>Data Path / Instruction Path</a:t>
+            </a:r>
+            <a:endParaRPr lang="en-US" sz="2400" dirty="0">
+              <a:solidFill>
+                <a:schemeClr val="bg2"/>
+              </a:solidFill>
+              <a:latin typeface="Times New Roman" panose="02020603050405020304" pitchFamily="18" charset="0"/>
+              <a:cs typeface="Times New Roman" panose="02020603050405020304" pitchFamily="18" charset="0"/>
+            </a:endParaRPr>
+          </a:p>
+          <a:p>
+            <a:pPr>
+              <a:spcBef>
+                <a:spcPts val="1200"/>
+              </a:spcBef>
+            </a:pPr>
+            <a:r>
+              <a:rPr lang="en-US" sz="2400" dirty="0">
+                <a:solidFill>
+                  <a:schemeClr val="bg2"/>
+                </a:solidFill>
+                <a:latin typeface="Times New Roman" panose="02020603050405020304" pitchFamily="18" charset="0"/>
+                <a:cs typeface="Times New Roman" panose="02020603050405020304" pitchFamily="18" charset="0"/>
+              </a:rPr>
+              <a:t>MDM / GPIO / Interrupt System / </a:t>
+            </a:r>
+            <a:r>
+              <a:rPr lang="zh-TW" altLang="en-US" sz="2400" dirty="0">
+                <a:solidFill>
+                  <a:schemeClr val="bg2"/>
+                </a:solidFill>
+                <a:latin typeface="Times New Roman" panose="02020603050405020304" pitchFamily="18" charset="0"/>
+                <a:cs typeface="Times New Roman" panose="02020603050405020304" pitchFamily="18" charset="0"/>
+              </a:rPr>
+              <a:t> </a:t>
+            </a:r>
+            <a:r>
+              <a:rPr lang="en-US" altLang="zh-TW" sz="2400" dirty="0">
+                <a:solidFill>
+                  <a:schemeClr val="bg2"/>
+                </a:solidFill>
+                <a:latin typeface="Times New Roman" panose="02020603050405020304" pitchFamily="18" charset="0"/>
+                <a:cs typeface="Times New Roman" panose="02020603050405020304" pitchFamily="18" charset="0"/>
+              </a:rPr>
+              <a:t>Timer &amp; PWM / XADC / UART</a:t>
+            </a:r>
+          </a:p>
+          <a:p>
+            <a:pPr>
+              <a:spcBef>
+                <a:spcPts val="1200"/>
+              </a:spcBef>
+            </a:pPr>
+            <a:r>
+              <a:rPr lang="en-US" altLang="zh-TW" sz="2400" dirty="0">
+                <a:solidFill>
+                  <a:schemeClr val="bg2"/>
+                </a:solidFill>
+                <a:latin typeface="Times New Roman" panose="02020603050405020304" pitchFamily="18" charset="0"/>
+                <a:cs typeface="Times New Roman" panose="02020603050405020304" pitchFamily="18" charset="0"/>
+              </a:rPr>
+              <a:t>Memory Hierarchy</a:t>
+            </a:r>
+          </a:p>
+          <a:p>
+            <a:pPr>
+              <a:spcBef>
+                <a:spcPts val="1200"/>
+              </a:spcBef>
+            </a:pPr>
+            <a:r>
+              <a:rPr lang="en-US" altLang="zh-TW" sz="2400" dirty="0">
+                <a:solidFill>
+                  <a:schemeClr val="bg2"/>
+                </a:solidFill>
+                <a:latin typeface="Times New Roman" panose="02020603050405020304" pitchFamily="18" charset="0"/>
+                <a:cs typeface="Times New Roman" panose="02020603050405020304" pitchFamily="18" charset="0"/>
+              </a:rPr>
+              <a:t>Hardware Report</a:t>
+            </a:r>
+            <a:endParaRPr lang="en-US" sz="2400" dirty="0">
+              <a:solidFill>
+                <a:schemeClr val="bg2"/>
+              </a:solidFill>
+              <a:latin typeface="Times New Roman" panose="02020603050405020304" pitchFamily="18" charset="0"/>
+              <a:cs typeface="Times New Roman" panose="02020603050405020304" pitchFamily="18" charset="0"/>
+            </a:endParaRPr>
+          </a:p>
+          <a:p>
+            <a:pPr>
+              <a:spcBef>
+                <a:spcPts val="1200"/>
+              </a:spcBef>
+            </a:pPr>
+            <a:r>
+              <a:rPr lang="en-US" sz="2400" dirty="0">
+                <a:solidFill>
+                  <a:schemeClr val="bg2"/>
+                </a:solidFill>
+                <a:latin typeface="Times New Roman" panose="02020603050405020304" pitchFamily="18" charset="0"/>
+                <a:cs typeface="Times New Roman" panose="02020603050405020304" pitchFamily="18" charset="0"/>
+              </a:rPr>
+              <a:t>Software Design Flow</a:t>
+            </a:r>
+          </a:p>
+          <a:p>
+            <a:pPr>
+              <a:spcBef>
+                <a:spcPts val="1200"/>
+              </a:spcBef>
+            </a:pPr>
+            <a:r>
+              <a:rPr lang="en-US" sz="2400" dirty="0">
+                <a:latin typeface="Times New Roman" panose="02020603050405020304" pitchFamily="18" charset="0"/>
+                <a:cs typeface="Times New Roman" panose="02020603050405020304" pitchFamily="18" charset="0"/>
+              </a:rPr>
+              <a:t>JTAG Debug Flow</a:t>
+            </a:r>
+          </a:p>
+          <a:p>
+            <a:pPr>
+              <a:spcBef>
+                <a:spcPts val="1200"/>
+              </a:spcBef>
+            </a:pPr>
+            <a:r>
+              <a:rPr lang="en-US" sz="2400" dirty="0">
+                <a:solidFill>
+                  <a:schemeClr val="bg2"/>
+                </a:solidFill>
+                <a:latin typeface="Times New Roman" panose="02020603050405020304" pitchFamily="18" charset="0"/>
+                <a:cs typeface="Times New Roman" panose="02020603050405020304" pitchFamily="18" charset="0"/>
+              </a:rPr>
+              <a:t>Standalone Boot Sequence</a:t>
+            </a:r>
+          </a:p>
+        </p:txBody>
+      </p:sp>
+      <p:sp>
+        <p:nvSpPr>
+          <p:cNvPr id="4" name="投影片編號版面配置區 3">
+            <a:extLst>
+              <a:ext uri="{FF2B5EF4-FFF2-40B4-BE49-F238E27FC236}">
+                <a16:creationId xmlns:a16="http://schemas.microsoft.com/office/drawing/2014/main" id="{DD7D01D4-C40B-FE2A-564A-D957653CEF40}"/>
+              </a:ext>
+            </a:extLst>
+          </p:cNvPr>
+          <p:cNvSpPr>
+            <a:spLocks noGrp="1"/>
+          </p:cNvSpPr>
+          <p:nvPr>
+            <p:ph type="sldNum" sz="quarter" idx="12"/>
+          </p:nvPr>
+        </p:nvSpPr>
+        <p:spPr/>
+        <p:txBody>
+          <a:bodyPr/>
+          <a:lstStyle/>
+          <a:p>
+            <a:fld id="{F9F9ED32-46C6-469E-9D81-E8934DBD0961}" type="slidenum">
+              <a:rPr lang="zh-TW" altLang="en-US" smtClean="0"/>
+              <a:t>29</a:t>
+            </a:fld>
+            <a:endParaRPr lang="zh-TW" altLang="en-US" dirty="0"/>
+          </a:p>
+        </p:txBody>
+      </p:sp>
+    </p:spTree>
+    <p:extLst>
+      <p:ext uri="{BB962C8B-B14F-4D97-AF65-F5344CB8AC3E}">
+        <p14:creationId xmlns:p14="http://schemas.microsoft.com/office/powerpoint/2010/main" val="1347852348"/>
+      </p:ext>
+    </p:extLst>
+  </p:cSld>
+  <p:clrMapOvr>
+    <a:masterClrMapping/>
+  </p:clrMapOvr>
+  <mc:AlternateContent xmlns:mc="http://schemas.openxmlformats.org/markup-compatibility/2006" xmlns:p14="http://schemas.microsoft.com/office/powerpoint/2010/main">
+    <mc:Choice Requires="p14">
+      <p:transition spd="slow" p14:dur="2000">
+        <p:cut/>
+      </p:transition>
+    </mc:Choice>
+    <mc:Fallback xmlns="">
+      <p:transition spd="slow">
+        <p:cut/>
+      </p:transition>
+    </mc:Fallback>
+  </mc:AlternateContent>
 </p:sld>
 </file>
 
@@ -15426,6 +17019,30 @@
               </a:rPr>
               <a:t>Microcontroller Overview</a:t>
             </a:r>
+          </a:p>
+          <a:p>
+            <a:pPr>
+              <a:spcBef>
+                <a:spcPts val="1200"/>
+              </a:spcBef>
+            </a:pPr>
+            <a:r>
+              <a:rPr lang="en-US" altLang="zh-TW" sz="2400" dirty="0">
+                <a:solidFill>
+                  <a:schemeClr val="bg2"/>
+                </a:solidFill>
+                <a:latin typeface="Times New Roman" panose="02020603050405020304" pitchFamily="18" charset="0"/>
+                <a:cs typeface="Times New Roman" panose="02020603050405020304" pitchFamily="18" charset="0"/>
+              </a:rPr>
+              <a:t>Data Path / Instruction Path</a:t>
+            </a:r>
+            <a:endParaRPr lang="en-US" sz="2400" dirty="0">
+              <a:solidFill>
+                <a:schemeClr val="bg2"/>
+              </a:solidFill>
+              <a:latin typeface="Times New Roman" panose="02020603050405020304" pitchFamily="18" charset="0"/>
+              <a:cs typeface="Times New Roman" panose="02020603050405020304" pitchFamily="18" charset="0"/>
+            </a:endParaRPr>
           </a:p>
           <a:p>
             <a:pPr>
@@ -15617,265 +17234,6 @@
   <p:cSld>
     <p:spTree>
       <p:nvGrpSpPr>
-        <p:cNvPr id="1" name="">
-          <a:extLst>
-            <a:ext uri="{FF2B5EF4-FFF2-40B4-BE49-F238E27FC236}">
-              <a16:creationId xmlns:a16="http://schemas.microsoft.com/office/drawing/2014/main" id="{A5F8769B-96D5-FB86-647F-9E84199D00DD}"/>
-            </a:ext>
-          </a:extLst>
-        </p:cNvPr>
-        <p:cNvGrpSpPr/>
-        <p:nvPr/>
-      </p:nvGrpSpPr>
-      <p:grpSpPr>
-        <a:xfrm>
-          <a:off x="0" y="0"/>
-          <a:ext cx="0" cy="0"/>
-          <a:chOff x="0" y="0"/>
-          <a:chExt cx="0" cy="0"/>
-        </a:xfrm>
-      </p:grpSpPr>
-      <p:sp>
-        <p:nvSpPr>
-          <p:cNvPr id="3" name="內容版面配置區 2">
-            <a:extLst>
-              <a:ext uri="{FF2B5EF4-FFF2-40B4-BE49-F238E27FC236}">
-                <a16:creationId xmlns:a16="http://schemas.microsoft.com/office/drawing/2014/main" id="{6CAFB584-589A-4323-19D7-1DC80633D59A}"/>
-              </a:ext>
-            </a:extLst>
-          </p:cNvPr>
-          <p:cNvSpPr>
-            <a:spLocks noGrp="1"/>
-          </p:cNvSpPr>
-          <p:nvPr>
-            <p:ph idx="1"/>
-          </p:nvPr>
-        </p:nvSpPr>
-        <p:spPr/>
-        <p:txBody>
-          <a:bodyPr/>
-          <a:lstStyle/>
-          <a:p>
-            <a:pPr>
-              <a:spcBef>
-                <a:spcPts val="1200"/>
-              </a:spcBef>
-            </a:pPr>
-            <a:r>
-              <a:rPr lang="en-US" sz="2400" dirty="0">
-                <a:solidFill>
-                  <a:schemeClr val="bg2"/>
-                </a:solidFill>
-                <a:latin typeface="Times New Roman" panose="02020603050405020304" pitchFamily="18" charset="0"/>
-                <a:cs typeface="Times New Roman" panose="02020603050405020304" pitchFamily="18" charset="0"/>
-              </a:rPr>
-              <a:t>FPGA Selection and Spec</a:t>
-            </a:r>
-          </a:p>
-          <a:p>
-            <a:pPr>
-              <a:spcBef>
-                <a:spcPts val="1200"/>
-              </a:spcBef>
-            </a:pPr>
-            <a:r>
-              <a:rPr lang="en-US" sz="2400" dirty="0">
-                <a:solidFill>
-                  <a:schemeClr val="bg2"/>
-                </a:solidFill>
-                <a:latin typeface="Times New Roman" panose="02020603050405020304" pitchFamily="18" charset="0"/>
-                <a:cs typeface="Times New Roman" panose="02020603050405020304" pitchFamily="18" charset="0"/>
-              </a:rPr>
-              <a:t>Microcontroller Overview</a:t>
-            </a:r>
-          </a:p>
-          <a:p>
-            <a:pPr>
-              <a:spcBef>
-                <a:spcPts val="1200"/>
-              </a:spcBef>
-            </a:pPr>
-            <a:r>
-              <a:rPr lang="en-US" sz="2400" dirty="0">
-                <a:solidFill>
-                  <a:schemeClr val="bg2"/>
-                </a:solidFill>
-                <a:latin typeface="Times New Roman" panose="02020603050405020304" pitchFamily="18" charset="0"/>
-                <a:cs typeface="Times New Roman" panose="02020603050405020304" pitchFamily="18" charset="0"/>
-              </a:rPr>
-              <a:t>MDM / GPIO / Interrupt System / </a:t>
-            </a:r>
-            <a:r>
-              <a:rPr lang="zh-TW" altLang="en-US" sz="2400" dirty="0">
-                <a:solidFill>
-                  <a:schemeClr val="bg2"/>
-                </a:solidFill>
-                <a:latin typeface="Times New Roman" panose="02020603050405020304" pitchFamily="18" charset="0"/>
-                <a:cs typeface="Times New Roman" panose="02020603050405020304" pitchFamily="18" charset="0"/>
-              </a:rPr>
-              <a:t> </a:t>
-            </a:r>
-            <a:r>
-              <a:rPr lang="en-US" altLang="zh-TW" sz="2400" dirty="0">
-                <a:solidFill>
-                  <a:schemeClr val="bg2"/>
-                </a:solidFill>
-                <a:latin typeface="Times New Roman" panose="02020603050405020304" pitchFamily="18" charset="0"/>
-                <a:cs typeface="Times New Roman" panose="02020603050405020304" pitchFamily="18" charset="0"/>
-              </a:rPr>
-              <a:t>Timer &amp; PWM / XADC / UART</a:t>
-            </a:r>
-          </a:p>
-          <a:p>
-            <a:pPr>
-              <a:spcBef>
-                <a:spcPts val="1200"/>
-              </a:spcBef>
-            </a:pPr>
-            <a:r>
-              <a:rPr lang="en-US" altLang="zh-TW" sz="2400" dirty="0">
-                <a:solidFill>
-                  <a:schemeClr val="bg2"/>
-                </a:solidFill>
-                <a:latin typeface="Times New Roman" panose="02020603050405020304" pitchFamily="18" charset="0"/>
-                <a:cs typeface="Times New Roman" panose="02020603050405020304" pitchFamily="18" charset="0"/>
-              </a:rPr>
-              <a:t>Memory Hierarchy</a:t>
-            </a:r>
-          </a:p>
-          <a:p>
-            <a:pPr>
-              <a:spcBef>
-                <a:spcPts val="1200"/>
-              </a:spcBef>
-            </a:pPr>
-            <a:r>
-              <a:rPr lang="en-US" altLang="zh-TW" sz="2400" dirty="0">
-                <a:solidFill>
-                  <a:schemeClr val="bg2"/>
-                </a:solidFill>
-                <a:latin typeface="Times New Roman" panose="02020603050405020304" pitchFamily="18" charset="0"/>
-                <a:cs typeface="Times New Roman" panose="02020603050405020304" pitchFamily="18" charset="0"/>
-              </a:rPr>
-              <a:t>Hardware Report</a:t>
-            </a:r>
-            <a:endParaRPr lang="en-US" sz="2400" dirty="0">
-              <a:solidFill>
-                <a:schemeClr val="bg2"/>
-              </a:solidFill>
-              <a:latin typeface="Times New Roman" panose="02020603050405020304" pitchFamily="18" charset="0"/>
-              <a:cs typeface="Times New Roman" panose="02020603050405020304" pitchFamily="18" charset="0"/>
-            </a:endParaRPr>
-          </a:p>
-          <a:p>
-            <a:pPr>
-              <a:spcBef>
-                <a:spcPts val="1200"/>
-              </a:spcBef>
-            </a:pPr>
-            <a:r>
-              <a:rPr lang="en-US" sz="2400" dirty="0">
-                <a:solidFill>
-                  <a:schemeClr val="bg2"/>
-                </a:solidFill>
-                <a:latin typeface="Times New Roman" panose="02020603050405020304" pitchFamily="18" charset="0"/>
-                <a:cs typeface="Times New Roman" panose="02020603050405020304" pitchFamily="18" charset="0"/>
-              </a:rPr>
-              <a:t>Software Design Flow</a:t>
-            </a:r>
-          </a:p>
-          <a:p>
-            <a:pPr>
-              <a:spcBef>
-                <a:spcPts val="1200"/>
-              </a:spcBef>
-            </a:pPr>
-            <a:r>
-              <a:rPr lang="en-US" sz="2400" dirty="0">
-                <a:latin typeface="Times New Roman" panose="02020603050405020304" pitchFamily="18" charset="0"/>
-                <a:cs typeface="Times New Roman" panose="02020603050405020304" pitchFamily="18" charset="0"/>
-              </a:rPr>
-              <a:t>JTAG Debug Flow</a:t>
-            </a:r>
-          </a:p>
-          <a:p>
-            <a:pPr>
-              <a:spcBef>
-                <a:spcPts val="1200"/>
-              </a:spcBef>
-            </a:pPr>
-            <a:r>
-              <a:rPr lang="en-US" sz="2400" dirty="0">
-                <a:solidFill>
-                  <a:schemeClr val="bg2"/>
-                </a:solidFill>
-                <a:latin typeface="Times New Roman" panose="02020603050405020304" pitchFamily="18" charset="0"/>
-                <a:cs typeface="Times New Roman" panose="02020603050405020304" pitchFamily="18" charset="0"/>
-              </a:rPr>
-              <a:t>Standalone Boot Sequence</a:t>
-            </a:r>
-          </a:p>
-        </p:txBody>
-      </p:sp>
-      <p:sp>
-        <p:nvSpPr>
-          <p:cNvPr id="4" name="投影片編號版面配置區 3">
-            <a:extLst>
-              <a:ext uri="{FF2B5EF4-FFF2-40B4-BE49-F238E27FC236}">
-                <a16:creationId xmlns:a16="http://schemas.microsoft.com/office/drawing/2014/main" id="{DD7D01D4-C40B-FE2A-564A-D957653CEF40}"/>
-              </a:ext>
-            </a:extLst>
-          </p:cNvPr>
-          <p:cNvSpPr>
-            <a:spLocks noGrp="1"/>
-          </p:cNvSpPr>
-          <p:nvPr>
-            <p:ph type="sldNum" sz="quarter" idx="12"/>
-          </p:nvPr>
-        </p:nvSpPr>
-        <p:spPr/>
-        <p:txBody>
-          <a:bodyPr/>
-          <a:lstStyle/>
-          <a:p>
-            <a:fld id="{F9F9ED32-46C6-469E-9D81-E8934DBD0961}" type="slidenum">
-              <a:rPr lang="zh-TW" altLang="en-US" smtClean="0"/>
-              <a:t>30</a:t>
-            </a:fld>
-            <a:endParaRPr lang="zh-TW" altLang="en-US" dirty="0"/>
-          </a:p>
-        </p:txBody>
-      </p:sp>
-    </p:spTree>
-    <p:extLst>
-      <p:ext uri="{BB962C8B-B14F-4D97-AF65-F5344CB8AC3E}">
-        <p14:creationId xmlns:p14="http://schemas.microsoft.com/office/powerpoint/2010/main" val="1347852348"/>
-      </p:ext>
-    </p:extLst>
-  </p:cSld>
-  <p:clrMapOvr>
-    <a:masterClrMapping/>
-  </p:clrMapOvr>
-  <mc:AlternateContent xmlns:mc="http://schemas.openxmlformats.org/markup-compatibility/2006" xmlns:p14="http://schemas.microsoft.com/office/powerpoint/2010/main">
-    <mc:Choice Requires="p14">
-      <p:transition spd="slow" p14:dur="2000">
-        <p:cut/>
-      </p:transition>
-    </mc:Choice>
-    <mc:Fallback xmlns="">
-      <p:transition spd="slow">
-        <p:cut/>
-      </p:transition>
-    </mc:Fallback>
-  </mc:AlternateContent>
-</p:sld>
-</file>
-
-<file path=ppt/slides/slide31.xml><?xml version="1.0" encoding="utf-8"?>
-<p:sld xmlns:a="http://schemas.openxmlformats.org/drawingml/2006/main" xmlns:r="http://schemas.openxmlformats.org/officeDocument/2006/relationships" xmlns:p="http://schemas.openxmlformats.org/presentationml/2006/main">
-  <p:cSld>
-    <p:spTree>
-      <p:nvGrpSpPr>
         <p:cNvPr id="1" name=""/>
         <p:cNvGrpSpPr/>
         <p:nvPr/>
@@ -15940,7 +17298,7 @@
             <a:fld id="{F9F9ED32-46C6-469E-9D81-E8934DBD0961}" type="slidenum">
               <a:rPr lang="zh-TW" altLang="en-US" smtClean="0"/>
               <a:pPr/>
-              <a:t>31</a:t>
+              <a:t>30</a:t>
             </a:fld>
             <a:endParaRPr lang="zh-TW" altLang="en-US" dirty="0"/>
           </a:p>
@@ -16001,7 +17359,7 @@
 </p:sld>
 </file>
 
-<file path=ppt/slides/slide32.xml><?xml version="1.0" encoding="utf-8"?>
+<file path=ppt/slides/slide31.xml><?xml version="1.0" encoding="utf-8"?>
 <p:sld xmlns:a="http://schemas.openxmlformats.org/drawingml/2006/main" xmlns:r="http://schemas.openxmlformats.org/officeDocument/2006/relationships" xmlns:p="http://schemas.openxmlformats.org/presentationml/2006/main">
   <p:cSld>
     <p:spTree>
@@ -16085,6 +17443,30 @@
               </a:spcBef>
             </a:pPr>
             <a:r>
+              <a:rPr lang="en-US" altLang="zh-TW" sz="2400" dirty="0">
+                <a:solidFill>
+                  <a:schemeClr val="bg2"/>
+                </a:solidFill>
+                <a:latin typeface="Times New Roman" panose="02020603050405020304" pitchFamily="18" charset="0"/>
+                <a:cs typeface="Times New Roman" panose="02020603050405020304" pitchFamily="18" charset="0"/>
+              </a:rPr>
+              <a:t>Data Path / Instruction Path</a:t>
+            </a:r>
+            <a:endParaRPr lang="en-US" sz="2400" dirty="0">
+              <a:solidFill>
+                <a:schemeClr val="bg2"/>
+              </a:solidFill>
+              <a:latin typeface="Times New Roman" panose="02020603050405020304" pitchFamily="18" charset="0"/>
+              <a:cs typeface="Times New Roman" panose="02020603050405020304" pitchFamily="18" charset="0"/>
+            </a:endParaRPr>
+          </a:p>
+          <a:p>
+            <a:pPr>
+              <a:spcBef>
+                <a:spcPts val="1200"/>
+              </a:spcBef>
+            </a:pPr>
+            <a:r>
               <a:rPr lang="en-US" sz="2400" dirty="0">
                 <a:solidFill>
                   <a:schemeClr val="bg2"/>
@@ -16229,7 +17611,7 @@
           <a:p>
             <a:fld id="{F9F9ED32-46C6-469E-9D81-E8934DBD0961}" type="slidenum">
               <a:rPr lang="zh-TW" altLang="en-US" smtClean="0"/>
-              <a:t>32</a:t>
+              <a:t>31</a:t>
             </a:fld>
             <a:endParaRPr lang="zh-TW" altLang="en-US" dirty="0"/>
           </a:p>
@@ -16260,7 +17642,7 @@
 </p:sld>
 </file>
 
-<file path=ppt/slides/slide33.xml><?xml version="1.0" encoding="utf-8"?>
+<file path=ppt/slides/slide32.xml><?xml version="1.0" encoding="utf-8"?>
 <p:sld xmlns:a="http://schemas.openxmlformats.org/drawingml/2006/main" xmlns:r="http://schemas.openxmlformats.org/officeDocument/2006/relationships" xmlns:p="http://schemas.openxmlformats.org/presentationml/2006/main">
   <p:cSld>
     <p:spTree>
@@ -16454,7 +17836,7 @@
           <a:p>
             <a:fld id="{5E7A655E-BA10-45EB-B439-1EA08694B58E}" type="slidenum">
               <a:rPr lang="en-TW" smtClean="0"/>
-              <a:t>33</a:t>
+              <a:t>32</a:t>
             </a:fld>
             <a:endParaRPr lang="en-TW"/>
           </a:p>
@@ -16468,7 +17850,7 @@
 </p:sld>
 </file>
 
-<file path=ppt/slides/slide34.xml><?xml version="1.0" encoding="utf-8"?>
+<file path=ppt/slides/slide33.xml><?xml version="1.0" encoding="utf-8"?>
 <p:sld xmlns:a="http://schemas.openxmlformats.org/drawingml/2006/main" xmlns:r="http://schemas.openxmlformats.org/officeDocument/2006/relationships" xmlns:p="http://schemas.openxmlformats.org/presentationml/2006/main">
   <p:cSld>
     <p:spTree>
@@ -16639,7 +18021,7 @@
             <a:fld id="{F9F9ED32-46C6-469E-9D81-E8934DBD0961}" type="slidenum">
               <a:rPr lang="zh-TW" altLang="en-US" smtClean="0"/>
               <a:pPr/>
-              <a:t>34</a:t>
+              <a:t>33</a:t>
             </a:fld>
             <a:endParaRPr lang="zh-TW" altLang="en-US" dirty="0"/>
           </a:p>
@@ -16658,7 +18040,7 @@
 </p:sld>
 </file>
 
-<file path=ppt/slides/slide35.xml><?xml version="1.0" encoding="utf-8"?>
+<file path=ppt/slides/slide34.xml><?xml version="1.0" encoding="utf-8"?>
 <p:sld xmlns:a="http://schemas.openxmlformats.org/drawingml/2006/main" xmlns:r="http://schemas.openxmlformats.org/officeDocument/2006/relationships" xmlns:p="http://schemas.openxmlformats.org/presentationml/2006/main">
   <p:cSld>
     <p:spTree>
@@ -16744,18 +18126,34 @@
           </a:p>
           <a:p>
             <a:r>
-              <a:rPr lang="en-US" sz="2400" dirty="0" err="1"/>
+              <a:rPr lang="en-US" sz="2400" dirty="0" err="1">
+                <a:solidFill>
+                  <a:srgbClr val="FF0000"/>
+                </a:solidFill>
+              </a:rPr>
               <a:t>uart</a:t>
             </a:r>
             <a:r>
-              <a:rPr lang="en-US" sz="2400" dirty="0"/>
+              <a:rPr lang="en-US" sz="2400" dirty="0">
+                <a:solidFill>
+                  <a:srgbClr val="FF0000"/>
+                </a:solidFill>
+              </a:rPr>
               <a:t> 16550 Baud Rate </a:t>
             </a:r>
             <a:r>
-              <a:rPr lang="zh-TW" altLang="en-US" sz="2400" dirty="0"/>
+              <a:rPr lang="zh-TW" altLang="en-US" sz="2400" dirty="0">
+                <a:solidFill>
+                  <a:srgbClr val="FF0000"/>
+                </a:solidFill>
+              </a:rPr>
               <a:t>更改</a:t>
             </a:r>
-            <a:endParaRPr lang="en-US" altLang="zh-TW" sz="2400" dirty="0"/>
+            <a:endParaRPr lang="en-US" altLang="zh-TW" sz="2400" dirty="0">
+              <a:solidFill>
+                <a:srgbClr val="FF0000"/>
+              </a:solidFill>
+            </a:endParaRPr>
           </a:p>
           <a:p>
             <a:r>
@@ -16782,15 +18180,27 @@
           </a:p>
           <a:p>
             <a:r>
-              <a:rPr lang="en-US" sz="2400" dirty="0"/>
-              <a:t>QSPI </a:t>
-            </a:r>
-            <a:r>
-              <a:rPr lang="zh-TW" altLang="en-US" sz="2400" dirty="0"/>
+              <a:rPr lang="en-US" sz="2400" dirty="0">
+                <a:solidFill>
+                  <a:srgbClr val="FF0000"/>
+                </a:solidFill>
+              </a:rPr>
+              <a:t>NOR FLASH </a:t>
+            </a:r>
+            <a:r>
+              <a:rPr lang="zh-TW" altLang="en-US" sz="2400" dirty="0">
+                <a:solidFill>
+                  <a:srgbClr val="FF0000"/>
+                </a:solidFill>
+              </a:rPr>
               <a:t>內建 </a:t>
             </a:r>
             <a:r>
-              <a:rPr lang="en-US" sz="2400" dirty="0"/>
+              <a:rPr lang="en-US" sz="2400" dirty="0">
+                <a:solidFill>
+                  <a:srgbClr val="FF0000"/>
+                </a:solidFill>
+              </a:rPr>
               <a:t>Bitstream </a:t>
             </a:r>
           </a:p>
@@ -16807,25 +18217,49 @@
           </a:p>
           <a:p>
             <a:r>
-              <a:rPr lang="en-US" sz="2400" dirty="0"/>
+              <a:rPr lang="en-US" sz="2400" dirty="0">
+                <a:solidFill>
+                  <a:srgbClr val="00B0F0"/>
+                </a:solidFill>
+              </a:rPr>
               <a:t>Memory Hier </a:t>
             </a:r>
             <a:r>
-              <a:rPr lang="zh-TW" altLang="en-US" sz="2400" dirty="0"/>
+              <a:rPr lang="zh-TW" altLang="en-US" sz="2400" dirty="0">
+                <a:solidFill>
+                  <a:srgbClr val="00B0F0"/>
+                </a:solidFill>
+              </a:rPr>
               <a:t>設計 </a:t>
             </a:r>
-            <a:endParaRPr lang="en-US" altLang="zh-TW" sz="2400" dirty="0"/>
-          </a:p>
-          <a:p>
-            <a:r>
-              <a:rPr lang="en-US" sz="2400" dirty="0"/>
+            <a:endParaRPr lang="en-US" altLang="zh-TW" sz="2400" dirty="0">
+              <a:solidFill>
+                <a:srgbClr val="00B0F0"/>
+              </a:solidFill>
+            </a:endParaRPr>
+          </a:p>
+          <a:p>
+            <a:r>
+              <a:rPr lang="en-US" sz="2400" dirty="0">
+                <a:solidFill>
+                  <a:srgbClr val="00B0F0"/>
+                </a:solidFill>
+              </a:rPr>
               <a:t>Standalone Boot Sequence</a:t>
             </a:r>
             <a:r>
-              <a:rPr lang="zh-TW" altLang="en-US" sz="2400" dirty="0"/>
+              <a:rPr lang="zh-TW" altLang="en-US" sz="2400" dirty="0">
+                <a:solidFill>
+                  <a:srgbClr val="00B0F0"/>
+                </a:solidFill>
+              </a:rPr>
               <a:t>流程</a:t>
             </a:r>
-            <a:endParaRPr lang="en-US" sz="2400" dirty="0"/>
+            <a:endParaRPr lang="en-US" sz="2400" dirty="0">
+              <a:solidFill>
+                <a:srgbClr val="00B0F0"/>
+              </a:solidFill>
+            </a:endParaRPr>
           </a:p>
         </p:txBody>
       </p:sp>
@@ -16852,7 +18286,7 @@
           <a:p>
             <a:fld id="{F9F9ED32-46C6-469E-9D81-E8934DBD0961}" type="slidenum">
               <a:rPr lang="zh-TW" altLang="en-US" smtClean="0"/>
-              <a:t>35</a:t>
+              <a:t>34</a:t>
             </a:fld>
             <a:endParaRPr lang="zh-TW" altLang="en-US" dirty="0"/>
           </a:p>
@@ -19844,6 +21278,23 @@
               </a:rPr>
               <a:t>Microcontroller Overview</a:t>
             </a:r>
+          </a:p>
+          <a:p>
+            <a:pPr>
+              <a:spcBef>
+                <a:spcPts val="1200"/>
+              </a:spcBef>
+            </a:pPr>
+            <a:r>
+              <a:rPr lang="en-US" altLang="zh-TW" sz="2400" dirty="0">
+                <a:solidFill>
+                  <a:schemeClr val="bg2"/>
+                </a:solidFill>
+                <a:latin typeface="Times New Roman" panose="02020603050405020304" pitchFamily="18" charset="0"/>
+                <a:cs typeface="Times New Roman" panose="02020603050405020304" pitchFamily="18" charset="0"/>
+              </a:rPr>
+              <a:t>Data Path / Instruction Path</a:t>
+            </a:r>
             <a:endParaRPr lang="en-US" sz="2400" dirty="0">
               <a:solidFill>
                 <a:schemeClr val="bg2"/>
@@ -22846,13 +24297,7 @@
   <p:cSld>
     <p:spTree>
       <p:nvGrpSpPr>
-        <p:cNvPr id="1" name="">
-          <a:extLst>
-            <a:ext uri="{FF2B5EF4-FFF2-40B4-BE49-F238E27FC236}">
-              <a16:creationId xmlns:a16="http://schemas.microsoft.com/office/drawing/2014/main" id="{AC9B3EDC-A309-94C5-D7DC-F5AD3B1C34F4}"/>
-            </a:ext>
-          </a:extLst>
-        </p:cNvPr>
+        <p:cNvPr id="1" name=""/>
         <p:cNvGrpSpPr/>
         <p:nvPr/>
       </p:nvGrpSpPr>
@@ -22866,10 +24311,10 @@
       </p:grpSpPr>
       <p:sp>
         <p:nvSpPr>
-          <p:cNvPr id="69" name="PlaceHolder 1">
+          <p:cNvPr id="2" name="標題 1">
             <a:extLst>
               <a:ext uri="{FF2B5EF4-FFF2-40B4-BE49-F238E27FC236}">
-                <a16:creationId xmlns:a16="http://schemas.microsoft.com/office/drawing/2014/main" id="{4F7665A9-AC2C-762D-2B6E-C4436CF0B993}"/>
+                <a16:creationId xmlns:a16="http://schemas.microsoft.com/office/drawing/2014/main" id="{160021F1-BA58-7AF4-2F56-55F9FF8F2256}"/>
               </a:ext>
             </a:extLst>
           </p:cNvPr>
@@ -22880,700 +24325,25 @@
             <p:ph type="title"/>
           </p:nvPr>
         </p:nvSpPr>
-        <p:spPr>
-          <a:xfrm>
-            <a:off x="1015920" y="0"/>
-            <a:ext cx="10972080" cy="1142280"/>
-          </a:xfrm>
-          <a:prstGeom prst="rect">
-            <a:avLst/>
-          </a:prstGeom>
-          <a:noFill/>
-          <a:ln w="0">
-            <a:noFill/>
-          </a:ln>
-        </p:spPr>
-        <p:txBody>
-          <a:bodyPr lIns="91440" tIns="45720" rIns="91440" bIns="45720" anchor="ctr">
-            <a:noAutofit/>
-          </a:bodyPr>
+        <p:spPr/>
+        <p:txBody>
+          <a:bodyPr/>
           <a:lstStyle/>
           <a:p>
-            <a:pPr indent="0">
-              <a:lnSpc>
-                <a:spcPct val="100000"/>
-              </a:lnSpc>
-              <a:buNone/>
-              <a:tabLst>
-                <a:tab pos="0" algn="l"/>
-              </a:tabLst>
-            </a:pPr>
-            <a:r>
-              <a:rPr lang="en-US" sz="4000" b="1" strike="noStrike" spc="-1" dirty="0">
-                <a:solidFill>
-                  <a:srgbClr val="DDDDDD"/>
-                </a:solidFill>
-                <a:latin typeface="+mn-lt"/>
-                <a:ea typeface="Calibri"/>
-              </a:rPr>
-              <a:t>Instruction Path vs Data Path</a:t>
-            </a:r>
-            <a:endParaRPr lang="en-US" sz="4000" b="0" strike="noStrike" spc="-1" dirty="0">
-              <a:solidFill>
-                <a:srgbClr val="000000"/>
-              </a:solidFill>
-              <a:latin typeface="+mn-lt"/>
-            </a:endParaRPr>
-          </a:p>
-        </p:txBody>
-      </p:sp>
-      <p:sp>
-        <p:nvSpPr>
-          <p:cNvPr id="70" name="矩形: 圓角 3">
+            <a:r>
+              <a:rPr lang="en-US" altLang="zh-TW" dirty="0"/>
+              <a:t>MicroBlaze Config</a:t>
+            </a:r>
+            <a:endParaRPr lang="en-US" dirty="0"/>
+          </a:p>
+        </p:txBody>
+      </p:sp>
+      <p:sp>
+        <p:nvSpPr>
+          <p:cNvPr id="3" name="內容版面配置區 2">
             <a:extLst>
               <a:ext uri="{FF2B5EF4-FFF2-40B4-BE49-F238E27FC236}">
-                <a16:creationId xmlns:a16="http://schemas.microsoft.com/office/drawing/2014/main" id="{4B38E0FB-8E8C-E904-6AAD-00DAF005670B}"/>
-              </a:ext>
-            </a:extLst>
-          </p:cNvPr>
-          <p:cNvSpPr/>
-          <p:nvPr/>
-        </p:nvSpPr>
-        <p:spPr>
-          <a:xfrm>
-            <a:off x="2217504" y="4047149"/>
-            <a:ext cx="1518840" cy="815040"/>
-          </a:xfrm>
-          <a:prstGeom prst="roundRect">
-            <a:avLst>
-              <a:gd name="adj" fmla="val 16667"/>
-            </a:avLst>
-          </a:prstGeom>
-          <a:solidFill>
-            <a:srgbClr val="FFC000"/>
-          </a:solidFill>
-          <a:ln>
-            <a:solidFill>
-              <a:srgbClr val="000000"/>
-            </a:solidFill>
-            <a:round/>
-          </a:ln>
-        </p:spPr>
-        <p:style>
-          <a:lnRef idx="2">
-            <a:schemeClr val="dk1">
-              <a:shade val="15000"/>
-            </a:schemeClr>
-          </a:lnRef>
-          <a:fillRef idx="1">
-            <a:schemeClr val="dk1"/>
-          </a:fillRef>
-          <a:effectRef idx="0">
-            <a:schemeClr val="dk1"/>
-          </a:effectRef>
-          <a:fontRef idx="minor"/>
-        </p:style>
-        <p:txBody>
-          <a:bodyPr lIns="90000" tIns="45000" rIns="90000" bIns="45000" anchor="ctr">
-            <a:noAutofit/>
-          </a:bodyPr>
-          <a:lstStyle/>
-          <a:p>
-            <a:pPr algn="ctr">
-              <a:lnSpc>
-                <a:spcPct val="100000"/>
-              </a:lnSpc>
-            </a:pPr>
-            <a:r>
-              <a:rPr lang="en-US" sz="1400" b="0" strike="noStrike" spc="-1" dirty="0">
-                <a:solidFill>
-                  <a:schemeClr val="dk1"/>
-                </a:solidFill>
-                <a:ea typeface="Arial"/>
-              </a:rPr>
-              <a:t>MicroBlaze V</a:t>
-            </a:r>
-            <a:endParaRPr lang="en-US" sz="1400" b="0" strike="noStrike" spc="-1" dirty="0">
-              <a:solidFill>
-                <a:srgbClr val="000000"/>
-              </a:solidFill>
-            </a:endParaRPr>
-          </a:p>
-        </p:txBody>
-      </p:sp>
-      <p:sp>
-        <p:nvSpPr>
-          <p:cNvPr id="76" name="矩形 12">
-            <a:extLst>
-              <a:ext uri="{FF2B5EF4-FFF2-40B4-BE49-F238E27FC236}">
-                <a16:creationId xmlns:a16="http://schemas.microsoft.com/office/drawing/2014/main" id="{F8CE3DE0-AB66-3F9D-A39F-187E999E9BE5}"/>
-              </a:ext>
-            </a:extLst>
-          </p:cNvPr>
-          <p:cNvSpPr/>
-          <p:nvPr/>
-        </p:nvSpPr>
-        <p:spPr>
-          <a:xfrm>
-            <a:off x="357783" y="6072961"/>
-            <a:ext cx="11476434" cy="254880"/>
-          </a:xfrm>
-          <a:prstGeom prst="rect">
-            <a:avLst/>
-          </a:prstGeom>
-          <a:solidFill>
-            <a:schemeClr val="tx1"/>
-          </a:solidFill>
-          <a:ln>
-            <a:solidFill>
-              <a:srgbClr val="516263"/>
-            </a:solidFill>
-            <a:round/>
-          </a:ln>
-        </p:spPr>
-        <p:style>
-          <a:lnRef idx="2">
-            <a:schemeClr val="accent1">
-              <a:shade val="15000"/>
-            </a:schemeClr>
-          </a:lnRef>
-          <a:fillRef idx="1">
-            <a:schemeClr val="accent1"/>
-          </a:fillRef>
-          <a:effectRef idx="0">
-            <a:schemeClr val="accent1"/>
-          </a:effectRef>
-          <a:fontRef idx="minor"/>
-        </p:style>
-        <p:txBody>
-          <a:bodyPr lIns="90000" tIns="45000" rIns="90000" bIns="45000" anchor="ctr">
-            <a:noAutofit/>
-          </a:bodyPr>
-          <a:lstStyle/>
-          <a:p>
-            <a:pPr algn="ctr">
-              <a:lnSpc>
-                <a:spcPct val="100000"/>
-              </a:lnSpc>
-            </a:pPr>
-            <a:r>
-              <a:rPr lang="en-US" sz="2000" b="0" strike="noStrike" spc="-1">
-                <a:solidFill>
-                  <a:schemeClr val="lt1"/>
-                </a:solidFill>
-                <a:ea typeface="Arial"/>
-              </a:rPr>
-              <a:t>AXI Interconnect (BUS)</a:t>
-            </a:r>
-            <a:endParaRPr lang="en-US" sz="2000" b="0" strike="noStrike" spc="-1">
-              <a:solidFill>
-                <a:srgbClr val="FFFFFF"/>
-              </a:solidFill>
-            </a:endParaRPr>
-          </a:p>
-        </p:txBody>
-      </p:sp>
-      <p:sp>
-        <p:nvSpPr>
-          <p:cNvPr id="89" name="矩形: 圓角 40">
-            <a:extLst>
-              <a:ext uri="{FF2B5EF4-FFF2-40B4-BE49-F238E27FC236}">
-                <a16:creationId xmlns:a16="http://schemas.microsoft.com/office/drawing/2014/main" id="{B7F58E37-A80C-88D4-5AF6-9295E3766375}"/>
-              </a:ext>
-            </a:extLst>
-          </p:cNvPr>
-          <p:cNvSpPr/>
-          <p:nvPr/>
-        </p:nvSpPr>
-        <p:spPr>
-          <a:xfrm>
-            <a:off x="2217504" y="2901629"/>
-            <a:ext cx="1518840" cy="815040"/>
-          </a:xfrm>
-          <a:prstGeom prst="roundRect">
-            <a:avLst>
-              <a:gd name="adj" fmla="val 16667"/>
-            </a:avLst>
-          </a:prstGeom>
-          <a:solidFill>
-            <a:srgbClr val="FFC000"/>
-          </a:solidFill>
-          <a:ln>
-            <a:solidFill>
-              <a:srgbClr val="000000"/>
-            </a:solidFill>
-            <a:round/>
-          </a:ln>
-        </p:spPr>
-        <p:style>
-          <a:lnRef idx="2">
-            <a:schemeClr val="dk1">
-              <a:shade val="15000"/>
-            </a:schemeClr>
-          </a:lnRef>
-          <a:fillRef idx="1">
-            <a:schemeClr val="dk1"/>
-          </a:fillRef>
-          <a:effectRef idx="0">
-            <a:schemeClr val="dk1"/>
-          </a:effectRef>
-          <a:fontRef idx="minor"/>
-        </p:style>
-        <p:txBody>
-          <a:bodyPr lIns="90000" tIns="45000" rIns="90000" bIns="45000" anchor="ctr">
-            <a:noAutofit/>
-          </a:bodyPr>
-          <a:lstStyle/>
-          <a:p>
-            <a:pPr algn="ctr">
-              <a:lnSpc>
-                <a:spcPct val="100000"/>
-              </a:lnSpc>
-            </a:pPr>
-            <a:r>
-              <a:rPr lang="en-US" sz="1400" b="0" strike="noStrike" spc="-1">
-                <a:solidFill>
-                  <a:schemeClr val="dk1"/>
-                </a:solidFill>
-                <a:ea typeface="Arial"/>
-              </a:rPr>
-              <a:t>Local Memory</a:t>
-            </a:r>
-            <a:endParaRPr lang="en-US" sz="1400" b="0" strike="noStrike" spc="-1">
-              <a:solidFill>
-                <a:srgbClr val="000000"/>
-              </a:solidFill>
-            </a:endParaRPr>
-          </a:p>
-          <a:p>
-            <a:pPr algn="ctr">
-              <a:lnSpc>
-                <a:spcPct val="100000"/>
-              </a:lnSpc>
-            </a:pPr>
-            <a:r>
-              <a:rPr lang="en-US" sz="1400" b="0" strike="noStrike" spc="-1">
-                <a:solidFill>
-                  <a:schemeClr val="dk1"/>
-                </a:solidFill>
-                <a:ea typeface="Arial"/>
-              </a:rPr>
-              <a:t>Bus</a:t>
-            </a:r>
-            <a:endParaRPr lang="en-US" sz="1400" b="0" strike="noStrike" spc="-1">
-              <a:solidFill>
-                <a:srgbClr val="000000"/>
-              </a:solidFill>
-            </a:endParaRPr>
-          </a:p>
-        </p:txBody>
-      </p:sp>
-      <p:cxnSp>
-        <p:nvCxnSpPr>
-          <p:cNvPr id="90" name="直線單箭頭接點 43">
-            <a:extLst>
-              <a:ext uri="{FF2B5EF4-FFF2-40B4-BE49-F238E27FC236}">
-                <a16:creationId xmlns:a16="http://schemas.microsoft.com/office/drawing/2014/main" id="{F9AF19C2-5090-702C-D170-6E609FFD4EB8}"/>
-              </a:ext>
-            </a:extLst>
-          </p:cNvPr>
-          <p:cNvCxnSpPr>
-            <a:stCxn id="89" idx="2"/>
-            <a:endCxn id="70" idx="0"/>
-          </p:cNvCxnSpPr>
-          <p:nvPr/>
-        </p:nvCxnSpPr>
-        <p:spPr>
-          <a:xfrm>
-            <a:off x="2976744" y="3716669"/>
-            <a:ext cx="360" cy="330840"/>
-          </a:xfrm>
-          <a:prstGeom prst="straightConnector1">
-            <a:avLst/>
-          </a:prstGeom>
-          <a:ln w="28575">
-            <a:solidFill>
-              <a:srgbClr val="000000"/>
-            </a:solidFill>
-            <a:round/>
-            <a:headEnd type="arrow" w="med" len="med"/>
-            <a:tailEnd type="arrow" w="med" len="med"/>
-          </a:ln>
-        </p:spPr>
-      </p:cxnSp>
-      <p:sp>
-        <p:nvSpPr>
-          <p:cNvPr id="91" name="矩形: 圓角 44">
-            <a:extLst>
-              <a:ext uri="{FF2B5EF4-FFF2-40B4-BE49-F238E27FC236}">
-                <a16:creationId xmlns:a16="http://schemas.microsoft.com/office/drawing/2014/main" id="{544A8586-0A13-B205-8F07-59222A176CE6}"/>
-              </a:ext>
-            </a:extLst>
-          </p:cNvPr>
-          <p:cNvSpPr/>
-          <p:nvPr/>
-        </p:nvSpPr>
-        <p:spPr>
-          <a:xfrm>
-            <a:off x="2217324" y="1755909"/>
-            <a:ext cx="1518840" cy="815040"/>
-          </a:xfrm>
-          <a:prstGeom prst="roundRect">
-            <a:avLst>
-              <a:gd name="adj" fmla="val 16667"/>
-            </a:avLst>
-          </a:prstGeom>
-          <a:solidFill>
-            <a:srgbClr val="FFC000"/>
-          </a:solidFill>
-          <a:ln>
-            <a:solidFill>
-              <a:srgbClr val="000000"/>
-            </a:solidFill>
-            <a:round/>
-          </a:ln>
-        </p:spPr>
-        <p:style>
-          <a:lnRef idx="2">
-            <a:schemeClr val="dk1">
-              <a:shade val="15000"/>
-            </a:schemeClr>
-          </a:lnRef>
-          <a:fillRef idx="1">
-            <a:schemeClr val="dk1"/>
-          </a:fillRef>
-          <a:effectRef idx="0">
-            <a:schemeClr val="dk1"/>
-          </a:effectRef>
-          <a:fontRef idx="minor"/>
-        </p:style>
-        <p:txBody>
-          <a:bodyPr lIns="90000" tIns="45000" rIns="90000" bIns="45000" anchor="ctr">
-            <a:noAutofit/>
-          </a:bodyPr>
-          <a:lstStyle/>
-          <a:p>
-            <a:pPr algn="ctr">
-              <a:lnSpc>
-                <a:spcPct val="100000"/>
-              </a:lnSpc>
-            </a:pPr>
-            <a:r>
-              <a:rPr lang="en-US" sz="1400" b="0" strike="noStrike" spc="-1" dirty="0">
-                <a:solidFill>
-                  <a:schemeClr val="dk1"/>
-                </a:solidFill>
-                <a:ea typeface="Arial"/>
-              </a:rPr>
-              <a:t>Data Mem /</a:t>
-            </a:r>
-            <a:endParaRPr lang="en-US" sz="1400" spc="-1" dirty="0">
-              <a:solidFill>
-                <a:schemeClr val="dk1"/>
-              </a:solidFill>
-              <a:ea typeface="Arial"/>
-            </a:endParaRPr>
-          </a:p>
-          <a:p>
-            <a:pPr algn="ctr">
-              <a:lnSpc>
-                <a:spcPct val="100000"/>
-              </a:lnSpc>
-            </a:pPr>
-            <a:r>
-              <a:rPr lang="en-US" sz="1400" b="0" strike="noStrike" spc="-1" dirty="0">
-                <a:solidFill>
-                  <a:schemeClr val="dk1"/>
-                </a:solidFill>
-              </a:rPr>
-              <a:t>Inst Mem /</a:t>
-            </a:r>
-            <a:endParaRPr lang="en-US" sz="1400" b="0" strike="noStrike" spc="-1" dirty="0">
-              <a:solidFill>
-                <a:srgbClr val="000000"/>
-              </a:solidFill>
-            </a:endParaRPr>
-          </a:p>
-          <a:p>
-            <a:pPr algn="ctr">
-              <a:lnSpc>
-                <a:spcPct val="100000"/>
-              </a:lnSpc>
-            </a:pPr>
-            <a:r>
-              <a:rPr lang="en-US" sz="1400" b="0" strike="noStrike" spc="-1" dirty="0">
-                <a:solidFill>
-                  <a:schemeClr val="dk1"/>
-                </a:solidFill>
-                <a:ea typeface="Arial"/>
-              </a:rPr>
-              <a:t>Shared 128KB</a:t>
-            </a:r>
-            <a:endParaRPr lang="en-US" sz="1400" b="0" strike="noStrike" spc="-1" dirty="0">
-              <a:solidFill>
-                <a:srgbClr val="000000"/>
-              </a:solidFill>
-            </a:endParaRPr>
-          </a:p>
-        </p:txBody>
-      </p:sp>
-      <p:cxnSp>
-        <p:nvCxnSpPr>
-          <p:cNvPr id="94" name="直線單箭頭接點 51">
-            <a:extLst>
-              <a:ext uri="{FF2B5EF4-FFF2-40B4-BE49-F238E27FC236}">
-                <a16:creationId xmlns:a16="http://schemas.microsoft.com/office/drawing/2014/main" id="{A08B72DD-477E-5AEF-02CB-D6883BD66362}"/>
-              </a:ext>
-            </a:extLst>
-          </p:cNvPr>
-          <p:cNvCxnSpPr>
-            <a:cxnSpLocks/>
-            <a:stCxn id="91" idx="2"/>
-            <a:endCxn id="89" idx="0"/>
-          </p:cNvCxnSpPr>
-          <p:nvPr/>
-        </p:nvCxnSpPr>
-        <p:spPr>
-          <a:xfrm>
-            <a:off x="2976744" y="2570949"/>
-            <a:ext cx="180" cy="330680"/>
-          </a:xfrm>
-          <a:prstGeom prst="straightConnector1">
-            <a:avLst/>
-          </a:prstGeom>
-          <a:ln w="28575">
-            <a:solidFill>
-              <a:srgbClr val="000000"/>
-            </a:solidFill>
-            <a:round/>
-            <a:headEnd type="arrow" w="med" len="med"/>
-            <a:tailEnd type="arrow" w="med" len="med"/>
-          </a:ln>
-        </p:spPr>
-      </p:cxnSp>
-      <p:sp>
-        <p:nvSpPr>
-          <p:cNvPr id="20" name="矩形: 圓角 23">
-            <a:extLst>
-              <a:ext uri="{FF2B5EF4-FFF2-40B4-BE49-F238E27FC236}">
-                <a16:creationId xmlns:a16="http://schemas.microsoft.com/office/drawing/2014/main" id="{FA75E766-E83B-E04C-8A4A-2C300FA40729}"/>
-              </a:ext>
-            </a:extLst>
-          </p:cNvPr>
-          <p:cNvSpPr/>
-          <p:nvPr/>
-        </p:nvSpPr>
-        <p:spPr>
-          <a:xfrm>
-            <a:off x="5091018" y="3858610"/>
-            <a:ext cx="1208160" cy="1007963"/>
-          </a:xfrm>
-          <a:prstGeom prst="roundRect">
-            <a:avLst>
-              <a:gd name="adj" fmla="val 16667"/>
-            </a:avLst>
-          </a:prstGeom>
-          <a:solidFill>
-            <a:schemeClr val="bg2">
-              <a:lumMod val="40000"/>
-              <a:lumOff val="60000"/>
-            </a:schemeClr>
-          </a:solidFill>
-          <a:ln>
-            <a:solidFill>
-              <a:srgbClr val="516263"/>
-            </a:solidFill>
-            <a:round/>
-          </a:ln>
-        </p:spPr>
-        <p:style>
-          <a:lnRef idx="2">
-            <a:schemeClr val="accent1">
-              <a:shade val="15000"/>
-            </a:schemeClr>
-          </a:lnRef>
-          <a:fillRef idx="1">
-            <a:schemeClr val="accent1"/>
-          </a:fillRef>
-          <a:effectRef idx="0">
-            <a:schemeClr val="accent1"/>
-          </a:effectRef>
-          <a:fontRef idx="minor"/>
-        </p:style>
-        <p:txBody>
-          <a:bodyPr lIns="90000" tIns="45000" rIns="90000" bIns="45000" anchor="ctr">
-            <a:noAutofit/>
-          </a:bodyPr>
-          <a:lstStyle/>
-          <a:p>
-            <a:pPr algn="ctr">
-              <a:lnSpc>
-                <a:spcPct val="100000"/>
-              </a:lnSpc>
-            </a:pPr>
-            <a:r>
-              <a:rPr lang="en-US" sz="1400" b="0" strike="noStrike" spc="-1" dirty="0">
-                <a:solidFill>
-                  <a:schemeClr val="dk1"/>
-                </a:solidFill>
-                <a:ea typeface="Arial"/>
-              </a:rPr>
-              <a:t>AXI</a:t>
-            </a:r>
-          </a:p>
-          <a:p>
-            <a:pPr algn="ctr">
-              <a:lnSpc>
-                <a:spcPct val="100000"/>
-              </a:lnSpc>
-            </a:pPr>
-            <a:r>
-              <a:rPr lang="en-US" sz="1400" b="0" strike="noStrike" spc="-1" dirty="0">
-                <a:solidFill>
-                  <a:schemeClr val="dk1"/>
-                </a:solidFill>
-              </a:rPr>
-              <a:t>EMC</a:t>
-            </a:r>
-            <a:endParaRPr lang="en-US" sz="1400" b="0" strike="noStrike" spc="-1" dirty="0">
-              <a:solidFill>
-                <a:srgbClr val="000000"/>
-              </a:solidFill>
-            </a:endParaRPr>
-          </a:p>
-        </p:txBody>
-      </p:sp>
-      <p:sp>
-        <p:nvSpPr>
-          <p:cNvPr id="23" name="矩形: 圓角 23">
-            <a:extLst>
-              <a:ext uri="{FF2B5EF4-FFF2-40B4-BE49-F238E27FC236}">
-                <a16:creationId xmlns:a16="http://schemas.microsoft.com/office/drawing/2014/main" id="{B7BC6666-9CF9-EE27-835B-44D9039D2EA5}"/>
-              </a:ext>
-            </a:extLst>
-          </p:cNvPr>
-          <p:cNvSpPr/>
-          <p:nvPr/>
-        </p:nvSpPr>
-        <p:spPr>
-          <a:xfrm>
-            <a:off x="5091018" y="2511130"/>
-            <a:ext cx="1209600" cy="1045080"/>
-          </a:xfrm>
-          <a:prstGeom prst="roundRect">
-            <a:avLst>
-              <a:gd name="adj" fmla="val 16667"/>
-            </a:avLst>
-          </a:prstGeom>
-          <a:solidFill>
-            <a:schemeClr val="bg2">
-              <a:lumMod val="40000"/>
-              <a:lumOff val="60000"/>
-            </a:schemeClr>
-          </a:solidFill>
-          <a:ln>
-            <a:solidFill>
-              <a:srgbClr val="516263"/>
-            </a:solidFill>
-            <a:round/>
-          </a:ln>
-        </p:spPr>
-        <p:style>
-          <a:lnRef idx="2">
-            <a:schemeClr val="accent1">
-              <a:shade val="15000"/>
-            </a:schemeClr>
-          </a:lnRef>
-          <a:fillRef idx="1">
-            <a:schemeClr val="accent1"/>
-          </a:fillRef>
-          <a:effectRef idx="0">
-            <a:schemeClr val="accent1"/>
-          </a:effectRef>
-          <a:fontRef idx="minor"/>
-        </p:style>
-        <p:txBody>
-          <a:bodyPr lIns="90000" tIns="45000" rIns="90000" bIns="45000" anchor="ctr">
-            <a:noAutofit/>
-          </a:bodyPr>
-          <a:lstStyle/>
-          <a:p>
-            <a:pPr algn="ctr">
-              <a:lnSpc>
-                <a:spcPct val="100000"/>
-              </a:lnSpc>
-            </a:pPr>
-            <a:r>
-              <a:rPr lang="en-US" sz="1400" b="0" strike="noStrike" spc="-1" dirty="0">
-                <a:solidFill>
-                  <a:srgbClr val="000000"/>
-                </a:solidFill>
-              </a:rPr>
-              <a:t>SRAM</a:t>
-            </a:r>
-          </a:p>
-          <a:p>
-            <a:pPr algn="ctr">
-              <a:lnSpc>
-                <a:spcPct val="100000"/>
-              </a:lnSpc>
-            </a:pPr>
-            <a:r>
-              <a:rPr lang="en-US" sz="1400" spc="-1" dirty="0">
-                <a:solidFill>
-                  <a:srgbClr val="000000"/>
-                </a:solidFill>
-              </a:rPr>
-              <a:t>512KB</a:t>
-            </a:r>
-            <a:endParaRPr lang="en-US" sz="1400" b="0" strike="noStrike" spc="-1" dirty="0">
-              <a:solidFill>
-                <a:srgbClr val="000000"/>
-              </a:solidFill>
-            </a:endParaRPr>
-          </a:p>
-        </p:txBody>
-      </p:sp>
-      <p:cxnSp>
-        <p:nvCxnSpPr>
-          <p:cNvPr id="24" name="直線單箭頭接點 48">
-            <a:extLst>
-              <a:ext uri="{FF2B5EF4-FFF2-40B4-BE49-F238E27FC236}">
-                <a16:creationId xmlns:a16="http://schemas.microsoft.com/office/drawing/2014/main" id="{24A8A9E0-019A-7D11-C114-AE960F16CC3E}"/>
-              </a:ext>
-            </a:extLst>
-          </p:cNvPr>
-          <p:cNvCxnSpPr>
-            <a:cxnSpLocks/>
-            <a:stCxn id="23" idx="2"/>
-            <a:endCxn id="20" idx="0"/>
-          </p:cNvCxnSpPr>
-          <p:nvPr/>
-        </p:nvCxnSpPr>
-        <p:spPr>
-          <a:xfrm flipH="1">
-            <a:off x="5695098" y="3556210"/>
-            <a:ext cx="720" cy="302400"/>
-          </a:xfrm>
-          <a:prstGeom prst="straightConnector1">
-            <a:avLst/>
-          </a:prstGeom>
-          <a:ln w="28575">
-            <a:solidFill>
-              <a:srgbClr val="000000"/>
-            </a:solidFill>
-            <a:round/>
-            <a:headEnd type="arrow" w="med" len="med"/>
-            <a:tailEnd type="arrow" w="med" len="med"/>
-          </a:ln>
-        </p:spPr>
-      </p:cxnSp>
-      <p:sp>
-        <p:nvSpPr>
-          <p:cNvPr id="6" name="Slide Number Placeholder 5">
-            <a:extLst>
-              <a:ext uri="{FF2B5EF4-FFF2-40B4-BE49-F238E27FC236}">
-                <a16:creationId xmlns:a16="http://schemas.microsoft.com/office/drawing/2014/main" id="{0F1FBA3D-0F12-BC37-F542-0C79282917FC}"/>
+                <a16:creationId xmlns:a16="http://schemas.microsoft.com/office/drawing/2014/main" id="{3F24A009-F66A-9ACC-E755-3676A3BD118C}"/>
               </a:ext>
             </a:extLst>
           </p:cNvPr>
@@ -23581,7 +24351,7 @@
             <a:spLocks noGrp="1"/>
           </p:cNvSpPr>
           <p:nvPr>
-            <p:ph type="sldNum" idx="10"/>
+            <p:ph idx="1"/>
           </p:nvPr>
         </p:nvSpPr>
         <p:spPr/>
@@ -23589,877 +24359,172 @@
           <a:bodyPr/>
           <a:lstStyle/>
           <a:p>
-            <a:fld id="{5E7A655E-BA10-45EB-B439-1EA08694B58E}" type="slidenum">
-              <a:rPr lang="en-TW" smtClean="0">
-                <a:latin typeface="+mn-lt"/>
-              </a:rPr>
-              <a:t>9</a:t>
-            </a:fld>
-            <a:endParaRPr lang="en-TW">
-              <a:latin typeface="+mn-lt"/>
-            </a:endParaRPr>
-          </a:p>
-        </p:txBody>
-      </p:sp>
-      <p:sp>
-        <p:nvSpPr>
-          <p:cNvPr id="31" name="箭號: 左-右雙向 30">
+            <a:pPr>
+              <a:lnSpc>
+                <a:spcPct val="150000"/>
+              </a:lnSpc>
+            </a:pPr>
+            <a:r>
+              <a:rPr lang="en-US" sz="2400" dirty="0"/>
+              <a:t>Processor: MicroBlaze RISC-V, </a:t>
+            </a:r>
+            <a:r>
+              <a:rPr lang="en-US" sz="2400" dirty="0">
+                <a:solidFill>
+                  <a:srgbClr val="FF0000"/>
+                </a:solidFill>
+              </a:rPr>
+              <a:t>32-bit</a:t>
+            </a:r>
+            <a:r>
+              <a:rPr lang="en-US" sz="2400" dirty="0"/>
+              <a:t>, Single Core, </a:t>
+            </a:r>
+            <a:r>
+              <a:rPr lang="en-US" sz="2400" dirty="0">
+                <a:solidFill>
+                  <a:srgbClr val="FF0000"/>
+                </a:solidFill>
+              </a:rPr>
+              <a:t>5-Stage Pipeline</a:t>
+            </a:r>
+          </a:p>
+          <a:p>
+            <a:pPr>
+              <a:lnSpc>
+                <a:spcPct val="150000"/>
+              </a:lnSpc>
+            </a:pPr>
+            <a:r>
+              <a:rPr lang="en-US" sz="2400" dirty="0"/>
+              <a:t>Clock: 100 MHz (12 MHz OSC → Clocking Wizard PLL)</a:t>
+            </a:r>
+          </a:p>
+          <a:p>
+            <a:pPr>
+              <a:lnSpc>
+                <a:spcPct val="150000"/>
+              </a:lnSpc>
+            </a:pPr>
+            <a:r>
+              <a:rPr lang="en-US" sz="2400" dirty="0"/>
+              <a:t>ISA Extensions: </a:t>
+            </a:r>
+            <a:r>
+              <a:rPr lang="en-US" sz="2400" b="1" dirty="0"/>
+              <a:t>RV32IM_Zba_Zbb_Zbc_Zbs</a:t>
+            </a:r>
+          </a:p>
+          <a:p>
+            <a:pPr>
+              <a:lnSpc>
+                <a:spcPct val="150000"/>
+              </a:lnSpc>
+            </a:pPr>
+            <a:r>
+              <a:rPr lang="en-US" sz="2400" dirty="0"/>
+              <a:t>Local Memory: 128 KB BRAM (ILMB + DLMB)</a:t>
+            </a:r>
+          </a:p>
+          <a:p>
+            <a:pPr>
+              <a:lnSpc>
+                <a:spcPct val="150000"/>
+              </a:lnSpc>
+            </a:pPr>
+            <a:r>
+              <a:rPr lang="en-US" sz="2400" dirty="0"/>
+              <a:t>Cache: </a:t>
+            </a:r>
+            <a:r>
+              <a:rPr lang="en-US" sz="2400" dirty="0">
+                <a:solidFill>
+                  <a:srgbClr val="FF0000"/>
+                </a:solidFill>
+              </a:rPr>
+              <a:t>Disabled</a:t>
+            </a:r>
+            <a:r>
+              <a:rPr lang="en-US" sz="2400" dirty="0"/>
+              <a:t> (I-Cache &amp; D-Cache both off)</a:t>
+            </a:r>
+          </a:p>
+          <a:p>
+            <a:pPr>
+              <a:lnSpc>
+                <a:spcPct val="150000"/>
+              </a:lnSpc>
+            </a:pPr>
+            <a:r>
+              <a:rPr lang="en-US" sz="2400" dirty="0"/>
+              <a:t>Debug: </a:t>
+            </a:r>
+            <a:r>
+              <a:rPr lang="en-US" sz="2400" dirty="0">
+                <a:solidFill>
+                  <a:srgbClr val="FF0000"/>
+                </a:solidFill>
+              </a:rPr>
+              <a:t>MDM JTAG </a:t>
+            </a:r>
+            <a:r>
+              <a:rPr lang="en-US" sz="2400" dirty="0"/>
+              <a:t>— breakpoints, register, memory R/W</a:t>
+            </a:r>
+          </a:p>
+          <a:p>
+            <a:pPr>
+              <a:lnSpc>
+                <a:spcPct val="150000"/>
+              </a:lnSpc>
+            </a:pPr>
+            <a:r>
+              <a:rPr lang="en-US" sz="2400" dirty="0"/>
+              <a:t>Interrupt: AXI INTC, 6 sources (3 Timer + 2 UART + 1 GPIO)</a:t>
+            </a:r>
+          </a:p>
+          <a:p>
+            <a:pPr marL="0" indent="0">
+              <a:buNone/>
+            </a:pPr>
+            <a:endParaRPr lang="en-US" sz="2400" dirty="0"/>
+          </a:p>
+        </p:txBody>
+      </p:sp>
+      <p:sp>
+        <p:nvSpPr>
+          <p:cNvPr id="4" name="投影片編號版面配置區 3">
             <a:extLst>
               <a:ext uri="{FF2B5EF4-FFF2-40B4-BE49-F238E27FC236}">
-                <a16:creationId xmlns:a16="http://schemas.microsoft.com/office/drawing/2014/main" id="{2DA41A05-6416-5C1E-8EAC-1A4252128A0B}"/>
+                <a16:creationId xmlns:a16="http://schemas.microsoft.com/office/drawing/2014/main" id="{915DF62F-4D23-B66F-49B5-B952C77664CB}"/>
               </a:ext>
             </a:extLst>
           </p:cNvPr>
-          <p:cNvSpPr/>
-          <p:nvPr/>
-        </p:nvSpPr>
-        <p:spPr>
-          <a:xfrm rot="5400000">
-            <a:off x="2179109" y="5316298"/>
-            <a:ext cx="991956" cy="249120"/>
-          </a:xfrm>
-          <a:prstGeom prst="leftRightArrow">
-            <a:avLst/>
-          </a:prstGeom>
-          <a:solidFill>
-            <a:schemeClr val="tx1"/>
-          </a:solidFill>
-          <a:ln>
-            <a:solidFill>
-              <a:schemeClr val="tx1"/>
-            </a:solidFill>
-          </a:ln>
-        </p:spPr>
-        <p:style>
-          <a:lnRef idx="2">
-            <a:schemeClr val="accent1">
-              <a:shade val="15000"/>
-            </a:schemeClr>
-          </a:lnRef>
-          <a:fillRef idx="1">
-            <a:schemeClr val="accent1"/>
-          </a:fillRef>
-          <a:effectRef idx="0">
-            <a:schemeClr val="accent1"/>
-          </a:effectRef>
-          <a:fontRef idx="minor">
-            <a:schemeClr val="lt1"/>
-          </a:fontRef>
-        </p:style>
-        <p:txBody>
-          <a:bodyPr rtlCol="0" anchor="ctr"/>
+          <p:cNvSpPr>
+            <a:spLocks noGrp="1"/>
+          </p:cNvSpPr>
+          <p:nvPr>
+            <p:ph type="sldNum" sz="quarter" idx="12"/>
+          </p:nvPr>
+        </p:nvSpPr>
+        <p:spPr/>
+        <p:txBody>
+          <a:bodyPr/>
           <a:lstStyle/>
           <a:p>
-            <a:pPr algn="ctr"/>
-            <a:endParaRPr lang="en-US"/>
-          </a:p>
-        </p:txBody>
-      </p:sp>
-      <p:sp>
-        <p:nvSpPr>
-          <p:cNvPr id="10" name="箭號: 左-右雙向 9">
-            <a:extLst>
-              <a:ext uri="{FF2B5EF4-FFF2-40B4-BE49-F238E27FC236}">
-                <a16:creationId xmlns:a16="http://schemas.microsoft.com/office/drawing/2014/main" id="{9478FF48-59AA-D23B-2B37-D1D3D43C7CCB}"/>
-              </a:ext>
-            </a:extLst>
-          </p:cNvPr>
-          <p:cNvSpPr/>
-          <p:nvPr/>
-        </p:nvSpPr>
-        <p:spPr>
-          <a:xfrm rot="5400000">
-            <a:off x="2755715" y="5317832"/>
-            <a:ext cx="991956" cy="249120"/>
-          </a:xfrm>
-          <a:prstGeom prst="leftRightArrow">
-            <a:avLst/>
-          </a:prstGeom>
-          <a:solidFill>
-            <a:schemeClr val="tx1"/>
-          </a:solidFill>
-          <a:ln>
-            <a:solidFill>
-              <a:schemeClr val="tx1"/>
-            </a:solidFill>
-          </a:ln>
-        </p:spPr>
-        <p:style>
-          <a:lnRef idx="2">
-            <a:schemeClr val="accent1">
-              <a:shade val="15000"/>
-            </a:schemeClr>
-          </a:lnRef>
-          <a:fillRef idx="1">
-            <a:schemeClr val="accent1"/>
-          </a:fillRef>
-          <a:effectRef idx="0">
-            <a:schemeClr val="accent1"/>
-          </a:effectRef>
-          <a:fontRef idx="minor">
-            <a:schemeClr val="lt1"/>
-          </a:fontRef>
-        </p:style>
-        <p:txBody>
-          <a:bodyPr rtlCol="0" anchor="ctr"/>
-          <a:lstStyle/>
-          <a:p>
-            <a:pPr algn="ctr"/>
-            <a:endParaRPr lang="en-US"/>
-          </a:p>
-        </p:txBody>
-      </p:sp>
-      <p:sp>
-        <p:nvSpPr>
-          <p:cNvPr id="11" name="箭號: 左-右雙向 10">
-            <a:extLst>
-              <a:ext uri="{FF2B5EF4-FFF2-40B4-BE49-F238E27FC236}">
-                <a16:creationId xmlns:a16="http://schemas.microsoft.com/office/drawing/2014/main" id="{3DC3A253-8676-1BA7-1395-F47C8BF049E7}"/>
-              </a:ext>
-            </a:extLst>
-          </p:cNvPr>
-          <p:cNvSpPr/>
-          <p:nvPr/>
-        </p:nvSpPr>
-        <p:spPr>
-          <a:xfrm rot="5400000">
-            <a:off x="4953545" y="5372844"/>
-            <a:ext cx="991956" cy="249120"/>
-          </a:xfrm>
-          <a:prstGeom prst="leftRightArrow">
-            <a:avLst/>
-          </a:prstGeom>
-          <a:solidFill>
-            <a:schemeClr val="tx1"/>
-          </a:solidFill>
-          <a:ln>
-            <a:solidFill>
-              <a:schemeClr val="tx1"/>
-            </a:solidFill>
-          </a:ln>
-        </p:spPr>
-        <p:style>
-          <a:lnRef idx="2">
-            <a:schemeClr val="accent1">
-              <a:shade val="15000"/>
-            </a:schemeClr>
-          </a:lnRef>
-          <a:fillRef idx="1">
-            <a:schemeClr val="accent1"/>
-          </a:fillRef>
-          <a:effectRef idx="0">
-            <a:schemeClr val="accent1"/>
-          </a:effectRef>
-          <a:fontRef idx="minor">
-            <a:schemeClr val="lt1"/>
-          </a:fontRef>
-        </p:style>
-        <p:txBody>
-          <a:bodyPr rtlCol="0" anchor="ctr"/>
-          <a:lstStyle/>
-          <a:p>
-            <a:pPr algn="ctr"/>
-            <a:endParaRPr lang="en-US"/>
-          </a:p>
-        </p:txBody>
-      </p:sp>
-      <p:sp>
-        <p:nvSpPr>
-          <p:cNvPr id="14" name="箭號: 左-右雙向 13">
-            <a:extLst>
-              <a:ext uri="{FF2B5EF4-FFF2-40B4-BE49-F238E27FC236}">
-                <a16:creationId xmlns:a16="http://schemas.microsoft.com/office/drawing/2014/main" id="{3C19D0A3-7057-020B-9110-1B0E205EE477}"/>
-              </a:ext>
-            </a:extLst>
-          </p:cNvPr>
-          <p:cNvSpPr/>
-          <p:nvPr/>
-        </p:nvSpPr>
-        <p:spPr>
-          <a:xfrm rot="5400000">
-            <a:off x="5445310" y="5372844"/>
-            <a:ext cx="991956" cy="249120"/>
-          </a:xfrm>
-          <a:prstGeom prst="leftRightArrow">
-            <a:avLst/>
-          </a:prstGeom>
-          <a:solidFill>
-            <a:schemeClr val="tx1"/>
-          </a:solidFill>
-          <a:ln>
-            <a:solidFill>
-              <a:schemeClr val="tx1"/>
-            </a:solidFill>
-          </a:ln>
-        </p:spPr>
-        <p:style>
-          <a:lnRef idx="2">
-            <a:schemeClr val="accent1">
-              <a:shade val="15000"/>
-            </a:schemeClr>
-          </a:lnRef>
-          <a:fillRef idx="1">
-            <a:schemeClr val="accent1"/>
-          </a:fillRef>
-          <a:effectRef idx="0">
-            <a:schemeClr val="accent1"/>
-          </a:effectRef>
-          <a:fontRef idx="minor">
-            <a:schemeClr val="lt1"/>
-          </a:fontRef>
-        </p:style>
-        <p:txBody>
-          <a:bodyPr rtlCol="0" anchor="ctr"/>
-          <a:lstStyle/>
-          <a:p>
-            <a:pPr algn="ctr"/>
-            <a:endParaRPr lang="en-US"/>
-          </a:p>
-        </p:txBody>
-      </p:sp>
-      <p:sp>
-        <p:nvSpPr>
-          <p:cNvPr id="15" name="文字方塊 14">
-            <a:extLst>
-              <a:ext uri="{FF2B5EF4-FFF2-40B4-BE49-F238E27FC236}">
-                <a16:creationId xmlns:a16="http://schemas.microsoft.com/office/drawing/2014/main" id="{806B00BD-FDE7-4B07-33A6-F5C99AAEFB34}"/>
-              </a:ext>
-            </a:extLst>
-          </p:cNvPr>
-          <p:cNvSpPr txBox="1"/>
-          <p:nvPr/>
-        </p:nvSpPr>
-        <p:spPr>
-          <a:xfrm>
-            <a:off x="1528945" y="5268528"/>
-            <a:ext cx="857839" cy="369332"/>
-          </a:xfrm>
-          <a:prstGeom prst="rect">
-            <a:avLst/>
-          </a:prstGeom>
-          <a:noFill/>
-        </p:spPr>
-        <p:txBody>
-          <a:bodyPr wrap="square" rtlCol="0">
-            <a:spAutoFit/>
-          </a:bodyPr>
-          <a:lstStyle/>
-          <a:p>
-            <a:pPr algn="ctr"/>
-            <a:r>
-              <a:rPr lang="en-US" dirty="0"/>
-              <a:t>DP</a:t>
-            </a:r>
-          </a:p>
-        </p:txBody>
-      </p:sp>
-      <p:sp>
-        <p:nvSpPr>
-          <p:cNvPr id="16" name="文字方塊 15">
-            <a:extLst>
-              <a:ext uri="{FF2B5EF4-FFF2-40B4-BE49-F238E27FC236}">
-                <a16:creationId xmlns:a16="http://schemas.microsoft.com/office/drawing/2014/main" id="{38ECBB6B-C648-DDD4-1044-DDECB7873AE7}"/>
-              </a:ext>
-            </a:extLst>
-          </p:cNvPr>
-          <p:cNvSpPr txBox="1"/>
-          <p:nvPr/>
-        </p:nvSpPr>
-        <p:spPr>
-          <a:xfrm>
-            <a:off x="4495404" y="5313505"/>
-            <a:ext cx="857839" cy="369332"/>
-          </a:xfrm>
-          <a:prstGeom prst="rect">
-            <a:avLst/>
-          </a:prstGeom>
-          <a:noFill/>
-        </p:spPr>
-        <p:txBody>
-          <a:bodyPr wrap="square" rtlCol="0">
-            <a:spAutoFit/>
-          </a:bodyPr>
-          <a:lstStyle/>
-          <a:p>
-            <a:pPr algn="ctr"/>
-            <a:r>
-              <a:rPr lang="en-US" dirty="0"/>
-              <a:t>DP</a:t>
-            </a:r>
-          </a:p>
-        </p:txBody>
-      </p:sp>
-      <p:sp>
-        <p:nvSpPr>
-          <p:cNvPr id="17" name="文字方塊 16">
-            <a:extLst>
-              <a:ext uri="{FF2B5EF4-FFF2-40B4-BE49-F238E27FC236}">
-                <a16:creationId xmlns:a16="http://schemas.microsoft.com/office/drawing/2014/main" id="{12C292B4-5C55-E4D4-0031-948718334209}"/>
-              </a:ext>
-            </a:extLst>
-          </p:cNvPr>
-          <p:cNvSpPr txBox="1"/>
-          <p:nvPr/>
-        </p:nvSpPr>
-        <p:spPr>
-          <a:xfrm>
-            <a:off x="3368731" y="5255425"/>
-            <a:ext cx="857839" cy="369332"/>
-          </a:xfrm>
-          <a:prstGeom prst="rect">
-            <a:avLst/>
-          </a:prstGeom>
-          <a:noFill/>
-        </p:spPr>
-        <p:txBody>
-          <a:bodyPr wrap="square" rtlCol="0">
-            <a:spAutoFit/>
-          </a:bodyPr>
-          <a:lstStyle/>
-          <a:p>
-            <a:pPr algn="ctr"/>
-            <a:r>
-              <a:rPr lang="en-US" dirty="0"/>
-              <a:t>IP</a:t>
-            </a:r>
-          </a:p>
-        </p:txBody>
-      </p:sp>
-      <p:sp>
-        <p:nvSpPr>
-          <p:cNvPr id="18" name="文字方塊 17">
-            <a:extLst>
-              <a:ext uri="{FF2B5EF4-FFF2-40B4-BE49-F238E27FC236}">
-                <a16:creationId xmlns:a16="http://schemas.microsoft.com/office/drawing/2014/main" id="{00C8ED77-2BC0-CA86-CD18-C3CC4E181EB7}"/>
-              </a:ext>
-            </a:extLst>
-          </p:cNvPr>
-          <p:cNvSpPr txBox="1"/>
-          <p:nvPr/>
-        </p:nvSpPr>
-        <p:spPr>
-          <a:xfrm>
-            <a:off x="6058327" y="5273624"/>
-            <a:ext cx="857839" cy="369332"/>
-          </a:xfrm>
-          <a:prstGeom prst="rect">
-            <a:avLst/>
-          </a:prstGeom>
-          <a:noFill/>
-        </p:spPr>
-        <p:txBody>
-          <a:bodyPr wrap="square" rtlCol="0">
-            <a:spAutoFit/>
-          </a:bodyPr>
-          <a:lstStyle/>
-          <a:p>
-            <a:pPr algn="ctr"/>
-            <a:r>
-              <a:rPr lang="en-US" dirty="0"/>
-              <a:t>IP</a:t>
-            </a:r>
-          </a:p>
-        </p:txBody>
-      </p:sp>
-      <p:sp>
-        <p:nvSpPr>
-          <p:cNvPr id="2" name="矩形: 圓角 23">
-            <a:extLst>
-              <a:ext uri="{FF2B5EF4-FFF2-40B4-BE49-F238E27FC236}">
-                <a16:creationId xmlns:a16="http://schemas.microsoft.com/office/drawing/2014/main" id="{1D2970AF-7377-52C0-77D3-B7E742CE4BFD}"/>
-              </a:ext>
-            </a:extLst>
-          </p:cNvPr>
-          <p:cNvSpPr/>
-          <p:nvPr/>
-        </p:nvSpPr>
-        <p:spPr>
-          <a:xfrm>
-            <a:off x="7653852" y="3843276"/>
-            <a:ext cx="1209600" cy="1045080"/>
-          </a:xfrm>
-          <a:prstGeom prst="roundRect">
-            <a:avLst>
-              <a:gd name="adj" fmla="val 16667"/>
-            </a:avLst>
-          </a:prstGeom>
-          <a:solidFill>
-            <a:srgbClr val="00B050"/>
-          </a:solidFill>
-          <a:ln>
-            <a:solidFill>
-              <a:srgbClr val="516263"/>
-            </a:solidFill>
-            <a:round/>
-          </a:ln>
-        </p:spPr>
-        <p:style>
-          <a:lnRef idx="2">
-            <a:schemeClr val="accent1">
-              <a:shade val="15000"/>
-            </a:schemeClr>
-          </a:lnRef>
-          <a:fillRef idx="1">
-            <a:schemeClr val="accent1"/>
-          </a:fillRef>
-          <a:effectRef idx="0">
-            <a:schemeClr val="accent1"/>
-          </a:effectRef>
-          <a:fontRef idx="minor"/>
-        </p:style>
-        <p:txBody>
-          <a:bodyPr lIns="90000" tIns="45000" rIns="90000" bIns="45000" anchor="ctr">
-            <a:noAutofit/>
-          </a:bodyPr>
-          <a:lstStyle/>
-          <a:p>
-            <a:pPr algn="ctr">
-              <a:lnSpc>
-                <a:spcPct val="100000"/>
-              </a:lnSpc>
-            </a:pPr>
-            <a:r>
-              <a:rPr lang="en-US" sz="1400" b="0" strike="noStrike" spc="-1" dirty="0">
-                <a:solidFill>
-                  <a:schemeClr val="dk1"/>
-                </a:solidFill>
-                <a:ea typeface="Arial"/>
-              </a:rPr>
-              <a:t>AXI</a:t>
-            </a:r>
-          </a:p>
-          <a:p>
-            <a:pPr algn="ctr">
-              <a:lnSpc>
-                <a:spcPct val="100000"/>
-              </a:lnSpc>
-            </a:pPr>
-            <a:r>
-              <a:rPr lang="en-US" sz="1400" spc="-1" dirty="0">
-                <a:solidFill>
-                  <a:schemeClr val="dk1"/>
-                </a:solidFill>
-              </a:rPr>
-              <a:t>Quad-SPI</a:t>
-            </a:r>
-            <a:endParaRPr lang="en-US" sz="1400" b="0" strike="noStrike" spc="-1" dirty="0">
-              <a:solidFill>
-                <a:srgbClr val="000000"/>
-              </a:solidFill>
-            </a:endParaRPr>
-          </a:p>
-        </p:txBody>
-      </p:sp>
-      <p:sp>
-        <p:nvSpPr>
-          <p:cNvPr id="3" name="矩形: 圓角 23">
-            <a:extLst>
-              <a:ext uri="{FF2B5EF4-FFF2-40B4-BE49-F238E27FC236}">
-                <a16:creationId xmlns:a16="http://schemas.microsoft.com/office/drawing/2014/main" id="{76C09D02-6452-2912-EC84-9A94FC086A37}"/>
-              </a:ext>
-            </a:extLst>
-          </p:cNvPr>
-          <p:cNvSpPr/>
-          <p:nvPr/>
-        </p:nvSpPr>
-        <p:spPr>
-          <a:xfrm>
-            <a:off x="7653852" y="2457879"/>
-            <a:ext cx="1209600" cy="1045080"/>
-          </a:xfrm>
-          <a:prstGeom prst="roundRect">
-            <a:avLst>
-              <a:gd name="adj" fmla="val 16667"/>
-            </a:avLst>
-          </a:prstGeom>
-          <a:solidFill>
-            <a:srgbClr val="00B050"/>
-          </a:solidFill>
-          <a:ln>
-            <a:solidFill>
-              <a:srgbClr val="516263"/>
-            </a:solidFill>
-            <a:round/>
-          </a:ln>
-        </p:spPr>
-        <p:style>
-          <a:lnRef idx="2">
-            <a:schemeClr val="accent1">
-              <a:shade val="15000"/>
-            </a:schemeClr>
-          </a:lnRef>
-          <a:fillRef idx="1">
-            <a:schemeClr val="accent1"/>
-          </a:fillRef>
-          <a:effectRef idx="0">
-            <a:schemeClr val="accent1"/>
-          </a:effectRef>
-          <a:fontRef idx="minor"/>
-        </p:style>
-        <p:txBody>
-          <a:bodyPr lIns="90000" tIns="45000" rIns="90000" bIns="45000" anchor="ctr">
-            <a:noAutofit/>
-          </a:bodyPr>
-          <a:lstStyle/>
-          <a:p>
-            <a:pPr algn="ctr">
-              <a:lnSpc>
-                <a:spcPct val="100000"/>
-              </a:lnSpc>
-            </a:pPr>
-            <a:r>
-              <a:rPr lang="en-US" altLang="zh-TW" sz="1400" spc="-1" dirty="0">
-                <a:solidFill>
-                  <a:srgbClr val="000000"/>
-                </a:solidFill>
-              </a:rPr>
-              <a:t>NOR</a:t>
-            </a:r>
-            <a:endParaRPr lang="en-US" sz="1400" spc="-1" dirty="0">
-              <a:solidFill>
-                <a:srgbClr val="000000"/>
-              </a:solidFill>
-            </a:endParaRPr>
-          </a:p>
-          <a:p>
-            <a:pPr algn="ctr">
-              <a:lnSpc>
-                <a:spcPct val="100000"/>
-              </a:lnSpc>
-            </a:pPr>
-            <a:r>
-              <a:rPr lang="en-US" sz="1400" spc="-1" dirty="0">
-                <a:solidFill>
-                  <a:srgbClr val="000000"/>
-                </a:solidFill>
-              </a:rPr>
-              <a:t>Flash</a:t>
-            </a:r>
-          </a:p>
-          <a:p>
-            <a:pPr algn="ctr">
-              <a:lnSpc>
-                <a:spcPct val="100000"/>
-              </a:lnSpc>
-            </a:pPr>
-            <a:r>
-              <a:rPr lang="en-US" sz="1400" b="0" strike="noStrike" spc="-1" dirty="0">
-                <a:solidFill>
-                  <a:srgbClr val="000000"/>
-                </a:solidFill>
-              </a:rPr>
-              <a:t>4MB</a:t>
-            </a:r>
-          </a:p>
-        </p:txBody>
-      </p:sp>
-      <p:cxnSp>
-        <p:nvCxnSpPr>
-          <p:cNvPr id="4" name="直線單箭頭接點 48">
-            <a:extLst>
-              <a:ext uri="{FF2B5EF4-FFF2-40B4-BE49-F238E27FC236}">
-                <a16:creationId xmlns:a16="http://schemas.microsoft.com/office/drawing/2014/main" id="{9985DF57-585C-5757-002F-AFF8B93B366C}"/>
-              </a:ext>
-            </a:extLst>
-          </p:cNvPr>
-          <p:cNvCxnSpPr>
-            <a:cxnSpLocks/>
-            <a:stCxn id="3" idx="2"/>
-            <a:endCxn id="2" idx="0"/>
-          </p:cNvCxnSpPr>
-          <p:nvPr/>
-        </p:nvCxnSpPr>
-        <p:spPr>
-          <a:xfrm>
-            <a:off x="8258652" y="3502959"/>
-            <a:ext cx="0" cy="340317"/>
-          </a:xfrm>
-          <a:prstGeom prst="straightConnector1">
-            <a:avLst/>
-          </a:prstGeom>
-          <a:ln w="28575">
-            <a:solidFill>
-              <a:srgbClr val="000000"/>
-            </a:solidFill>
-            <a:round/>
-            <a:headEnd type="arrow" w="med" len="med"/>
-            <a:tailEnd type="arrow" w="med" len="med"/>
-          </a:ln>
-        </p:spPr>
-      </p:cxnSp>
-      <p:sp>
-        <p:nvSpPr>
-          <p:cNvPr id="9" name="箭號: 左-右雙向 8">
-            <a:extLst>
-              <a:ext uri="{FF2B5EF4-FFF2-40B4-BE49-F238E27FC236}">
-                <a16:creationId xmlns:a16="http://schemas.microsoft.com/office/drawing/2014/main" id="{C1EE47B8-9007-D52B-C6E5-42BDD313FFA5}"/>
-              </a:ext>
-            </a:extLst>
-          </p:cNvPr>
-          <p:cNvSpPr/>
-          <p:nvPr/>
-        </p:nvSpPr>
-        <p:spPr>
-          <a:xfrm rot="5400000">
-            <a:off x="7587182" y="5316298"/>
-            <a:ext cx="991956" cy="249120"/>
-          </a:xfrm>
-          <a:prstGeom prst="leftRightArrow">
-            <a:avLst/>
-          </a:prstGeom>
-          <a:solidFill>
-            <a:schemeClr val="tx1"/>
-          </a:solidFill>
-          <a:ln>
-            <a:solidFill>
-              <a:schemeClr val="tx1"/>
-            </a:solidFill>
-          </a:ln>
-        </p:spPr>
-        <p:style>
-          <a:lnRef idx="2">
-            <a:schemeClr val="accent1">
-              <a:shade val="15000"/>
-            </a:schemeClr>
-          </a:lnRef>
-          <a:fillRef idx="1">
-            <a:schemeClr val="accent1"/>
-          </a:fillRef>
-          <a:effectRef idx="0">
-            <a:schemeClr val="accent1"/>
-          </a:effectRef>
-          <a:fontRef idx="minor">
-            <a:schemeClr val="lt1"/>
-          </a:fontRef>
-        </p:style>
-        <p:txBody>
-          <a:bodyPr rtlCol="0" anchor="ctr"/>
-          <a:lstStyle/>
-          <a:p>
-            <a:pPr algn="ctr"/>
-            <a:endParaRPr lang="en-US"/>
-          </a:p>
-        </p:txBody>
-      </p:sp>
-      <p:sp>
-        <p:nvSpPr>
-          <p:cNvPr id="12" name="文字方塊 11">
-            <a:extLst>
-              <a:ext uri="{FF2B5EF4-FFF2-40B4-BE49-F238E27FC236}">
-                <a16:creationId xmlns:a16="http://schemas.microsoft.com/office/drawing/2014/main" id="{D3AF3847-B1D6-F433-9017-10AE2E12D3BF}"/>
-              </a:ext>
-            </a:extLst>
-          </p:cNvPr>
-          <p:cNvSpPr txBox="1"/>
-          <p:nvPr/>
-        </p:nvSpPr>
-        <p:spPr>
-          <a:xfrm>
-            <a:off x="7157000" y="5262293"/>
-            <a:ext cx="857839" cy="369332"/>
-          </a:xfrm>
-          <a:prstGeom prst="rect">
-            <a:avLst/>
-          </a:prstGeom>
-          <a:noFill/>
-        </p:spPr>
-        <p:txBody>
-          <a:bodyPr wrap="square" rtlCol="0">
-            <a:spAutoFit/>
-          </a:bodyPr>
-          <a:lstStyle/>
-          <a:p>
-            <a:pPr algn="ctr"/>
-            <a:r>
-              <a:rPr lang="en-US" dirty="0"/>
-              <a:t>DP</a:t>
-            </a:r>
-          </a:p>
-        </p:txBody>
-      </p:sp>
-      <p:sp>
-        <p:nvSpPr>
-          <p:cNvPr id="13" name="文字方塊 12">
-            <a:extLst>
-              <a:ext uri="{FF2B5EF4-FFF2-40B4-BE49-F238E27FC236}">
-                <a16:creationId xmlns:a16="http://schemas.microsoft.com/office/drawing/2014/main" id="{EFD0DFC2-61B2-9D5F-C002-CBAE2354E191}"/>
-              </a:ext>
-            </a:extLst>
-          </p:cNvPr>
-          <p:cNvSpPr txBox="1"/>
-          <p:nvPr/>
-        </p:nvSpPr>
-        <p:spPr>
-          <a:xfrm>
-            <a:off x="9310249" y="2657253"/>
-            <a:ext cx="2299295" cy="646331"/>
-          </a:xfrm>
-          <a:prstGeom prst="rect">
-            <a:avLst/>
-          </a:prstGeom>
-          <a:noFill/>
-        </p:spPr>
-        <p:txBody>
-          <a:bodyPr wrap="square" rtlCol="0">
-            <a:spAutoFit/>
-          </a:bodyPr>
-          <a:lstStyle/>
-          <a:p>
-            <a:r>
-              <a:rPr lang="en-US" altLang="zh-TW" dirty="0"/>
-              <a:t>XIP (Execute in Place) is</a:t>
-            </a:r>
-            <a:r>
-              <a:rPr lang="zh-TW" altLang="en-US" dirty="0"/>
-              <a:t> </a:t>
-            </a:r>
-            <a:r>
-              <a:rPr lang="en-US" altLang="zh-TW" dirty="0"/>
-              <a:t>supported</a:t>
-            </a:r>
-            <a:endParaRPr lang="en-US" dirty="0"/>
-          </a:p>
-        </p:txBody>
-      </p:sp>
-      <p:cxnSp>
-        <p:nvCxnSpPr>
-          <p:cNvPr id="21" name="直線單箭頭接點 20">
-            <a:extLst>
-              <a:ext uri="{FF2B5EF4-FFF2-40B4-BE49-F238E27FC236}">
-                <a16:creationId xmlns:a16="http://schemas.microsoft.com/office/drawing/2014/main" id="{3E275E0A-0C6C-05AA-8DB5-2886262EF066}"/>
-              </a:ext>
-            </a:extLst>
-          </p:cNvPr>
-          <p:cNvCxnSpPr>
-            <a:stCxn id="3" idx="3"/>
-            <a:endCxn id="13" idx="1"/>
-          </p:cNvCxnSpPr>
-          <p:nvPr/>
-        </p:nvCxnSpPr>
-        <p:spPr>
-          <a:xfrm>
-            <a:off x="8863452" y="2980419"/>
-            <a:ext cx="446797" cy="0"/>
-          </a:xfrm>
-          <a:prstGeom prst="straightConnector1">
-            <a:avLst/>
-          </a:prstGeom>
-          <a:ln w="38100">
-            <a:solidFill>
-              <a:schemeClr val="tx1"/>
-            </a:solidFill>
-            <a:tailEnd type="triangle"/>
-          </a:ln>
-        </p:spPr>
-        <p:style>
-          <a:lnRef idx="1">
-            <a:schemeClr val="accent1"/>
-          </a:lnRef>
-          <a:fillRef idx="0">
-            <a:schemeClr val="accent1"/>
-          </a:fillRef>
-          <a:effectRef idx="0">
-            <a:schemeClr val="accent1"/>
-          </a:effectRef>
-          <a:fontRef idx="minor">
-            <a:schemeClr val="tx1"/>
-          </a:fontRef>
-        </p:style>
-      </p:cxnSp>
-      <p:sp>
-        <p:nvSpPr>
-          <p:cNvPr id="25" name="箭號: 左-右雙向 24">
-            <a:extLst>
-              <a:ext uri="{FF2B5EF4-FFF2-40B4-BE49-F238E27FC236}">
-                <a16:creationId xmlns:a16="http://schemas.microsoft.com/office/drawing/2014/main" id="{32AD87AD-19FC-11F5-2572-0BAFDBDFCA3F}"/>
-              </a:ext>
-            </a:extLst>
-          </p:cNvPr>
-          <p:cNvSpPr/>
-          <p:nvPr/>
-        </p:nvSpPr>
-        <p:spPr>
-          <a:xfrm rot="5400000">
-            <a:off x="7995125" y="5314235"/>
-            <a:ext cx="991956" cy="249120"/>
-          </a:xfrm>
-          <a:prstGeom prst="leftRightArrow">
-            <a:avLst/>
-          </a:prstGeom>
-          <a:solidFill>
-            <a:schemeClr val="tx1"/>
-          </a:solidFill>
-          <a:ln>
-            <a:solidFill>
-              <a:schemeClr val="tx1"/>
-            </a:solidFill>
-          </a:ln>
-        </p:spPr>
-        <p:style>
-          <a:lnRef idx="2">
-            <a:schemeClr val="accent1">
-              <a:shade val="15000"/>
-            </a:schemeClr>
-          </a:lnRef>
-          <a:fillRef idx="1">
-            <a:schemeClr val="accent1"/>
-          </a:fillRef>
-          <a:effectRef idx="0">
-            <a:schemeClr val="accent1"/>
-          </a:effectRef>
-          <a:fontRef idx="minor">
-            <a:schemeClr val="lt1"/>
-          </a:fontRef>
-        </p:style>
-        <p:txBody>
-          <a:bodyPr rtlCol="0" anchor="ctr"/>
-          <a:lstStyle/>
-          <a:p>
-            <a:pPr algn="ctr"/>
-            <a:endParaRPr lang="en-US"/>
-          </a:p>
-        </p:txBody>
-      </p:sp>
-      <p:sp>
-        <p:nvSpPr>
-          <p:cNvPr id="26" name="文字方塊 25">
-            <a:extLst>
-              <a:ext uri="{FF2B5EF4-FFF2-40B4-BE49-F238E27FC236}">
-                <a16:creationId xmlns:a16="http://schemas.microsoft.com/office/drawing/2014/main" id="{2C183AF0-4C0B-C5D6-F705-89C4F5527C9D}"/>
-              </a:ext>
-            </a:extLst>
-          </p:cNvPr>
-          <p:cNvSpPr txBox="1"/>
-          <p:nvPr/>
-        </p:nvSpPr>
-        <p:spPr>
-          <a:xfrm>
-            <a:off x="8608142" y="5215015"/>
-            <a:ext cx="857839" cy="369332"/>
-          </a:xfrm>
-          <a:prstGeom prst="rect">
-            <a:avLst/>
-          </a:prstGeom>
-          <a:noFill/>
-        </p:spPr>
-        <p:txBody>
-          <a:bodyPr wrap="square" rtlCol="0">
-            <a:spAutoFit/>
-          </a:bodyPr>
-          <a:lstStyle/>
-          <a:p>
-            <a:pPr algn="ctr"/>
-            <a:r>
-              <a:rPr lang="en-US" dirty="0"/>
-              <a:t>IP</a:t>
-            </a:r>
+            <a:fld id="{F9F9ED32-46C6-469E-9D81-E8934DBD0961}" type="slidenum">
+              <a:rPr lang="zh-TW" altLang="en-US" smtClean="0"/>
+              <a:pPr/>
+              <a:t>9</a:t>
+            </a:fld>
+            <a:endParaRPr lang="zh-TW" altLang="en-US" dirty="0"/>
           </a:p>
         </p:txBody>
       </p:sp>
     </p:spTree>
     <p:extLst>
       <p:ext uri="{BB962C8B-B14F-4D97-AF65-F5344CB8AC3E}">
-        <p14:creationId xmlns:p14="http://schemas.microsoft.com/office/powerpoint/2010/main" val="298182491"/>
+        <p14:creationId xmlns:p14="http://schemas.microsoft.com/office/powerpoint/2010/main" val="4145163537"/>
       </p:ext>
     </p:extLst>
   </p:cSld>

--- a/Intro_PPT/RISCV-MCU.pptx
+++ b/Intro_PPT/RISCV-MCU.pptx
@@ -5,10 +5,10 @@
     <p:sldMasterId id="2147483660" r:id="rId1"/>
   </p:sldMasterIdLst>
   <p:notesMasterIdLst>
-    <p:notesMasterId r:id="rId36"/>
+    <p:notesMasterId r:id="rId37"/>
   </p:notesMasterIdLst>
   <p:handoutMasterIdLst>
-    <p:handoutMasterId r:id="rId37"/>
+    <p:handoutMasterId r:id="rId38"/>
   </p:handoutMasterIdLst>
   <p:sldIdLst>
     <p:sldId id="353" r:id="rId2"/>
@@ -25,26 +25,27 @@
     <p:sldId id="305" r:id="rId13"/>
     <p:sldId id="383" r:id="rId14"/>
     <p:sldId id="381" r:id="rId15"/>
-    <p:sldId id="271" r:id="rId16"/>
-    <p:sldId id="377" r:id="rId17"/>
-    <p:sldId id="378" r:id="rId18"/>
-    <p:sldId id="376" r:id="rId19"/>
-    <p:sldId id="362" r:id="rId20"/>
-    <p:sldId id="363" r:id="rId21"/>
-    <p:sldId id="302" r:id="rId22"/>
-    <p:sldId id="364" r:id="rId23"/>
-    <p:sldId id="263" r:id="rId24"/>
-    <p:sldId id="365" r:id="rId25"/>
-    <p:sldId id="272" r:id="rId26"/>
-    <p:sldId id="289" r:id="rId27"/>
-    <p:sldId id="366" r:id="rId28"/>
-    <p:sldId id="367" r:id="rId29"/>
-    <p:sldId id="368" r:id="rId30"/>
-    <p:sldId id="369" r:id="rId31"/>
-    <p:sldId id="370" r:id="rId32"/>
-    <p:sldId id="264" r:id="rId33"/>
-    <p:sldId id="382" r:id="rId34"/>
-    <p:sldId id="374" r:id="rId35"/>
+    <p:sldId id="386" r:id="rId16"/>
+    <p:sldId id="271" r:id="rId17"/>
+    <p:sldId id="377" r:id="rId18"/>
+    <p:sldId id="378" r:id="rId19"/>
+    <p:sldId id="376" r:id="rId20"/>
+    <p:sldId id="362" r:id="rId21"/>
+    <p:sldId id="363" r:id="rId22"/>
+    <p:sldId id="302" r:id="rId23"/>
+    <p:sldId id="364" r:id="rId24"/>
+    <p:sldId id="263" r:id="rId25"/>
+    <p:sldId id="365" r:id="rId26"/>
+    <p:sldId id="272" r:id="rId27"/>
+    <p:sldId id="289" r:id="rId28"/>
+    <p:sldId id="366" r:id="rId29"/>
+    <p:sldId id="367" r:id="rId30"/>
+    <p:sldId id="368" r:id="rId31"/>
+    <p:sldId id="369" r:id="rId32"/>
+    <p:sldId id="370" r:id="rId33"/>
+    <p:sldId id="264" r:id="rId34"/>
+    <p:sldId id="382" r:id="rId35"/>
+    <p:sldId id="374" r:id="rId36"/>
   </p:sldIdLst>
   <p:sldSz cx="12192000" cy="6858000"/>
   <p:notesSz cx="6797675" cy="9926638"/>
@@ -8565,6 +8566,145 @@
   <p:cSld>
     <p:spTree>
       <p:nvGrpSpPr>
+        <p:cNvPr id="1" name=""/>
+        <p:cNvGrpSpPr/>
+        <p:nvPr/>
+      </p:nvGrpSpPr>
+      <p:grpSpPr>
+        <a:xfrm>
+          <a:off x="0" y="0"/>
+          <a:ext cx="0" cy="0"/>
+          <a:chOff x="0" y="0"/>
+          <a:chExt cx="0" cy="0"/>
+        </a:xfrm>
+      </p:grpSpPr>
+      <p:sp>
+        <p:nvSpPr>
+          <p:cNvPr id="2" name="標題 1">
+            <a:extLst>
+              <a:ext uri="{FF2B5EF4-FFF2-40B4-BE49-F238E27FC236}">
+                <a16:creationId xmlns:a16="http://schemas.microsoft.com/office/drawing/2014/main" id="{B91DF792-146A-3A22-E807-445C6BA171D7}"/>
+              </a:ext>
+            </a:extLst>
+          </p:cNvPr>
+          <p:cNvSpPr>
+            <a:spLocks noGrp="1"/>
+          </p:cNvSpPr>
+          <p:nvPr>
+            <p:ph type="title"/>
+          </p:nvPr>
+        </p:nvSpPr>
+        <p:spPr/>
+        <p:txBody>
+          <a:bodyPr/>
+          <a:lstStyle/>
+          <a:p>
+            <a:r>
+              <a:rPr lang="en-US" spc="-1" dirty="0">
+                <a:ea typeface="Calibri"/>
+              </a:rPr>
+              <a:t>MDM (</a:t>
+            </a:r>
+            <a:r>
+              <a:rPr lang="en-US" spc="-1" dirty="0" err="1">
+                <a:ea typeface="Calibri"/>
+              </a:rPr>
+              <a:t>MicroBlaze</a:t>
+            </a:r>
+            <a:r>
+              <a:rPr lang="en-US" spc="-1" dirty="0">
+                <a:ea typeface="Calibri"/>
+              </a:rPr>
+              <a:t> Debug Module)</a:t>
+            </a:r>
+            <a:endParaRPr lang="en-US" dirty="0"/>
+          </a:p>
+        </p:txBody>
+      </p:sp>
+      <p:sp>
+        <p:nvSpPr>
+          <p:cNvPr id="4" name="投影片編號版面配置區 3">
+            <a:extLst>
+              <a:ext uri="{FF2B5EF4-FFF2-40B4-BE49-F238E27FC236}">
+                <a16:creationId xmlns:a16="http://schemas.microsoft.com/office/drawing/2014/main" id="{51BF99A6-FB33-B0D5-25B2-608C67FA4BF1}"/>
+              </a:ext>
+            </a:extLst>
+          </p:cNvPr>
+          <p:cNvSpPr>
+            <a:spLocks noGrp="1"/>
+          </p:cNvSpPr>
+          <p:nvPr>
+            <p:ph type="sldNum" sz="quarter" idx="12"/>
+          </p:nvPr>
+        </p:nvSpPr>
+        <p:spPr/>
+        <p:txBody>
+          <a:bodyPr/>
+          <a:lstStyle/>
+          <a:p>
+            <a:fld id="{F9F9ED32-46C6-469E-9D81-E8934DBD0961}" type="slidenum">
+              <a:rPr lang="zh-TW" altLang="en-US" smtClean="0"/>
+              <a:pPr/>
+              <a:t>15</a:t>
+            </a:fld>
+            <a:endParaRPr lang="zh-TW" altLang="en-US" dirty="0"/>
+          </a:p>
+        </p:txBody>
+      </p:sp>
+      <p:pic>
+        <p:nvPicPr>
+          <p:cNvPr id="8" name="圖片 7">
+            <a:extLst>
+              <a:ext uri="{FF2B5EF4-FFF2-40B4-BE49-F238E27FC236}">
+                <a16:creationId xmlns:a16="http://schemas.microsoft.com/office/drawing/2014/main" id="{84EDD8A3-ED4D-A37C-CC35-46FBC1F2FCF8}"/>
+              </a:ext>
+            </a:extLst>
+          </p:cNvPr>
+          <p:cNvPicPr>
+            <a:picLocks noChangeAspect="1"/>
+          </p:cNvPicPr>
+          <p:nvPr/>
+        </p:nvPicPr>
+        <p:blipFill>
+          <a:blip r:embed="rId2">
+            <a:extLst>
+              <a:ext uri="{28A0092B-C50C-407E-A947-70E740481C1C}">
+                <a14:useLocalDpi xmlns:a14="http://schemas.microsoft.com/office/drawing/2010/main" val="0"/>
+              </a:ext>
+            </a:extLst>
+          </a:blip>
+          <a:stretch>
+            <a:fillRect/>
+          </a:stretch>
+        </p:blipFill>
+        <p:spPr>
+          <a:xfrm>
+            <a:off x="29811" y="0"/>
+            <a:ext cx="12132378" cy="6858000"/>
+          </a:xfrm>
+          <a:prstGeom prst="rect">
+            <a:avLst/>
+          </a:prstGeom>
+        </p:spPr>
+      </p:pic>
+    </p:spTree>
+    <p:extLst>
+      <p:ext uri="{BB962C8B-B14F-4D97-AF65-F5344CB8AC3E}">
+        <p14:creationId xmlns:p14="http://schemas.microsoft.com/office/powerpoint/2010/main" val="3320091747"/>
+      </p:ext>
+    </p:extLst>
+  </p:cSld>
+  <p:clrMapOvr>
+    <a:masterClrMapping/>
+  </p:clrMapOvr>
+</p:sld>
+</file>
+
+<file path=ppt/slides/slide16.xml><?xml version="1.0" encoding="utf-8"?>
+<p:sld xmlns:a="http://schemas.openxmlformats.org/drawingml/2006/main" xmlns:r="http://schemas.openxmlformats.org/officeDocument/2006/relationships" xmlns:p="http://schemas.openxmlformats.org/presentationml/2006/main">
+  <p:cSld>
+    <p:spTree>
+      <p:nvGrpSpPr>
         <p:cNvPr id="1" name="">
           <a:extLst>
             <a:ext uri="{FF2B5EF4-FFF2-40B4-BE49-F238E27FC236}">
@@ -9551,7 +9691,7 @@
               <a:rPr lang="en-TW" smtClean="0">
                 <a:latin typeface="+mn-lt"/>
               </a:rPr>
-              <a:t>15</a:t>
+              <a:t>16</a:t>
             </a:fld>
             <a:endParaRPr lang="en-TW">
               <a:latin typeface="+mn-lt"/>
@@ -9572,7 +9712,7 @@
 </p:sld>
 </file>
 
-<file path=ppt/slides/slide16.xml><?xml version="1.0" encoding="utf-8"?>
+<file path=ppt/slides/slide17.xml><?xml version="1.0" encoding="utf-8"?>
 <p:sld xmlns:a="http://schemas.openxmlformats.org/drawingml/2006/main" xmlns:r="http://schemas.openxmlformats.org/officeDocument/2006/relationships" xmlns:p="http://schemas.openxmlformats.org/presentationml/2006/main">
   <p:cSld>
     <p:spTree>
@@ -9649,7 +9789,7 @@
           <a:p>
             <a:fld id="{F9F9ED32-46C6-469E-9D81-E8934DBD0961}" type="slidenum">
               <a:rPr lang="zh-TW" altLang="en-US" smtClean="0"/>
-              <a:t>16</a:t>
+              <a:t>17</a:t>
             </a:fld>
             <a:endParaRPr lang="zh-TW" altLang="en-US" dirty="0"/>
           </a:p>
@@ -11090,7 +11230,7 @@
 </p:sld>
 </file>
 
-<file path=ppt/slides/slide17.xml><?xml version="1.0" encoding="utf-8"?>
+<file path=ppt/slides/slide18.xml><?xml version="1.0" encoding="utf-8"?>
 <p:sld xmlns:a="http://schemas.openxmlformats.org/drawingml/2006/main" xmlns:r="http://schemas.openxmlformats.org/officeDocument/2006/relationships" xmlns:p="http://schemas.openxmlformats.org/presentationml/2006/main">
   <p:cSld>
     <p:spTree>
@@ -11167,7 +11307,7 @@
           <a:p>
             <a:fld id="{F9F9ED32-46C6-469E-9D81-E8934DBD0961}" type="slidenum">
               <a:rPr lang="zh-TW" altLang="en-US" smtClean="0"/>
-              <a:t>17</a:t>
+              <a:t>18</a:t>
             </a:fld>
             <a:endParaRPr lang="zh-TW" altLang="en-US" dirty="0"/>
           </a:p>
@@ -11836,7 +11976,7 @@
 </p:sld>
 </file>
 
-<file path=ppt/slides/slide18.xml><?xml version="1.0" encoding="utf-8"?>
+<file path=ppt/slides/slide19.xml><?xml version="1.0" encoding="utf-8"?>
 <p:sld xmlns:a="http://schemas.openxmlformats.org/drawingml/2006/main" xmlns:r="http://schemas.openxmlformats.org/officeDocument/2006/relationships" xmlns:p="http://schemas.openxmlformats.org/presentationml/2006/main">
   <p:cSld>
     <p:spTree>
@@ -12056,7 +12196,7 @@
           <a:p>
             <a:fld id="{F9F9ED32-46C6-469E-9D81-E8934DBD0961}" type="slidenum">
               <a:rPr lang="zh-TW" altLang="en-US" smtClean="0"/>
-              <a:t>18</a:t>
+              <a:t>19</a:t>
             </a:fld>
             <a:endParaRPr lang="zh-TW" altLang="en-US" dirty="0"/>
           </a:p>
@@ -12178,7 +12318,289 @@
 </p:sld>
 </file>
 
-<file path=ppt/slides/slide19.xml><?xml version="1.0" encoding="utf-8"?>
+<file path=ppt/slides/slide2.xml><?xml version="1.0" encoding="utf-8"?>
+<p:sld xmlns:a="http://schemas.openxmlformats.org/drawingml/2006/main" xmlns:r="http://schemas.openxmlformats.org/officeDocument/2006/relationships" xmlns:p="http://schemas.openxmlformats.org/presentationml/2006/main">
+  <p:cSld>
+    <p:spTree>
+      <p:nvGrpSpPr>
+        <p:cNvPr id="1" name="">
+          <a:extLst>
+            <a:ext uri="{FF2B5EF4-FFF2-40B4-BE49-F238E27FC236}">
+              <a16:creationId xmlns:a16="http://schemas.microsoft.com/office/drawing/2014/main" id="{B69280E7-411B-5B87-EFAC-03C9325D8EB4}"/>
+            </a:ext>
+          </a:extLst>
+        </p:cNvPr>
+        <p:cNvGrpSpPr/>
+        <p:nvPr/>
+      </p:nvGrpSpPr>
+      <p:grpSpPr>
+        <a:xfrm>
+          <a:off x="0" y="0"/>
+          <a:ext cx="0" cy="0"/>
+          <a:chOff x="0" y="0"/>
+          <a:chExt cx="0" cy="0"/>
+        </a:xfrm>
+      </p:grpSpPr>
+      <p:sp>
+        <p:nvSpPr>
+          <p:cNvPr id="2" name="標題 1">
+            <a:extLst>
+              <a:ext uri="{FF2B5EF4-FFF2-40B4-BE49-F238E27FC236}">
+                <a16:creationId xmlns:a16="http://schemas.microsoft.com/office/drawing/2014/main" id="{4743D012-99B4-A6AC-0CD2-999158835AC4}"/>
+              </a:ext>
+            </a:extLst>
+          </p:cNvPr>
+          <p:cNvSpPr>
+            <a:spLocks noGrp="1"/>
+          </p:cNvSpPr>
+          <p:nvPr>
+            <p:ph type="title"/>
+          </p:nvPr>
+        </p:nvSpPr>
+        <p:spPr/>
+        <p:txBody>
+          <a:bodyPr/>
+          <a:lstStyle/>
+          <a:p>
+            <a:r>
+              <a:rPr lang="en-US" altLang="zh-TW" dirty="0"/>
+              <a:t>Outline</a:t>
+            </a:r>
+            <a:endParaRPr lang="zh-TW" altLang="en-US" dirty="0"/>
+          </a:p>
+        </p:txBody>
+      </p:sp>
+      <p:sp>
+        <p:nvSpPr>
+          <p:cNvPr id="3" name="內容版面配置區 2">
+            <a:extLst>
+              <a:ext uri="{FF2B5EF4-FFF2-40B4-BE49-F238E27FC236}">
+                <a16:creationId xmlns:a16="http://schemas.microsoft.com/office/drawing/2014/main" id="{130A0642-98CF-9CEF-6C6D-052CB538B24A}"/>
+              </a:ext>
+            </a:extLst>
+          </p:cNvPr>
+          <p:cNvSpPr>
+            <a:spLocks noGrp="1"/>
+          </p:cNvSpPr>
+          <p:nvPr>
+            <p:ph idx="1"/>
+          </p:nvPr>
+        </p:nvSpPr>
+        <p:spPr/>
+        <p:txBody>
+          <a:bodyPr/>
+          <a:lstStyle/>
+          <a:p>
+            <a:pPr>
+              <a:spcBef>
+                <a:spcPts val="1200"/>
+              </a:spcBef>
+            </a:pPr>
+            <a:r>
+              <a:rPr lang="en-US" sz="2400" dirty="0">
+                <a:latin typeface="Times New Roman" panose="02020603050405020304" pitchFamily="18" charset="0"/>
+                <a:cs typeface="Times New Roman" panose="02020603050405020304" pitchFamily="18" charset="0"/>
+              </a:rPr>
+              <a:t>FPGA Selection and Spec</a:t>
+            </a:r>
+          </a:p>
+          <a:p>
+            <a:pPr>
+              <a:spcBef>
+                <a:spcPts val="1200"/>
+              </a:spcBef>
+            </a:pPr>
+            <a:r>
+              <a:rPr lang="en-US" sz="2400" dirty="0">
+                <a:latin typeface="Times New Roman" panose="02020603050405020304" pitchFamily="18" charset="0"/>
+                <a:cs typeface="Times New Roman" panose="02020603050405020304" pitchFamily="18" charset="0"/>
+              </a:rPr>
+              <a:t>Microcontroller Overview</a:t>
+            </a:r>
+          </a:p>
+          <a:p>
+            <a:pPr>
+              <a:spcBef>
+                <a:spcPts val="1200"/>
+              </a:spcBef>
+            </a:pPr>
+            <a:r>
+              <a:rPr lang="en-US" altLang="zh-TW" sz="2400" dirty="0">
+                <a:latin typeface="Times New Roman" panose="02020603050405020304" pitchFamily="18" charset="0"/>
+                <a:cs typeface="Times New Roman" panose="02020603050405020304" pitchFamily="18" charset="0"/>
+              </a:rPr>
+              <a:t>Data Path / Instruction Path</a:t>
+            </a:r>
+            <a:endParaRPr lang="en-US" sz="2400" dirty="0">
+              <a:latin typeface="Times New Roman" panose="02020603050405020304" pitchFamily="18" charset="0"/>
+              <a:cs typeface="Times New Roman" panose="02020603050405020304" pitchFamily="18" charset="0"/>
+            </a:endParaRPr>
+          </a:p>
+          <a:p>
+            <a:pPr>
+              <a:spcBef>
+                <a:spcPts val="1200"/>
+              </a:spcBef>
+            </a:pPr>
+            <a:r>
+              <a:rPr lang="en-US" sz="2400" dirty="0">
+                <a:latin typeface="Times New Roman" panose="02020603050405020304" pitchFamily="18" charset="0"/>
+                <a:cs typeface="Times New Roman" panose="02020603050405020304" pitchFamily="18" charset="0"/>
+              </a:rPr>
+              <a:t>MDM / GPIO / Interrupt System / </a:t>
+            </a:r>
+            <a:r>
+              <a:rPr lang="zh-TW" altLang="en-US" sz="2400" dirty="0">
+                <a:latin typeface="Times New Roman" panose="02020603050405020304" pitchFamily="18" charset="0"/>
+                <a:cs typeface="Times New Roman" panose="02020603050405020304" pitchFamily="18" charset="0"/>
+              </a:rPr>
+              <a:t> </a:t>
+            </a:r>
+            <a:r>
+              <a:rPr lang="en-US" altLang="zh-TW" sz="2400" dirty="0">
+                <a:latin typeface="Times New Roman" panose="02020603050405020304" pitchFamily="18" charset="0"/>
+                <a:cs typeface="Times New Roman" panose="02020603050405020304" pitchFamily="18" charset="0"/>
+              </a:rPr>
+              <a:t>Timer &amp; PWM / XADC / UART</a:t>
+            </a:r>
+          </a:p>
+          <a:p>
+            <a:pPr>
+              <a:spcBef>
+                <a:spcPts val="1200"/>
+              </a:spcBef>
+            </a:pPr>
+            <a:r>
+              <a:rPr lang="en-US" altLang="zh-TW" sz="2400" dirty="0">
+                <a:solidFill>
+                  <a:srgbClr val="FF0000"/>
+                </a:solidFill>
+                <a:latin typeface="Times New Roman" panose="02020603050405020304" pitchFamily="18" charset="0"/>
+                <a:cs typeface="Times New Roman" panose="02020603050405020304" pitchFamily="18" charset="0"/>
+              </a:rPr>
+              <a:t>Memory Hierarchy</a:t>
+            </a:r>
+          </a:p>
+          <a:p>
+            <a:pPr>
+              <a:spcBef>
+                <a:spcPts val="1200"/>
+              </a:spcBef>
+            </a:pPr>
+            <a:r>
+              <a:rPr lang="en-US" altLang="zh-TW" sz="2400" dirty="0">
+                <a:latin typeface="Times New Roman" panose="02020603050405020304" pitchFamily="18" charset="0"/>
+                <a:cs typeface="Times New Roman" panose="02020603050405020304" pitchFamily="18" charset="0"/>
+              </a:rPr>
+              <a:t>Hardware Report</a:t>
+            </a:r>
+            <a:endParaRPr lang="en-US" sz="2400" dirty="0">
+              <a:latin typeface="Times New Roman" panose="02020603050405020304" pitchFamily="18" charset="0"/>
+              <a:cs typeface="Times New Roman" panose="02020603050405020304" pitchFamily="18" charset="0"/>
+            </a:endParaRPr>
+          </a:p>
+          <a:p>
+            <a:pPr>
+              <a:spcBef>
+                <a:spcPts val="1200"/>
+              </a:spcBef>
+            </a:pPr>
+            <a:r>
+              <a:rPr lang="en-US" sz="2400" dirty="0">
+                <a:latin typeface="Times New Roman" panose="02020603050405020304" pitchFamily="18" charset="0"/>
+                <a:cs typeface="Times New Roman" panose="02020603050405020304" pitchFamily="18" charset="0"/>
+              </a:rPr>
+              <a:t>Software Design Flow</a:t>
+            </a:r>
+          </a:p>
+          <a:p>
+            <a:pPr>
+              <a:spcBef>
+                <a:spcPts val="1200"/>
+              </a:spcBef>
+            </a:pPr>
+            <a:r>
+              <a:rPr lang="en-US" sz="2400" dirty="0">
+                <a:latin typeface="Times New Roman" panose="02020603050405020304" pitchFamily="18" charset="0"/>
+                <a:cs typeface="Times New Roman" panose="02020603050405020304" pitchFamily="18" charset="0"/>
+              </a:rPr>
+              <a:t>JTAG Debug Flow</a:t>
+            </a:r>
+          </a:p>
+          <a:p>
+            <a:pPr>
+              <a:spcBef>
+                <a:spcPts val="1200"/>
+              </a:spcBef>
+            </a:pPr>
+            <a:r>
+              <a:rPr lang="en-US" sz="2400" dirty="0">
+                <a:solidFill>
+                  <a:srgbClr val="FF0000"/>
+                </a:solidFill>
+                <a:latin typeface="Times New Roman" panose="02020603050405020304" pitchFamily="18" charset="0"/>
+                <a:cs typeface="Times New Roman" panose="02020603050405020304" pitchFamily="18" charset="0"/>
+              </a:rPr>
+              <a:t>Standalone Boot Sequence</a:t>
+            </a:r>
+          </a:p>
+        </p:txBody>
+      </p:sp>
+      <p:sp>
+        <p:nvSpPr>
+          <p:cNvPr id="4" name="投影片編號版面配置區 3">
+            <a:extLst>
+              <a:ext uri="{FF2B5EF4-FFF2-40B4-BE49-F238E27FC236}">
+                <a16:creationId xmlns:a16="http://schemas.microsoft.com/office/drawing/2014/main" id="{2026C914-5B87-BB1E-25CB-FED0FD0FBFCC}"/>
+              </a:ext>
+            </a:extLst>
+          </p:cNvPr>
+          <p:cNvSpPr>
+            <a:spLocks noGrp="1"/>
+          </p:cNvSpPr>
+          <p:nvPr>
+            <p:ph type="sldNum" sz="quarter" idx="12"/>
+          </p:nvPr>
+        </p:nvSpPr>
+        <p:spPr/>
+        <p:txBody>
+          <a:bodyPr/>
+          <a:lstStyle/>
+          <a:p>
+            <a:fld id="{F9F9ED32-46C6-469E-9D81-E8934DBD0961}" type="slidenum">
+              <a:rPr lang="zh-TW" altLang="en-US" smtClean="0"/>
+              <a:t>2</a:t>
+            </a:fld>
+            <a:endParaRPr lang="zh-TW" altLang="en-US" dirty="0"/>
+          </a:p>
+        </p:txBody>
+      </p:sp>
+    </p:spTree>
+    <p:extLst>
+      <p:ext uri="{BB962C8B-B14F-4D97-AF65-F5344CB8AC3E}">
+        <p14:creationId xmlns:p14="http://schemas.microsoft.com/office/powerpoint/2010/main" val="219506187"/>
+      </p:ext>
+    </p:extLst>
+  </p:cSld>
+  <p:clrMapOvr>
+    <a:masterClrMapping/>
+  </p:clrMapOvr>
+  <mc:AlternateContent xmlns:mc="http://schemas.openxmlformats.org/markup-compatibility/2006" xmlns:p14="http://schemas.microsoft.com/office/powerpoint/2010/main">
+    <mc:Choice Requires="p14">
+      <p:transition spd="slow" p14:dur="2000">
+        <p:cut/>
+      </p:transition>
+    </mc:Choice>
+    <mc:Fallback xmlns="">
+      <p:transition spd="slow">
+        <p:cut/>
+      </p:transition>
+    </mc:Fallback>
+  </mc:AlternateContent>
+</p:sld>
+</file>
+
+<file path=ppt/slides/slide20.xml><?xml version="1.0" encoding="utf-8"?>
 <p:sld xmlns:a="http://schemas.openxmlformats.org/drawingml/2006/main" xmlns:r="http://schemas.openxmlformats.org/officeDocument/2006/relationships" xmlns:p="http://schemas.openxmlformats.org/presentationml/2006/main">
   <p:cSld>
     <p:spTree>
@@ -12246,7 +12668,7 @@
           <a:p>
             <a:fld id="{5E7A655E-BA10-45EB-B439-1EA08694B58E}" type="slidenum">
               <a:rPr lang="en-US" smtClean="0"/>
-              <a:t>19</a:t>
+              <a:t>20</a:t>
             </a:fld>
             <a:endParaRPr lang="en-US"/>
           </a:p>
@@ -14129,289 +14551,7 @@
 </p:sld>
 </file>
 
-<file path=ppt/slides/slide2.xml><?xml version="1.0" encoding="utf-8"?>
-<p:sld xmlns:a="http://schemas.openxmlformats.org/drawingml/2006/main" xmlns:r="http://schemas.openxmlformats.org/officeDocument/2006/relationships" xmlns:p="http://schemas.openxmlformats.org/presentationml/2006/main">
-  <p:cSld>
-    <p:spTree>
-      <p:nvGrpSpPr>
-        <p:cNvPr id="1" name="">
-          <a:extLst>
-            <a:ext uri="{FF2B5EF4-FFF2-40B4-BE49-F238E27FC236}">
-              <a16:creationId xmlns:a16="http://schemas.microsoft.com/office/drawing/2014/main" id="{B69280E7-411B-5B87-EFAC-03C9325D8EB4}"/>
-            </a:ext>
-          </a:extLst>
-        </p:cNvPr>
-        <p:cNvGrpSpPr/>
-        <p:nvPr/>
-      </p:nvGrpSpPr>
-      <p:grpSpPr>
-        <a:xfrm>
-          <a:off x="0" y="0"/>
-          <a:ext cx="0" cy="0"/>
-          <a:chOff x="0" y="0"/>
-          <a:chExt cx="0" cy="0"/>
-        </a:xfrm>
-      </p:grpSpPr>
-      <p:sp>
-        <p:nvSpPr>
-          <p:cNvPr id="2" name="標題 1">
-            <a:extLst>
-              <a:ext uri="{FF2B5EF4-FFF2-40B4-BE49-F238E27FC236}">
-                <a16:creationId xmlns:a16="http://schemas.microsoft.com/office/drawing/2014/main" id="{4743D012-99B4-A6AC-0CD2-999158835AC4}"/>
-              </a:ext>
-            </a:extLst>
-          </p:cNvPr>
-          <p:cNvSpPr>
-            <a:spLocks noGrp="1"/>
-          </p:cNvSpPr>
-          <p:nvPr>
-            <p:ph type="title"/>
-          </p:nvPr>
-        </p:nvSpPr>
-        <p:spPr/>
-        <p:txBody>
-          <a:bodyPr/>
-          <a:lstStyle/>
-          <a:p>
-            <a:r>
-              <a:rPr lang="en-US" altLang="zh-TW" dirty="0"/>
-              <a:t>Outline</a:t>
-            </a:r>
-            <a:endParaRPr lang="zh-TW" altLang="en-US" dirty="0"/>
-          </a:p>
-        </p:txBody>
-      </p:sp>
-      <p:sp>
-        <p:nvSpPr>
-          <p:cNvPr id="3" name="內容版面配置區 2">
-            <a:extLst>
-              <a:ext uri="{FF2B5EF4-FFF2-40B4-BE49-F238E27FC236}">
-                <a16:creationId xmlns:a16="http://schemas.microsoft.com/office/drawing/2014/main" id="{130A0642-98CF-9CEF-6C6D-052CB538B24A}"/>
-              </a:ext>
-            </a:extLst>
-          </p:cNvPr>
-          <p:cNvSpPr>
-            <a:spLocks noGrp="1"/>
-          </p:cNvSpPr>
-          <p:nvPr>
-            <p:ph idx="1"/>
-          </p:nvPr>
-        </p:nvSpPr>
-        <p:spPr/>
-        <p:txBody>
-          <a:bodyPr/>
-          <a:lstStyle/>
-          <a:p>
-            <a:pPr>
-              <a:spcBef>
-                <a:spcPts val="1200"/>
-              </a:spcBef>
-            </a:pPr>
-            <a:r>
-              <a:rPr lang="en-US" sz="2400" dirty="0">
-                <a:latin typeface="Times New Roman" panose="02020603050405020304" pitchFamily="18" charset="0"/>
-                <a:cs typeface="Times New Roman" panose="02020603050405020304" pitchFamily="18" charset="0"/>
-              </a:rPr>
-              <a:t>FPGA Selection and Spec</a:t>
-            </a:r>
-          </a:p>
-          <a:p>
-            <a:pPr>
-              <a:spcBef>
-                <a:spcPts val="1200"/>
-              </a:spcBef>
-            </a:pPr>
-            <a:r>
-              <a:rPr lang="en-US" sz="2400" dirty="0">
-                <a:latin typeface="Times New Roman" panose="02020603050405020304" pitchFamily="18" charset="0"/>
-                <a:cs typeface="Times New Roman" panose="02020603050405020304" pitchFamily="18" charset="0"/>
-              </a:rPr>
-              <a:t>Microcontroller Overview</a:t>
-            </a:r>
-          </a:p>
-          <a:p>
-            <a:pPr>
-              <a:spcBef>
-                <a:spcPts val="1200"/>
-              </a:spcBef>
-            </a:pPr>
-            <a:r>
-              <a:rPr lang="en-US" altLang="zh-TW" sz="2400" dirty="0">
-                <a:latin typeface="Times New Roman" panose="02020603050405020304" pitchFamily="18" charset="0"/>
-                <a:cs typeface="Times New Roman" panose="02020603050405020304" pitchFamily="18" charset="0"/>
-              </a:rPr>
-              <a:t>Data Path / Instruction Path</a:t>
-            </a:r>
-            <a:endParaRPr lang="en-US" sz="2400" dirty="0">
-              <a:latin typeface="Times New Roman" panose="02020603050405020304" pitchFamily="18" charset="0"/>
-              <a:cs typeface="Times New Roman" panose="02020603050405020304" pitchFamily="18" charset="0"/>
-            </a:endParaRPr>
-          </a:p>
-          <a:p>
-            <a:pPr>
-              <a:spcBef>
-                <a:spcPts val="1200"/>
-              </a:spcBef>
-            </a:pPr>
-            <a:r>
-              <a:rPr lang="en-US" sz="2400" dirty="0">
-                <a:latin typeface="Times New Roman" panose="02020603050405020304" pitchFamily="18" charset="0"/>
-                <a:cs typeface="Times New Roman" panose="02020603050405020304" pitchFamily="18" charset="0"/>
-              </a:rPr>
-              <a:t>MDM / GPIO / Interrupt System / </a:t>
-            </a:r>
-            <a:r>
-              <a:rPr lang="zh-TW" altLang="en-US" sz="2400" dirty="0">
-                <a:latin typeface="Times New Roman" panose="02020603050405020304" pitchFamily="18" charset="0"/>
-                <a:cs typeface="Times New Roman" panose="02020603050405020304" pitchFamily="18" charset="0"/>
-              </a:rPr>
-              <a:t> </a:t>
-            </a:r>
-            <a:r>
-              <a:rPr lang="en-US" altLang="zh-TW" sz="2400" dirty="0">
-                <a:latin typeface="Times New Roman" panose="02020603050405020304" pitchFamily="18" charset="0"/>
-                <a:cs typeface="Times New Roman" panose="02020603050405020304" pitchFamily="18" charset="0"/>
-              </a:rPr>
-              <a:t>Timer &amp; PWM / XADC / UART</a:t>
-            </a:r>
-          </a:p>
-          <a:p>
-            <a:pPr>
-              <a:spcBef>
-                <a:spcPts val="1200"/>
-              </a:spcBef>
-            </a:pPr>
-            <a:r>
-              <a:rPr lang="en-US" altLang="zh-TW" sz="2400" dirty="0">
-                <a:solidFill>
-                  <a:srgbClr val="FF0000"/>
-                </a:solidFill>
-                <a:latin typeface="Times New Roman" panose="02020603050405020304" pitchFamily="18" charset="0"/>
-                <a:cs typeface="Times New Roman" panose="02020603050405020304" pitchFamily="18" charset="0"/>
-              </a:rPr>
-              <a:t>Memory Hierarchy</a:t>
-            </a:r>
-          </a:p>
-          <a:p>
-            <a:pPr>
-              <a:spcBef>
-                <a:spcPts val="1200"/>
-              </a:spcBef>
-            </a:pPr>
-            <a:r>
-              <a:rPr lang="en-US" altLang="zh-TW" sz="2400" dirty="0">
-                <a:latin typeface="Times New Roman" panose="02020603050405020304" pitchFamily="18" charset="0"/>
-                <a:cs typeface="Times New Roman" panose="02020603050405020304" pitchFamily="18" charset="0"/>
-              </a:rPr>
-              <a:t>Hardware Report</a:t>
-            </a:r>
-            <a:endParaRPr lang="en-US" sz="2400" dirty="0">
-              <a:latin typeface="Times New Roman" panose="02020603050405020304" pitchFamily="18" charset="0"/>
-              <a:cs typeface="Times New Roman" panose="02020603050405020304" pitchFamily="18" charset="0"/>
-            </a:endParaRPr>
-          </a:p>
-          <a:p>
-            <a:pPr>
-              <a:spcBef>
-                <a:spcPts val="1200"/>
-              </a:spcBef>
-            </a:pPr>
-            <a:r>
-              <a:rPr lang="en-US" sz="2400" dirty="0">
-                <a:latin typeface="Times New Roman" panose="02020603050405020304" pitchFamily="18" charset="0"/>
-                <a:cs typeface="Times New Roman" panose="02020603050405020304" pitchFamily="18" charset="0"/>
-              </a:rPr>
-              <a:t>Software Design Flow</a:t>
-            </a:r>
-          </a:p>
-          <a:p>
-            <a:pPr>
-              <a:spcBef>
-                <a:spcPts val="1200"/>
-              </a:spcBef>
-            </a:pPr>
-            <a:r>
-              <a:rPr lang="en-US" sz="2400" dirty="0">
-                <a:latin typeface="Times New Roman" panose="02020603050405020304" pitchFamily="18" charset="0"/>
-                <a:cs typeface="Times New Roman" panose="02020603050405020304" pitchFamily="18" charset="0"/>
-              </a:rPr>
-              <a:t>JTAG Debug Flow</a:t>
-            </a:r>
-          </a:p>
-          <a:p>
-            <a:pPr>
-              <a:spcBef>
-                <a:spcPts val="1200"/>
-              </a:spcBef>
-            </a:pPr>
-            <a:r>
-              <a:rPr lang="en-US" sz="2400" dirty="0">
-                <a:solidFill>
-                  <a:srgbClr val="FF0000"/>
-                </a:solidFill>
-                <a:latin typeface="Times New Roman" panose="02020603050405020304" pitchFamily="18" charset="0"/>
-                <a:cs typeface="Times New Roman" panose="02020603050405020304" pitchFamily="18" charset="0"/>
-              </a:rPr>
-              <a:t>Standalone Boot Sequence</a:t>
-            </a:r>
-          </a:p>
-        </p:txBody>
-      </p:sp>
-      <p:sp>
-        <p:nvSpPr>
-          <p:cNvPr id="4" name="投影片編號版面配置區 3">
-            <a:extLst>
-              <a:ext uri="{FF2B5EF4-FFF2-40B4-BE49-F238E27FC236}">
-                <a16:creationId xmlns:a16="http://schemas.microsoft.com/office/drawing/2014/main" id="{2026C914-5B87-BB1E-25CB-FED0FD0FBFCC}"/>
-              </a:ext>
-            </a:extLst>
-          </p:cNvPr>
-          <p:cNvSpPr>
-            <a:spLocks noGrp="1"/>
-          </p:cNvSpPr>
-          <p:nvPr>
-            <p:ph type="sldNum" sz="quarter" idx="12"/>
-          </p:nvPr>
-        </p:nvSpPr>
-        <p:spPr/>
-        <p:txBody>
-          <a:bodyPr/>
-          <a:lstStyle/>
-          <a:p>
-            <a:fld id="{F9F9ED32-46C6-469E-9D81-E8934DBD0961}" type="slidenum">
-              <a:rPr lang="zh-TW" altLang="en-US" smtClean="0"/>
-              <a:t>2</a:t>
-            </a:fld>
-            <a:endParaRPr lang="zh-TW" altLang="en-US" dirty="0"/>
-          </a:p>
-        </p:txBody>
-      </p:sp>
-    </p:spTree>
-    <p:extLst>
-      <p:ext uri="{BB962C8B-B14F-4D97-AF65-F5344CB8AC3E}">
-        <p14:creationId xmlns:p14="http://schemas.microsoft.com/office/powerpoint/2010/main" val="219506187"/>
-      </p:ext>
-    </p:extLst>
-  </p:cSld>
-  <p:clrMapOvr>
-    <a:masterClrMapping/>
-  </p:clrMapOvr>
-  <mc:AlternateContent xmlns:mc="http://schemas.openxmlformats.org/markup-compatibility/2006" xmlns:p14="http://schemas.microsoft.com/office/powerpoint/2010/main">
-    <mc:Choice Requires="p14">
-      <p:transition spd="slow" p14:dur="2000">
-        <p:cut/>
-      </p:transition>
-    </mc:Choice>
-    <mc:Fallback xmlns="">
-      <p:transition spd="slow">
-        <p:cut/>
-      </p:transition>
-    </mc:Fallback>
-  </mc:AlternateContent>
-</p:sld>
-</file>
-
-<file path=ppt/slides/slide20.xml><?xml version="1.0" encoding="utf-8"?>
+<file path=ppt/slides/slide21.xml><?xml version="1.0" encoding="utf-8"?>
 <p:sld xmlns:a="http://schemas.openxmlformats.org/drawingml/2006/main" xmlns:r="http://schemas.openxmlformats.org/officeDocument/2006/relationships" xmlns:p="http://schemas.openxmlformats.org/presentationml/2006/main">
   <p:cSld>
     <p:spTree>
@@ -14663,7 +14803,7 @@
           <a:p>
             <a:fld id="{F9F9ED32-46C6-469E-9D81-E8934DBD0961}" type="slidenum">
               <a:rPr lang="zh-TW" altLang="en-US" smtClean="0"/>
-              <a:t>20</a:t>
+              <a:t>21</a:t>
             </a:fld>
             <a:endParaRPr lang="zh-TW" altLang="en-US" dirty="0"/>
           </a:p>
@@ -14694,7 +14834,7 @@
 </p:sld>
 </file>
 
-<file path=ppt/slides/slide21.xml><?xml version="1.0" encoding="utf-8"?>
+<file path=ppt/slides/slide22.xml><?xml version="1.0" encoding="utf-8"?>
 <p:sld xmlns:a="http://schemas.openxmlformats.org/drawingml/2006/main" xmlns:r="http://schemas.openxmlformats.org/officeDocument/2006/relationships" xmlns:p="http://schemas.openxmlformats.org/presentationml/2006/main">
   <p:cSld>
     <p:spTree>
@@ -14768,7 +14908,7 @@
           <a:p>
             <a:fld id="{9856DA5A-CF52-47BD-AC49-21DC5CAD2230}" type="slidenum">
               <a:rPr lang="en-TW" smtClean="0"/>
-              <a:t>21</a:t>
+              <a:t>22</a:t>
             </a:fld>
             <a:endParaRPr lang="en-TW"/>
           </a:p>
@@ -14834,7 +14974,7 @@
 </p:sld>
 </file>
 
-<file path=ppt/slides/slide22.xml><?xml version="1.0" encoding="utf-8"?>
+<file path=ppt/slides/slide23.xml><?xml version="1.0" encoding="utf-8"?>
 <p:sld xmlns:a="http://schemas.openxmlformats.org/drawingml/2006/main" xmlns:r="http://schemas.openxmlformats.org/officeDocument/2006/relationships" xmlns:p="http://schemas.openxmlformats.org/presentationml/2006/main">
   <p:cSld>
     <p:spTree>
@@ -15083,7 +15223,7 @@
           <a:p>
             <a:fld id="{F9F9ED32-46C6-469E-9D81-E8934DBD0961}" type="slidenum">
               <a:rPr lang="zh-TW" altLang="en-US" smtClean="0"/>
-              <a:t>22</a:t>
+              <a:t>23</a:t>
             </a:fld>
             <a:endParaRPr lang="zh-TW" altLang="en-US" dirty="0"/>
           </a:p>
@@ -15114,7 +15254,7 @@
 </p:sld>
 </file>
 
-<file path=ppt/slides/slide23.xml><?xml version="1.0" encoding="utf-8"?>
+<file path=ppt/slides/slide24.xml><?xml version="1.0" encoding="utf-8"?>
 <p:sld xmlns:a="http://schemas.openxmlformats.org/drawingml/2006/main" xmlns:r="http://schemas.openxmlformats.org/officeDocument/2006/relationships" xmlns:p="http://schemas.openxmlformats.org/presentationml/2006/main">
   <p:cSld>
     <p:spTree>
@@ -15354,7 +15494,7 @@
           <a:p>
             <a:fld id="{5E7A655E-BA10-45EB-B439-1EA08694B58E}" type="slidenum">
               <a:rPr lang="en-TW" smtClean="0"/>
-              <a:t>23</a:t>
+              <a:t>24</a:t>
             </a:fld>
             <a:endParaRPr lang="en-TW"/>
           </a:p>
@@ -15368,7 +15508,7 @@
 </p:sld>
 </file>
 
-<file path=ppt/slides/slide24.xml><?xml version="1.0" encoding="utf-8"?>
+<file path=ppt/slides/slide25.xml><?xml version="1.0" encoding="utf-8"?>
 <p:sld xmlns:a="http://schemas.openxmlformats.org/drawingml/2006/main" xmlns:r="http://schemas.openxmlformats.org/officeDocument/2006/relationships" xmlns:p="http://schemas.openxmlformats.org/presentationml/2006/main">
   <p:cSld>
     <p:spTree>
@@ -15620,7 +15760,7 @@
           <a:p>
             <a:fld id="{F9F9ED32-46C6-469E-9D81-E8934DBD0961}" type="slidenum">
               <a:rPr lang="zh-TW" altLang="en-US" smtClean="0"/>
-              <a:t>24</a:t>
+              <a:t>25</a:t>
             </a:fld>
             <a:endParaRPr lang="zh-TW" altLang="en-US" dirty="0"/>
           </a:p>
@@ -15651,7 +15791,7 @@
 </p:sld>
 </file>
 
-<file path=ppt/slides/slide25.xml><?xml version="1.0" encoding="utf-8"?>
+<file path=ppt/slides/slide26.xml><?xml version="1.0" encoding="utf-8"?>
 <p:sld xmlns:a="http://schemas.openxmlformats.org/drawingml/2006/main" xmlns:r="http://schemas.openxmlformats.org/officeDocument/2006/relationships" xmlns:p="http://schemas.openxmlformats.org/presentationml/2006/main">
   <p:cSld>
     <p:spTree>
@@ -15775,7 +15915,7 @@
             </a:pPr>
             <a:fld id="{00000000-1234-1234-1234-123412341234}" type="slidenum">
               <a:rPr lang="en-US" smtClean="0"/>
-              <a:t>25</a:t>
+              <a:t>26</a:t>
             </a:fld>
             <a:endParaRPr lang="en-US"/>
           </a:p>
@@ -15794,7 +15934,7 @@
 </p:sld>
 </file>
 
-<file path=ppt/slides/slide26.xml><?xml version="1.0" encoding="utf-8"?>
+<file path=ppt/slides/slide27.xml><?xml version="1.0" encoding="utf-8"?>
 <p:sld xmlns:a="http://schemas.openxmlformats.org/drawingml/2006/main" xmlns:r="http://schemas.openxmlformats.org/officeDocument/2006/relationships" xmlns:p="http://schemas.openxmlformats.org/presentationml/2006/main">
   <p:cSld>
     <p:spTree>
@@ -16029,7 +16169,7 @@
             </a:pPr>
             <a:fld id="{00000000-1234-1234-1234-123412341234}" type="slidenum">
               <a:rPr lang="en-US" smtClean="0"/>
-              <a:t>26</a:t>
+              <a:t>27</a:t>
             </a:fld>
             <a:endParaRPr lang="en-US"/>
           </a:p>
@@ -16048,7 +16188,7 @@
 </p:sld>
 </file>
 
-<file path=ppt/slides/slide27.xml><?xml version="1.0" encoding="utf-8"?>
+<file path=ppt/slides/slide28.xml><?xml version="1.0" encoding="utf-8"?>
 <p:sld xmlns:a="http://schemas.openxmlformats.org/drawingml/2006/main" xmlns:r="http://schemas.openxmlformats.org/officeDocument/2006/relationships" xmlns:p="http://schemas.openxmlformats.org/presentationml/2006/main">
   <p:cSld>
     <p:spTree>
@@ -16325,7 +16465,7 @@
             <a:fld id="{F9F9ED32-46C6-469E-9D81-E8934DBD0961}" type="slidenum">
               <a:rPr lang="zh-TW" altLang="en-US" smtClean="0"/>
               <a:pPr/>
-              <a:t>27</a:t>
+              <a:t>28</a:t>
             </a:fld>
             <a:endParaRPr lang="zh-TW" altLang="en-US" dirty="0"/>
           </a:p>
@@ -16420,7 +16560,7 @@
 </p:sld>
 </file>
 
-<file path=ppt/slides/slide28.xml><?xml version="1.0" encoding="utf-8"?>
+<file path=ppt/slides/slide29.xml><?xml version="1.0" encoding="utf-8"?>
 <p:sld xmlns:a="http://schemas.openxmlformats.org/drawingml/2006/main" xmlns:r="http://schemas.openxmlformats.org/officeDocument/2006/relationships" xmlns:p="http://schemas.openxmlformats.org/presentationml/2006/main">
   <p:cSld>
     <p:spTree>
@@ -16644,7 +16784,7 @@
             <a:fld id="{F9F9ED32-46C6-469E-9D81-E8934DBD0961}" type="slidenum">
               <a:rPr lang="zh-TW" altLang="en-US" smtClean="0"/>
               <a:pPr/>
-              <a:t>28</a:t>
+              <a:t>29</a:t>
             </a:fld>
             <a:endParaRPr lang="zh-TW" altLang="en-US" dirty="0"/>
           </a:p>
@@ -16660,289 +16800,6 @@
   <p:clrMapOvr>
     <a:masterClrMapping/>
   </p:clrMapOvr>
-</p:sld>
-</file>
-
-<file path=ppt/slides/slide29.xml><?xml version="1.0" encoding="utf-8"?>
-<p:sld xmlns:a="http://schemas.openxmlformats.org/drawingml/2006/main" xmlns:r="http://schemas.openxmlformats.org/officeDocument/2006/relationships" xmlns:p="http://schemas.openxmlformats.org/presentationml/2006/main">
-  <p:cSld>
-    <p:spTree>
-      <p:nvGrpSpPr>
-        <p:cNvPr id="1" name="">
-          <a:extLst>
-            <a:ext uri="{FF2B5EF4-FFF2-40B4-BE49-F238E27FC236}">
-              <a16:creationId xmlns:a16="http://schemas.microsoft.com/office/drawing/2014/main" id="{A5F8769B-96D5-FB86-647F-9E84199D00DD}"/>
-            </a:ext>
-          </a:extLst>
-        </p:cNvPr>
-        <p:cNvGrpSpPr/>
-        <p:nvPr/>
-      </p:nvGrpSpPr>
-      <p:grpSpPr>
-        <a:xfrm>
-          <a:off x="0" y="0"/>
-          <a:ext cx="0" cy="0"/>
-          <a:chOff x="0" y="0"/>
-          <a:chExt cx="0" cy="0"/>
-        </a:xfrm>
-      </p:grpSpPr>
-      <p:sp>
-        <p:nvSpPr>
-          <p:cNvPr id="3" name="內容版面配置區 2">
-            <a:extLst>
-              <a:ext uri="{FF2B5EF4-FFF2-40B4-BE49-F238E27FC236}">
-                <a16:creationId xmlns:a16="http://schemas.microsoft.com/office/drawing/2014/main" id="{6CAFB584-589A-4323-19D7-1DC80633D59A}"/>
-              </a:ext>
-            </a:extLst>
-          </p:cNvPr>
-          <p:cNvSpPr>
-            <a:spLocks noGrp="1"/>
-          </p:cNvSpPr>
-          <p:nvPr>
-            <p:ph idx="1"/>
-          </p:nvPr>
-        </p:nvSpPr>
-        <p:spPr/>
-        <p:txBody>
-          <a:bodyPr/>
-          <a:lstStyle/>
-          <a:p>
-            <a:pPr>
-              <a:spcBef>
-                <a:spcPts val="1200"/>
-              </a:spcBef>
-            </a:pPr>
-            <a:r>
-              <a:rPr lang="en-US" sz="2400" dirty="0">
-                <a:solidFill>
-                  <a:schemeClr val="bg2"/>
-                </a:solidFill>
-                <a:latin typeface="Times New Roman" panose="02020603050405020304" pitchFamily="18" charset="0"/>
-                <a:cs typeface="Times New Roman" panose="02020603050405020304" pitchFamily="18" charset="0"/>
-              </a:rPr>
-              <a:t>FPGA Selection and Spec</a:t>
-            </a:r>
-          </a:p>
-          <a:p>
-            <a:pPr>
-              <a:spcBef>
-                <a:spcPts val="1200"/>
-              </a:spcBef>
-            </a:pPr>
-            <a:r>
-              <a:rPr lang="en-US" sz="2400" dirty="0">
-                <a:solidFill>
-                  <a:schemeClr val="bg2"/>
-                </a:solidFill>
-                <a:latin typeface="Times New Roman" panose="02020603050405020304" pitchFamily="18" charset="0"/>
-                <a:cs typeface="Times New Roman" panose="02020603050405020304" pitchFamily="18" charset="0"/>
-              </a:rPr>
-              <a:t>Microcontroller Overview</a:t>
-            </a:r>
-          </a:p>
-          <a:p>
-            <a:pPr>
-              <a:spcBef>
-                <a:spcPts val="1200"/>
-              </a:spcBef>
-            </a:pPr>
-            <a:r>
-              <a:rPr lang="en-US" altLang="zh-TW" sz="2400" dirty="0">
-                <a:solidFill>
-                  <a:schemeClr val="bg2"/>
-                </a:solidFill>
-                <a:latin typeface="Times New Roman" panose="02020603050405020304" pitchFamily="18" charset="0"/>
-                <a:cs typeface="Times New Roman" panose="02020603050405020304" pitchFamily="18" charset="0"/>
-              </a:rPr>
-              <a:t>Data Path / Instruction Path</a:t>
-            </a:r>
-            <a:endParaRPr lang="en-US" sz="2400" dirty="0">
-              <a:solidFill>
-                <a:schemeClr val="bg2"/>
-              </a:solidFill>
-              <a:latin typeface="Times New Roman" panose="02020603050405020304" pitchFamily="18" charset="0"/>
-              <a:cs typeface="Times New Roman" panose="02020603050405020304" pitchFamily="18" charset="0"/>
-            </a:endParaRPr>
-          </a:p>
-          <a:p>
-            <a:pPr>
-              <a:spcBef>
-                <a:spcPts val="1200"/>
-              </a:spcBef>
-            </a:pPr>
-            <a:r>
-              <a:rPr lang="en-US" sz="2400" dirty="0">
-                <a:solidFill>
-                  <a:schemeClr val="bg2"/>
-                </a:solidFill>
-                <a:latin typeface="Times New Roman" panose="02020603050405020304" pitchFamily="18" charset="0"/>
-                <a:cs typeface="Times New Roman" panose="02020603050405020304" pitchFamily="18" charset="0"/>
-              </a:rPr>
-              <a:t>MDM / GPIO / Interrupt System / </a:t>
-            </a:r>
-            <a:r>
-              <a:rPr lang="zh-TW" altLang="en-US" sz="2400" dirty="0">
-                <a:solidFill>
-                  <a:schemeClr val="bg2"/>
-                </a:solidFill>
-                <a:latin typeface="Times New Roman" panose="02020603050405020304" pitchFamily="18" charset="0"/>
-                <a:cs typeface="Times New Roman" panose="02020603050405020304" pitchFamily="18" charset="0"/>
-              </a:rPr>
-              <a:t> </a:t>
-            </a:r>
-            <a:r>
-              <a:rPr lang="en-US" altLang="zh-TW" sz="2400" dirty="0">
-                <a:solidFill>
-                  <a:schemeClr val="bg2"/>
-                </a:solidFill>
-                <a:latin typeface="Times New Roman" panose="02020603050405020304" pitchFamily="18" charset="0"/>
-                <a:cs typeface="Times New Roman" panose="02020603050405020304" pitchFamily="18" charset="0"/>
-              </a:rPr>
-              <a:t>Timer &amp; PWM / XADC / UART</a:t>
-            </a:r>
-          </a:p>
-          <a:p>
-            <a:pPr>
-              <a:spcBef>
-                <a:spcPts val="1200"/>
-              </a:spcBef>
-            </a:pPr>
-            <a:r>
-              <a:rPr lang="en-US" altLang="zh-TW" sz="2400" dirty="0">
-                <a:solidFill>
-                  <a:schemeClr val="bg2"/>
-                </a:solidFill>
-                <a:latin typeface="Times New Roman" panose="02020603050405020304" pitchFamily="18" charset="0"/>
-                <a:cs typeface="Times New Roman" panose="02020603050405020304" pitchFamily="18" charset="0"/>
-              </a:rPr>
-              <a:t>Memory Hierarchy</a:t>
-            </a:r>
-          </a:p>
-          <a:p>
-            <a:pPr>
-              <a:spcBef>
-                <a:spcPts val="1200"/>
-              </a:spcBef>
-            </a:pPr>
-            <a:r>
-              <a:rPr lang="en-US" altLang="zh-TW" sz="2400" dirty="0">
-                <a:solidFill>
-                  <a:schemeClr val="bg2"/>
-                </a:solidFill>
-                <a:latin typeface="Times New Roman" panose="02020603050405020304" pitchFamily="18" charset="0"/>
-                <a:cs typeface="Times New Roman" panose="02020603050405020304" pitchFamily="18" charset="0"/>
-              </a:rPr>
-              <a:t>Hardware Report</a:t>
-            </a:r>
-            <a:endParaRPr lang="en-US" sz="2400" dirty="0">
-              <a:solidFill>
-                <a:schemeClr val="bg2"/>
-              </a:solidFill>
-              <a:latin typeface="Times New Roman" panose="02020603050405020304" pitchFamily="18" charset="0"/>
-              <a:cs typeface="Times New Roman" panose="02020603050405020304" pitchFamily="18" charset="0"/>
-            </a:endParaRPr>
-          </a:p>
-          <a:p>
-            <a:pPr>
-              <a:spcBef>
-                <a:spcPts val="1200"/>
-              </a:spcBef>
-            </a:pPr>
-            <a:r>
-              <a:rPr lang="en-US" sz="2400" dirty="0">
-                <a:solidFill>
-                  <a:schemeClr val="bg2"/>
-                </a:solidFill>
-                <a:latin typeface="Times New Roman" panose="02020603050405020304" pitchFamily="18" charset="0"/>
-                <a:cs typeface="Times New Roman" panose="02020603050405020304" pitchFamily="18" charset="0"/>
-              </a:rPr>
-              <a:t>Software Design Flow</a:t>
-            </a:r>
-          </a:p>
-          <a:p>
-            <a:pPr>
-              <a:spcBef>
-                <a:spcPts val="1200"/>
-              </a:spcBef>
-            </a:pPr>
-            <a:r>
-              <a:rPr lang="en-US" sz="2400" dirty="0">
-                <a:latin typeface="Times New Roman" panose="02020603050405020304" pitchFamily="18" charset="0"/>
-                <a:cs typeface="Times New Roman" panose="02020603050405020304" pitchFamily="18" charset="0"/>
-              </a:rPr>
-              <a:t>JTAG Debug Flow</a:t>
-            </a:r>
-          </a:p>
-          <a:p>
-            <a:pPr>
-              <a:spcBef>
-                <a:spcPts val="1200"/>
-              </a:spcBef>
-            </a:pPr>
-            <a:r>
-              <a:rPr lang="en-US" sz="2400" dirty="0">
-                <a:solidFill>
-                  <a:schemeClr val="bg2"/>
-                </a:solidFill>
-                <a:latin typeface="Times New Roman" panose="02020603050405020304" pitchFamily="18" charset="0"/>
-                <a:cs typeface="Times New Roman" panose="02020603050405020304" pitchFamily="18" charset="0"/>
-              </a:rPr>
-              <a:t>Standalone Boot Sequence</a:t>
-            </a:r>
-          </a:p>
-        </p:txBody>
-      </p:sp>
-      <p:sp>
-        <p:nvSpPr>
-          <p:cNvPr id="4" name="投影片編號版面配置區 3">
-            <a:extLst>
-              <a:ext uri="{FF2B5EF4-FFF2-40B4-BE49-F238E27FC236}">
-                <a16:creationId xmlns:a16="http://schemas.microsoft.com/office/drawing/2014/main" id="{DD7D01D4-C40B-FE2A-564A-D957653CEF40}"/>
-              </a:ext>
-            </a:extLst>
-          </p:cNvPr>
-          <p:cNvSpPr>
-            <a:spLocks noGrp="1"/>
-          </p:cNvSpPr>
-          <p:nvPr>
-            <p:ph type="sldNum" sz="quarter" idx="12"/>
-          </p:nvPr>
-        </p:nvSpPr>
-        <p:spPr/>
-        <p:txBody>
-          <a:bodyPr/>
-          <a:lstStyle/>
-          <a:p>
-            <a:fld id="{F9F9ED32-46C6-469E-9D81-E8934DBD0961}" type="slidenum">
-              <a:rPr lang="zh-TW" altLang="en-US" smtClean="0"/>
-              <a:t>29</a:t>
-            </a:fld>
-            <a:endParaRPr lang="zh-TW" altLang="en-US" dirty="0"/>
-          </a:p>
-        </p:txBody>
-      </p:sp>
-    </p:spTree>
-    <p:extLst>
-      <p:ext uri="{BB962C8B-B14F-4D97-AF65-F5344CB8AC3E}">
-        <p14:creationId xmlns:p14="http://schemas.microsoft.com/office/powerpoint/2010/main" val="1347852348"/>
-      </p:ext>
-    </p:extLst>
-  </p:cSld>
-  <p:clrMapOvr>
-    <a:masterClrMapping/>
-  </p:clrMapOvr>
-  <mc:AlternateContent xmlns:mc="http://schemas.openxmlformats.org/markup-compatibility/2006" xmlns:p14="http://schemas.microsoft.com/office/powerpoint/2010/main">
-    <mc:Choice Requires="p14">
-      <p:transition spd="slow" p14:dur="2000">
-        <p:cut/>
-      </p:transition>
-    </mc:Choice>
-    <mc:Fallback xmlns="">
-      <p:transition spd="slow">
-        <p:cut/>
-      </p:transition>
-    </mc:Fallback>
-  </mc:AlternateContent>
 </p:sld>
 </file>
 
@@ -17234,6 +17091,289 @@
   <p:cSld>
     <p:spTree>
       <p:nvGrpSpPr>
+        <p:cNvPr id="1" name="">
+          <a:extLst>
+            <a:ext uri="{FF2B5EF4-FFF2-40B4-BE49-F238E27FC236}">
+              <a16:creationId xmlns:a16="http://schemas.microsoft.com/office/drawing/2014/main" id="{A5F8769B-96D5-FB86-647F-9E84199D00DD}"/>
+            </a:ext>
+          </a:extLst>
+        </p:cNvPr>
+        <p:cNvGrpSpPr/>
+        <p:nvPr/>
+      </p:nvGrpSpPr>
+      <p:grpSpPr>
+        <a:xfrm>
+          <a:off x="0" y="0"/>
+          <a:ext cx="0" cy="0"/>
+          <a:chOff x="0" y="0"/>
+          <a:chExt cx="0" cy="0"/>
+        </a:xfrm>
+      </p:grpSpPr>
+      <p:sp>
+        <p:nvSpPr>
+          <p:cNvPr id="3" name="內容版面配置區 2">
+            <a:extLst>
+              <a:ext uri="{FF2B5EF4-FFF2-40B4-BE49-F238E27FC236}">
+                <a16:creationId xmlns:a16="http://schemas.microsoft.com/office/drawing/2014/main" id="{6CAFB584-589A-4323-19D7-1DC80633D59A}"/>
+              </a:ext>
+            </a:extLst>
+          </p:cNvPr>
+          <p:cNvSpPr>
+            <a:spLocks noGrp="1"/>
+          </p:cNvSpPr>
+          <p:nvPr>
+            <p:ph idx="1"/>
+          </p:nvPr>
+        </p:nvSpPr>
+        <p:spPr/>
+        <p:txBody>
+          <a:bodyPr/>
+          <a:lstStyle/>
+          <a:p>
+            <a:pPr>
+              <a:spcBef>
+                <a:spcPts val="1200"/>
+              </a:spcBef>
+            </a:pPr>
+            <a:r>
+              <a:rPr lang="en-US" sz="2400" dirty="0">
+                <a:solidFill>
+                  <a:schemeClr val="bg2"/>
+                </a:solidFill>
+                <a:latin typeface="Times New Roman" panose="02020603050405020304" pitchFamily="18" charset="0"/>
+                <a:cs typeface="Times New Roman" panose="02020603050405020304" pitchFamily="18" charset="0"/>
+              </a:rPr>
+              <a:t>FPGA Selection and Spec</a:t>
+            </a:r>
+          </a:p>
+          <a:p>
+            <a:pPr>
+              <a:spcBef>
+                <a:spcPts val="1200"/>
+              </a:spcBef>
+            </a:pPr>
+            <a:r>
+              <a:rPr lang="en-US" sz="2400" dirty="0">
+                <a:solidFill>
+                  <a:schemeClr val="bg2"/>
+                </a:solidFill>
+                <a:latin typeface="Times New Roman" panose="02020603050405020304" pitchFamily="18" charset="0"/>
+                <a:cs typeface="Times New Roman" panose="02020603050405020304" pitchFamily="18" charset="0"/>
+              </a:rPr>
+              <a:t>Microcontroller Overview</a:t>
+            </a:r>
+          </a:p>
+          <a:p>
+            <a:pPr>
+              <a:spcBef>
+                <a:spcPts val="1200"/>
+              </a:spcBef>
+            </a:pPr>
+            <a:r>
+              <a:rPr lang="en-US" altLang="zh-TW" sz="2400" dirty="0">
+                <a:solidFill>
+                  <a:schemeClr val="bg2"/>
+                </a:solidFill>
+                <a:latin typeface="Times New Roman" panose="02020603050405020304" pitchFamily="18" charset="0"/>
+                <a:cs typeface="Times New Roman" panose="02020603050405020304" pitchFamily="18" charset="0"/>
+              </a:rPr>
+              <a:t>Data Path / Instruction Path</a:t>
+            </a:r>
+            <a:endParaRPr lang="en-US" sz="2400" dirty="0">
+              <a:solidFill>
+                <a:schemeClr val="bg2"/>
+              </a:solidFill>
+              <a:latin typeface="Times New Roman" panose="02020603050405020304" pitchFamily="18" charset="0"/>
+              <a:cs typeface="Times New Roman" panose="02020603050405020304" pitchFamily="18" charset="0"/>
+            </a:endParaRPr>
+          </a:p>
+          <a:p>
+            <a:pPr>
+              <a:spcBef>
+                <a:spcPts val="1200"/>
+              </a:spcBef>
+            </a:pPr>
+            <a:r>
+              <a:rPr lang="en-US" sz="2400" dirty="0">
+                <a:solidFill>
+                  <a:schemeClr val="bg2"/>
+                </a:solidFill>
+                <a:latin typeface="Times New Roman" panose="02020603050405020304" pitchFamily="18" charset="0"/>
+                <a:cs typeface="Times New Roman" panose="02020603050405020304" pitchFamily="18" charset="0"/>
+              </a:rPr>
+              <a:t>MDM / GPIO / Interrupt System / </a:t>
+            </a:r>
+            <a:r>
+              <a:rPr lang="zh-TW" altLang="en-US" sz="2400" dirty="0">
+                <a:solidFill>
+                  <a:schemeClr val="bg2"/>
+                </a:solidFill>
+                <a:latin typeface="Times New Roman" panose="02020603050405020304" pitchFamily="18" charset="0"/>
+                <a:cs typeface="Times New Roman" panose="02020603050405020304" pitchFamily="18" charset="0"/>
+              </a:rPr>
+              <a:t> </a:t>
+            </a:r>
+            <a:r>
+              <a:rPr lang="en-US" altLang="zh-TW" sz="2400" dirty="0">
+                <a:solidFill>
+                  <a:schemeClr val="bg2"/>
+                </a:solidFill>
+                <a:latin typeface="Times New Roman" panose="02020603050405020304" pitchFamily="18" charset="0"/>
+                <a:cs typeface="Times New Roman" panose="02020603050405020304" pitchFamily="18" charset="0"/>
+              </a:rPr>
+              <a:t>Timer &amp; PWM / XADC / UART</a:t>
+            </a:r>
+          </a:p>
+          <a:p>
+            <a:pPr>
+              <a:spcBef>
+                <a:spcPts val="1200"/>
+              </a:spcBef>
+            </a:pPr>
+            <a:r>
+              <a:rPr lang="en-US" altLang="zh-TW" sz="2400" dirty="0">
+                <a:solidFill>
+                  <a:schemeClr val="bg2"/>
+                </a:solidFill>
+                <a:latin typeface="Times New Roman" panose="02020603050405020304" pitchFamily="18" charset="0"/>
+                <a:cs typeface="Times New Roman" panose="02020603050405020304" pitchFamily="18" charset="0"/>
+              </a:rPr>
+              <a:t>Memory Hierarchy</a:t>
+            </a:r>
+          </a:p>
+          <a:p>
+            <a:pPr>
+              <a:spcBef>
+                <a:spcPts val="1200"/>
+              </a:spcBef>
+            </a:pPr>
+            <a:r>
+              <a:rPr lang="en-US" altLang="zh-TW" sz="2400" dirty="0">
+                <a:solidFill>
+                  <a:schemeClr val="bg2"/>
+                </a:solidFill>
+                <a:latin typeface="Times New Roman" panose="02020603050405020304" pitchFamily="18" charset="0"/>
+                <a:cs typeface="Times New Roman" panose="02020603050405020304" pitchFamily="18" charset="0"/>
+              </a:rPr>
+              <a:t>Hardware Report</a:t>
+            </a:r>
+            <a:endParaRPr lang="en-US" sz="2400" dirty="0">
+              <a:solidFill>
+                <a:schemeClr val="bg2"/>
+              </a:solidFill>
+              <a:latin typeface="Times New Roman" panose="02020603050405020304" pitchFamily="18" charset="0"/>
+              <a:cs typeface="Times New Roman" panose="02020603050405020304" pitchFamily="18" charset="0"/>
+            </a:endParaRPr>
+          </a:p>
+          <a:p>
+            <a:pPr>
+              <a:spcBef>
+                <a:spcPts val="1200"/>
+              </a:spcBef>
+            </a:pPr>
+            <a:r>
+              <a:rPr lang="en-US" sz="2400" dirty="0">
+                <a:solidFill>
+                  <a:schemeClr val="bg2"/>
+                </a:solidFill>
+                <a:latin typeface="Times New Roman" panose="02020603050405020304" pitchFamily="18" charset="0"/>
+                <a:cs typeface="Times New Roman" panose="02020603050405020304" pitchFamily="18" charset="0"/>
+              </a:rPr>
+              <a:t>Software Design Flow</a:t>
+            </a:r>
+          </a:p>
+          <a:p>
+            <a:pPr>
+              <a:spcBef>
+                <a:spcPts val="1200"/>
+              </a:spcBef>
+            </a:pPr>
+            <a:r>
+              <a:rPr lang="en-US" sz="2400" dirty="0">
+                <a:latin typeface="Times New Roman" panose="02020603050405020304" pitchFamily="18" charset="0"/>
+                <a:cs typeface="Times New Roman" panose="02020603050405020304" pitchFamily="18" charset="0"/>
+              </a:rPr>
+              <a:t>JTAG Debug Flow</a:t>
+            </a:r>
+          </a:p>
+          <a:p>
+            <a:pPr>
+              <a:spcBef>
+                <a:spcPts val="1200"/>
+              </a:spcBef>
+            </a:pPr>
+            <a:r>
+              <a:rPr lang="en-US" sz="2400" dirty="0">
+                <a:solidFill>
+                  <a:schemeClr val="bg2"/>
+                </a:solidFill>
+                <a:latin typeface="Times New Roman" panose="02020603050405020304" pitchFamily="18" charset="0"/>
+                <a:cs typeface="Times New Roman" panose="02020603050405020304" pitchFamily="18" charset="0"/>
+              </a:rPr>
+              <a:t>Standalone Boot Sequence</a:t>
+            </a:r>
+          </a:p>
+        </p:txBody>
+      </p:sp>
+      <p:sp>
+        <p:nvSpPr>
+          <p:cNvPr id="4" name="投影片編號版面配置區 3">
+            <a:extLst>
+              <a:ext uri="{FF2B5EF4-FFF2-40B4-BE49-F238E27FC236}">
+                <a16:creationId xmlns:a16="http://schemas.microsoft.com/office/drawing/2014/main" id="{DD7D01D4-C40B-FE2A-564A-D957653CEF40}"/>
+              </a:ext>
+            </a:extLst>
+          </p:cNvPr>
+          <p:cNvSpPr>
+            <a:spLocks noGrp="1"/>
+          </p:cNvSpPr>
+          <p:nvPr>
+            <p:ph type="sldNum" sz="quarter" idx="12"/>
+          </p:nvPr>
+        </p:nvSpPr>
+        <p:spPr/>
+        <p:txBody>
+          <a:bodyPr/>
+          <a:lstStyle/>
+          <a:p>
+            <a:fld id="{F9F9ED32-46C6-469E-9D81-E8934DBD0961}" type="slidenum">
+              <a:rPr lang="zh-TW" altLang="en-US" smtClean="0"/>
+              <a:t>30</a:t>
+            </a:fld>
+            <a:endParaRPr lang="zh-TW" altLang="en-US" dirty="0"/>
+          </a:p>
+        </p:txBody>
+      </p:sp>
+    </p:spTree>
+    <p:extLst>
+      <p:ext uri="{BB962C8B-B14F-4D97-AF65-F5344CB8AC3E}">
+        <p14:creationId xmlns:p14="http://schemas.microsoft.com/office/powerpoint/2010/main" val="1347852348"/>
+      </p:ext>
+    </p:extLst>
+  </p:cSld>
+  <p:clrMapOvr>
+    <a:masterClrMapping/>
+  </p:clrMapOvr>
+  <mc:AlternateContent xmlns:mc="http://schemas.openxmlformats.org/markup-compatibility/2006" xmlns:p14="http://schemas.microsoft.com/office/powerpoint/2010/main">
+    <mc:Choice Requires="p14">
+      <p:transition spd="slow" p14:dur="2000">
+        <p:cut/>
+      </p:transition>
+    </mc:Choice>
+    <mc:Fallback xmlns="">
+      <p:transition spd="slow">
+        <p:cut/>
+      </p:transition>
+    </mc:Fallback>
+  </mc:AlternateContent>
+</p:sld>
+</file>
+
+<file path=ppt/slides/slide31.xml><?xml version="1.0" encoding="utf-8"?>
+<p:sld xmlns:a="http://schemas.openxmlformats.org/drawingml/2006/main" xmlns:r="http://schemas.openxmlformats.org/officeDocument/2006/relationships" xmlns:p="http://schemas.openxmlformats.org/presentationml/2006/main">
+  <p:cSld>
+    <p:spTree>
+      <p:nvGrpSpPr>
         <p:cNvPr id="1" name=""/>
         <p:cNvGrpSpPr/>
         <p:nvPr/>
@@ -17298,7 +17438,7 @@
             <a:fld id="{F9F9ED32-46C6-469E-9D81-E8934DBD0961}" type="slidenum">
               <a:rPr lang="zh-TW" altLang="en-US" smtClean="0"/>
               <a:pPr/>
-              <a:t>30</a:t>
+              <a:t>31</a:t>
             </a:fld>
             <a:endParaRPr lang="zh-TW" altLang="en-US" dirty="0"/>
           </a:p>
@@ -17359,7 +17499,7 @@
 </p:sld>
 </file>
 
-<file path=ppt/slides/slide31.xml><?xml version="1.0" encoding="utf-8"?>
+<file path=ppt/slides/slide32.xml><?xml version="1.0" encoding="utf-8"?>
 <p:sld xmlns:a="http://schemas.openxmlformats.org/drawingml/2006/main" xmlns:r="http://schemas.openxmlformats.org/officeDocument/2006/relationships" xmlns:p="http://schemas.openxmlformats.org/presentationml/2006/main">
   <p:cSld>
     <p:spTree>
@@ -17611,7 +17751,7 @@
           <a:p>
             <a:fld id="{F9F9ED32-46C6-469E-9D81-E8934DBD0961}" type="slidenum">
               <a:rPr lang="zh-TW" altLang="en-US" smtClean="0"/>
-              <a:t>31</a:t>
+              <a:t>32</a:t>
             </a:fld>
             <a:endParaRPr lang="zh-TW" altLang="en-US" dirty="0"/>
           </a:p>
@@ -17642,7 +17782,7 @@
 </p:sld>
 </file>
 
-<file path=ppt/slides/slide32.xml><?xml version="1.0" encoding="utf-8"?>
+<file path=ppt/slides/slide33.xml><?xml version="1.0" encoding="utf-8"?>
 <p:sld xmlns:a="http://schemas.openxmlformats.org/drawingml/2006/main" xmlns:r="http://schemas.openxmlformats.org/officeDocument/2006/relationships" xmlns:p="http://schemas.openxmlformats.org/presentationml/2006/main">
   <p:cSld>
     <p:spTree>
@@ -17836,7 +17976,7 @@
           <a:p>
             <a:fld id="{5E7A655E-BA10-45EB-B439-1EA08694B58E}" type="slidenum">
               <a:rPr lang="en-TW" smtClean="0"/>
-              <a:t>32</a:t>
+              <a:t>33</a:t>
             </a:fld>
             <a:endParaRPr lang="en-TW"/>
           </a:p>
@@ -17850,7 +17990,7 @@
 </p:sld>
 </file>
 
-<file path=ppt/slides/slide33.xml><?xml version="1.0" encoding="utf-8"?>
+<file path=ppt/slides/slide34.xml><?xml version="1.0" encoding="utf-8"?>
 <p:sld xmlns:a="http://schemas.openxmlformats.org/drawingml/2006/main" xmlns:r="http://schemas.openxmlformats.org/officeDocument/2006/relationships" xmlns:p="http://schemas.openxmlformats.org/presentationml/2006/main">
   <p:cSld>
     <p:spTree>
@@ -18021,7 +18161,7 @@
             <a:fld id="{F9F9ED32-46C6-469E-9D81-E8934DBD0961}" type="slidenum">
               <a:rPr lang="zh-TW" altLang="en-US" smtClean="0"/>
               <a:pPr/>
-              <a:t>33</a:t>
+              <a:t>34</a:t>
             </a:fld>
             <a:endParaRPr lang="zh-TW" altLang="en-US" dirty="0"/>
           </a:p>
@@ -18040,7 +18180,7 @@
 </p:sld>
 </file>
 
-<file path=ppt/slides/slide34.xml><?xml version="1.0" encoding="utf-8"?>
+<file path=ppt/slides/slide35.xml><?xml version="1.0" encoding="utf-8"?>
 <p:sld xmlns:a="http://schemas.openxmlformats.org/drawingml/2006/main" xmlns:r="http://schemas.openxmlformats.org/officeDocument/2006/relationships" xmlns:p="http://schemas.openxmlformats.org/presentationml/2006/main">
   <p:cSld>
     <p:spTree>
@@ -18286,7 +18426,7 @@
           <a:p>
             <a:fld id="{F9F9ED32-46C6-469E-9D81-E8934DBD0961}" type="slidenum">
               <a:rPr lang="zh-TW" altLang="en-US" smtClean="0"/>
-              <a:t>34</a:t>
+              <a:t>35</a:t>
             </a:fld>
             <a:endParaRPr lang="zh-TW" altLang="en-US" dirty="0"/>
           </a:p>
